--- a/Athanase_Case_Studies.pptx
+++ b/Athanase_Case_Studies.pptx
@@ -26,6 +26,7 @@
     <p:sldId id="274" r:id="rId25"/>
     <p:sldId id="275" r:id="rId26"/>
     <p:sldId id="276" r:id="rId27"/>
+    <p:sldId id="277" r:id="rId28"/>
   </p:sldIdLst>
   <p:sldSz cx="9753904" cy="7315200" type="screen4x3"/>
   <p:notesSz cx="6858000" cy="9144000"/>
@@ -4856,7 +4857,7 @@
             <a:avLst/>
           </a:prstGeom>
           <a:solidFill>
-            <a:srgbClr val="152130"/>
+            <a:srgbClr val="FFFFFF"/>
           </a:solidFill>
           <a:ln>
             <a:noFill/>
@@ -4873,7 +4874,7 @@
       </p:sp>
       <p:pic>
         <p:nvPicPr>
-          <p:cNvPr id="3" name="Picture 2" descr="logo_white.png"/>
+          <p:cNvPr id="3" name="Picture 2" descr="mark_dark.png"/>
           <p:cNvPicPr>
             <a:picLocks noChangeAspect="1"/>
           </p:cNvPicPr>
@@ -4887,8 +4888,8 @@
         </p:blipFill>
         <p:spPr>
           <a:xfrm>
-            <a:off x="548640" y="502920"/>
-            <a:ext cx="2337572" cy="502920"/>
+            <a:off x="457200" y="219456"/>
+            <a:ext cx="280009" cy="237744"/>
           </a:xfrm>
           <a:prstGeom prst="rect">
             <a:avLst/>
@@ -4897,20 +4898,62 @@
       </p:pic>
       <p:sp>
         <p:nvSpPr>
-          <p:cNvPr id="4" name="Rectangle 3"/>
+          <p:cNvPr id="4" name="TextBox 3"/>
+          <p:cNvSpPr txBox="1"/>
+          <p:nvPr/>
+        </p:nvSpPr>
+        <p:spPr>
+          <a:xfrm>
+            <a:off x="841248" y="246888"/>
+            <a:ext cx="5486400" cy="274320"/>
+          </a:xfrm>
+          <a:prstGeom prst="rect">
+            <a:avLst/>
+          </a:prstGeom>
+          <a:noFill/>
+        </p:spPr>
+        <p:txBody>
+          <a:bodyPr wrap="square" anchor="t" lIns="0" rIns="0" tIns="0" bIns="0">
+            <a:spAutoFit/>
+          </a:bodyPr>
+          <a:lstStyle/>
+          <a:p>
+            <a:pPr algn="l">
+              <a:lnSpc>
+                <a:spcPct val="110000"/>
+              </a:lnSpc>
+              <a:spcAft>
+                <a:spcPts val="0"/>
+              </a:spcAft>
+            </a:pPr>
+            <a:r>
+              <a:rPr sz="1100" b="0" i="0">
+                <a:solidFill>
+                  <a:srgbClr val="556A83"/>
+                </a:solidFill>
+                <a:latin typeface="Arial"/>
+              </a:rPr>
+              <a:t>Case · AIP fund era</a:t>
+            </a:r>
+          </a:p>
+        </p:txBody>
+      </p:sp>
+      <p:sp>
+        <p:nvSpPr>
+          <p:cNvPr id="5" name="Rectangle 4"/>
           <p:cNvSpPr/>
           <p:nvPr/>
         </p:nvSpPr>
         <p:spPr>
           <a:xfrm>
-            <a:off x="566928" y="2788920"/>
-            <a:ext cx="457200" cy="27940"/>
+            <a:off x="0" y="566928"/>
+            <a:ext cx="9753904" cy="914400"/>
           </a:xfrm>
           <a:prstGeom prst="rect">
             <a:avLst/>
           </a:prstGeom>
           <a:solidFill>
-            <a:srgbClr val="556A83"/>
+            <a:srgbClr val="F6F7F9"/>
           </a:solidFill>
           <a:ln>
             <a:noFill/>
@@ -4927,14 +4970,14 @@
       </p:sp>
       <p:sp>
         <p:nvSpPr>
-          <p:cNvPr id="5" name="TextBox 4"/>
+          <p:cNvPr id="6" name="TextBox 5"/>
           <p:cNvSpPr txBox="1"/>
           <p:nvPr/>
         </p:nvSpPr>
         <p:spPr>
           <a:xfrm>
-            <a:off x="548640" y="2971800"/>
-            <a:ext cx="8686800" cy="457200"/>
+            <a:off x="502920" y="713232"/>
+            <a:ext cx="8778240" cy="640080"/>
           </a:xfrm>
           <a:prstGeom prst="rect">
             <a:avLst/>
@@ -4956,27 +4999,27 @@
               </a:spcAft>
             </a:pPr>
             <a:r>
-              <a:rPr sz="1300" b="0" i="0">
-                <a:solidFill>
-                  <a:srgbClr val="556A83"/>
-                </a:solidFill>
-                <a:latin typeface="Arial"/>
-              </a:rPr>
-              <a:t>PART II · INVESTMENT AB ÖRESUND (1994–2007)</a:t>
-            </a:r>
-          </a:p>
-        </p:txBody>
-      </p:sp>
-      <p:sp>
-        <p:nvSpPr>
-          <p:cNvPr id="6" name="TextBox 5"/>
+              <a:rPr sz="2600" b="0" i="0" spc="-78">
+                <a:solidFill>
+                  <a:srgbClr val="314359"/>
+                </a:solidFill>
+                <a:latin typeface="Times New Roman"/>
+              </a:rPr>
+              <a:t>Investment case study: Renold plc</a:t>
+            </a:r>
+          </a:p>
+        </p:txBody>
+      </p:sp>
+      <p:sp>
+        <p:nvSpPr>
+          <p:cNvPr id="7" name="TextBox 6"/>
           <p:cNvSpPr txBox="1"/>
           <p:nvPr/>
         </p:nvSpPr>
         <p:spPr>
           <a:xfrm>
-            <a:off x="548640" y="3291840"/>
-            <a:ext cx="8686800" cy="1280160"/>
+            <a:off x="5486400" y="6967728"/>
+            <a:ext cx="4023360" cy="274320"/>
           </a:xfrm>
           <a:prstGeom prst="rect">
             <a:avLst/>
@@ -4989,22 +5032,921 @@
           </a:bodyPr>
           <a:lstStyle/>
           <a:p>
+            <a:pPr algn="r">
+              <a:lnSpc>
+                <a:spcPct val="110000"/>
+              </a:lnSpc>
+              <a:spcAft>
+                <a:spcPts val="0"/>
+              </a:spcAft>
+            </a:pPr>
+            <a:r>
+              <a:rPr sz="850" b="0" i="0">
+                <a:solidFill>
+                  <a:srgbClr val="556A83"/>
+                </a:solidFill>
+                <a:latin typeface="Arial"/>
+              </a:rPr>
+              <a:t>Strictly confidential          10</a:t>
+            </a:r>
+          </a:p>
+        </p:txBody>
+      </p:sp>
+      <p:sp>
+        <p:nvSpPr>
+          <p:cNvPr id="8" name="TextBox 7"/>
+          <p:cNvSpPr txBox="1"/>
+          <p:nvPr/>
+        </p:nvSpPr>
+        <p:spPr>
+          <a:xfrm>
+            <a:off x="502920" y="1783080"/>
+            <a:ext cx="4160520" cy="5120640"/>
+          </a:xfrm>
+          <a:prstGeom prst="rect">
+            <a:avLst/>
+          </a:prstGeom>
+          <a:noFill/>
+        </p:spPr>
+        <p:txBody>
+          <a:bodyPr wrap="square" anchor="t" lIns="0" rIns="0" tIns="0" bIns="0">
+            <a:spAutoFit/>
+          </a:bodyPr>
+          <a:lstStyle/>
+          <a:p>
             <a:pPr algn="l">
               <a:lnSpc>
                 <a:spcPct val="110000"/>
               </a:lnSpc>
-              <a:spcAft>
+              <a:spcBef>
                 <a:spcPts val="0"/>
-              </a:spcAft>
-            </a:pPr>
-            <a:r>
-              <a:rPr sz="3400" b="0" i="1" spc="-102">
-                <a:solidFill>
-                  <a:srgbClr val="E2E5E9"/>
+              </a:spcBef>
+              <a:spcAft>
+                <a:spcPts val="250"/>
+              </a:spcAft>
+            </a:pPr>
+            <a:r>
+              <a:rPr sz="1100" b="1" i="0">
+                <a:solidFill>
+                  <a:srgbClr val="314359"/>
                 </a:solidFill>
                 <a:latin typeface="Times New Roman"/>
               </a:rPr>
-              <a:t>Earlier track record</a:t>
+              <a:t>Company description</a:t>
+            </a:r>
+          </a:p>
+          <a:p>
+            <a:pPr algn="l">
+              <a:lnSpc>
+                <a:spcPct val="108000"/>
+              </a:lnSpc>
+              <a:spcAft>
+                <a:spcPts val="200"/>
+              </a:spcAft>
+            </a:pPr>
+            <a:r>
+              <a:rPr sz="869" b="0" i="0">
+                <a:solidFill>
+                  <a:srgbClr val="0E1620"/>
+                </a:solidFill>
+                <a:latin typeface="Arial"/>
+              </a:rPr>
+              <a:t>Renold plc is a London-listed global leader in industrial chain and torque-transmission products — roller chain, couplings, gearboxes and clutches — serving mining, materials-handling, transport and energy customers worldwide. A market-leading niche franchise (inventor of the bush roller chain, 1879) with a large installed base and recurring aftermarket demand.</a:t>
+            </a:r>
+          </a:p>
+          <a:p>
+            <a:pPr algn="l">
+              <a:lnSpc>
+                <a:spcPct val="110000"/>
+              </a:lnSpc>
+              <a:spcBef>
+                <a:spcPts val="700"/>
+              </a:spcBef>
+              <a:spcAft>
+                <a:spcPts val="250"/>
+              </a:spcAft>
+            </a:pPr>
+            <a:r>
+              <a:rPr sz="1100" b="1" i="0">
+                <a:solidFill>
+                  <a:srgbClr val="314359"/>
+                </a:solidFill>
+                <a:latin typeface="Times New Roman"/>
+              </a:rPr>
+              <a:t>Recognized opportunities</a:t>
+            </a:r>
+          </a:p>
+          <a:p>
+            <a:pPr marL="149162" indent="-149162">
+              <a:lnSpc>
+                <a:spcPct val="106000"/>
+              </a:lnSpc>
+              <a:spcAft>
+                <a:spcPts val="150"/>
+              </a:spcAft>
+            </a:pPr>
+            <a:r>
+              <a:rPr sz="869" b="1">
+                <a:solidFill>
+                  <a:srgbClr val="556A83"/>
+                </a:solidFill>
+                <a:latin typeface="Arial"/>
+              </a:rPr>
+              <a:t>›  </a:t>
+            </a:r>
+            <a:r>
+              <a:rPr sz="869">
+                <a:solidFill>
+                  <a:srgbClr val="0E1620"/>
+                </a:solidFill>
+                <a:latin typeface="Arial"/>
+              </a:rPr>
+              <a:t>Market-leading niche industrial — strong brand, global installed base, recurring aftermarket</a:t>
+            </a:r>
+          </a:p>
+          <a:p>
+            <a:pPr marL="149162" indent="-149162">
+              <a:lnSpc>
+                <a:spcPct val="106000"/>
+              </a:lnSpc>
+              <a:spcAft>
+                <a:spcPts val="150"/>
+              </a:spcAft>
+            </a:pPr>
+            <a:r>
+              <a:rPr sz="869" b="1">
+                <a:solidFill>
+                  <a:srgbClr val="556A83"/>
+                </a:solidFill>
+                <a:latin typeface="Arial"/>
+              </a:rPr>
+              <a:t>›  </a:t>
+            </a:r>
+            <a:r>
+              <a:rPr sz="869">
+                <a:solidFill>
+                  <a:srgbClr val="0E1620"/>
+                </a:solidFill>
+                <a:latin typeface="Arial"/>
+              </a:rPr>
+              <a:t>Mispriced, under-followed UK small-cap at a deep discount to earnings power (~50p)</a:t>
+            </a:r>
+          </a:p>
+          <a:p>
+            <a:pPr marL="149162" indent="-149162">
+              <a:lnSpc>
+                <a:spcPct val="106000"/>
+              </a:lnSpc>
+              <a:spcAft>
+                <a:spcPts val="150"/>
+              </a:spcAft>
+            </a:pPr>
+            <a:r>
+              <a:rPr sz="869" b="1">
+                <a:solidFill>
+                  <a:srgbClr val="556A83"/>
+                </a:solidFill>
+                <a:latin typeface="Arial"/>
+              </a:rPr>
+              <a:t>›  </a:t>
+            </a:r>
+            <a:r>
+              <a:rPr sz="869">
+                <a:solidFill>
+                  <a:srgbClr val="0E1620"/>
+                </a:solidFill>
+                <a:latin typeface="Arial"/>
+              </a:rPr>
+              <a:t>Multi-year self-help underway — margin expansion and operational improvement</a:t>
+            </a:r>
+          </a:p>
+          <a:p>
+            <a:pPr marL="149162" indent="-149162">
+              <a:lnSpc>
+                <a:spcPct val="106000"/>
+              </a:lnSpc>
+              <a:spcAft>
+                <a:spcPts val="150"/>
+              </a:spcAft>
+            </a:pPr>
+            <a:r>
+              <a:rPr sz="869" b="1">
+                <a:solidFill>
+                  <a:srgbClr val="556A83"/>
+                </a:solidFill>
+                <a:latin typeface="Arial"/>
+              </a:rPr>
+              <a:t>›  </a:t>
+            </a:r>
+            <a:r>
+              <a:rPr sz="869">
+                <a:solidFill>
+                  <a:srgbClr val="0E1620"/>
+                </a:solidFill>
+                <a:latin typeface="Arial"/>
+              </a:rPr>
+              <a:t>Strong cash generation and a de-risking balance sheet</a:t>
+            </a:r>
+          </a:p>
+          <a:p>
+            <a:pPr marL="149162" indent="-149162">
+              <a:lnSpc>
+                <a:spcPct val="106000"/>
+              </a:lnSpc>
+              <a:spcAft>
+                <a:spcPts val="150"/>
+              </a:spcAft>
+            </a:pPr>
+            <a:r>
+              <a:rPr sz="869" b="1">
+                <a:solidFill>
+                  <a:srgbClr val="556A83"/>
+                </a:solidFill>
+                <a:latin typeface="Arial"/>
+              </a:rPr>
+              <a:t>›  </a:t>
+            </a:r>
+            <a:r>
+              <a:rPr sz="869">
+                <a:solidFill>
+                  <a:srgbClr val="0E1620"/>
+                </a:solidFill>
+                <a:latin typeface="Arial"/>
+              </a:rPr>
+              <a:t>A credible consolidation / takeover candidate, with limited downside at entry</a:t>
+            </a:r>
+          </a:p>
+          <a:p>
+            <a:pPr algn="l">
+              <a:lnSpc>
+                <a:spcPct val="110000"/>
+              </a:lnSpc>
+              <a:spcBef>
+                <a:spcPts val="700"/>
+              </a:spcBef>
+              <a:spcAft>
+                <a:spcPts val="250"/>
+              </a:spcAft>
+            </a:pPr>
+            <a:r>
+              <a:rPr sz="1100" b="1" i="0">
+                <a:solidFill>
+                  <a:srgbClr val="314359"/>
+                </a:solidFill>
+                <a:latin typeface="Times New Roman"/>
+              </a:rPr>
+              <a:t>Initial plan</a:t>
+            </a:r>
+          </a:p>
+          <a:p>
+            <a:pPr algn="l">
+              <a:lnSpc>
+                <a:spcPct val="108000"/>
+              </a:lnSpc>
+              <a:spcAft>
+                <a:spcPts val="200"/>
+              </a:spcAft>
+            </a:pPr>
+            <a:r>
+              <a:rPr sz="869" b="0" i="0">
+                <a:solidFill>
+                  <a:srgbClr val="0E1620"/>
+                </a:solidFill>
+                <a:latin typeface="Arial"/>
+              </a:rPr>
+              <a:t>An opportunistic position rather than a control engagement: build a meaningful stake at a deep discount to intrinsic value, underwrite the downside through asset and earnings-power support, and let the catalysts — margin improvement and likely strategic interest — close the gap.</a:t>
+            </a:r>
+          </a:p>
+          <a:p>
+            <a:pPr algn="l">
+              <a:lnSpc>
+                <a:spcPct val="110000"/>
+              </a:lnSpc>
+              <a:spcBef>
+                <a:spcPts val="700"/>
+              </a:spcBef>
+              <a:spcAft>
+                <a:spcPts val="250"/>
+              </a:spcAft>
+            </a:pPr>
+            <a:r>
+              <a:rPr sz="1100" b="1" i="0">
+                <a:solidFill>
+                  <a:srgbClr val="314359"/>
+                </a:solidFill>
+                <a:latin typeface="Times New Roman"/>
+              </a:rPr>
+              <a:t>Results</a:t>
+            </a:r>
+          </a:p>
+          <a:p>
+            <a:pPr marL="149162" indent="-149162">
+              <a:lnSpc>
+                <a:spcPct val="106000"/>
+              </a:lnSpc>
+              <a:spcAft>
+                <a:spcPts val="150"/>
+              </a:spcAft>
+            </a:pPr>
+            <a:r>
+              <a:rPr sz="869" b="1">
+                <a:solidFill>
+                  <a:srgbClr val="556A83"/>
+                </a:solidFill>
+                <a:latin typeface="Arial"/>
+              </a:rPr>
+              <a:t>✓  </a:t>
+            </a:r>
+            <a:r>
+              <a:rPr sz="869">
+                <a:solidFill>
+                  <a:srgbClr val="0E1620"/>
+                </a:solidFill>
+                <a:latin typeface="Arial"/>
+              </a:rPr>
+              <a:t>Built ~5.3m shares at ~50p average from spring 2024; core position from December 2024 — about six months before the takeover</a:t>
+            </a:r>
+          </a:p>
+          <a:p>
+            <a:pPr marL="149162" indent="-149162">
+              <a:lnSpc>
+                <a:spcPct val="106000"/>
+              </a:lnSpc>
+              <a:spcAft>
+                <a:spcPts val="150"/>
+              </a:spcAft>
+            </a:pPr>
+            <a:r>
+              <a:rPr sz="869" b="1">
+                <a:solidFill>
+                  <a:srgbClr val="556A83"/>
+                </a:solidFill>
+                <a:latin typeface="Arial"/>
+              </a:rPr>
+              <a:t>✓  </a:t>
+            </a:r>
+            <a:r>
+              <a:rPr sz="869">
+                <a:solidFill>
+                  <a:srgbClr val="0E1620"/>
+                </a:solidFill>
+                <a:latin typeface="Arial"/>
+              </a:rPr>
+              <a:t>A recommended cash takeover emerged in 2025 at ~81p per share</a:t>
+            </a:r>
+          </a:p>
+          <a:p>
+            <a:pPr marL="149162" indent="-149162">
+              <a:lnSpc>
+                <a:spcPct val="106000"/>
+              </a:lnSpc>
+              <a:spcAft>
+                <a:spcPts val="150"/>
+              </a:spcAft>
+            </a:pPr>
+            <a:r>
+              <a:rPr sz="869" b="1">
+                <a:solidFill>
+                  <a:srgbClr val="556A83"/>
+                </a:solidFill>
+                <a:latin typeface="Arial"/>
+              </a:rPr>
+              <a:t>✓  </a:t>
+            </a:r>
+            <a:r>
+              <a:rPr sz="869">
+                <a:solidFill>
+                  <a:srgbClr val="0E1620"/>
+                </a:solidFill>
+                <a:latin typeface="Arial"/>
+              </a:rPr>
+              <a:t>Realised the entire position into the offer at ~81p over June–July 2025</a:t>
+            </a:r>
+          </a:p>
+          <a:p>
+            <a:pPr marL="149162" indent="-149162">
+              <a:lnSpc>
+                <a:spcPct val="106000"/>
+              </a:lnSpc>
+              <a:spcAft>
+                <a:spcPts val="150"/>
+              </a:spcAft>
+            </a:pPr>
+            <a:r>
+              <a:rPr sz="869" b="1">
+                <a:solidFill>
+                  <a:srgbClr val="556A83"/>
+                </a:solidFill>
+                <a:latin typeface="Arial"/>
+              </a:rPr>
+              <a:t>✓  </a:t>
+            </a:r>
+            <a:r>
+              <a:rPr sz="869">
+                <a:solidFill>
+                  <a:srgbClr val="0E1620"/>
+                </a:solidFill>
+                <a:latin typeface="Arial"/>
+              </a:rPr>
+              <a:t>~1.6× money multiple, +62% gross (SEK 20.9m); money-weighted IRR ~234%</a:t>
+            </a:r>
+          </a:p>
+        </p:txBody>
+      </p:sp>
+      <p:sp>
+        <p:nvSpPr>
+          <p:cNvPr id="9" name="Rounded Rectangle 8"/>
+          <p:cNvSpPr/>
+          <p:nvPr/>
+        </p:nvSpPr>
+        <p:spPr>
+          <a:xfrm>
+            <a:off x="4983480" y="1783080"/>
+            <a:ext cx="4297680" cy="384048"/>
+          </a:xfrm>
+          <a:prstGeom prst="roundRect">
+            <a:avLst/>
+          </a:prstGeom>
+          <a:solidFill>
+            <a:srgbClr val="F6F7F9"/>
+          </a:solidFill>
+          <a:ln>
+            <a:noFill/>
+          </a:ln>
+          <a:effectLst/>
+        </p:spPr>
+        <p:txBody>
+          <a:bodyPr rtlCol="0" anchor="ctr"/>
+          <a:lstStyle/>
+          <a:p>
+            <a:pPr algn="ctr"/>
+          </a:p>
+        </p:txBody>
+      </p:sp>
+      <p:sp>
+        <p:nvSpPr>
+          <p:cNvPr id="10" name="TextBox 9"/>
+          <p:cNvSpPr txBox="1"/>
+          <p:nvPr/>
+        </p:nvSpPr>
+        <p:spPr>
+          <a:xfrm>
+            <a:off x="4983480" y="1783080"/>
+            <a:ext cx="4297680" cy="384048"/>
+          </a:xfrm>
+          <a:prstGeom prst="rect">
+            <a:avLst/>
+          </a:prstGeom>
+          <a:noFill/>
+        </p:spPr>
+        <p:txBody>
+          <a:bodyPr wrap="square" anchor="ctr" lIns="0" rIns="0" tIns="0" bIns="0">
+            <a:spAutoFit/>
+          </a:bodyPr>
+          <a:lstStyle/>
+          <a:p>
+            <a:pPr algn="ctr">
+              <a:lnSpc>
+                <a:spcPct val="110000"/>
+              </a:lnSpc>
+              <a:spcAft>
+                <a:spcPts val="0"/>
+              </a:spcAft>
+            </a:pPr>
+            <a:r>
+              <a:rPr sz="1250" b="1" i="0">
+                <a:solidFill>
+                  <a:srgbClr val="314359"/>
+                </a:solidFill>
+                <a:latin typeface="Times New Roman"/>
+              </a:rPr>
+              <a:t>IRR 234% · Money multiple 1.6×</a:t>
+            </a:r>
+          </a:p>
+        </p:txBody>
+      </p:sp>
+      <p:sp>
+        <p:nvSpPr>
+          <p:cNvPr id="11" name="TextBox 10"/>
+          <p:cNvSpPr txBox="1"/>
+          <p:nvPr/>
+        </p:nvSpPr>
+        <p:spPr>
+          <a:xfrm>
+            <a:off x="4983480" y="2350008"/>
+            <a:ext cx="4297680" cy="274320"/>
+          </a:xfrm>
+          <a:prstGeom prst="rect">
+            <a:avLst/>
+          </a:prstGeom>
+          <a:noFill/>
+        </p:spPr>
+        <p:txBody>
+          <a:bodyPr wrap="square" anchor="t" lIns="0" rIns="0" tIns="0" bIns="0">
+            <a:spAutoFit/>
+          </a:bodyPr>
+          <a:lstStyle/>
+          <a:p>
+            <a:pPr algn="ctr">
+              <a:lnSpc>
+                <a:spcPct val="110000"/>
+              </a:lnSpc>
+              <a:spcAft>
+                <a:spcPts val="0"/>
+              </a:spcAft>
+            </a:pPr>
+            <a:r>
+              <a:rPr sz="1100" b="1" i="0">
+                <a:solidFill>
+                  <a:srgbClr val="314359"/>
+                </a:solidFill>
+                <a:latin typeface="Times New Roman"/>
+              </a:rPr>
+              <a:t>Capital invested vs. realised proceeds</a:t>
+            </a:r>
+          </a:p>
+        </p:txBody>
+      </p:sp>
+      <p:sp>
+        <p:nvSpPr>
+          <p:cNvPr id="12" name="Rectangle 11"/>
+          <p:cNvSpPr/>
+          <p:nvPr/>
+        </p:nvSpPr>
+        <p:spPr>
+          <a:xfrm>
+            <a:off x="5074920" y="4773168"/>
+            <a:ext cx="4114800" cy="12700"/>
+          </a:xfrm>
+          <a:prstGeom prst="rect">
+            <a:avLst/>
+          </a:prstGeom>
+          <a:solidFill>
+            <a:srgbClr val="E2E5E9"/>
+          </a:solidFill>
+          <a:ln>
+            <a:noFill/>
+          </a:ln>
+          <a:effectLst/>
+        </p:spPr>
+        <p:txBody>
+          <a:bodyPr rtlCol="0" anchor="ctr"/>
+          <a:lstStyle/>
+          <a:p>
+            <a:pPr algn="ctr"/>
+          </a:p>
+        </p:txBody>
+      </p:sp>
+      <p:sp>
+        <p:nvSpPr>
+          <p:cNvPr id="13" name="Rectangle 12"/>
+          <p:cNvSpPr/>
+          <p:nvPr/>
+        </p:nvSpPr>
+        <p:spPr>
+          <a:xfrm>
+            <a:off x="5577840" y="3756092"/>
+            <a:ext cx="1051560" cy="1017076"/>
+          </a:xfrm>
+          <a:prstGeom prst="rect">
+            <a:avLst/>
+          </a:prstGeom>
+          <a:solidFill>
+            <a:srgbClr val="152130"/>
+          </a:solidFill>
+          <a:ln>
+            <a:noFill/>
+          </a:ln>
+          <a:effectLst/>
+        </p:spPr>
+        <p:txBody>
+          <a:bodyPr rtlCol="0" anchor="ctr"/>
+          <a:lstStyle/>
+          <a:p>
+            <a:pPr algn="ctr"/>
+          </a:p>
+        </p:txBody>
+      </p:sp>
+      <p:sp>
+        <p:nvSpPr>
+          <p:cNvPr id="14" name="TextBox 13"/>
+          <p:cNvSpPr txBox="1"/>
+          <p:nvPr/>
+        </p:nvSpPr>
+        <p:spPr>
+          <a:xfrm>
+            <a:off x="5303520" y="3481772"/>
+            <a:ext cx="1600200" cy="256032"/>
+          </a:xfrm>
+          <a:prstGeom prst="rect">
+            <a:avLst/>
+          </a:prstGeom>
+          <a:noFill/>
+        </p:spPr>
+        <p:txBody>
+          <a:bodyPr wrap="square" anchor="t" lIns="0" rIns="0" tIns="0" bIns="0">
+            <a:spAutoFit/>
+          </a:bodyPr>
+          <a:lstStyle/>
+          <a:p>
+            <a:pPr algn="ctr">
+              <a:lnSpc>
+                <a:spcPct val="110000"/>
+              </a:lnSpc>
+              <a:spcAft>
+                <a:spcPts val="0"/>
+              </a:spcAft>
+            </a:pPr>
+            <a:r>
+              <a:rPr sz="1300" b="1" i="0">
+                <a:solidFill>
+                  <a:srgbClr val="314359"/>
+                </a:solidFill>
+                <a:latin typeface="Times New Roman"/>
+              </a:rPr>
+              <a:t>35</a:t>
+            </a:r>
+          </a:p>
+        </p:txBody>
+      </p:sp>
+      <p:sp>
+        <p:nvSpPr>
+          <p:cNvPr id="15" name="TextBox 14"/>
+          <p:cNvSpPr txBox="1"/>
+          <p:nvPr/>
+        </p:nvSpPr>
+        <p:spPr>
+          <a:xfrm>
+            <a:off x="5074920" y="4828032"/>
+            <a:ext cx="2057400" cy="310896"/>
+          </a:xfrm>
+          <a:prstGeom prst="rect">
+            <a:avLst/>
+          </a:prstGeom>
+          <a:noFill/>
+        </p:spPr>
+        <p:txBody>
+          <a:bodyPr wrap="square" anchor="t" lIns="0" rIns="0" tIns="0" bIns="0">
+            <a:spAutoFit/>
+          </a:bodyPr>
+          <a:lstStyle/>
+          <a:p>
+            <a:pPr algn="ctr">
+              <a:lnSpc>
+                <a:spcPct val="110000"/>
+              </a:lnSpc>
+              <a:spcAft>
+                <a:spcPts val="0"/>
+              </a:spcAft>
+            </a:pPr>
+            <a:r>
+              <a:rPr sz="950" b="0" i="0">
+                <a:solidFill>
+                  <a:srgbClr val="0E1620"/>
+                </a:solidFill>
+                <a:latin typeface="Arial"/>
+              </a:rPr>
+              <a:t>Capital invested</a:t>
+            </a:r>
+          </a:p>
+        </p:txBody>
+      </p:sp>
+      <p:sp>
+        <p:nvSpPr>
+          <p:cNvPr id="16" name="Rectangle 15"/>
+          <p:cNvSpPr/>
+          <p:nvPr/>
+        </p:nvSpPr>
+        <p:spPr>
+          <a:xfrm>
+            <a:off x="7635240" y="3145846"/>
+            <a:ext cx="1051560" cy="1627322"/>
+          </a:xfrm>
+          <a:prstGeom prst="rect">
+            <a:avLst/>
+          </a:prstGeom>
+          <a:solidFill>
+            <a:srgbClr val="152130"/>
+          </a:solidFill>
+          <a:ln>
+            <a:noFill/>
+          </a:ln>
+          <a:effectLst/>
+        </p:spPr>
+        <p:txBody>
+          <a:bodyPr rtlCol="0" anchor="ctr"/>
+          <a:lstStyle/>
+          <a:p>
+            <a:pPr algn="ctr"/>
+          </a:p>
+        </p:txBody>
+      </p:sp>
+      <p:sp>
+        <p:nvSpPr>
+          <p:cNvPr id="17" name="TextBox 16"/>
+          <p:cNvSpPr txBox="1"/>
+          <p:nvPr/>
+        </p:nvSpPr>
+        <p:spPr>
+          <a:xfrm>
+            <a:off x="7360920" y="2871526"/>
+            <a:ext cx="1600200" cy="256032"/>
+          </a:xfrm>
+          <a:prstGeom prst="rect">
+            <a:avLst/>
+          </a:prstGeom>
+          <a:noFill/>
+        </p:spPr>
+        <p:txBody>
+          <a:bodyPr wrap="square" anchor="t" lIns="0" rIns="0" tIns="0" bIns="0">
+            <a:spAutoFit/>
+          </a:bodyPr>
+          <a:lstStyle/>
+          <a:p>
+            <a:pPr algn="ctr">
+              <a:lnSpc>
+                <a:spcPct val="110000"/>
+              </a:lnSpc>
+              <a:spcAft>
+                <a:spcPts val="0"/>
+              </a:spcAft>
+            </a:pPr>
+            <a:r>
+              <a:rPr sz="1300" b="1" i="0">
+                <a:solidFill>
+                  <a:srgbClr val="314359"/>
+                </a:solidFill>
+                <a:latin typeface="Times New Roman"/>
+              </a:rPr>
+              <a:t>56</a:t>
+            </a:r>
+          </a:p>
+        </p:txBody>
+      </p:sp>
+      <p:sp>
+        <p:nvSpPr>
+          <p:cNvPr id="18" name="TextBox 17"/>
+          <p:cNvSpPr txBox="1"/>
+          <p:nvPr/>
+        </p:nvSpPr>
+        <p:spPr>
+          <a:xfrm>
+            <a:off x="7132320" y="4828032"/>
+            <a:ext cx="2057400" cy="310896"/>
+          </a:xfrm>
+          <a:prstGeom prst="rect">
+            <a:avLst/>
+          </a:prstGeom>
+          <a:noFill/>
+        </p:spPr>
+        <p:txBody>
+          <a:bodyPr wrap="square" anchor="t" lIns="0" rIns="0" tIns="0" bIns="0">
+            <a:spAutoFit/>
+          </a:bodyPr>
+          <a:lstStyle/>
+          <a:p>
+            <a:pPr algn="ctr">
+              <a:lnSpc>
+                <a:spcPct val="110000"/>
+              </a:lnSpc>
+              <a:spcAft>
+                <a:spcPts val="0"/>
+              </a:spcAft>
+            </a:pPr>
+            <a:r>
+              <a:rPr sz="950" b="0" i="0">
+                <a:solidFill>
+                  <a:srgbClr val="0E1620"/>
+                </a:solidFill>
+                <a:latin typeface="Arial"/>
+              </a:rPr>
+              <a:t>Realised proceeds</a:t>
+            </a:r>
+          </a:p>
+        </p:txBody>
+      </p:sp>
+      <p:sp>
+        <p:nvSpPr>
+          <p:cNvPr id="19" name="TextBox 18"/>
+          <p:cNvSpPr txBox="1"/>
+          <p:nvPr/>
+        </p:nvSpPr>
+        <p:spPr>
+          <a:xfrm>
+            <a:off x="4983480" y="5157216"/>
+            <a:ext cx="4297680" cy="201168"/>
+          </a:xfrm>
+          <a:prstGeom prst="rect">
+            <a:avLst/>
+          </a:prstGeom>
+          <a:noFill/>
+        </p:spPr>
+        <p:txBody>
+          <a:bodyPr wrap="square" anchor="t" lIns="0" rIns="0" tIns="0" bIns="0">
+            <a:spAutoFit/>
+          </a:bodyPr>
+          <a:lstStyle/>
+          <a:p>
+            <a:pPr algn="l">
+              <a:lnSpc>
+                <a:spcPct val="110000"/>
+              </a:lnSpc>
+              <a:spcAft>
+                <a:spcPts val="0"/>
+              </a:spcAft>
+            </a:pPr>
+            <a:r>
+              <a:rPr sz="850" b="0" i="1">
+                <a:solidFill>
+                  <a:srgbClr val="556A83"/>
+                </a:solidFill>
+                <a:latin typeface="Arial"/>
+              </a:rPr>
+              <a:t>SEK m</a:t>
+            </a:r>
+          </a:p>
+        </p:txBody>
+      </p:sp>
+      <p:sp>
+        <p:nvSpPr>
+          <p:cNvPr id="20" name="TextBox 19"/>
+          <p:cNvSpPr txBox="1"/>
+          <p:nvPr/>
+        </p:nvSpPr>
+        <p:spPr>
+          <a:xfrm>
+            <a:off x="4983480" y="5029200"/>
+            <a:ext cx="4297680" cy="731520"/>
+          </a:xfrm>
+          <a:prstGeom prst="rect">
+            <a:avLst/>
+          </a:prstGeom>
+          <a:noFill/>
+        </p:spPr>
+        <p:txBody>
+          <a:bodyPr wrap="square" anchor="t" lIns="0" rIns="0" tIns="0" bIns="0">
+            <a:spAutoFit/>
+          </a:bodyPr>
+          <a:lstStyle/>
+          <a:p>
+            <a:pPr algn="ctr">
+              <a:lnSpc>
+                <a:spcPct val="110000"/>
+              </a:lnSpc>
+              <a:spcAft>
+                <a:spcPts val="0"/>
+              </a:spcAft>
+            </a:pPr>
+            <a:r>
+              <a:rPr sz="1200" b="1" i="0">
+                <a:solidFill>
+                  <a:srgbClr val="314359"/>
+                </a:solidFill>
+                <a:latin typeface="Times New Roman"/>
+              </a:rPr>
+              <a:t>Bought at ~50p; acquired at ~81p in a recommended takeover</a:t>
+            </a:r>
+          </a:p>
+        </p:txBody>
+      </p:sp>
+      <p:sp>
+        <p:nvSpPr>
+          <p:cNvPr id="21" name="TextBox 20"/>
+          <p:cNvSpPr txBox="1"/>
+          <p:nvPr/>
+        </p:nvSpPr>
+        <p:spPr>
+          <a:xfrm>
+            <a:off x="502920" y="6967728"/>
+            <a:ext cx="4846320" cy="274320"/>
+          </a:xfrm>
+          <a:prstGeom prst="rect">
+            <a:avLst/>
+          </a:prstGeom>
+          <a:noFill/>
+        </p:spPr>
+        <p:txBody>
+          <a:bodyPr wrap="square" anchor="t" lIns="0" rIns="0" tIns="0" bIns="0">
+            <a:spAutoFit/>
+          </a:bodyPr>
+          <a:lstStyle/>
+          <a:p>
+            <a:pPr algn="l">
+              <a:lnSpc>
+                <a:spcPct val="100000"/>
+              </a:lnSpc>
+              <a:spcAft>
+                <a:spcPts val="0"/>
+              </a:spcAft>
+            </a:pPr>
+            <a:r>
+              <a:rPr sz="750" b="0" i="1">
+                <a:solidFill>
+                  <a:srgbClr val="556A83"/>
+                </a:solidFill>
+                <a:latin typeface="Arial"/>
+              </a:rPr>
+              <a:t>Source: AIPFII transaction history (Apr 2024 – Jul 2025). IRR is money-weighted; the short opportunistic hold lifts the annualised figure. Past performance is not indicative of future results.</a:t>
             </a:r>
           </a:p>
         </p:txBody>
@@ -5042,7 +5984,7 @@
             <a:avLst/>
           </a:prstGeom>
           <a:solidFill>
-            <a:srgbClr val="FFFFFF"/>
+            <a:srgbClr val="152130"/>
           </a:solidFill>
           <a:ln>
             <a:noFill/>
@@ -5059,7 +6001,7 @@
       </p:sp>
       <p:pic>
         <p:nvPicPr>
-          <p:cNvPr id="3" name="Picture 2" descr="mark_dark.png"/>
+          <p:cNvPr id="3" name="Picture 2" descr="logo_white.png"/>
           <p:cNvPicPr>
             <a:picLocks noChangeAspect="1"/>
           </p:cNvPicPr>
@@ -5073,8 +6015,8 @@
         </p:blipFill>
         <p:spPr>
           <a:xfrm>
-            <a:off x="457200" y="219456"/>
-            <a:ext cx="280009" cy="237744"/>
+            <a:off x="548640" y="502920"/>
+            <a:ext cx="2337572" cy="502920"/>
           </a:xfrm>
           <a:prstGeom prst="rect">
             <a:avLst/>
@@ -5083,62 +6025,20 @@
       </p:pic>
       <p:sp>
         <p:nvSpPr>
-          <p:cNvPr id="4" name="TextBox 3"/>
-          <p:cNvSpPr txBox="1"/>
-          <p:nvPr/>
-        </p:nvSpPr>
-        <p:spPr>
-          <a:xfrm>
-            <a:off x="841248" y="246888"/>
-            <a:ext cx="5486400" cy="274320"/>
-          </a:xfrm>
-          <a:prstGeom prst="rect">
-            <a:avLst/>
-          </a:prstGeom>
-          <a:noFill/>
-        </p:spPr>
-        <p:txBody>
-          <a:bodyPr wrap="square" anchor="t" lIns="0" rIns="0" tIns="0" bIns="0">
-            <a:spAutoFit/>
-          </a:bodyPr>
-          <a:lstStyle/>
-          <a:p>
-            <a:pPr algn="l">
-              <a:lnSpc>
-                <a:spcPct val="110000"/>
-              </a:lnSpc>
-              <a:spcAft>
-                <a:spcPts val="0"/>
-              </a:spcAft>
-            </a:pPr>
-            <a:r>
-              <a:rPr sz="1100" b="0" i="0">
-                <a:solidFill>
-                  <a:srgbClr val="556A83"/>
-                </a:solidFill>
-                <a:latin typeface="Arial"/>
-              </a:rPr>
-              <a:t>Case · Öresund era</a:t>
-            </a:r>
-          </a:p>
-        </p:txBody>
-      </p:sp>
-      <p:sp>
-        <p:nvSpPr>
-          <p:cNvPr id="5" name="Rectangle 4"/>
+          <p:cNvPr id="4" name="Rectangle 3"/>
           <p:cNvSpPr/>
           <p:nvPr/>
         </p:nvSpPr>
         <p:spPr>
           <a:xfrm>
-            <a:off x="0" y="566928"/>
-            <a:ext cx="9753904" cy="914400"/>
+            <a:off x="566928" y="2788920"/>
+            <a:ext cx="457200" cy="27940"/>
           </a:xfrm>
           <a:prstGeom prst="rect">
             <a:avLst/>
           </a:prstGeom>
           <a:solidFill>
-            <a:srgbClr val="F6F7F9"/>
+            <a:srgbClr val="556A83"/>
           </a:solidFill>
           <a:ln>
             <a:noFill/>
@@ -5155,14 +6055,14 @@
       </p:sp>
       <p:sp>
         <p:nvSpPr>
-          <p:cNvPr id="6" name="TextBox 5"/>
+          <p:cNvPr id="5" name="TextBox 4"/>
           <p:cNvSpPr txBox="1"/>
           <p:nvPr/>
         </p:nvSpPr>
         <p:spPr>
           <a:xfrm>
-            <a:off x="502920" y="713232"/>
-            <a:ext cx="8778240" cy="640080"/>
+            <a:off x="548640" y="2971800"/>
+            <a:ext cx="8686800" cy="457200"/>
           </a:xfrm>
           <a:prstGeom prst="rect">
             <a:avLst/>
@@ -5184,27 +6084,27 @@
               </a:spcAft>
             </a:pPr>
             <a:r>
-              <a:rPr sz="2600" b="0" i="0" spc="-78">
-                <a:solidFill>
-                  <a:srgbClr val="314359"/>
-                </a:solidFill>
-                <a:latin typeface="Times New Roman"/>
-              </a:rPr>
-              <a:t>Investment case study: Custos</a:t>
-            </a:r>
-          </a:p>
-        </p:txBody>
-      </p:sp>
-      <p:sp>
-        <p:nvSpPr>
-          <p:cNvPr id="7" name="TextBox 6"/>
+              <a:rPr sz="1300" b="0" i="0">
+                <a:solidFill>
+                  <a:srgbClr val="556A83"/>
+                </a:solidFill>
+                <a:latin typeface="Arial"/>
+              </a:rPr>
+              <a:t>PART II · INVESTMENT AB ÖRESUND (1994–2007)</a:t>
+            </a:r>
+          </a:p>
+        </p:txBody>
+      </p:sp>
+      <p:sp>
+        <p:nvSpPr>
+          <p:cNvPr id="6" name="TextBox 5"/>
           <p:cNvSpPr txBox="1"/>
           <p:nvPr/>
         </p:nvSpPr>
         <p:spPr>
           <a:xfrm>
-            <a:off x="5486400" y="6967728"/>
-            <a:ext cx="4023360" cy="274320"/>
+            <a:off x="548640" y="3291840"/>
+            <a:ext cx="8686800" cy="1280160"/>
           </a:xfrm>
           <a:prstGeom prst="rect">
             <a:avLst/>
@@ -5217,7 +6117,7 @@
           </a:bodyPr>
           <a:lstStyle/>
           <a:p>
-            <a:pPr algn="r">
+            <a:pPr algn="l">
               <a:lnSpc>
                 <a:spcPct val="110000"/>
               </a:lnSpc>
@@ -5226,678 +6126,13 @@
               </a:spcAft>
             </a:pPr>
             <a:r>
-              <a:rPr sz="850" b="0" i="0">
-                <a:solidFill>
-                  <a:srgbClr val="556A83"/>
-                </a:solidFill>
-                <a:latin typeface="Arial"/>
-              </a:rPr>
-              <a:t>Strictly confidential          10</a:t>
-            </a:r>
-          </a:p>
-        </p:txBody>
-      </p:sp>
-      <p:sp>
-        <p:nvSpPr>
-          <p:cNvPr id="8" name="TextBox 7"/>
-          <p:cNvSpPr txBox="1"/>
-          <p:nvPr/>
-        </p:nvSpPr>
-        <p:spPr>
-          <a:xfrm>
-            <a:off x="502920" y="1783080"/>
-            <a:ext cx="4160520" cy="5120640"/>
-          </a:xfrm>
-          <a:prstGeom prst="rect">
-            <a:avLst/>
-          </a:prstGeom>
-          <a:noFill/>
-        </p:spPr>
-        <p:txBody>
-          <a:bodyPr wrap="square" anchor="t" lIns="0" rIns="0" tIns="0" bIns="0">
-            <a:spAutoFit/>
-          </a:bodyPr>
-          <a:lstStyle/>
-          <a:p>
-            <a:pPr algn="l">
-              <a:lnSpc>
-                <a:spcPct val="110000"/>
-              </a:lnSpc>
-              <a:spcBef>
-                <a:spcPts val="0"/>
-              </a:spcBef>
-              <a:spcAft>
-                <a:spcPts val="250"/>
-              </a:spcAft>
-            </a:pPr>
-            <a:r>
-              <a:rPr sz="1100" b="1" i="0">
-                <a:solidFill>
-                  <a:srgbClr val="314359"/>
+              <a:rPr sz="3400" b="0" i="1" spc="-102">
+                <a:solidFill>
+                  <a:srgbClr val="E2E5E9"/>
                 </a:solidFill>
                 <a:latin typeface="Times New Roman"/>
               </a:rPr>
-              <a:t>Company description</a:t>
-            </a:r>
-          </a:p>
-          <a:p>
-            <a:pPr algn="l">
-              <a:lnSpc>
-                <a:spcPct val="108000"/>
-              </a:lnSpc>
-              <a:spcAft>
-                <a:spcPts val="200"/>
-              </a:spcAft>
-            </a:pPr>
-            <a:r>
-              <a:rPr sz="869" b="0" i="0">
-                <a:solidFill>
-                  <a:srgbClr val="0E1620"/>
-                </a:solidFill>
-                <a:latin typeface="Arial"/>
-              </a:rPr>
-              <a:t>Custos was a Swedish listed investment company holding a portfolio of listed companies. It traded at a significant discount to net asset value and had an inefficient capital structure.</a:t>
-            </a:r>
-          </a:p>
-          <a:p>
-            <a:pPr algn="l">
-              <a:lnSpc>
-                <a:spcPct val="110000"/>
-              </a:lnSpc>
-              <a:spcBef>
-                <a:spcPts val="700"/>
-              </a:spcBef>
-              <a:spcAft>
-                <a:spcPts val="250"/>
-              </a:spcAft>
-            </a:pPr>
-            <a:r>
-              <a:rPr sz="1100" b="1" i="0">
-                <a:solidFill>
-                  <a:srgbClr val="314359"/>
-                </a:solidFill>
-                <a:latin typeface="Times New Roman"/>
-              </a:rPr>
-              <a:t>Recognized opportunities</a:t>
-            </a:r>
-          </a:p>
-          <a:p>
-            <a:pPr marL="149162" indent="-149162">
-              <a:lnSpc>
-                <a:spcPct val="106000"/>
-              </a:lnSpc>
-              <a:spcAft>
-                <a:spcPts val="150"/>
-              </a:spcAft>
-            </a:pPr>
-            <a:r>
-              <a:rPr sz="869" b="1">
-                <a:solidFill>
-                  <a:srgbClr val="556A83"/>
-                </a:solidFill>
-                <a:latin typeface="Arial"/>
-              </a:rPr>
-              <a:t>›  </a:t>
-            </a:r>
-            <a:r>
-              <a:rPr sz="869">
-                <a:solidFill>
-                  <a:srgbClr val="0E1620"/>
-                </a:solidFill>
-                <a:latin typeface="Arial"/>
-              </a:rPr>
-              <a:t>Investment companies traded at a discount to NAV</a:t>
-            </a:r>
-          </a:p>
-          <a:p>
-            <a:pPr marL="149162" indent="-149162">
-              <a:lnSpc>
-                <a:spcPct val="106000"/>
-              </a:lnSpc>
-              <a:spcAft>
-                <a:spcPts val="150"/>
-              </a:spcAft>
-            </a:pPr>
-            <a:r>
-              <a:rPr sz="869" b="1">
-                <a:solidFill>
-                  <a:srgbClr val="556A83"/>
-                </a:solidFill>
-                <a:latin typeface="Arial"/>
-              </a:rPr>
-              <a:t>›  </a:t>
-            </a:r>
-            <a:r>
-              <a:rPr sz="869">
-                <a:solidFill>
-                  <a:srgbClr val="0E1620"/>
-                </a:solidFill>
-                <a:latin typeface="Arial"/>
-              </a:rPr>
-              <a:t>Inefficient capital structure</a:t>
-            </a:r>
-          </a:p>
-          <a:p>
-            <a:pPr marL="149162" indent="-149162">
-              <a:lnSpc>
-                <a:spcPct val="106000"/>
-              </a:lnSpc>
-              <a:spcAft>
-                <a:spcPts val="150"/>
-              </a:spcAft>
-            </a:pPr>
-            <a:r>
-              <a:rPr sz="869" b="1">
-                <a:solidFill>
-                  <a:srgbClr val="556A83"/>
-                </a:solidFill>
-                <a:latin typeface="Arial"/>
-              </a:rPr>
-              <a:t>›  </a:t>
-            </a:r>
-            <a:r>
-              <a:rPr sz="869">
-                <a:solidFill>
-                  <a:srgbClr val="0E1620"/>
-                </a:solidFill>
-                <a:latin typeface="Arial"/>
-              </a:rPr>
-              <a:t>An interesting portfolio of companies not optimally managed</a:t>
-            </a:r>
-          </a:p>
-          <a:p>
-            <a:pPr marL="149162" indent="-149162">
-              <a:lnSpc>
-                <a:spcPct val="106000"/>
-              </a:lnSpc>
-              <a:spcAft>
-                <a:spcPts val="150"/>
-              </a:spcAft>
-            </a:pPr>
-            <a:r>
-              <a:rPr sz="869" b="1">
-                <a:solidFill>
-                  <a:srgbClr val="556A83"/>
-                </a:solidFill>
-                <a:latin typeface="Arial"/>
-              </a:rPr>
-              <a:t>›  </a:t>
-            </a:r>
-            <a:r>
-              <a:rPr sz="869">
-                <a:solidFill>
-                  <a:srgbClr val="0E1620"/>
-                </a:solidFill>
-                <a:latin typeface="Arial"/>
-              </a:rPr>
-              <a:t>Opportunity to buy the underlying assets at a ~30% discount</a:t>
-            </a:r>
-          </a:p>
-          <a:p>
-            <a:pPr marL="149162" indent="-149162">
-              <a:lnSpc>
-                <a:spcPct val="106000"/>
-              </a:lnSpc>
-              <a:spcAft>
-                <a:spcPts val="150"/>
-              </a:spcAft>
-            </a:pPr>
-            <a:r>
-              <a:rPr sz="869" b="1">
-                <a:solidFill>
-                  <a:srgbClr val="556A83"/>
-                </a:solidFill>
-                <a:latin typeface="Arial"/>
-              </a:rPr>
-              <a:t>›  </a:t>
-            </a:r>
-            <a:r>
-              <a:rPr sz="869">
-                <a:solidFill>
-                  <a:srgbClr val="0E1620"/>
-                </a:solidFill>
-                <a:latin typeface="Arial"/>
-              </a:rPr>
-              <a:t>The largest shareholder, Skanska, had sold its holding in 1994</a:t>
-            </a:r>
-          </a:p>
-          <a:p>
-            <a:pPr marL="149162" indent="-149162">
-              <a:lnSpc>
-                <a:spcPct val="106000"/>
-              </a:lnSpc>
-              <a:spcAft>
-                <a:spcPts val="150"/>
-              </a:spcAft>
-            </a:pPr>
-            <a:r>
-              <a:rPr sz="869" b="1">
-                <a:solidFill>
-                  <a:srgbClr val="556A83"/>
-                </a:solidFill>
-                <a:latin typeface="Arial"/>
-              </a:rPr>
-              <a:t>›  </a:t>
-            </a:r>
-            <a:r>
-              <a:rPr sz="869">
-                <a:solidFill>
-                  <a:srgbClr val="0E1620"/>
-                </a:solidFill>
-                <a:latin typeface="Arial"/>
-              </a:rPr>
-              <a:t>The board was not focused on creating shareholder value</a:t>
-            </a:r>
-          </a:p>
-          <a:p>
-            <a:pPr algn="l">
-              <a:lnSpc>
-                <a:spcPct val="110000"/>
-              </a:lnSpc>
-              <a:spcBef>
-                <a:spcPts val="700"/>
-              </a:spcBef>
-              <a:spcAft>
-                <a:spcPts val="250"/>
-              </a:spcAft>
-            </a:pPr>
-            <a:r>
-              <a:rPr sz="1100" b="1" i="0">
-                <a:solidFill>
-                  <a:srgbClr val="314359"/>
-                </a:solidFill>
-                <a:latin typeface="Times New Roman"/>
-              </a:rPr>
-              <a:t>Initial plan</a:t>
-            </a:r>
-          </a:p>
-          <a:p>
-            <a:pPr algn="l">
-              <a:lnSpc>
-                <a:spcPct val="108000"/>
-              </a:lnSpc>
-              <a:spcAft>
-                <a:spcPts val="200"/>
-              </a:spcAft>
-            </a:pPr>
-            <a:r>
-              <a:rPr sz="869" b="0" i="0">
-                <a:solidFill>
-                  <a:srgbClr val="0E1620"/>
-                </a:solidFill>
-                <a:latin typeface="Arial"/>
-              </a:rPr>
-              <a:t>1) Increase shareholder value through extended engagement in holdings via active board management; 2) form a more heterogeneous board to enhance dialogue and decision-making; 3) reduce the discount to NAV through, if necessary, redemption of holdings/cash and synthetic buy-back programs.</a:t>
-            </a:r>
-          </a:p>
-          <a:p>
-            <a:pPr algn="l">
-              <a:lnSpc>
-                <a:spcPct val="110000"/>
-              </a:lnSpc>
-              <a:spcBef>
-                <a:spcPts val="700"/>
-              </a:spcBef>
-              <a:spcAft>
-                <a:spcPts val="250"/>
-              </a:spcAft>
-            </a:pPr>
-            <a:r>
-              <a:rPr sz="1100" b="1" i="0">
-                <a:solidFill>
-                  <a:srgbClr val="314359"/>
-                </a:solidFill>
-                <a:latin typeface="Times New Roman"/>
-              </a:rPr>
-              <a:t>Results</a:t>
-            </a:r>
-          </a:p>
-          <a:p>
-            <a:pPr marL="149162" indent="-149162">
-              <a:lnSpc>
-                <a:spcPct val="106000"/>
-              </a:lnSpc>
-              <a:spcAft>
-                <a:spcPts val="150"/>
-              </a:spcAft>
-            </a:pPr>
-            <a:r>
-              <a:rPr sz="869" b="1">
-                <a:solidFill>
-                  <a:srgbClr val="556A83"/>
-                </a:solidFill>
-                <a:latin typeface="Arial"/>
-              </a:rPr>
-              <a:t>✓  </a:t>
-            </a:r>
-            <a:r>
-              <a:rPr sz="869">
-                <a:solidFill>
-                  <a:srgbClr val="0E1620"/>
-                </a:solidFill>
-                <a:latin typeface="Arial"/>
-              </a:rPr>
-              <a:t>New board and CEO (Christer Gardell); active ownership reduced the NAV discount</a:t>
-            </a:r>
-          </a:p>
-          <a:p>
-            <a:pPr marL="149162" indent="-149162">
-              <a:lnSpc>
-                <a:spcPct val="106000"/>
-              </a:lnSpc>
-              <a:spcAft>
-                <a:spcPts val="150"/>
-              </a:spcAft>
-            </a:pPr>
-            <a:r>
-              <a:rPr sz="869" b="1">
-                <a:solidFill>
-                  <a:srgbClr val="556A83"/>
-                </a:solidFill>
-                <a:latin typeface="Arial"/>
-              </a:rPr>
-              <a:t>✓  </a:t>
-            </a:r>
-            <a:r>
-              <a:rPr sz="869">
-                <a:solidFill>
-                  <a:srgbClr val="0E1620"/>
-                </a:solidFill>
-                <a:latin typeface="Arial"/>
-              </a:rPr>
-              <a:t>Distributed Hufvudstaden to shareholders; sold ASG to Deutsche Post</a:t>
-            </a:r>
-          </a:p>
-          <a:p>
-            <a:pPr marL="149162" indent="-149162">
-              <a:lnSpc>
-                <a:spcPct val="106000"/>
-              </a:lnSpc>
-              <a:spcAft>
-                <a:spcPts val="150"/>
-              </a:spcAft>
-            </a:pPr>
-            <a:r>
-              <a:rPr sz="869" b="1">
-                <a:solidFill>
-                  <a:srgbClr val="556A83"/>
-                </a:solidFill>
-                <a:latin typeface="Arial"/>
-              </a:rPr>
-              <a:t>✓  </a:t>
-            </a:r>
-            <a:r>
-              <a:rPr sz="869">
-                <a:solidFill>
-                  <a:srgbClr val="0E1620"/>
-                </a:solidFill>
-                <a:latin typeface="Arial"/>
-              </a:rPr>
-              <a:t>Founded Acando; synthetic buy-back distributing SEK 1.6bn</a:t>
-            </a:r>
-          </a:p>
-          <a:p>
-            <a:pPr marL="149162" indent="-149162">
-              <a:lnSpc>
-                <a:spcPct val="106000"/>
-              </a:lnSpc>
-              <a:spcAft>
-                <a:spcPts val="150"/>
-              </a:spcAft>
-            </a:pPr>
-            <a:r>
-              <a:rPr sz="869" b="1">
-                <a:solidFill>
-                  <a:srgbClr val="556A83"/>
-                </a:solidFill>
-                <a:latin typeface="Arial"/>
-              </a:rPr>
-              <a:t>✓  </a:t>
-            </a:r>
-            <a:r>
-              <a:rPr sz="869">
-                <a:solidFill>
-                  <a:srgbClr val="0E1620"/>
-                </a:solidFill>
-                <a:latin typeface="Arial"/>
-              </a:rPr>
-              <a:t>~SEK 3.5bn distributed via buy-back and the distribution of SCA</a:t>
-            </a:r>
-          </a:p>
-          <a:p>
-            <a:pPr marL="149162" indent="-149162">
-              <a:lnSpc>
-                <a:spcPct val="106000"/>
-              </a:lnSpc>
-              <a:spcAft>
-                <a:spcPts val="150"/>
-              </a:spcAft>
-            </a:pPr>
-            <a:r>
-              <a:rPr sz="869" b="1">
-                <a:solidFill>
-                  <a:srgbClr val="556A83"/>
-                </a:solidFill>
-                <a:latin typeface="Arial"/>
-              </a:rPr>
-              <a:t>✓  </a:t>
-            </a:r>
-            <a:r>
-              <a:rPr sz="869">
-                <a:solidFill>
-                  <a:srgbClr val="0E1620"/>
-                </a:solidFill>
-                <a:latin typeface="Arial"/>
-              </a:rPr>
-              <a:t>Bilia and Acando distributed to shareholders</a:t>
-            </a:r>
-          </a:p>
-          <a:p>
-            <a:pPr marL="149162" indent="-149162">
-              <a:lnSpc>
-                <a:spcPct val="106000"/>
-              </a:lnSpc>
-              <a:spcAft>
-                <a:spcPts val="150"/>
-              </a:spcAft>
-            </a:pPr>
-            <a:r>
-              <a:rPr sz="869" b="1">
-                <a:solidFill>
-                  <a:srgbClr val="556A83"/>
-                </a:solidFill>
-                <a:latin typeface="Arial"/>
-              </a:rPr>
-              <a:t>✓  </a:t>
-            </a:r>
-            <a:r>
-              <a:rPr sz="869">
-                <a:solidFill>
-                  <a:srgbClr val="0E1620"/>
-                </a:solidFill>
-                <a:latin typeface="Arial"/>
-              </a:rPr>
-              <a:t>Custos ultimately merged with Öresund</a:t>
-            </a:r>
-          </a:p>
-        </p:txBody>
-      </p:sp>
-      <p:sp>
-        <p:nvSpPr>
-          <p:cNvPr id="9" name="Rounded Rectangle 8"/>
-          <p:cNvSpPr/>
-          <p:nvPr/>
-        </p:nvSpPr>
-        <p:spPr>
-          <a:xfrm>
-            <a:off x="4983480" y="1783080"/>
-            <a:ext cx="4297680" cy="384048"/>
-          </a:xfrm>
-          <a:prstGeom prst="roundRect">
-            <a:avLst/>
-          </a:prstGeom>
-          <a:solidFill>
-            <a:srgbClr val="F6F7F9"/>
-          </a:solidFill>
-          <a:ln>
-            <a:noFill/>
-          </a:ln>
-          <a:effectLst/>
-        </p:spPr>
-        <p:txBody>
-          <a:bodyPr rtlCol="0" anchor="ctr"/>
-          <a:lstStyle/>
-          <a:p>
-            <a:pPr algn="ctr"/>
-          </a:p>
-        </p:txBody>
-      </p:sp>
-      <p:sp>
-        <p:nvSpPr>
-          <p:cNvPr id="10" name="TextBox 9"/>
-          <p:cNvSpPr txBox="1"/>
-          <p:nvPr/>
-        </p:nvSpPr>
-        <p:spPr>
-          <a:xfrm>
-            <a:off x="4983480" y="1783080"/>
-            <a:ext cx="4297680" cy="384048"/>
-          </a:xfrm>
-          <a:prstGeom prst="rect">
-            <a:avLst/>
-          </a:prstGeom>
-          <a:noFill/>
-        </p:spPr>
-        <p:txBody>
-          <a:bodyPr wrap="square" anchor="ctr" lIns="0" rIns="0" tIns="0" bIns="0">
-            <a:spAutoFit/>
-          </a:bodyPr>
-          <a:lstStyle/>
-          <a:p>
-            <a:pPr algn="ctr">
-              <a:lnSpc>
-                <a:spcPct val="110000"/>
-              </a:lnSpc>
-              <a:spcAft>
-                <a:spcPts val="0"/>
-              </a:spcAft>
-            </a:pPr>
-            <a:r>
-              <a:rPr sz="1250" b="1" i="0">
-                <a:solidFill>
-                  <a:srgbClr val="314359"/>
-                </a:solidFill>
-                <a:latin typeface="Times New Roman"/>
-              </a:rPr>
-              <a:t>IRR 58.9% · 2000–2004</a:t>
-            </a:r>
-          </a:p>
-        </p:txBody>
-      </p:sp>
-      <p:pic>
-        <p:nvPicPr>
-          <p:cNvPr id="11" name="Picture 10" descr="custos_line.png"/>
-          <p:cNvPicPr>
-            <a:picLocks noChangeAspect="1"/>
-          </p:cNvPicPr>
-          <p:nvPr/>
-        </p:nvPicPr>
-        <p:blipFill>
-          <a:blip r:embed="rId3"/>
-          <a:stretch>
-            <a:fillRect/>
-          </a:stretch>
-        </p:blipFill>
-        <p:spPr>
-          <a:xfrm>
-            <a:off x="4983480" y="2276856"/>
-            <a:ext cx="4297680" cy="2479862"/>
-          </a:xfrm>
-          <a:prstGeom prst="rect">
-            <a:avLst/>
-          </a:prstGeom>
-        </p:spPr>
-      </p:pic>
-      <p:sp>
-        <p:nvSpPr>
-          <p:cNvPr id="12" name="TextBox 11"/>
-          <p:cNvSpPr txBox="1"/>
-          <p:nvPr/>
-        </p:nvSpPr>
-        <p:spPr>
-          <a:xfrm>
-            <a:off x="4983480" y="4848158"/>
-            <a:ext cx="4297680" cy="457200"/>
-          </a:xfrm>
-          <a:prstGeom prst="rect">
-            <a:avLst/>
-          </a:prstGeom>
-          <a:noFill/>
-        </p:spPr>
-        <p:txBody>
-          <a:bodyPr wrap="square" anchor="t" lIns="0" rIns="0" tIns="0" bIns="0">
-            <a:spAutoFit/>
-          </a:bodyPr>
-          <a:lstStyle/>
-          <a:p>
-            <a:pPr algn="ctr">
-              <a:lnSpc>
-                <a:spcPct val="110000"/>
-              </a:lnSpc>
-              <a:spcAft>
-                <a:spcPts val="0"/>
-              </a:spcAft>
-            </a:pPr>
-            <a:r>
-              <a:rPr sz="1200" b="1" i="0">
-                <a:solidFill>
-                  <a:srgbClr val="314359"/>
-                </a:solidFill>
-                <a:latin typeface="Times New Roman"/>
-              </a:rPr>
-              <a:t>≈ SEK 11bn of shareholder value created over nine years</a:t>
-            </a:r>
-          </a:p>
-        </p:txBody>
-      </p:sp>
-      <p:sp>
-        <p:nvSpPr>
-          <p:cNvPr id="13" name="TextBox 12"/>
-          <p:cNvSpPr txBox="1"/>
-          <p:nvPr/>
-        </p:nvSpPr>
-        <p:spPr>
-          <a:xfrm>
-            <a:off x="502920" y="6967728"/>
-            <a:ext cx="4846320" cy="274320"/>
-          </a:xfrm>
-          <a:prstGeom prst="rect">
-            <a:avLst/>
-          </a:prstGeom>
-          <a:noFill/>
-        </p:spPr>
-        <p:txBody>
-          <a:bodyPr wrap="square" anchor="t" lIns="0" rIns="0" tIns="0" bIns="0">
-            <a:spAutoFit/>
-          </a:bodyPr>
-          <a:lstStyle/>
-          <a:p>
-            <a:pPr algn="l">
-              <a:lnSpc>
-                <a:spcPct val="100000"/>
-              </a:lnSpc>
-              <a:spcAft>
-                <a:spcPts val="0"/>
-              </a:spcAft>
-            </a:pPr>
-            <a:r>
-              <a:rPr sz="750" b="0" i="1">
-                <a:solidFill>
-                  <a:srgbClr val="556A83"/>
-                </a:solidFill>
-                <a:latin typeface="Arial"/>
-              </a:rPr>
-              <a:t>Note: 9 SEK ≈ 1€. IRR unleveraged and net of all costs. Executed by members of the team at Investment AB Öresund.</a:t>
+              <a:t>Earlier track record</a:t>
             </a:r>
           </a:p>
         </p:txBody>
@@ -6083,7 +6318,7 @@
                 </a:solidFill>
                 <a:latin typeface="Times New Roman"/>
               </a:rPr>
-              <a:t>Investment case study: Johnson Pump</a:t>
+              <a:t>Investment case study: Custos</a:t>
             </a:r>
           </a:p>
         </p:txBody>
@@ -6189,7 +6424,7 @@
                 </a:solidFill>
                 <a:latin typeface="Arial"/>
               </a:rPr>
-              <a:t>Johnson Pump was a traditional industrial business — a pump OEM with an extensive sales force and a strong brand. It had suffered profitability issues but had started to recover, with revenues of SEK 647m and a negative EBIT.</a:t>
+              <a:t>Custos was a Swedish listed investment company holding a portfolio of listed companies. It traded at a significant discount to net asset value and had an inefficient capital structure.</a:t>
             </a:r>
           </a:p>
           <a:p>
@@ -6239,7 +6474,7 @@
                 </a:solidFill>
                 <a:latin typeface="Arial"/>
               </a:rPr>
-              <a:t>Low profitability was largely a cost issue — customers kept buying and the gross margin was decent</a:t>
+              <a:t>Investment companies traded at a discount to NAV</a:t>
             </a:r>
           </a:p>
           <a:p>
@@ -6267,7 +6502,7 @@
                 </a:solidFill>
                 <a:latin typeface="Arial"/>
               </a:rPr>
-              <a:t>Significant upside on cost in both factories and sales offices</a:t>
+              <a:t>Inefficient capital structure</a:t>
             </a:r>
           </a:p>
           <a:p>
@@ -6295,7 +6530,7 @@
                 </a:solidFill>
                 <a:latin typeface="Arial"/>
               </a:rPr>
-              <a:t>The sales force could be leveraged with a wider product range (R&amp;D, 3rd-party products, M&amp;A)</a:t>
+              <a:t>An interesting portfolio of companies not optimally managed</a:t>
             </a:r>
           </a:p>
           <a:p>
@@ -6323,7 +6558,7 @@
                 </a:solidFill>
                 <a:latin typeface="Arial"/>
               </a:rPr>
-              <a:t>Market segmentation should reveal further niche potential</a:t>
+              <a:t>Opportunity to buy the underlying assets at a ~30% discount</a:t>
             </a:r>
           </a:p>
           <a:p>
@@ -6351,7 +6586,35 @@
                 </a:solidFill>
                 <a:latin typeface="Arial"/>
               </a:rPr>
-              <a:t>Geographic expansion to follow customers moving to low-cost countries</a:t>
+              <a:t>The largest shareholder, Skanska, had sold its holding in 1994</a:t>
+            </a:r>
+          </a:p>
+          <a:p>
+            <a:pPr marL="149162" indent="-149162">
+              <a:lnSpc>
+                <a:spcPct val="106000"/>
+              </a:lnSpc>
+              <a:spcAft>
+                <a:spcPts val="150"/>
+              </a:spcAft>
+            </a:pPr>
+            <a:r>
+              <a:rPr sz="869" b="1">
+                <a:solidFill>
+                  <a:srgbClr val="556A83"/>
+                </a:solidFill>
+                <a:latin typeface="Arial"/>
+              </a:rPr>
+              <a:t>›  </a:t>
+            </a:r>
+            <a:r>
+              <a:rPr sz="869">
+                <a:solidFill>
+                  <a:srgbClr val="0E1620"/>
+                </a:solidFill>
+                <a:latin typeface="Arial"/>
+              </a:rPr>
+              <a:t>The board was not focused on creating shareholder value</a:t>
             </a:r>
           </a:p>
           <a:p>
@@ -6392,7 +6655,7 @@
                 </a:solidFill>
                 <a:latin typeface="Arial"/>
               </a:rPr>
-              <a:t>Reduce costs in factories and sales offices, build a uniform sales process and a simplified product range, expand the range and geography, and grow in adjacencies through M&amp;A.</a:t>
+              <a:t>1) Increase shareholder value through extended engagement in holdings via active board management; 2) form a more heterogeneous board to enhance dialogue and decision-making; 3) reduce the discount to NAV through, if necessary, redemption of holdings/cash and synthetic buy-back programs.</a:t>
             </a:r>
           </a:p>
           <a:p>
@@ -6442,7 +6705,7 @@
                 </a:solidFill>
                 <a:latin typeface="Arial"/>
               </a:rPr>
-              <a:t>New ERP system (2002); component manufacturing moved to India (2003)</a:t>
+              <a:t>New board and CEO (Christer Gardell); active ownership reduced the NAV discount</a:t>
             </a:r>
           </a:p>
           <a:p>
@@ -6470,7 +6733,7 @@
                 </a:solidFill>
                 <a:latin typeface="Arial"/>
               </a:rPr>
-              <a:t>Restructured Dutch operations and centralised sourcing (2004–05)</a:t>
+              <a:t>Distributed Hufvudstaden to shareholders; sold ASG to Deutsche Post</a:t>
             </a:r>
           </a:p>
           <a:p>
@@ -6498,7 +6761,7 @@
                 </a:solidFill>
                 <a:latin typeface="Arial"/>
               </a:rPr>
-              <a:t>New CEO Stefan Charette (2006); separated Marine, acquired Tigerholm, launched an export organisation</a:t>
+              <a:t>Founded Acando; synthetic buy-back distributing SEK 1.6bn</a:t>
             </a:r>
           </a:p>
           <a:p>
@@ -6526,7 +6789,7 @@
                 </a:solidFill>
                 <a:latin typeface="Arial"/>
               </a:rPr>
-              <a:t>Revenues +~17%; SG&amp;A −~18%; operating result +~SEK 62m (−15m to +47m)</a:t>
+              <a:t>~SEK 3.5bn distributed via buy-back and the distribution of SCA</a:t>
             </a:r>
           </a:p>
           <a:p>
@@ -6554,7 +6817,35 @@
                 </a:solidFill>
                 <a:latin typeface="Arial"/>
               </a:rPr>
-              <a:t>SPX Corporation public offer accepted by &gt;90% of shareholders; delisted</a:t>
+              <a:t>Bilia and Acando distributed to shareholders</a:t>
+            </a:r>
+          </a:p>
+          <a:p>
+            <a:pPr marL="149162" indent="-149162">
+              <a:lnSpc>
+                <a:spcPct val="106000"/>
+              </a:lnSpc>
+              <a:spcAft>
+                <a:spcPts val="150"/>
+              </a:spcAft>
+            </a:pPr>
+            <a:r>
+              <a:rPr sz="869" b="1">
+                <a:solidFill>
+                  <a:srgbClr val="556A83"/>
+                </a:solidFill>
+                <a:latin typeface="Arial"/>
+              </a:rPr>
+              <a:t>✓  </a:t>
+            </a:r>
+            <a:r>
+              <a:rPr sz="869">
+                <a:solidFill>
+                  <a:srgbClr val="0E1620"/>
+                </a:solidFill>
+                <a:latin typeface="Arial"/>
+              </a:rPr>
+              <a:t>Custos ultimately merged with Öresund</a:t>
             </a:r>
           </a:p>
         </p:txBody>
@@ -6626,14 +6917,14 @@
                 </a:solidFill>
                 <a:latin typeface="Times New Roman"/>
               </a:rPr>
-              <a:t>IRR 34.4% · 2002–2006</a:t>
+              <a:t>IRR 58.9% · 2000–2004</a:t>
             </a:r>
           </a:p>
         </p:txBody>
       </p:sp>
       <p:pic>
         <p:nvPicPr>
-          <p:cNvPr id="11" name="Picture 10" descr="jp_line.png"/>
+          <p:cNvPr id="11" name="Picture 10" descr="custos_line.png"/>
           <p:cNvPicPr>
             <a:picLocks noChangeAspect="1"/>
           </p:cNvPicPr>
@@ -6658,6 +6949,48 @@
       <p:sp>
         <p:nvSpPr>
           <p:cNvPr id="12" name="TextBox 11"/>
+          <p:cNvSpPr txBox="1"/>
+          <p:nvPr/>
+        </p:nvSpPr>
+        <p:spPr>
+          <a:xfrm>
+            <a:off x="4983480" y="4848158"/>
+            <a:ext cx="4297680" cy="457200"/>
+          </a:xfrm>
+          <a:prstGeom prst="rect">
+            <a:avLst/>
+          </a:prstGeom>
+          <a:noFill/>
+        </p:spPr>
+        <p:txBody>
+          <a:bodyPr wrap="square" anchor="t" lIns="0" rIns="0" tIns="0" bIns="0">
+            <a:spAutoFit/>
+          </a:bodyPr>
+          <a:lstStyle/>
+          <a:p>
+            <a:pPr algn="ctr">
+              <a:lnSpc>
+                <a:spcPct val="110000"/>
+              </a:lnSpc>
+              <a:spcAft>
+                <a:spcPts val="0"/>
+              </a:spcAft>
+            </a:pPr>
+            <a:r>
+              <a:rPr sz="1200" b="1" i="0">
+                <a:solidFill>
+                  <a:srgbClr val="314359"/>
+                </a:solidFill>
+                <a:latin typeface="Times New Roman"/>
+              </a:rPr>
+              <a:t>≈ SEK 11bn of shareholder value created over nine years</a:t>
+            </a:r>
+          </a:p>
+        </p:txBody>
+      </p:sp>
+      <p:sp>
+        <p:nvSpPr>
+          <p:cNvPr id="13" name="TextBox 12"/>
           <p:cNvSpPr txBox="1"/>
           <p:nvPr/>
         </p:nvSpPr>
@@ -6878,7 +7211,7 @@
                 </a:solidFill>
                 <a:latin typeface="Times New Roman"/>
               </a:rPr>
-              <a:t>Investment case study: Wihlborgs / Drott</a:t>
+              <a:t>Investment case study: Johnson Pump</a:t>
             </a:r>
           </a:p>
         </p:txBody>
@@ -6984,7 +7317,7 @@
                 </a:solidFill>
                 <a:latin typeface="Arial"/>
               </a:rPr>
-              <a:t>Wihlborgs and Drott were Swedish listed real-estate companies holding commercial and residential properties in the growing Stockholm and Malmö regions, trading at a discount to NAV with no active owner.</a:t>
+              <a:t>Johnson Pump was a traditional industrial business — a pump OEM with an extensive sales force and a strong brand. It had suffered profitability issues but had started to recover, with revenues of SEK 647m and a negative EBIT.</a:t>
             </a:r>
           </a:p>
           <a:p>
@@ -7034,7 +7367,7 @@
                 </a:solidFill>
                 <a:latin typeface="Arial"/>
               </a:rPr>
-              <a:t>Shares traded at a discount to NAV for real-estate companies</a:t>
+              <a:t>Low profitability was largely a cost issue — customers kept buying and the gross margin was decent</a:t>
             </a:r>
           </a:p>
           <a:p>
@@ -7062,7 +7395,7 @@
                 </a:solidFill>
                 <a:latin typeface="Arial"/>
               </a:rPr>
-              <a:t>Hidden values in both Wihlborgs and Drott</a:t>
+              <a:t>Significant upside on cost in both factories and sales offices</a:t>
             </a:r>
           </a:p>
           <a:p>
@@ -7090,7 +7423,7 @@
                 </a:solidFill>
                 <a:latin typeface="Arial"/>
               </a:rPr>
-              <a:t>Limited active ownership; inefficient debt/capital structure</a:t>
+              <a:t>The sales force could be leveraged with a wider product range (R&amp;D, 3rd-party products, M&amp;A)</a:t>
             </a:r>
           </a:p>
           <a:p>
@@ -7118,7 +7451,7 @@
                 </a:solidFill>
                 <a:latin typeface="Arial"/>
               </a:rPr>
-              <a:t>Limited synergies between commercial and residential — divest</a:t>
+              <a:t>Market segmentation should reveal further niche potential</a:t>
             </a:r>
           </a:p>
           <a:p>
@@ -7146,35 +7479,7 @@
                 </a:solidFill>
                 <a:latin typeface="Arial"/>
               </a:rPr>
-              <a:t>Inefficient organisations</a:t>
-            </a:r>
-          </a:p>
-          <a:p>
-            <a:pPr marL="149162" indent="-149162">
-              <a:lnSpc>
-                <a:spcPct val="106000"/>
-              </a:lnSpc>
-              <a:spcAft>
-                <a:spcPts val="150"/>
-              </a:spcAft>
-            </a:pPr>
-            <a:r>
-              <a:rPr sz="869" b="1">
-                <a:solidFill>
-                  <a:srgbClr val="556A83"/>
-                </a:solidFill>
-                <a:latin typeface="Arial"/>
-              </a:rPr>
-              <a:t>›  </a:t>
-            </a:r>
-            <a:r>
-              <a:rPr sz="869">
-                <a:solidFill>
-                  <a:srgbClr val="0E1620"/>
-                </a:solidFill>
-                <a:latin typeface="Arial"/>
-              </a:rPr>
-              <a:t>Property-investment funds were pushing prices upwards</a:t>
+              <a:t>Geographic expansion to follow customers moving to low-cost countries</a:t>
             </a:r>
           </a:p>
           <a:p>
@@ -7215,7 +7520,7 @@
                 </a:solidFill>
                 <a:latin typeface="Arial"/>
               </a:rPr>
-              <a:t>Divest properties and reduce costs to enable cash distribution; split commercial and residential into separate companies — one for the Öresund/Malmö region and one for Stockholm; refinance to lower the cost of debt.</a:t>
+              <a:t>Reduce costs in factories and sales offices, build a uniform sales process and a simplified product range, expand the range and geography, and grow in adjacencies through M&amp;A.</a:t>
             </a:r>
           </a:p>
           <a:p>
@@ -7265,7 +7570,7 @@
                 </a:solidFill>
                 <a:latin typeface="Arial"/>
               </a:rPr>
-              <a:t>Öresund acquired 12% of Wihlborgs (2001); new board members joined</a:t>
+              <a:t>New ERP system (2002); component manufacturing moved to India (2003)</a:t>
             </a:r>
           </a:p>
           <a:p>
@@ -7293,7 +7598,7 @@
                 </a:solidFill>
                 <a:latin typeface="Arial"/>
               </a:rPr>
-              <a:t>Wihlborgs built a ~10% position in Drott; a new board was elected</a:t>
+              <a:t>Restructured Dutch operations and centralised sourcing (2004–05)</a:t>
             </a:r>
           </a:p>
           <a:p>
@@ -7321,7 +7626,7 @@
                 </a:solidFill>
                 <a:latin typeface="Arial"/>
               </a:rPr>
-              <a:t>New management plan with ~SEK 85m of yearly savings</a:t>
+              <a:t>New CEO Stefan Charette (2006); separated Marine, acquired Tigerholm, launched an export organisation</a:t>
             </a:r>
           </a:p>
           <a:p>
@@ -7349,7 +7654,7 @@
                 </a:solidFill>
                 <a:latin typeface="Arial"/>
               </a:rPr>
-              <a:t>Several properties divested — SEK 3.3bn cash redemption (2004)</a:t>
+              <a:t>Revenues +~17%; SG&amp;A −~18%; operating result +~SEK 62m (−15m to +47m)</a:t>
             </a:r>
           </a:p>
           <a:p>
@@ -7377,35 +7682,7 @@
                 </a:solidFill>
                 <a:latin typeface="Arial"/>
               </a:rPr>
-              <a:t>Drott split into BAB Drott (residential, sold to Stena) and Fabege (commercial, acquired by Wihlborgs)</a:t>
-            </a:r>
-          </a:p>
-          <a:p>
-            <a:pPr marL="149162" indent="-149162">
-              <a:lnSpc>
-                <a:spcPct val="106000"/>
-              </a:lnSpc>
-              <a:spcAft>
-                <a:spcPts val="150"/>
-              </a:spcAft>
-            </a:pPr>
-            <a:r>
-              <a:rPr sz="869" b="1">
-                <a:solidFill>
-                  <a:srgbClr val="556A83"/>
-                </a:solidFill>
-                <a:latin typeface="Arial"/>
-              </a:rPr>
-              <a:t>✓  </a:t>
-            </a:r>
-            <a:r>
-              <a:rPr sz="869">
-                <a:solidFill>
-                  <a:srgbClr val="0E1620"/>
-                </a:solidFill>
-                <a:latin typeface="Arial"/>
-              </a:rPr>
-              <a:t>Combined operations later split into two regional companies</a:t>
+              <a:t>SPX Corporation public offer accepted by &gt;90% of shareholders; delisted</a:t>
             </a:r>
           </a:p>
         </p:txBody>
@@ -7477,14 +7754,14 @@
                 </a:solidFill>
                 <a:latin typeface="Times New Roman"/>
               </a:rPr>
-              <a:t>IRR 31.0% · 2002–2004</a:t>
+              <a:t>IRR 34.4% · 2002–2006</a:t>
             </a:r>
           </a:p>
         </p:txBody>
       </p:sp>
       <p:pic>
         <p:nvPicPr>
-          <p:cNvPr id="11" name="Picture 10" descr="drott_line.png"/>
+          <p:cNvPr id="11" name="Picture 10" descr="jp_line.png"/>
           <p:cNvPicPr>
             <a:picLocks noChangeAspect="1"/>
           </p:cNvPicPr>
@@ -7509,48 +7786,6 @@
       <p:sp>
         <p:nvSpPr>
           <p:cNvPr id="12" name="TextBox 11"/>
-          <p:cNvSpPr txBox="1"/>
-          <p:nvPr/>
-        </p:nvSpPr>
-        <p:spPr>
-          <a:xfrm>
-            <a:off x="4983480" y="4848158"/>
-            <a:ext cx="4297680" cy="457200"/>
-          </a:xfrm>
-          <a:prstGeom prst="rect">
-            <a:avLst/>
-          </a:prstGeom>
-          <a:noFill/>
-        </p:spPr>
-        <p:txBody>
-          <a:bodyPr wrap="square" anchor="t" lIns="0" rIns="0" tIns="0" bIns="0">
-            <a:spAutoFit/>
-          </a:bodyPr>
-          <a:lstStyle/>
-          <a:p>
-            <a:pPr algn="ctr">
-              <a:lnSpc>
-                <a:spcPct val="110000"/>
-              </a:lnSpc>
-              <a:spcAft>
-                <a:spcPts val="0"/>
-              </a:spcAft>
-            </a:pPr>
-            <a:r>
-              <a:rPr sz="1200" b="1" i="0">
-                <a:solidFill>
-                  <a:srgbClr val="314359"/>
-                </a:solidFill>
-                <a:latin typeface="Times New Roman"/>
-              </a:rPr>
-              <a:t>≈ SEK 3bn of net value created in 15 months</a:t>
-            </a:r>
-          </a:p>
-        </p:txBody>
-      </p:sp>
-      <p:sp>
-        <p:nvSpPr>
-          <p:cNvPr id="13" name="TextBox 12"/>
           <p:cNvSpPr txBox="1"/>
           <p:nvPr/>
         </p:nvSpPr>
@@ -7771,7 +8006,7 @@
                 </a:solidFill>
                 <a:latin typeface="Times New Roman"/>
               </a:rPr>
-              <a:t>Investment case study: J&amp;W</a:t>
+              <a:t>Investment case study: Wihlborgs / Drott</a:t>
             </a:r>
           </a:p>
         </p:txBody>
@@ -7877,7 +8112,7 @@
                 </a:solidFill>
                 <a:latin typeface="Arial"/>
               </a:rPr>
-              <a:t>J&amp;W (Jacobson &amp; Widmark) was a Swedish technical-consulting firm. Öresund first invested in 1994 and took a controlling interest in 2000.</a:t>
+              <a:t>Wihlborgs and Drott were Swedish listed real-estate companies holding commercial and residential properties in the growing Stockholm and Malmö regions, trading at a discount to NAV with no active owner.</a:t>
             </a:r>
           </a:p>
           <a:p>
@@ -7927,7 +8162,7 @@
                 </a:solidFill>
                 <a:latin typeface="Arial"/>
               </a:rPr>
-              <a:t>Over-funded pension plans — cash to be returned from the SPP pension trust (now Alecta)</a:t>
+              <a:t>Shares traded at a discount to NAV for real-estate companies</a:t>
             </a:r>
           </a:p>
           <a:p>
@@ -7955,7 +8190,7 @@
                 </a:solidFill>
                 <a:latin typeface="Arial"/>
               </a:rPr>
-              <a:t>A fragmented consulting market with consolidation potential</a:t>
+              <a:t>Hidden values in both Wihlborgs and Drott</a:t>
             </a:r>
           </a:p>
           <a:p>
@@ -7983,7 +8218,91 @@
                 </a:solidFill>
                 <a:latin typeface="Arial"/>
               </a:rPr>
-              <a:t>A non-core subsidiary (Benima Ferator) that could be divested</a:t>
+              <a:t>Limited active ownership; inefficient debt/capital structure</a:t>
+            </a:r>
+          </a:p>
+          <a:p>
+            <a:pPr marL="149162" indent="-149162">
+              <a:lnSpc>
+                <a:spcPct val="106000"/>
+              </a:lnSpc>
+              <a:spcAft>
+                <a:spcPts val="150"/>
+              </a:spcAft>
+            </a:pPr>
+            <a:r>
+              <a:rPr sz="869" b="1">
+                <a:solidFill>
+                  <a:srgbClr val="556A83"/>
+                </a:solidFill>
+                <a:latin typeface="Arial"/>
+              </a:rPr>
+              <a:t>›  </a:t>
+            </a:r>
+            <a:r>
+              <a:rPr sz="869">
+                <a:solidFill>
+                  <a:srgbClr val="0E1620"/>
+                </a:solidFill>
+                <a:latin typeface="Arial"/>
+              </a:rPr>
+              <a:t>Limited synergies between commercial and residential — divest</a:t>
+            </a:r>
+          </a:p>
+          <a:p>
+            <a:pPr marL="149162" indent="-149162">
+              <a:lnSpc>
+                <a:spcPct val="106000"/>
+              </a:lnSpc>
+              <a:spcAft>
+                <a:spcPts val="150"/>
+              </a:spcAft>
+            </a:pPr>
+            <a:r>
+              <a:rPr sz="869" b="1">
+                <a:solidFill>
+                  <a:srgbClr val="556A83"/>
+                </a:solidFill>
+                <a:latin typeface="Arial"/>
+              </a:rPr>
+              <a:t>›  </a:t>
+            </a:r>
+            <a:r>
+              <a:rPr sz="869">
+                <a:solidFill>
+                  <a:srgbClr val="0E1620"/>
+                </a:solidFill>
+                <a:latin typeface="Arial"/>
+              </a:rPr>
+              <a:t>Inefficient organisations</a:t>
+            </a:r>
+          </a:p>
+          <a:p>
+            <a:pPr marL="149162" indent="-149162">
+              <a:lnSpc>
+                <a:spcPct val="106000"/>
+              </a:lnSpc>
+              <a:spcAft>
+                <a:spcPts val="150"/>
+              </a:spcAft>
+            </a:pPr>
+            <a:r>
+              <a:rPr sz="869" b="1">
+                <a:solidFill>
+                  <a:srgbClr val="556A83"/>
+                </a:solidFill>
+                <a:latin typeface="Arial"/>
+              </a:rPr>
+              <a:t>›  </a:t>
+            </a:r>
+            <a:r>
+              <a:rPr sz="869">
+                <a:solidFill>
+                  <a:srgbClr val="0E1620"/>
+                </a:solidFill>
+                <a:latin typeface="Arial"/>
+              </a:rPr>
+              <a:t>Property-investment funds were pushing prices upwards</a:t>
             </a:r>
           </a:p>
           <a:p>
@@ -8024,7 +8343,7 @@
                 </a:solidFill>
                 <a:latin typeface="Arial"/>
               </a:rPr>
-              <a:t>Return excess cash to shareholders, divest non-core operations, and consolidate the fragmented technical-consulting market through acquisitions.</a:t>
+              <a:t>Divest properties and reduce costs to enable cash distribution; split commercial and residential into separate companies — one for the Öresund/Malmö region and one for Stockholm; refinance to lower the cost of debt.</a:t>
             </a:r>
           </a:p>
           <a:p>
@@ -8074,7 +8393,7 @@
                 </a:solidFill>
                 <a:latin typeface="Arial"/>
               </a:rPr>
-              <a:t>Spun off Benima Ferator to shareholders (later acquired by Sigma)</a:t>
+              <a:t>Öresund acquired 12% of Wihlborgs (2001); new board members joined</a:t>
             </a:r>
           </a:p>
           <a:p>
@@ -8102,7 +8421,7 @@
                 </a:solidFill>
                 <a:latin typeface="Arial"/>
               </a:rPr>
-              <a:t>Transferred SPP pension-plan cash to shareholders</a:t>
+              <a:t>Wihlborgs built a ~10% position in Drott; a new board was elected</a:t>
             </a:r>
           </a:p>
           <a:p>
@@ -8130,7 +8449,7 @@
                 </a:solidFill>
                 <a:latin typeface="Arial"/>
               </a:rPr>
-              <a:t>Acquired several smaller competitors and the larger Kjessler &amp; Mannerstråle (KM)</a:t>
+              <a:t>New management plan with ~SEK 85m of yearly savings</a:t>
             </a:r>
           </a:p>
           <a:p>
@@ -8158,7 +8477,63 @@
                 </a:solidFill>
                 <a:latin typeface="Arial"/>
               </a:rPr>
-              <a:t>J&amp;W was subsequently sold to WSP</a:t>
+              <a:t>Several properties divested — SEK 3.3bn cash redemption (2004)</a:t>
+            </a:r>
+          </a:p>
+          <a:p>
+            <a:pPr marL="149162" indent="-149162">
+              <a:lnSpc>
+                <a:spcPct val="106000"/>
+              </a:lnSpc>
+              <a:spcAft>
+                <a:spcPts val="150"/>
+              </a:spcAft>
+            </a:pPr>
+            <a:r>
+              <a:rPr sz="869" b="1">
+                <a:solidFill>
+                  <a:srgbClr val="556A83"/>
+                </a:solidFill>
+                <a:latin typeface="Arial"/>
+              </a:rPr>
+              <a:t>✓  </a:t>
+            </a:r>
+            <a:r>
+              <a:rPr sz="869">
+                <a:solidFill>
+                  <a:srgbClr val="0E1620"/>
+                </a:solidFill>
+                <a:latin typeface="Arial"/>
+              </a:rPr>
+              <a:t>Drott split into BAB Drott (residential, sold to Stena) and Fabege (commercial, acquired by Wihlborgs)</a:t>
+            </a:r>
+          </a:p>
+          <a:p>
+            <a:pPr marL="149162" indent="-149162">
+              <a:lnSpc>
+                <a:spcPct val="106000"/>
+              </a:lnSpc>
+              <a:spcAft>
+                <a:spcPts val="150"/>
+              </a:spcAft>
+            </a:pPr>
+            <a:r>
+              <a:rPr sz="869" b="1">
+                <a:solidFill>
+                  <a:srgbClr val="556A83"/>
+                </a:solidFill>
+                <a:latin typeface="Arial"/>
+              </a:rPr>
+              <a:t>✓  </a:t>
+            </a:r>
+            <a:r>
+              <a:rPr sz="869">
+                <a:solidFill>
+                  <a:srgbClr val="0E1620"/>
+                </a:solidFill>
+                <a:latin typeface="Arial"/>
+              </a:rPr>
+              <a:t>Combined operations later split into two regional companies</a:t>
             </a:r>
           </a:p>
         </p:txBody>
@@ -8230,21 +8605,45 @@
                 </a:solidFill>
                 <a:latin typeface="Times New Roman"/>
               </a:rPr>
-              <a:t>IRR 94.4% · 2000–2001 · Technical consultants</a:t>
-            </a:r>
-          </a:p>
-        </p:txBody>
-      </p:sp>
-      <p:sp>
-        <p:nvSpPr>
-          <p:cNvPr id="11" name="TextBox 10"/>
+              <a:t>IRR 31.0% · 2002–2004</a:t>
+            </a:r>
+          </a:p>
+        </p:txBody>
+      </p:sp>
+      <p:pic>
+        <p:nvPicPr>
+          <p:cNvPr id="11" name="Picture 10" descr="drott_line.png"/>
+          <p:cNvPicPr>
+            <a:picLocks noChangeAspect="1"/>
+          </p:cNvPicPr>
+          <p:nvPr/>
+        </p:nvPicPr>
+        <p:blipFill>
+          <a:blip r:embed="rId3"/>
+          <a:stretch>
+            <a:fillRect/>
+          </a:stretch>
+        </p:blipFill>
+        <p:spPr>
+          <a:xfrm>
+            <a:off x="4983480" y="2276856"/>
+            <a:ext cx="4297680" cy="2479862"/>
+          </a:xfrm>
+          <a:prstGeom prst="rect">
+            <a:avLst/>
+          </a:prstGeom>
+        </p:spPr>
+      </p:pic>
+      <p:sp>
+        <p:nvSpPr>
+          <p:cNvPr id="12" name="TextBox 11"/>
           <p:cNvSpPr txBox="1"/>
           <p:nvPr/>
         </p:nvSpPr>
         <p:spPr>
           <a:xfrm>
-            <a:off x="4983480" y="2350008"/>
-            <a:ext cx="4297680" cy="274320"/>
+            <a:off x="4983480" y="4848158"/>
+            <a:ext cx="4297680" cy="457200"/>
           </a:xfrm>
           <a:prstGeom prst="rect">
             <a:avLst/>
@@ -8266,320 +8665,20 @@
               </a:spcAft>
             </a:pPr>
             <a:r>
-              <a:rPr sz="1100" b="1" i="0">
+              <a:rPr sz="1200" b="1" i="0">
                 <a:solidFill>
                   <a:srgbClr val="314359"/>
                 </a:solidFill>
                 <a:latin typeface="Times New Roman"/>
               </a:rPr>
-              <a:t>Initial investment vs. current value</a:t>
-            </a:r>
-          </a:p>
-        </p:txBody>
-      </p:sp>
-      <p:sp>
-        <p:nvSpPr>
-          <p:cNvPr id="12" name="Rectangle 11"/>
-          <p:cNvSpPr/>
-          <p:nvPr/>
-        </p:nvSpPr>
-        <p:spPr>
-          <a:xfrm>
-            <a:off x="5074920" y="4773168"/>
-            <a:ext cx="4114800" cy="12700"/>
-          </a:xfrm>
-          <a:prstGeom prst="rect">
-            <a:avLst/>
-          </a:prstGeom>
-          <a:solidFill>
-            <a:srgbClr val="E2E5E9"/>
-          </a:solidFill>
-          <a:ln>
-            <a:noFill/>
-          </a:ln>
-          <a:effectLst/>
-        </p:spPr>
-        <p:txBody>
-          <a:bodyPr rtlCol="0" anchor="ctr"/>
-          <a:lstStyle/>
-          <a:p>
-            <a:pPr algn="ctr"/>
-          </a:p>
-        </p:txBody>
-      </p:sp>
-      <p:sp>
-        <p:nvSpPr>
-          <p:cNvPr id="13" name="Rectangle 12"/>
-          <p:cNvSpPr/>
-          <p:nvPr/>
-        </p:nvSpPr>
-        <p:spPr>
-          <a:xfrm>
-            <a:off x="5577840" y="4044976"/>
-            <a:ext cx="1051560" cy="728192"/>
-          </a:xfrm>
-          <a:prstGeom prst="rect">
-            <a:avLst/>
-          </a:prstGeom>
-          <a:solidFill>
-            <a:srgbClr val="152130"/>
-          </a:solidFill>
-          <a:ln>
-            <a:noFill/>
-          </a:ln>
-          <a:effectLst/>
-        </p:spPr>
-        <p:txBody>
-          <a:bodyPr rtlCol="0" anchor="ctr"/>
-          <a:lstStyle/>
-          <a:p>
-            <a:pPr algn="ctr"/>
-          </a:p>
-        </p:txBody>
-      </p:sp>
-      <p:sp>
-        <p:nvSpPr>
-          <p:cNvPr id="14" name="TextBox 13"/>
-          <p:cNvSpPr txBox="1"/>
-          <p:nvPr/>
-        </p:nvSpPr>
-        <p:spPr>
-          <a:xfrm>
-            <a:off x="5303520" y="3770656"/>
-            <a:ext cx="1600200" cy="256032"/>
-          </a:xfrm>
-          <a:prstGeom prst="rect">
-            <a:avLst/>
-          </a:prstGeom>
-          <a:noFill/>
-        </p:spPr>
-        <p:txBody>
-          <a:bodyPr wrap="square" anchor="t" lIns="0" rIns="0" tIns="0" bIns="0">
-            <a:spAutoFit/>
-          </a:bodyPr>
-          <a:lstStyle/>
-          <a:p>
-            <a:pPr algn="ctr">
-              <a:lnSpc>
-                <a:spcPct val="110000"/>
-              </a:lnSpc>
-              <a:spcAft>
-                <a:spcPts val="0"/>
-              </a:spcAft>
-            </a:pPr>
-            <a:r>
-              <a:rPr sz="1300" b="1" i="0">
-                <a:solidFill>
-                  <a:srgbClr val="314359"/>
-                </a:solidFill>
-                <a:latin typeface="Times New Roman"/>
-              </a:rPr>
-              <a:t>213</a:t>
-            </a:r>
-          </a:p>
-        </p:txBody>
-      </p:sp>
-      <p:sp>
-        <p:nvSpPr>
-          <p:cNvPr id="15" name="TextBox 14"/>
-          <p:cNvSpPr txBox="1"/>
-          <p:nvPr/>
-        </p:nvSpPr>
-        <p:spPr>
-          <a:xfrm>
-            <a:off x="5074920" y="4828032"/>
-            <a:ext cx="2057400" cy="310896"/>
-          </a:xfrm>
-          <a:prstGeom prst="rect">
-            <a:avLst/>
-          </a:prstGeom>
-          <a:noFill/>
-        </p:spPr>
-        <p:txBody>
-          <a:bodyPr wrap="square" anchor="t" lIns="0" rIns="0" tIns="0" bIns="0">
-            <a:spAutoFit/>
-          </a:bodyPr>
-          <a:lstStyle/>
-          <a:p>
-            <a:pPr algn="ctr">
-              <a:lnSpc>
-                <a:spcPct val="110000"/>
-              </a:lnSpc>
-              <a:spcAft>
-                <a:spcPts val="0"/>
-              </a:spcAft>
-            </a:pPr>
-            <a:r>
-              <a:rPr sz="950" b="0" i="0">
-                <a:solidFill>
-                  <a:srgbClr val="0E1620"/>
-                </a:solidFill>
-                <a:latin typeface="Arial"/>
-              </a:rPr>
-              <a:t>Initial investment</a:t>
-            </a:r>
-          </a:p>
-        </p:txBody>
-      </p:sp>
-      <p:sp>
-        <p:nvSpPr>
-          <p:cNvPr id="16" name="Rectangle 15"/>
-          <p:cNvSpPr/>
-          <p:nvPr/>
-        </p:nvSpPr>
-        <p:spPr>
-          <a:xfrm>
-            <a:off x="7635240" y="3145846"/>
-            <a:ext cx="1051560" cy="1627322"/>
-          </a:xfrm>
-          <a:prstGeom prst="rect">
-            <a:avLst/>
-          </a:prstGeom>
-          <a:solidFill>
-            <a:srgbClr val="152130"/>
-          </a:solidFill>
-          <a:ln>
-            <a:noFill/>
-          </a:ln>
-          <a:effectLst/>
-        </p:spPr>
-        <p:txBody>
-          <a:bodyPr rtlCol="0" anchor="ctr"/>
-          <a:lstStyle/>
-          <a:p>
-            <a:pPr algn="ctr"/>
-          </a:p>
-        </p:txBody>
-      </p:sp>
-      <p:sp>
-        <p:nvSpPr>
-          <p:cNvPr id="17" name="TextBox 16"/>
-          <p:cNvSpPr txBox="1"/>
-          <p:nvPr/>
-        </p:nvSpPr>
-        <p:spPr>
-          <a:xfrm>
-            <a:off x="7360920" y="2871526"/>
-            <a:ext cx="1600200" cy="256032"/>
-          </a:xfrm>
-          <a:prstGeom prst="rect">
-            <a:avLst/>
-          </a:prstGeom>
-          <a:noFill/>
-        </p:spPr>
-        <p:txBody>
-          <a:bodyPr wrap="square" anchor="t" lIns="0" rIns="0" tIns="0" bIns="0">
-            <a:spAutoFit/>
-          </a:bodyPr>
-          <a:lstStyle/>
-          <a:p>
-            <a:pPr algn="ctr">
-              <a:lnSpc>
-                <a:spcPct val="110000"/>
-              </a:lnSpc>
-              <a:spcAft>
-                <a:spcPts val="0"/>
-              </a:spcAft>
-            </a:pPr>
-            <a:r>
-              <a:rPr sz="1300" b="1" i="0">
-                <a:solidFill>
-                  <a:srgbClr val="314359"/>
-                </a:solidFill>
-                <a:latin typeface="Times New Roman"/>
-              </a:rPr>
-              <a:t>476</a:t>
-            </a:r>
-          </a:p>
-        </p:txBody>
-      </p:sp>
-      <p:sp>
-        <p:nvSpPr>
-          <p:cNvPr id="18" name="TextBox 17"/>
-          <p:cNvSpPr txBox="1"/>
-          <p:nvPr/>
-        </p:nvSpPr>
-        <p:spPr>
-          <a:xfrm>
-            <a:off x="7132320" y="4828032"/>
-            <a:ext cx="2057400" cy="310896"/>
-          </a:xfrm>
-          <a:prstGeom prst="rect">
-            <a:avLst/>
-          </a:prstGeom>
-          <a:noFill/>
-        </p:spPr>
-        <p:txBody>
-          <a:bodyPr wrap="square" anchor="t" lIns="0" rIns="0" tIns="0" bIns="0">
-            <a:spAutoFit/>
-          </a:bodyPr>
-          <a:lstStyle/>
-          <a:p>
-            <a:pPr algn="ctr">
-              <a:lnSpc>
-                <a:spcPct val="110000"/>
-              </a:lnSpc>
-              <a:spcAft>
-                <a:spcPts val="0"/>
-              </a:spcAft>
-            </a:pPr>
-            <a:r>
-              <a:rPr sz="950" b="0" i="0">
-                <a:solidFill>
-                  <a:srgbClr val="0E1620"/>
-                </a:solidFill>
-                <a:latin typeface="Arial"/>
-              </a:rPr>
-              <a:t>Current value</a:t>
-            </a:r>
-          </a:p>
-        </p:txBody>
-      </p:sp>
-      <p:sp>
-        <p:nvSpPr>
-          <p:cNvPr id="19" name="TextBox 18"/>
-          <p:cNvSpPr txBox="1"/>
-          <p:nvPr/>
-        </p:nvSpPr>
-        <p:spPr>
-          <a:xfrm>
-            <a:off x="4983480" y="5157216"/>
-            <a:ext cx="4297680" cy="201168"/>
-          </a:xfrm>
-          <a:prstGeom prst="rect">
-            <a:avLst/>
-          </a:prstGeom>
-          <a:noFill/>
-        </p:spPr>
-        <p:txBody>
-          <a:bodyPr wrap="square" anchor="t" lIns="0" rIns="0" tIns="0" bIns="0">
-            <a:spAutoFit/>
-          </a:bodyPr>
-          <a:lstStyle/>
-          <a:p>
-            <a:pPr algn="l">
-              <a:lnSpc>
-                <a:spcPct val="110000"/>
-              </a:lnSpc>
-              <a:spcAft>
-                <a:spcPts val="0"/>
-              </a:spcAft>
-            </a:pPr>
-            <a:r>
-              <a:rPr sz="850" b="0" i="1">
-                <a:solidFill>
-                  <a:srgbClr val="556A83"/>
-                </a:solidFill>
-                <a:latin typeface="Arial"/>
-              </a:rPr>
-              <a:t>SEK M</a:t>
-            </a:r>
-          </a:p>
-        </p:txBody>
-      </p:sp>
-      <p:sp>
-        <p:nvSpPr>
-          <p:cNvPr id="20" name="TextBox 19"/>
+              <a:t>≈ SEK 3bn of net value created in 15 months</a:t>
+            </a:r>
+          </a:p>
+        </p:txBody>
+      </p:sp>
+      <p:sp>
+        <p:nvSpPr>
+          <p:cNvPr id="13" name="TextBox 12"/>
           <p:cNvSpPr txBox="1"/>
           <p:nvPr/>
         </p:nvSpPr>
@@ -8800,7 +8899,7 @@
                 </a:solidFill>
                 <a:latin typeface="Times New Roman"/>
               </a:rPr>
-              <a:t>Investment case study: Nobia</a:t>
+              <a:t>Investment case study: J&amp;W</a:t>
             </a:r>
           </a:p>
         </p:txBody>
@@ -8906,7 +9005,7 @@
                 </a:solidFill>
                 <a:latin typeface="Arial"/>
               </a:rPr>
-              <a:t>Nobia is a European kitchen company. Originally active across several construction-component areas, it was streamlined to focus on kitchens.</a:t>
+              <a:t>J&amp;W (Jacobson &amp; Widmark) was a Swedish technical-consulting firm. Öresund first invested in 1994 and took a controlling interest in 2000.</a:t>
             </a:r>
           </a:p>
           <a:p>
@@ -8956,7 +9055,7 @@
                 </a:solidFill>
                 <a:latin typeface="Arial"/>
               </a:rPr>
-              <a:t>Active across several construction-component areas — focus opportunity</a:t>
+              <a:t>Over-funded pension plans — cash to be returned from the SPP pension trust (now Alecta)</a:t>
             </a:r>
           </a:p>
           <a:p>
@@ -8984,7 +9083,35 @@
                 </a:solidFill>
                 <a:latin typeface="Arial"/>
               </a:rPr>
-              <a:t>A fragmented European kitchen market with consolidation potential</a:t>
+              <a:t>A fragmented consulting market with consolidation potential</a:t>
+            </a:r>
+          </a:p>
+          <a:p>
+            <a:pPr marL="149162" indent="-149162">
+              <a:lnSpc>
+                <a:spcPct val="106000"/>
+              </a:lnSpc>
+              <a:spcAft>
+                <a:spcPts val="150"/>
+              </a:spcAft>
+            </a:pPr>
+            <a:r>
+              <a:rPr sz="869" b="1">
+                <a:solidFill>
+                  <a:srgbClr val="556A83"/>
+                </a:solidFill>
+                <a:latin typeface="Arial"/>
+              </a:rPr>
+              <a:t>›  </a:t>
+            </a:r>
+            <a:r>
+              <a:rPr sz="869">
+                <a:solidFill>
+                  <a:srgbClr val="0E1620"/>
+                </a:solidFill>
+                <a:latin typeface="Arial"/>
+              </a:rPr>
+              <a:t>A non-core subsidiary (Benima Ferator) that could be divested</a:t>
             </a:r>
           </a:p>
           <a:p>
@@ -9025,7 +9152,7 @@
                 </a:solidFill>
                 <a:latin typeface="Arial"/>
               </a:rPr>
-              <a:t>Streamline Nobia to focus on kitchens by divesting other areas, and consolidate the European kitchen market through acquisitions.</a:t>
+              <a:t>Return excess cash to shareholders, divest non-core operations, and consolidate the fragmented technical-consulting market through acquisitions.</a:t>
             </a:r>
           </a:p>
           <a:p>
@@ -9075,7 +9202,7 @@
                 </a:solidFill>
                 <a:latin typeface="Arial"/>
               </a:rPr>
-              <a:t>Streamlined to focus on kitchens (sold Doors &amp; Windows)</a:t>
+              <a:t>Spun off Benima Ferator to shareholders (later acquired by Sigma)</a:t>
             </a:r>
           </a:p>
           <a:p>
@@ -9103,7 +9230,7 @@
                 </a:solidFill>
                 <a:latin typeface="Arial"/>
               </a:rPr>
-              <a:t>Acquired Gower, EWE-FM and Hygena — the largest kitchen company in Europe</a:t>
+              <a:t>Transferred SPP pension-plan cash to shareholders</a:t>
             </a:r>
           </a:p>
           <a:p>
@@ -9131,7 +9258,7 @@
                 </a:solidFill>
                 <a:latin typeface="Arial"/>
               </a:rPr>
-              <a:t>Turnover up from SEK 9.2bn (2003) to SEK 16.1bn (12m to Jun 2007)</a:t>
+              <a:t>Acquired several smaller competitors and the larger Kjessler &amp; Mannerstråle (KM)</a:t>
             </a:r>
           </a:p>
           <a:p>
@@ -9159,7 +9286,7 @@
                 </a:solidFill>
                 <a:latin typeface="Arial"/>
               </a:rPr>
-              <a:t>EBIT up from SEK 560m to SEK 1,360m</a:t>
+              <a:t>J&amp;W was subsequently sold to WSP</a:t>
             </a:r>
           </a:p>
         </p:txBody>
@@ -9231,7 +9358,7 @@
                 </a:solidFill>
                 <a:latin typeface="Times New Roman"/>
               </a:rPr>
-              <a:t>IRR 33.1% · 2002– · Consumer discretionary</a:t>
+              <a:t>IRR 94.4% · 2000–2001 · Technical consultants</a:t>
             </a:r>
           </a:p>
         </p:txBody>
@@ -9316,8 +9443,8 @@
         </p:nvSpPr>
         <p:spPr>
           <a:xfrm>
-            <a:off x="5577840" y="4529746"/>
-            <a:ext cx="1051560" cy="243422"/>
+            <a:off x="5577840" y="4044976"/>
+            <a:ext cx="1051560" cy="728192"/>
           </a:xfrm>
           <a:prstGeom prst="rect">
             <a:avLst/>
@@ -9346,7 +9473,7 @@
         </p:nvSpPr>
         <p:spPr>
           <a:xfrm>
-            <a:off x="5303520" y="4255426"/>
+            <a:off x="5303520" y="3770656"/>
             <a:ext cx="1600200" cy="256032"/>
           </a:xfrm>
           <a:prstGeom prst="rect">
@@ -9375,7 +9502,7 @@
                 </a:solidFill>
                 <a:latin typeface="Times New Roman"/>
               </a:rPr>
-              <a:t>162</a:t>
+              <a:t>213</a:t>
             </a:r>
           </a:p>
         </p:txBody>
@@ -9489,7 +9616,7 @@
                 </a:solidFill>
                 <a:latin typeface="Times New Roman"/>
               </a:rPr>
-              <a:t>1,083</a:t>
+              <a:t>476</a:t>
             </a:r>
           </a:p>
         </p:txBody>
@@ -9801,7 +9928,7 @@
                 </a:solidFill>
                 <a:latin typeface="Times New Roman"/>
               </a:rPr>
-              <a:t>Investment case study: HQ / Avanza</a:t>
+              <a:t>Investment case study: Nobia</a:t>
             </a:r>
           </a:p>
         </p:txBody>
@@ -9907,7 +10034,7 @@
                 </a:solidFill>
                 <a:latin typeface="Arial"/>
               </a:rPr>
-              <a:t>Hagströmer &amp; Qviberg (HQ) and Avanza are Swedish financial companies — brokerage, fund management, wealth management and online brokerage. Sven Hagströmer founded Hagströmer Fondkommission in 1986; Mats Qviberg joined in 1989.</a:t>
+              <a:t>Nobia is a European kitchen company. Originally active across several construction-component areas, it was streamlined to focus on kitchens.</a:t>
             </a:r>
           </a:p>
           <a:p>
@@ -9957,7 +10084,7 @@
                 </a:solidFill>
                 <a:latin typeface="Arial"/>
               </a:rPr>
-              <a:t>Separate online brokerage / fund management from traditional brokerage and investment banking</a:t>
+              <a:t>Active across several construction-component areas — focus opportunity</a:t>
             </a:r>
           </a:p>
           <a:p>
@@ -9985,7 +10112,7 @@
                 </a:solidFill>
                 <a:latin typeface="Arial"/>
               </a:rPr>
-              <a:t>Consolidation opportunities among internet brokerages</a:t>
+              <a:t>A fragmented European kitchen market with consolidation potential</a:t>
             </a:r>
           </a:p>
           <a:p>
@@ -10026,7 +10153,7 @@
                 </a:solidFill>
                 <a:latin typeface="Arial"/>
               </a:rPr>
-              <a:t>Split HQ into focused entities, consolidate internet brokerages into Avanza, and build a wealth-management business.</a:t>
+              <a:t>Streamline Nobia to focus on kitchens by divesting other areas, and consolidate the European kitchen market through acquisitions.</a:t>
             </a:r>
           </a:p>
           <a:p>
@@ -10076,7 +10203,7 @@
                 </a:solidFill>
                 <a:latin typeface="Arial"/>
               </a:rPr>
-              <a:t>HQ split (2000) into HQ.SE (internet brokerage, fund management) and Hagströmer &amp; Qviberg</a:t>
+              <a:t>Streamlined to focus on kitchens (sold Doors &amp; Windows)</a:t>
             </a:r>
           </a:p>
           <a:p>
@@ -10104,7 +10231,7 @@
                 </a:solidFill>
                 <a:latin typeface="Arial"/>
               </a:rPr>
-              <a:t>HQ.SE acquired Aktiespar FK and Avanza; split into HQ Fonder and Avanza</a:t>
+              <a:t>Acquired Gower, EWE-FM and Hygena — the largest kitchen company in Europe</a:t>
             </a:r>
           </a:p>
           <a:p>
@@ -10132,7 +10259,7 @@
                 </a:solidFill>
                 <a:latin typeface="Arial"/>
               </a:rPr>
-              <a:t>Avanza expanded into pensions, fund distribution, corporate finance and banking</a:t>
+              <a:t>Turnover up from SEK 9.2bn (2003) to SEK 16.1bn (12m to Jun 2007)</a:t>
             </a:r>
           </a:p>
           <a:p>
@@ -10160,7 +10287,7 @@
                 </a:solidFill>
                 <a:latin typeface="Arial"/>
               </a:rPr>
-              <a:t>HQ Fonder merged with Hagströmer &amp; Qviberg (2005) — SEK 85bn AUM</a:t>
+              <a:t>EBIT up from SEK 560m to SEK 1,360m</a:t>
             </a:r>
           </a:p>
         </p:txBody>
@@ -10232,7 +10359,7 @@
                 </a:solidFill>
                 <a:latin typeface="Times New Roman"/>
               </a:rPr>
-              <a:t>IRR 37.8% · 2000– · Finance</a:t>
+              <a:t>IRR 33.1% · 2002– · Consumer discretionary</a:t>
             </a:r>
           </a:p>
         </p:txBody>
@@ -10317,8 +10444,8 @@
         </p:nvSpPr>
         <p:spPr>
           <a:xfrm>
-            <a:off x="5577840" y="4341998"/>
-            <a:ext cx="1051560" cy="431170"/>
+            <a:off x="5577840" y="4529746"/>
+            <a:ext cx="1051560" cy="243422"/>
           </a:xfrm>
           <a:prstGeom prst="rect">
             <a:avLst/>
@@ -10347,7 +10474,7 @@
         </p:nvSpPr>
         <p:spPr>
           <a:xfrm>
-            <a:off x="5303520" y="4067678"/>
+            <a:off x="5303520" y="4255426"/>
             <a:ext cx="1600200" cy="256032"/>
           </a:xfrm>
           <a:prstGeom prst="rect">
@@ -10376,7 +10503,7 @@
                 </a:solidFill>
                 <a:latin typeface="Times New Roman"/>
               </a:rPr>
-              <a:t>744</a:t>
+              <a:t>162</a:t>
             </a:r>
           </a:p>
         </p:txBody>
@@ -10490,7 +10617,7 @@
                 </a:solidFill>
                 <a:latin typeface="Times New Roman"/>
               </a:rPr>
-              <a:t>2,808</a:t>
+              <a:t>1,083</a:t>
             </a:r>
           </a:p>
         </p:txBody>
@@ -10802,7 +10929,7 @@
                 </a:solidFill>
                 <a:latin typeface="Times New Roman"/>
               </a:rPr>
-              <a:t>Investment case study: SkiStar</a:t>
+              <a:t>Investment case study: HQ / Avanza</a:t>
             </a:r>
           </a:p>
         </p:txBody>
@@ -10908,7 +11035,7 @@
                 </a:solidFill>
                 <a:latin typeface="Arial"/>
               </a:rPr>
-              <a:t>SkiStar is a Scandinavian operator of alpine ski resorts, built through the consolidation of several destinations into a single listed leisure company.</a:t>
+              <a:t>Hagströmer &amp; Qviberg (HQ) and Avanza are Swedish financial companies — brokerage, fund management, wealth management and online brokerage. Sven Hagströmer founded Hagströmer Fondkommission in 1986; Mats Qviberg joined in 1989.</a:t>
             </a:r>
           </a:p>
           <a:p>
@@ -10958,7 +11085,7 @@
                 </a:solidFill>
                 <a:latin typeface="Arial"/>
               </a:rPr>
-              <a:t>A fragmented ski-resort market with consolidation potential</a:t>
+              <a:t>Separate online brokerage / fund management from traditional brokerage and investment banking</a:t>
             </a:r>
           </a:p>
           <a:p>
@@ -10986,7 +11113,7 @@
                 </a:solidFill>
                 <a:latin typeface="Arial"/>
               </a:rPr>
-              <a:t>Opportunity to build a leading Scandinavian leisure platform</a:t>
+              <a:t>Consolidation opportunities among internet brokerages</a:t>
             </a:r>
           </a:p>
           <a:p>
@@ -11027,7 +11154,7 @@
                 </a:solidFill>
                 <a:latin typeface="Arial"/>
               </a:rPr>
-              <a:t>Consolidate alpine destinations into a single listed leisure company.</a:t>
+              <a:t>Split HQ into focused entities, consolidate internet brokerages into Avanza, and build a wealth-management business.</a:t>
             </a:r>
           </a:p>
           <a:p>
@@ -11077,7 +11204,7 @@
                 </a:solidFill>
                 <a:latin typeface="Arial"/>
               </a:rPr>
-              <a:t>Hundfjället acquired Tandådalen; the combined entity was restructured</a:t>
+              <a:t>HQ split (2000) into HQ.SE (internet brokerage, fund management) and Hagströmer &amp; Qviberg</a:t>
             </a:r>
           </a:p>
           <a:p>
@@ -11105,7 +11232,7 @@
                 </a:solidFill>
                 <a:latin typeface="Arial"/>
               </a:rPr>
-              <a:t>Acquired Lindvallen; the combined entity was listed</a:t>
+              <a:t>HQ.SE acquired Aktiespar FK and Avanza; split into HQ Fonder and Avanza</a:t>
             </a:r>
           </a:p>
           <a:p>
@@ -11133,7 +11260,7 @@
                 </a:solidFill>
                 <a:latin typeface="Arial"/>
               </a:rPr>
-              <a:t>Acquired Åre, Duved and Vemdalen from Bure — renamed SkiStar</a:t>
+              <a:t>Avanza expanded into pensions, fund distribution, corporate finance and banking</a:t>
             </a:r>
           </a:p>
           <a:p>
@@ -11161,7 +11288,7 @@
                 </a:solidFill>
                 <a:latin typeface="Arial"/>
               </a:rPr>
-              <a:t>Acquired Hemsedal (and later Trysil)</a:t>
+              <a:t>HQ Fonder merged with Hagströmer &amp; Qviberg (2005) — SEK 85bn AUM</a:t>
             </a:r>
           </a:p>
         </p:txBody>
@@ -11233,7 +11360,7 @@
                 </a:solidFill>
                 <a:latin typeface="Times New Roman"/>
               </a:rPr>
-              <a:t>IRR 33.0% · 2000– · Leisure</a:t>
+              <a:t>IRR 37.8% · 2000– · Finance</a:t>
             </a:r>
           </a:p>
         </p:txBody>
@@ -11318,8 +11445,8 @@
         </p:nvSpPr>
         <p:spPr>
           <a:xfrm>
-            <a:off x="5577840" y="4378068"/>
-            <a:ext cx="1051560" cy="395100"/>
+            <a:off x="5577840" y="4341998"/>
+            <a:ext cx="1051560" cy="431170"/>
           </a:xfrm>
           <a:prstGeom prst="rect">
             <a:avLst/>
@@ -11348,7 +11475,7 @@
         </p:nvSpPr>
         <p:spPr>
           <a:xfrm>
-            <a:off x="5303520" y="4103748"/>
+            <a:off x="5303520" y="4067678"/>
             <a:ext cx="1600200" cy="256032"/>
           </a:xfrm>
           <a:prstGeom prst="rect">
@@ -11377,7 +11504,7 @@
                 </a:solidFill>
                 <a:latin typeface="Times New Roman"/>
               </a:rPr>
-              <a:t>160</a:t>
+              <a:t>744</a:t>
             </a:r>
           </a:p>
         </p:txBody>
@@ -11491,7 +11618,7 @@
                 </a:solidFill>
                 <a:latin typeface="Times New Roman"/>
               </a:rPr>
-              <a:t>659</a:t>
+              <a:t>2,808</a:t>
             </a:r>
           </a:p>
         </p:txBody>
@@ -12119,7 +12246,7 @@
                 </a:solidFill>
                 <a:latin typeface="Times New Roman"/>
               </a:rPr>
-              <a:t>Investment case study: Bilia</a:t>
+              <a:t>Investment case study: SkiStar</a:t>
             </a:r>
           </a:p>
         </p:txBody>
@@ -12225,7 +12352,7 @@
                 </a:solidFill>
                 <a:latin typeface="Arial"/>
               </a:rPr>
-              <a:t>Bilia is a leading Nordic car retailer and car-service company. Öresund became an owner in 2003 through a redemption of shares from Custos.</a:t>
+              <a:t>SkiStar is a Scandinavian operator of alpine ski resorts, built through the consolidation of several destinations into a single listed leisure company.</a:t>
             </a:r>
           </a:p>
           <a:p>
@@ -12275,7 +12402,7 @@
                 </a:solidFill>
                 <a:latin typeface="Arial"/>
               </a:rPr>
-              <a:t>Opportunity to separate trucks/heavy vehicles from the car business</a:t>
+              <a:t>A fragmented ski-resort market with consolidation potential</a:t>
             </a:r>
           </a:p>
           <a:p>
@@ -12303,35 +12430,7 @@
                 </a:solidFill>
                 <a:latin typeface="Arial"/>
               </a:rPr>
-              <a:t>Strong cash flow to fund consolidation of car retailers</a:t>
-            </a:r>
-          </a:p>
-          <a:p>
-            <a:pPr marL="149162" indent="-149162">
-              <a:lnSpc>
-                <a:spcPct val="106000"/>
-              </a:lnSpc>
-              <a:spcAft>
-                <a:spcPts val="150"/>
-              </a:spcAft>
-            </a:pPr>
-            <a:r>
-              <a:rPr sz="869" b="1">
-                <a:solidFill>
-                  <a:srgbClr val="556A83"/>
-                </a:solidFill>
-                <a:latin typeface="Arial"/>
-              </a:rPr>
-              <a:t>›  </a:t>
-            </a:r>
-            <a:r>
-              <a:rPr sz="869">
-                <a:solidFill>
-                  <a:srgbClr val="0E1620"/>
-                </a:solidFill>
-                <a:latin typeface="Arial"/>
-              </a:rPr>
-              <a:t>Hidden real-estate value</a:t>
+              <a:t>Opportunity to build a leading Scandinavian leisure platform</a:t>
             </a:r>
           </a:p>
           <a:p>
@@ -12372,7 +12471,7 @@
                 </a:solidFill>
                 <a:latin typeface="Arial"/>
               </a:rPr>
-              <a:t>Separate the heavy-vehicle and car businesses, use strong cash flow to acquire competing car retailers, and unlock real-estate value.</a:t>
+              <a:t>Consolidate alpine destinations into a single listed leisure company.</a:t>
             </a:r>
           </a:p>
           <a:p>
@@ -12422,7 +12521,7 @@
                 </a:solidFill>
                 <a:latin typeface="Arial"/>
               </a:rPr>
-              <a:t>Split into heavy vehicles (LV) and cars (PV); Volvo AB acquired the LV business for PV shares — leaving a pure car retailer</a:t>
+              <a:t>Hundfjället acquired Tandådalen; the combined entity was restructured</a:t>
             </a:r>
           </a:p>
           <a:p>
@@ -12450,7 +12549,7 @@
                 </a:solidFill>
                 <a:latin typeface="Arial"/>
               </a:rPr>
-              <a:t>Acquired several competing car retailers, expanding geography and brands; transferred excess cash to shareholders</a:t>
+              <a:t>Acquired Lindvallen; the combined entity was listed</a:t>
             </a:r>
           </a:p>
           <a:p>
@@ -12478,7 +12577,35 @@
                 </a:solidFill>
                 <a:latin typeface="Arial"/>
               </a:rPr>
-              <a:t>Spun off the real estate as Catena (2006), distributed to shareholders and listed</a:t>
+              <a:t>Acquired Åre, Duved and Vemdalen from Bure — renamed SkiStar</a:t>
+            </a:r>
+          </a:p>
+          <a:p>
+            <a:pPr marL="149162" indent="-149162">
+              <a:lnSpc>
+                <a:spcPct val="106000"/>
+              </a:lnSpc>
+              <a:spcAft>
+                <a:spcPts val="150"/>
+              </a:spcAft>
+            </a:pPr>
+            <a:r>
+              <a:rPr sz="869" b="1">
+                <a:solidFill>
+                  <a:srgbClr val="556A83"/>
+                </a:solidFill>
+                <a:latin typeface="Arial"/>
+              </a:rPr>
+              <a:t>✓  </a:t>
+            </a:r>
+            <a:r>
+              <a:rPr sz="869">
+                <a:solidFill>
+                  <a:srgbClr val="0E1620"/>
+                </a:solidFill>
+                <a:latin typeface="Arial"/>
+              </a:rPr>
+              <a:t>Acquired Hemsedal (and later Trysil)</a:t>
             </a:r>
           </a:p>
         </p:txBody>
@@ -12550,7 +12677,7 @@
                 </a:solidFill>
                 <a:latin typeface="Times New Roman"/>
               </a:rPr>
-              <a:t>IRR 26.0% · 2003– · Consumer discretionary</a:t>
+              <a:t>IRR 33.0% · 2000– · Leisure</a:t>
             </a:r>
           </a:p>
         </p:txBody>
@@ -12635,8 +12762,8 @@
         </p:nvSpPr>
         <p:spPr>
           <a:xfrm>
-            <a:off x="5577840" y="3993410"/>
-            <a:ext cx="1051560" cy="779758"/>
+            <a:off x="5577840" y="4378068"/>
+            <a:ext cx="1051560" cy="395100"/>
           </a:xfrm>
           <a:prstGeom prst="rect">
             <a:avLst/>
@@ -12665,7 +12792,7 @@
         </p:nvSpPr>
         <p:spPr>
           <a:xfrm>
-            <a:off x="5303520" y="3719090"/>
+            <a:off x="5303520" y="4103748"/>
             <a:ext cx="1600200" cy="256032"/>
           </a:xfrm>
           <a:prstGeom prst="rect">
@@ -12694,7 +12821,7 @@
                 </a:solidFill>
                 <a:latin typeface="Times New Roman"/>
               </a:rPr>
-              <a:t>506</a:t>
+              <a:t>160</a:t>
             </a:r>
           </a:p>
         </p:txBody>
@@ -12808,7 +12935,7 @@
                 </a:solidFill>
                 <a:latin typeface="Times New Roman"/>
               </a:rPr>
-              <a:t>1,056</a:t>
+              <a:t>659</a:t>
             </a:r>
           </a:p>
         </p:txBody>
@@ -12972,6 +13099,1007 @@
             <a:avLst/>
           </a:prstGeom>
           <a:solidFill>
+            <a:srgbClr val="FFFFFF"/>
+          </a:solidFill>
+          <a:ln>
+            <a:noFill/>
+          </a:ln>
+          <a:effectLst/>
+        </p:spPr>
+        <p:txBody>
+          <a:bodyPr rtlCol="0" anchor="ctr"/>
+          <a:lstStyle/>
+          <a:p>
+            <a:pPr algn="ctr"/>
+          </a:p>
+        </p:txBody>
+      </p:sp>
+      <p:pic>
+        <p:nvPicPr>
+          <p:cNvPr id="3" name="Picture 2" descr="mark_dark.png"/>
+          <p:cNvPicPr>
+            <a:picLocks noChangeAspect="1"/>
+          </p:cNvPicPr>
+          <p:nvPr/>
+        </p:nvPicPr>
+        <p:blipFill>
+          <a:blip r:embed="rId2"/>
+          <a:stretch>
+            <a:fillRect/>
+          </a:stretch>
+        </p:blipFill>
+        <p:spPr>
+          <a:xfrm>
+            <a:off x="457200" y="219456"/>
+            <a:ext cx="280009" cy="237744"/>
+          </a:xfrm>
+          <a:prstGeom prst="rect">
+            <a:avLst/>
+          </a:prstGeom>
+        </p:spPr>
+      </p:pic>
+      <p:sp>
+        <p:nvSpPr>
+          <p:cNvPr id="4" name="TextBox 3"/>
+          <p:cNvSpPr txBox="1"/>
+          <p:nvPr/>
+        </p:nvSpPr>
+        <p:spPr>
+          <a:xfrm>
+            <a:off x="841248" y="246888"/>
+            <a:ext cx="5486400" cy="274320"/>
+          </a:xfrm>
+          <a:prstGeom prst="rect">
+            <a:avLst/>
+          </a:prstGeom>
+          <a:noFill/>
+        </p:spPr>
+        <p:txBody>
+          <a:bodyPr wrap="square" anchor="t" lIns="0" rIns="0" tIns="0" bIns="0">
+            <a:spAutoFit/>
+          </a:bodyPr>
+          <a:lstStyle/>
+          <a:p>
+            <a:pPr algn="l">
+              <a:lnSpc>
+                <a:spcPct val="110000"/>
+              </a:lnSpc>
+              <a:spcAft>
+                <a:spcPts val="0"/>
+              </a:spcAft>
+            </a:pPr>
+            <a:r>
+              <a:rPr sz="1100" b="0" i="0">
+                <a:solidFill>
+                  <a:srgbClr val="556A83"/>
+                </a:solidFill>
+                <a:latin typeface="Arial"/>
+              </a:rPr>
+              <a:t>Case · Öresund era</a:t>
+            </a:r>
+          </a:p>
+        </p:txBody>
+      </p:sp>
+      <p:sp>
+        <p:nvSpPr>
+          <p:cNvPr id="5" name="Rectangle 4"/>
+          <p:cNvSpPr/>
+          <p:nvPr/>
+        </p:nvSpPr>
+        <p:spPr>
+          <a:xfrm>
+            <a:off x="0" y="566928"/>
+            <a:ext cx="9753904" cy="914400"/>
+          </a:xfrm>
+          <a:prstGeom prst="rect">
+            <a:avLst/>
+          </a:prstGeom>
+          <a:solidFill>
+            <a:srgbClr val="F6F7F9"/>
+          </a:solidFill>
+          <a:ln>
+            <a:noFill/>
+          </a:ln>
+          <a:effectLst/>
+        </p:spPr>
+        <p:txBody>
+          <a:bodyPr rtlCol="0" anchor="ctr"/>
+          <a:lstStyle/>
+          <a:p>
+            <a:pPr algn="ctr"/>
+          </a:p>
+        </p:txBody>
+      </p:sp>
+      <p:sp>
+        <p:nvSpPr>
+          <p:cNvPr id="6" name="TextBox 5"/>
+          <p:cNvSpPr txBox="1"/>
+          <p:nvPr/>
+        </p:nvSpPr>
+        <p:spPr>
+          <a:xfrm>
+            <a:off x="502920" y="713232"/>
+            <a:ext cx="8778240" cy="640080"/>
+          </a:xfrm>
+          <a:prstGeom prst="rect">
+            <a:avLst/>
+          </a:prstGeom>
+          <a:noFill/>
+        </p:spPr>
+        <p:txBody>
+          <a:bodyPr wrap="square" anchor="t" lIns="0" rIns="0" tIns="0" bIns="0">
+            <a:spAutoFit/>
+          </a:bodyPr>
+          <a:lstStyle/>
+          <a:p>
+            <a:pPr algn="l">
+              <a:lnSpc>
+                <a:spcPct val="110000"/>
+              </a:lnSpc>
+              <a:spcAft>
+                <a:spcPts val="0"/>
+              </a:spcAft>
+            </a:pPr>
+            <a:r>
+              <a:rPr sz="2600" b="0" i="0" spc="-78">
+                <a:solidFill>
+                  <a:srgbClr val="314359"/>
+                </a:solidFill>
+                <a:latin typeface="Times New Roman"/>
+              </a:rPr>
+              <a:t>Investment case study: Bilia</a:t>
+            </a:r>
+          </a:p>
+        </p:txBody>
+      </p:sp>
+      <p:sp>
+        <p:nvSpPr>
+          <p:cNvPr id="7" name="TextBox 6"/>
+          <p:cNvSpPr txBox="1"/>
+          <p:nvPr/>
+        </p:nvSpPr>
+        <p:spPr>
+          <a:xfrm>
+            <a:off x="5486400" y="6967728"/>
+            <a:ext cx="4023360" cy="274320"/>
+          </a:xfrm>
+          <a:prstGeom prst="rect">
+            <a:avLst/>
+          </a:prstGeom>
+          <a:noFill/>
+        </p:spPr>
+        <p:txBody>
+          <a:bodyPr wrap="square" anchor="t" lIns="0" rIns="0" tIns="0" bIns="0">
+            <a:spAutoFit/>
+          </a:bodyPr>
+          <a:lstStyle/>
+          <a:p>
+            <a:pPr algn="r">
+              <a:lnSpc>
+                <a:spcPct val="110000"/>
+              </a:lnSpc>
+              <a:spcAft>
+                <a:spcPts val="0"/>
+              </a:spcAft>
+            </a:pPr>
+            <a:r>
+              <a:rPr sz="850" b="0" i="0">
+                <a:solidFill>
+                  <a:srgbClr val="556A83"/>
+                </a:solidFill>
+                <a:latin typeface="Arial"/>
+              </a:rPr>
+              <a:t>Strictly confidential          18</a:t>
+            </a:r>
+          </a:p>
+        </p:txBody>
+      </p:sp>
+      <p:sp>
+        <p:nvSpPr>
+          <p:cNvPr id="8" name="TextBox 7"/>
+          <p:cNvSpPr txBox="1"/>
+          <p:nvPr/>
+        </p:nvSpPr>
+        <p:spPr>
+          <a:xfrm>
+            <a:off x="502920" y="1783080"/>
+            <a:ext cx="4160520" cy="5120640"/>
+          </a:xfrm>
+          <a:prstGeom prst="rect">
+            <a:avLst/>
+          </a:prstGeom>
+          <a:noFill/>
+        </p:spPr>
+        <p:txBody>
+          <a:bodyPr wrap="square" anchor="t" lIns="0" rIns="0" tIns="0" bIns="0">
+            <a:spAutoFit/>
+          </a:bodyPr>
+          <a:lstStyle/>
+          <a:p>
+            <a:pPr algn="l">
+              <a:lnSpc>
+                <a:spcPct val="110000"/>
+              </a:lnSpc>
+              <a:spcBef>
+                <a:spcPts val="0"/>
+              </a:spcBef>
+              <a:spcAft>
+                <a:spcPts val="250"/>
+              </a:spcAft>
+            </a:pPr>
+            <a:r>
+              <a:rPr sz="1100" b="1" i="0">
+                <a:solidFill>
+                  <a:srgbClr val="314359"/>
+                </a:solidFill>
+                <a:latin typeface="Times New Roman"/>
+              </a:rPr>
+              <a:t>Company description</a:t>
+            </a:r>
+          </a:p>
+          <a:p>
+            <a:pPr algn="l">
+              <a:lnSpc>
+                <a:spcPct val="108000"/>
+              </a:lnSpc>
+              <a:spcAft>
+                <a:spcPts val="200"/>
+              </a:spcAft>
+            </a:pPr>
+            <a:r>
+              <a:rPr sz="869" b="0" i="0">
+                <a:solidFill>
+                  <a:srgbClr val="0E1620"/>
+                </a:solidFill>
+                <a:latin typeface="Arial"/>
+              </a:rPr>
+              <a:t>Bilia is a leading Nordic car retailer and car-service company. Öresund became an owner in 2003 through a redemption of shares from Custos.</a:t>
+            </a:r>
+          </a:p>
+          <a:p>
+            <a:pPr algn="l">
+              <a:lnSpc>
+                <a:spcPct val="110000"/>
+              </a:lnSpc>
+              <a:spcBef>
+                <a:spcPts val="700"/>
+              </a:spcBef>
+              <a:spcAft>
+                <a:spcPts val="250"/>
+              </a:spcAft>
+            </a:pPr>
+            <a:r>
+              <a:rPr sz="1100" b="1" i="0">
+                <a:solidFill>
+                  <a:srgbClr val="314359"/>
+                </a:solidFill>
+                <a:latin typeface="Times New Roman"/>
+              </a:rPr>
+              <a:t>Recognized opportunities</a:t>
+            </a:r>
+          </a:p>
+          <a:p>
+            <a:pPr marL="149162" indent="-149162">
+              <a:lnSpc>
+                <a:spcPct val="106000"/>
+              </a:lnSpc>
+              <a:spcAft>
+                <a:spcPts val="150"/>
+              </a:spcAft>
+            </a:pPr>
+            <a:r>
+              <a:rPr sz="869" b="1">
+                <a:solidFill>
+                  <a:srgbClr val="556A83"/>
+                </a:solidFill>
+                <a:latin typeface="Arial"/>
+              </a:rPr>
+              <a:t>›  </a:t>
+            </a:r>
+            <a:r>
+              <a:rPr sz="869">
+                <a:solidFill>
+                  <a:srgbClr val="0E1620"/>
+                </a:solidFill>
+                <a:latin typeface="Arial"/>
+              </a:rPr>
+              <a:t>Opportunity to separate trucks/heavy vehicles from the car business</a:t>
+            </a:r>
+          </a:p>
+          <a:p>
+            <a:pPr marL="149162" indent="-149162">
+              <a:lnSpc>
+                <a:spcPct val="106000"/>
+              </a:lnSpc>
+              <a:spcAft>
+                <a:spcPts val="150"/>
+              </a:spcAft>
+            </a:pPr>
+            <a:r>
+              <a:rPr sz="869" b="1">
+                <a:solidFill>
+                  <a:srgbClr val="556A83"/>
+                </a:solidFill>
+                <a:latin typeface="Arial"/>
+              </a:rPr>
+              <a:t>›  </a:t>
+            </a:r>
+            <a:r>
+              <a:rPr sz="869">
+                <a:solidFill>
+                  <a:srgbClr val="0E1620"/>
+                </a:solidFill>
+                <a:latin typeface="Arial"/>
+              </a:rPr>
+              <a:t>Strong cash flow to fund consolidation of car retailers</a:t>
+            </a:r>
+          </a:p>
+          <a:p>
+            <a:pPr marL="149162" indent="-149162">
+              <a:lnSpc>
+                <a:spcPct val="106000"/>
+              </a:lnSpc>
+              <a:spcAft>
+                <a:spcPts val="150"/>
+              </a:spcAft>
+            </a:pPr>
+            <a:r>
+              <a:rPr sz="869" b="1">
+                <a:solidFill>
+                  <a:srgbClr val="556A83"/>
+                </a:solidFill>
+                <a:latin typeface="Arial"/>
+              </a:rPr>
+              <a:t>›  </a:t>
+            </a:r>
+            <a:r>
+              <a:rPr sz="869">
+                <a:solidFill>
+                  <a:srgbClr val="0E1620"/>
+                </a:solidFill>
+                <a:latin typeface="Arial"/>
+              </a:rPr>
+              <a:t>Hidden real-estate value</a:t>
+            </a:r>
+          </a:p>
+          <a:p>
+            <a:pPr algn="l">
+              <a:lnSpc>
+                <a:spcPct val="110000"/>
+              </a:lnSpc>
+              <a:spcBef>
+                <a:spcPts val="700"/>
+              </a:spcBef>
+              <a:spcAft>
+                <a:spcPts val="250"/>
+              </a:spcAft>
+            </a:pPr>
+            <a:r>
+              <a:rPr sz="1100" b="1" i="0">
+                <a:solidFill>
+                  <a:srgbClr val="314359"/>
+                </a:solidFill>
+                <a:latin typeface="Times New Roman"/>
+              </a:rPr>
+              <a:t>Initial plan</a:t>
+            </a:r>
+          </a:p>
+          <a:p>
+            <a:pPr algn="l">
+              <a:lnSpc>
+                <a:spcPct val="108000"/>
+              </a:lnSpc>
+              <a:spcAft>
+                <a:spcPts val="200"/>
+              </a:spcAft>
+            </a:pPr>
+            <a:r>
+              <a:rPr sz="869" b="0" i="0">
+                <a:solidFill>
+                  <a:srgbClr val="0E1620"/>
+                </a:solidFill>
+                <a:latin typeface="Arial"/>
+              </a:rPr>
+              <a:t>Separate the heavy-vehicle and car businesses, use strong cash flow to acquire competing car retailers, and unlock real-estate value.</a:t>
+            </a:r>
+          </a:p>
+          <a:p>
+            <a:pPr algn="l">
+              <a:lnSpc>
+                <a:spcPct val="110000"/>
+              </a:lnSpc>
+              <a:spcBef>
+                <a:spcPts val="700"/>
+              </a:spcBef>
+              <a:spcAft>
+                <a:spcPts val="250"/>
+              </a:spcAft>
+            </a:pPr>
+            <a:r>
+              <a:rPr sz="1100" b="1" i="0">
+                <a:solidFill>
+                  <a:srgbClr val="314359"/>
+                </a:solidFill>
+                <a:latin typeface="Times New Roman"/>
+              </a:rPr>
+              <a:t>Results</a:t>
+            </a:r>
+          </a:p>
+          <a:p>
+            <a:pPr marL="149162" indent="-149162">
+              <a:lnSpc>
+                <a:spcPct val="106000"/>
+              </a:lnSpc>
+              <a:spcAft>
+                <a:spcPts val="150"/>
+              </a:spcAft>
+            </a:pPr>
+            <a:r>
+              <a:rPr sz="869" b="1">
+                <a:solidFill>
+                  <a:srgbClr val="556A83"/>
+                </a:solidFill>
+                <a:latin typeface="Arial"/>
+              </a:rPr>
+              <a:t>✓  </a:t>
+            </a:r>
+            <a:r>
+              <a:rPr sz="869">
+                <a:solidFill>
+                  <a:srgbClr val="0E1620"/>
+                </a:solidFill>
+                <a:latin typeface="Arial"/>
+              </a:rPr>
+              <a:t>Split into heavy vehicles (LV) and cars (PV); Volvo AB acquired the LV business for PV shares — leaving a pure car retailer</a:t>
+            </a:r>
+          </a:p>
+          <a:p>
+            <a:pPr marL="149162" indent="-149162">
+              <a:lnSpc>
+                <a:spcPct val="106000"/>
+              </a:lnSpc>
+              <a:spcAft>
+                <a:spcPts val="150"/>
+              </a:spcAft>
+            </a:pPr>
+            <a:r>
+              <a:rPr sz="869" b="1">
+                <a:solidFill>
+                  <a:srgbClr val="556A83"/>
+                </a:solidFill>
+                <a:latin typeface="Arial"/>
+              </a:rPr>
+              <a:t>✓  </a:t>
+            </a:r>
+            <a:r>
+              <a:rPr sz="869">
+                <a:solidFill>
+                  <a:srgbClr val="0E1620"/>
+                </a:solidFill>
+                <a:latin typeface="Arial"/>
+              </a:rPr>
+              <a:t>Acquired several competing car retailers, expanding geography and brands; transferred excess cash to shareholders</a:t>
+            </a:r>
+          </a:p>
+          <a:p>
+            <a:pPr marL="149162" indent="-149162">
+              <a:lnSpc>
+                <a:spcPct val="106000"/>
+              </a:lnSpc>
+              <a:spcAft>
+                <a:spcPts val="150"/>
+              </a:spcAft>
+            </a:pPr>
+            <a:r>
+              <a:rPr sz="869" b="1">
+                <a:solidFill>
+                  <a:srgbClr val="556A83"/>
+                </a:solidFill>
+                <a:latin typeface="Arial"/>
+              </a:rPr>
+              <a:t>✓  </a:t>
+            </a:r>
+            <a:r>
+              <a:rPr sz="869">
+                <a:solidFill>
+                  <a:srgbClr val="0E1620"/>
+                </a:solidFill>
+                <a:latin typeface="Arial"/>
+              </a:rPr>
+              <a:t>Spun off the real estate as Catena (2006), distributed to shareholders and listed</a:t>
+            </a:r>
+          </a:p>
+        </p:txBody>
+      </p:sp>
+      <p:sp>
+        <p:nvSpPr>
+          <p:cNvPr id="9" name="Rounded Rectangle 8"/>
+          <p:cNvSpPr/>
+          <p:nvPr/>
+        </p:nvSpPr>
+        <p:spPr>
+          <a:xfrm>
+            <a:off x="4983480" y="1783080"/>
+            <a:ext cx="4297680" cy="384048"/>
+          </a:xfrm>
+          <a:prstGeom prst="roundRect">
+            <a:avLst/>
+          </a:prstGeom>
+          <a:solidFill>
+            <a:srgbClr val="F6F7F9"/>
+          </a:solidFill>
+          <a:ln>
+            <a:noFill/>
+          </a:ln>
+          <a:effectLst/>
+        </p:spPr>
+        <p:txBody>
+          <a:bodyPr rtlCol="0" anchor="ctr"/>
+          <a:lstStyle/>
+          <a:p>
+            <a:pPr algn="ctr"/>
+          </a:p>
+        </p:txBody>
+      </p:sp>
+      <p:sp>
+        <p:nvSpPr>
+          <p:cNvPr id="10" name="TextBox 9"/>
+          <p:cNvSpPr txBox="1"/>
+          <p:nvPr/>
+        </p:nvSpPr>
+        <p:spPr>
+          <a:xfrm>
+            <a:off x="4983480" y="1783080"/>
+            <a:ext cx="4297680" cy="384048"/>
+          </a:xfrm>
+          <a:prstGeom prst="rect">
+            <a:avLst/>
+          </a:prstGeom>
+          <a:noFill/>
+        </p:spPr>
+        <p:txBody>
+          <a:bodyPr wrap="square" anchor="ctr" lIns="0" rIns="0" tIns="0" bIns="0">
+            <a:spAutoFit/>
+          </a:bodyPr>
+          <a:lstStyle/>
+          <a:p>
+            <a:pPr algn="ctr">
+              <a:lnSpc>
+                <a:spcPct val="110000"/>
+              </a:lnSpc>
+              <a:spcAft>
+                <a:spcPts val="0"/>
+              </a:spcAft>
+            </a:pPr>
+            <a:r>
+              <a:rPr sz="1250" b="1" i="0">
+                <a:solidFill>
+                  <a:srgbClr val="314359"/>
+                </a:solidFill>
+                <a:latin typeface="Times New Roman"/>
+              </a:rPr>
+              <a:t>IRR 26.0% · 2003– · Consumer discretionary</a:t>
+            </a:r>
+          </a:p>
+        </p:txBody>
+      </p:sp>
+      <p:sp>
+        <p:nvSpPr>
+          <p:cNvPr id="11" name="TextBox 10"/>
+          <p:cNvSpPr txBox="1"/>
+          <p:nvPr/>
+        </p:nvSpPr>
+        <p:spPr>
+          <a:xfrm>
+            <a:off x="4983480" y="2350008"/>
+            <a:ext cx="4297680" cy="274320"/>
+          </a:xfrm>
+          <a:prstGeom prst="rect">
+            <a:avLst/>
+          </a:prstGeom>
+          <a:noFill/>
+        </p:spPr>
+        <p:txBody>
+          <a:bodyPr wrap="square" anchor="t" lIns="0" rIns="0" tIns="0" bIns="0">
+            <a:spAutoFit/>
+          </a:bodyPr>
+          <a:lstStyle/>
+          <a:p>
+            <a:pPr algn="ctr">
+              <a:lnSpc>
+                <a:spcPct val="110000"/>
+              </a:lnSpc>
+              <a:spcAft>
+                <a:spcPts val="0"/>
+              </a:spcAft>
+            </a:pPr>
+            <a:r>
+              <a:rPr sz="1100" b="1" i="0">
+                <a:solidFill>
+                  <a:srgbClr val="314359"/>
+                </a:solidFill>
+                <a:latin typeface="Times New Roman"/>
+              </a:rPr>
+              <a:t>Initial investment vs. current value</a:t>
+            </a:r>
+          </a:p>
+        </p:txBody>
+      </p:sp>
+      <p:sp>
+        <p:nvSpPr>
+          <p:cNvPr id="12" name="Rectangle 11"/>
+          <p:cNvSpPr/>
+          <p:nvPr/>
+        </p:nvSpPr>
+        <p:spPr>
+          <a:xfrm>
+            <a:off x="5074920" y="4773168"/>
+            <a:ext cx="4114800" cy="12700"/>
+          </a:xfrm>
+          <a:prstGeom prst="rect">
+            <a:avLst/>
+          </a:prstGeom>
+          <a:solidFill>
+            <a:srgbClr val="E2E5E9"/>
+          </a:solidFill>
+          <a:ln>
+            <a:noFill/>
+          </a:ln>
+          <a:effectLst/>
+        </p:spPr>
+        <p:txBody>
+          <a:bodyPr rtlCol="0" anchor="ctr"/>
+          <a:lstStyle/>
+          <a:p>
+            <a:pPr algn="ctr"/>
+          </a:p>
+        </p:txBody>
+      </p:sp>
+      <p:sp>
+        <p:nvSpPr>
+          <p:cNvPr id="13" name="Rectangle 12"/>
+          <p:cNvSpPr/>
+          <p:nvPr/>
+        </p:nvSpPr>
+        <p:spPr>
+          <a:xfrm>
+            <a:off x="5577840" y="3993410"/>
+            <a:ext cx="1051560" cy="779758"/>
+          </a:xfrm>
+          <a:prstGeom prst="rect">
+            <a:avLst/>
+          </a:prstGeom>
+          <a:solidFill>
+            <a:srgbClr val="152130"/>
+          </a:solidFill>
+          <a:ln>
+            <a:noFill/>
+          </a:ln>
+          <a:effectLst/>
+        </p:spPr>
+        <p:txBody>
+          <a:bodyPr rtlCol="0" anchor="ctr"/>
+          <a:lstStyle/>
+          <a:p>
+            <a:pPr algn="ctr"/>
+          </a:p>
+        </p:txBody>
+      </p:sp>
+      <p:sp>
+        <p:nvSpPr>
+          <p:cNvPr id="14" name="TextBox 13"/>
+          <p:cNvSpPr txBox="1"/>
+          <p:nvPr/>
+        </p:nvSpPr>
+        <p:spPr>
+          <a:xfrm>
+            <a:off x="5303520" y="3719090"/>
+            <a:ext cx="1600200" cy="256032"/>
+          </a:xfrm>
+          <a:prstGeom prst="rect">
+            <a:avLst/>
+          </a:prstGeom>
+          <a:noFill/>
+        </p:spPr>
+        <p:txBody>
+          <a:bodyPr wrap="square" anchor="t" lIns="0" rIns="0" tIns="0" bIns="0">
+            <a:spAutoFit/>
+          </a:bodyPr>
+          <a:lstStyle/>
+          <a:p>
+            <a:pPr algn="ctr">
+              <a:lnSpc>
+                <a:spcPct val="110000"/>
+              </a:lnSpc>
+              <a:spcAft>
+                <a:spcPts val="0"/>
+              </a:spcAft>
+            </a:pPr>
+            <a:r>
+              <a:rPr sz="1300" b="1" i="0">
+                <a:solidFill>
+                  <a:srgbClr val="314359"/>
+                </a:solidFill>
+                <a:latin typeface="Times New Roman"/>
+              </a:rPr>
+              <a:t>506</a:t>
+            </a:r>
+          </a:p>
+        </p:txBody>
+      </p:sp>
+      <p:sp>
+        <p:nvSpPr>
+          <p:cNvPr id="15" name="TextBox 14"/>
+          <p:cNvSpPr txBox="1"/>
+          <p:nvPr/>
+        </p:nvSpPr>
+        <p:spPr>
+          <a:xfrm>
+            <a:off x="5074920" y="4828032"/>
+            <a:ext cx="2057400" cy="310896"/>
+          </a:xfrm>
+          <a:prstGeom prst="rect">
+            <a:avLst/>
+          </a:prstGeom>
+          <a:noFill/>
+        </p:spPr>
+        <p:txBody>
+          <a:bodyPr wrap="square" anchor="t" lIns="0" rIns="0" tIns="0" bIns="0">
+            <a:spAutoFit/>
+          </a:bodyPr>
+          <a:lstStyle/>
+          <a:p>
+            <a:pPr algn="ctr">
+              <a:lnSpc>
+                <a:spcPct val="110000"/>
+              </a:lnSpc>
+              <a:spcAft>
+                <a:spcPts val="0"/>
+              </a:spcAft>
+            </a:pPr>
+            <a:r>
+              <a:rPr sz="950" b="0" i="0">
+                <a:solidFill>
+                  <a:srgbClr val="0E1620"/>
+                </a:solidFill>
+                <a:latin typeface="Arial"/>
+              </a:rPr>
+              <a:t>Initial investment</a:t>
+            </a:r>
+          </a:p>
+        </p:txBody>
+      </p:sp>
+      <p:sp>
+        <p:nvSpPr>
+          <p:cNvPr id="16" name="Rectangle 15"/>
+          <p:cNvSpPr/>
+          <p:nvPr/>
+        </p:nvSpPr>
+        <p:spPr>
+          <a:xfrm>
+            <a:off x="7635240" y="3145846"/>
+            <a:ext cx="1051560" cy="1627322"/>
+          </a:xfrm>
+          <a:prstGeom prst="rect">
+            <a:avLst/>
+          </a:prstGeom>
+          <a:solidFill>
+            <a:srgbClr val="152130"/>
+          </a:solidFill>
+          <a:ln>
+            <a:noFill/>
+          </a:ln>
+          <a:effectLst/>
+        </p:spPr>
+        <p:txBody>
+          <a:bodyPr rtlCol="0" anchor="ctr"/>
+          <a:lstStyle/>
+          <a:p>
+            <a:pPr algn="ctr"/>
+          </a:p>
+        </p:txBody>
+      </p:sp>
+      <p:sp>
+        <p:nvSpPr>
+          <p:cNvPr id="17" name="TextBox 16"/>
+          <p:cNvSpPr txBox="1"/>
+          <p:nvPr/>
+        </p:nvSpPr>
+        <p:spPr>
+          <a:xfrm>
+            <a:off x="7360920" y="2871526"/>
+            <a:ext cx="1600200" cy="256032"/>
+          </a:xfrm>
+          <a:prstGeom prst="rect">
+            <a:avLst/>
+          </a:prstGeom>
+          <a:noFill/>
+        </p:spPr>
+        <p:txBody>
+          <a:bodyPr wrap="square" anchor="t" lIns="0" rIns="0" tIns="0" bIns="0">
+            <a:spAutoFit/>
+          </a:bodyPr>
+          <a:lstStyle/>
+          <a:p>
+            <a:pPr algn="ctr">
+              <a:lnSpc>
+                <a:spcPct val="110000"/>
+              </a:lnSpc>
+              <a:spcAft>
+                <a:spcPts val="0"/>
+              </a:spcAft>
+            </a:pPr>
+            <a:r>
+              <a:rPr sz="1300" b="1" i="0">
+                <a:solidFill>
+                  <a:srgbClr val="314359"/>
+                </a:solidFill>
+                <a:latin typeface="Times New Roman"/>
+              </a:rPr>
+              <a:t>1,056</a:t>
+            </a:r>
+          </a:p>
+        </p:txBody>
+      </p:sp>
+      <p:sp>
+        <p:nvSpPr>
+          <p:cNvPr id="18" name="TextBox 17"/>
+          <p:cNvSpPr txBox="1"/>
+          <p:nvPr/>
+        </p:nvSpPr>
+        <p:spPr>
+          <a:xfrm>
+            <a:off x="7132320" y="4828032"/>
+            <a:ext cx="2057400" cy="310896"/>
+          </a:xfrm>
+          <a:prstGeom prst="rect">
+            <a:avLst/>
+          </a:prstGeom>
+          <a:noFill/>
+        </p:spPr>
+        <p:txBody>
+          <a:bodyPr wrap="square" anchor="t" lIns="0" rIns="0" tIns="0" bIns="0">
+            <a:spAutoFit/>
+          </a:bodyPr>
+          <a:lstStyle/>
+          <a:p>
+            <a:pPr algn="ctr">
+              <a:lnSpc>
+                <a:spcPct val="110000"/>
+              </a:lnSpc>
+              <a:spcAft>
+                <a:spcPts val="0"/>
+              </a:spcAft>
+            </a:pPr>
+            <a:r>
+              <a:rPr sz="950" b="0" i="0">
+                <a:solidFill>
+                  <a:srgbClr val="0E1620"/>
+                </a:solidFill>
+                <a:latin typeface="Arial"/>
+              </a:rPr>
+              <a:t>Current value</a:t>
+            </a:r>
+          </a:p>
+        </p:txBody>
+      </p:sp>
+      <p:sp>
+        <p:nvSpPr>
+          <p:cNvPr id="19" name="TextBox 18"/>
+          <p:cNvSpPr txBox="1"/>
+          <p:nvPr/>
+        </p:nvSpPr>
+        <p:spPr>
+          <a:xfrm>
+            <a:off x="4983480" y="5157216"/>
+            <a:ext cx="4297680" cy="201168"/>
+          </a:xfrm>
+          <a:prstGeom prst="rect">
+            <a:avLst/>
+          </a:prstGeom>
+          <a:noFill/>
+        </p:spPr>
+        <p:txBody>
+          <a:bodyPr wrap="square" anchor="t" lIns="0" rIns="0" tIns="0" bIns="0">
+            <a:spAutoFit/>
+          </a:bodyPr>
+          <a:lstStyle/>
+          <a:p>
+            <a:pPr algn="l">
+              <a:lnSpc>
+                <a:spcPct val="110000"/>
+              </a:lnSpc>
+              <a:spcAft>
+                <a:spcPts val="0"/>
+              </a:spcAft>
+            </a:pPr>
+            <a:r>
+              <a:rPr sz="850" b="0" i="1">
+                <a:solidFill>
+                  <a:srgbClr val="556A83"/>
+                </a:solidFill>
+                <a:latin typeface="Arial"/>
+              </a:rPr>
+              <a:t>SEK M</a:t>
+            </a:r>
+          </a:p>
+        </p:txBody>
+      </p:sp>
+      <p:sp>
+        <p:nvSpPr>
+          <p:cNvPr id="20" name="TextBox 19"/>
+          <p:cNvSpPr txBox="1"/>
+          <p:nvPr/>
+        </p:nvSpPr>
+        <p:spPr>
+          <a:xfrm>
+            <a:off x="502920" y="6967728"/>
+            <a:ext cx="4846320" cy="274320"/>
+          </a:xfrm>
+          <a:prstGeom prst="rect">
+            <a:avLst/>
+          </a:prstGeom>
+          <a:noFill/>
+        </p:spPr>
+        <p:txBody>
+          <a:bodyPr wrap="square" anchor="t" lIns="0" rIns="0" tIns="0" bIns="0">
+            <a:spAutoFit/>
+          </a:bodyPr>
+          <a:lstStyle/>
+          <a:p>
+            <a:pPr algn="l">
+              <a:lnSpc>
+                <a:spcPct val="100000"/>
+              </a:lnSpc>
+              <a:spcAft>
+                <a:spcPts val="0"/>
+              </a:spcAft>
+            </a:pPr>
+            <a:r>
+              <a:rPr sz="750" b="0" i="1">
+                <a:solidFill>
+                  <a:srgbClr val="556A83"/>
+                </a:solidFill>
+                <a:latin typeface="Arial"/>
+              </a:rPr>
+              <a:t>Note: 9 SEK ≈ 1€. IRR unleveraged and net of all costs. Executed by members of the team at Investment AB Öresund.</a:t>
+            </a:r>
+          </a:p>
+        </p:txBody>
+      </p:sp>
+    </p:spTree>
+  </p:cSld>
+  <p:clrMapOvr>
+    <a:masterClrMapping/>
+  </p:clrMapOvr>
+</p:sld>
+</file>
+
+<file path=ppt/slides/slide22.xml><?xml version="1.0" encoding="utf-8"?>
+<p:sld xmlns:a="http://schemas.openxmlformats.org/drawingml/2006/main" xmlns:p="http://schemas.openxmlformats.org/presentationml/2006/main" xmlns:r="http://schemas.openxmlformats.org/officeDocument/2006/relationships">
+  <p:cSld>
+    <p:spTree>
+      <p:nvGrpSpPr>
+        <p:cNvPr id="1" name=""/>
+        <p:cNvGrpSpPr/>
+        <p:nvPr/>
+      </p:nvGrpSpPr>
+      <p:grpSpPr/>
+      <p:sp>
+        <p:nvSpPr>
+          <p:cNvPr id="2" name="Rectangle 1"/>
+          <p:cNvSpPr/>
+          <p:nvPr/>
+        </p:nvSpPr>
+        <p:spPr>
+          <a:xfrm>
+            <a:off x="0" y="0"/>
+            <a:ext cx="9753904" cy="7315200"/>
+          </a:xfrm>
+          <a:prstGeom prst="rect">
+            <a:avLst/>
+          </a:prstGeom>
+          <a:solidFill>
             <a:srgbClr val="152130"/>
           </a:solidFill>
           <a:ln>
@@ -15171,7 +16299,223 @@
       </p:sp>
       <p:sp>
         <p:nvSpPr>
-          <p:cNvPr id="58" name="TextBox 57"/>
+          <p:cNvPr id="58" name="Rectangle 57"/>
+          <p:cNvSpPr/>
+          <p:nvPr/>
+        </p:nvSpPr>
+        <p:spPr>
+          <a:xfrm>
+            <a:off x="502920" y="4681728"/>
+            <a:ext cx="2240280" cy="274320"/>
+          </a:xfrm>
+          <a:prstGeom prst="rect">
+            <a:avLst/>
+          </a:prstGeom>
+          <a:solidFill>
+            <a:srgbClr val="FFFFFF"/>
+          </a:solidFill>
+          <a:ln>
+            <a:noFill/>
+          </a:ln>
+          <a:effectLst/>
+        </p:spPr>
+        <p:txBody>
+          <a:bodyPr rtlCol="0" anchor="ctr"/>
+          <a:lstStyle/>
+          <a:p>
+            <a:pPr algn="ctr"/>
+          </a:p>
+        </p:txBody>
+      </p:sp>
+      <p:sp>
+        <p:nvSpPr>
+          <p:cNvPr id="59" name="TextBox 58"/>
+          <p:cNvSpPr txBox="1"/>
+          <p:nvPr/>
+        </p:nvSpPr>
+        <p:spPr>
+          <a:xfrm>
+            <a:off x="557784" y="4681728"/>
+            <a:ext cx="2148840" cy="274320"/>
+          </a:xfrm>
+          <a:prstGeom prst="rect">
+            <a:avLst/>
+          </a:prstGeom>
+          <a:noFill/>
+        </p:spPr>
+        <p:txBody>
+          <a:bodyPr wrap="square" anchor="ctr" lIns="0" rIns="0" tIns="0" bIns="0">
+            <a:spAutoFit/>
+          </a:bodyPr>
+          <a:lstStyle/>
+          <a:p>
+            <a:pPr algn="l">
+              <a:lnSpc>
+                <a:spcPct val="110000"/>
+              </a:lnSpc>
+              <a:spcAft>
+                <a:spcPts val="0"/>
+              </a:spcAft>
+            </a:pPr>
+            <a:r>
+              <a:rPr sz="869" b="1" i="0">
+                <a:solidFill>
+                  <a:srgbClr val="314359"/>
+                </a:solidFill>
+                <a:latin typeface="Arial"/>
+              </a:rPr>
+              <a:t>Renold plc</a:t>
+            </a:r>
+          </a:p>
+        </p:txBody>
+      </p:sp>
+      <p:sp>
+        <p:nvSpPr>
+          <p:cNvPr id="60" name="Rectangle 59"/>
+          <p:cNvSpPr/>
+          <p:nvPr/>
+        </p:nvSpPr>
+        <p:spPr>
+          <a:xfrm>
+            <a:off x="2743200" y="4681728"/>
+            <a:ext cx="960120" cy="274320"/>
+          </a:xfrm>
+          <a:prstGeom prst="rect">
+            <a:avLst/>
+          </a:prstGeom>
+          <a:solidFill>
+            <a:srgbClr val="FFFFFF"/>
+          </a:solidFill>
+          <a:ln>
+            <a:noFill/>
+          </a:ln>
+          <a:effectLst/>
+        </p:spPr>
+        <p:txBody>
+          <a:bodyPr rtlCol="0" anchor="ctr"/>
+          <a:lstStyle/>
+          <a:p>
+            <a:pPr algn="ctr"/>
+          </a:p>
+        </p:txBody>
+      </p:sp>
+      <p:sp>
+        <p:nvSpPr>
+          <p:cNvPr id="61" name="TextBox 60"/>
+          <p:cNvSpPr txBox="1"/>
+          <p:nvPr/>
+        </p:nvSpPr>
+        <p:spPr>
+          <a:xfrm>
+            <a:off x="2798064" y="4681728"/>
+            <a:ext cx="868680" cy="274320"/>
+          </a:xfrm>
+          <a:prstGeom prst="rect">
+            <a:avLst/>
+          </a:prstGeom>
+          <a:noFill/>
+        </p:spPr>
+        <p:txBody>
+          <a:bodyPr wrap="square" anchor="ctr" lIns="0" rIns="0" tIns="0" bIns="0">
+            <a:spAutoFit/>
+          </a:bodyPr>
+          <a:lstStyle/>
+          <a:p>
+            <a:pPr algn="r">
+              <a:lnSpc>
+                <a:spcPct val="110000"/>
+              </a:lnSpc>
+              <a:spcAft>
+                <a:spcPts val="0"/>
+              </a:spcAft>
+            </a:pPr>
+            <a:r>
+              <a:rPr sz="869" b="0" i="0">
+                <a:solidFill>
+                  <a:srgbClr val="0E1620"/>
+                </a:solidFill>
+                <a:latin typeface="Arial"/>
+              </a:rPr>
+              <a:t>234%</a:t>
+            </a:r>
+          </a:p>
+        </p:txBody>
+      </p:sp>
+      <p:sp>
+        <p:nvSpPr>
+          <p:cNvPr id="62" name="Rectangle 61"/>
+          <p:cNvSpPr/>
+          <p:nvPr/>
+        </p:nvSpPr>
+        <p:spPr>
+          <a:xfrm>
+            <a:off x="3703320" y="4681728"/>
+            <a:ext cx="960120" cy="274320"/>
+          </a:xfrm>
+          <a:prstGeom prst="rect">
+            <a:avLst/>
+          </a:prstGeom>
+          <a:solidFill>
+            <a:srgbClr val="FFFFFF"/>
+          </a:solidFill>
+          <a:ln>
+            <a:noFill/>
+          </a:ln>
+          <a:effectLst/>
+        </p:spPr>
+        <p:txBody>
+          <a:bodyPr rtlCol="0" anchor="ctr"/>
+          <a:lstStyle/>
+          <a:p>
+            <a:pPr algn="ctr"/>
+          </a:p>
+        </p:txBody>
+      </p:sp>
+      <p:sp>
+        <p:nvSpPr>
+          <p:cNvPr id="63" name="TextBox 62"/>
+          <p:cNvSpPr txBox="1"/>
+          <p:nvPr/>
+        </p:nvSpPr>
+        <p:spPr>
+          <a:xfrm>
+            <a:off x="3758184" y="4681728"/>
+            <a:ext cx="868680" cy="274320"/>
+          </a:xfrm>
+          <a:prstGeom prst="rect">
+            <a:avLst/>
+          </a:prstGeom>
+          <a:noFill/>
+        </p:spPr>
+        <p:txBody>
+          <a:bodyPr wrap="square" anchor="ctr" lIns="0" rIns="0" tIns="0" bIns="0">
+            <a:spAutoFit/>
+          </a:bodyPr>
+          <a:lstStyle/>
+          <a:p>
+            <a:pPr algn="r">
+              <a:lnSpc>
+                <a:spcPct val="110000"/>
+              </a:lnSpc>
+              <a:spcAft>
+                <a:spcPts val="0"/>
+              </a:spcAft>
+            </a:pPr>
+            <a:r>
+              <a:rPr sz="869" b="0" i="0">
+                <a:solidFill>
+                  <a:srgbClr val="0E1620"/>
+                </a:solidFill>
+                <a:latin typeface="Arial"/>
+              </a:rPr>
+              <a:t>1.6×</a:t>
+            </a:r>
+          </a:p>
+        </p:txBody>
+      </p:sp>
+      <p:sp>
+        <p:nvSpPr>
+          <p:cNvPr id="64" name="TextBox 63"/>
           <p:cNvSpPr txBox="1"/>
           <p:nvPr/>
         </p:nvSpPr>
@@ -15213,7 +16557,7 @@
       </p:sp>
       <p:sp>
         <p:nvSpPr>
-          <p:cNvPr id="59" name="Rectangle 58"/>
+          <p:cNvPr id="65" name="Rectangle 64"/>
           <p:cNvSpPr/>
           <p:nvPr/>
         </p:nvSpPr>
@@ -15243,7 +16587,7 @@
       </p:sp>
       <p:sp>
         <p:nvSpPr>
-          <p:cNvPr id="60" name="TextBox 59"/>
+          <p:cNvPr id="66" name="TextBox 65"/>
           <p:cNvSpPr txBox="1"/>
           <p:nvPr/>
         </p:nvSpPr>
@@ -15285,7 +16629,7 @@
       </p:sp>
       <p:sp>
         <p:nvSpPr>
-          <p:cNvPr id="61" name="Rectangle 60"/>
+          <p:cNvPr id="67" name="Rectangle 66"/>
           <p:cNvSpPr/>
           <p:nvPr/>
         </p:nvSpPr>
@@ -15315,7 +16659,7 @@
       </p:sp>
       <p:sp>
         <p:nvSpPr>
-          <p:cNvPr id="62" name="TextBox 61"/>
+          <p:cNvPr id="68" name="TextBox 67"/>
           <p:cNvSpPr txBox="1"/>
           <p:nvPr/>
         </p:nvSpPr>
@@ -15357,7 +16701,7 @@
       </p:sp>
       <p:sp>
         <p:nvSpPr>
-          <p:cNvPr id="63" name="Rectangle 62"/>
+          <p:cNvPr id="69" name="Rectangle 68"/>
           <p:cNvSpPr/>
           <p:nvPr/>
         </p:nvSpPr>
@@ -15387,7 +16731,7 @@
       </p:sp>
       <p:sp>
         <p:nvSpPr>
-          <p:cNvPr id="64" name="TextBox 63"/>
+          <p:cNvPr id="70" name="TextBox 69"/>
           <p:cNvSpPr txBox="1"/>
           <p:nvPr/>
         </p:nvSpPr>
@@ -15429,7 +16773,7 @@
       </p:sp>
       <p:sp>
         <p:nvSpPr>
-          <p:cNvPr id="65" name="Rectangle 64"/>
+          <p:cNvPr id="71" name="Rectangle 70"/>
           <p:cNvSpPr/>
           <p:nvPr/>
         </p:nvSpPr>
@@ -15459,7 +16803,7 @@
       </p:sp>
       <p:sp>
         <p:nvSpPr>
-          <p:cNvPr id="66" name="TextBox 65"/>
+          <p:cNvPr id="72" name="TextBox 71"/>
           <p:cNvSpPr txBox="1"/>
           <p:nvPr/>
         </p:nvSpPr>
@@ -15501,7 +16845,7 @@
       </p:sp>
       <p:sp>
         <p:nvSpPr>
-          <p:cNvPr id="67" name="Rectangle 66"/>
+          <p:cNvPr id="73" name="Rectangle 72"/>
           <p:cNvSpPr/>
           <p:nvPr/>
         </p:nvSpPr>
@@ -15531,7 +16875,7 @@
       </p:sp>
       <p:sp>
         <p:nvSpPr>
-          <p:cNvPr id="68" name="TextBox 67"/>
+          <p:cNvPr id="74" name="TextBox 73"/>
           <p:cNvSpPr txBox="1"/>
           <p:nvPr/>
         </p:nvSpPr>
@@ -15573,7 +16917,7 @@
       </p:sp>
       <p:sp>
         <p:nvSpPr>
-          <p:cNvPr id="69" name="Rectangle 68"/>
+          <p:cNvPr id="75" name="Rectangle 74"/>
           <p:cNvSpPr/>
           <p:nvPr/>
         </p:nvSpPr>
@@ -15603,7 +16947,7 @@
       </p:sp>
       <p:sp>
         <p:nvSpPr>
-          <p:cNvPr id="70" name="TextBox 69"/>
+          <p:cNvPr id="76" name="TextBox 75"/>
           <p:cNvSpPr txBox="1"/>
           <p:nvPr/>
         </p:nvSpPr>
@@ -15645,7 +16989,7 @@
       </p:sp>
       <p:sp>
         <p:nvSpPr>
-          <p:cNvPr id="71" name="Rectangle 70"/>
+          <p:cNvPr id="77" name="Rectangle 76"/>
           <p:cNvSpPr/>
           <p:nvPr/>
         </p:nvSpPr>
@@ -15675,7 +17019,7 @@
       </p:sp>
       <p:sp>
         <p:nvSpPr>
-          <p:cNvPr id="72" name="TextBox 71"/>
+          <p:cNvPr id="78" name="TextBox 77"/>
           <p:cNvSpPr txBox="1"/>
           <p:nvPr/>
         </p:nvSpPr>
@@ -15717,7 +17061,7 @@
       </p:sp>
       <p:sp>
         <p:nvSpPr>
-          <p:cNvPr id="73" name="Rectangle 72"/>
+          <p:cNvPr id="79" name="Rectangle 78"/>
           <p:cNvSpPr/>
           <p:nvPr/>
         </p:nvSpPr>
@@ -15747,7 +17091,7 @@
       </p:sp>
       <p:sp>
         <p:nvSpPr>
-          <p:cNvPr id="74" name="TextBox 73"/>
+          <p:cNvPr id="80" name="TextBox 79"/>
           <p:cNvSpPr txBox="1"/>
           <p:nvPr/>
         </p:nvSpPr>
@@ -15789,7 +17133,7 @@
       </p:sp>
       <p:sp>
         <p:nvSpPr>
-          <p:cNvPr id="75" name="Rectangle 74"/>
+          <p:cNvPr id="81" name="Rectangle 80"/>
           <p:cNvSpPr/>
           <p:nvPr/>
         </p:nvSpPr>
@@ -15819,7 +17163,7 @@
       </p:sp>
       <p:sp>
         <p:nvSpPr>
-          <p:cNvPr id="76" name="TextBox 75"/>
+          <p:cNvPr id="82" name="TextBox 81"/>
           <p:cNvSpPr txBox="1"/>
           <p:nvPr/>
         </p:nvSpPr>
@@ -15861,7 +17205,7 @@
       </p:sp>
       <p:sp>
         <p:nvSpPr>
-          <p:cNvPr id="77" name="Rectangle 76"/>
+          <p:cNvPr id="83" name="Rectangle 82"/>
           <p:cNvSpPr/>
           <p:nvPr/>
         </p:nvSpPr>
@@ -15891,7 +17235,7 @@
       </p:sp>
       <p:sp>
         <p:nvSpPr>
-          <p:cNvPr id="78" name="TextBox 77"/>
+          <p:cNvPr id="84" name="TextBox 83"/>
           <p:cNvSpPr txBox="1"/>
           <p:nvPr/>
         </p:nvSpPr>
@@ -15933,7 +17277,7 @@
       </p:sp>
       <p:sp>
         <p:nvSpPr>
-          <p:cNvPr id="79" name="Rectangle 78"/>
+          <p:cNvPr id="85" name="Rectangle 84"/>
           <p:cNvSpPr/>
           <p:nvPr/>
         </p:nvSpPr>
@@ -15963,7 +17307,7 @@
       </p:sp>
       <p:sp>
         <p:nvSpPr>
-          <p:cNvPr id="80" name="TextBox 79"/>
+          <p:cNvPr id="86" name="TextBox 85"/>
           <p:cNvSpPr txBox="1"/>
           <p:nvPr/>
         </p:nvSpPr>
@@ -16005,7 +17349,7 @@
       </p:sp>
       <p:sp>
         <p:nvSpPr>
-          <p:cNvPr id="81" name="Rectangle 80"/>
+          <p:cNvPr id="87" name="Rectangle 86"/>
           <p:cNvSpPr/>
           <p:nvPr/>
         </p:nvSpPr>
@@ -16035,7 +17379,7 @@
       </p:sp>
       <p:sp>
         <p:nvSpPr>
-          <p:cNvPr id="82" name="TextBox 81"/>
+          <p:cNvPr id="88" name="TextBox 87"/>
           <p:cNvSpPr txBox="1"/>
           <p:nvPr/>
         </p:nvSpPr>
@@ -16077,7 +17421,7 @@
       </p:sp>
       <p:sp>
         <p:nvSpPr>
-          <p:cNvPr id="83" name="Rectangle 82"/>
+          <p:cNvPr id="89" name="Rectangle 88"/>
           <p:cNvSpPr/>
           <p:nvPr/>
         </p:nvSpPr>
@@ -16107,7 +17451,7 @@
       </p:sp>
       <p:sp>
         <p:nvSpPr>
-          <p:cNvPr id="84" name="TextBox 83"/>
+          <p:cNvPr id="90" name="TextBox 89"/>
           <p:cNvSpPr txBox="1"/>
           <p:nvPr/>
         </p:nvSpPr>
@@ -16149,7 +17493,7 @@
       </p:sp>
       <p:sp>
         <p:nvSpPr>
-          <p:cNvPr id="85" name="Rectangle 84"/>
+          <p:cNvPr id="91" name="Rectangle 90"/>
           <p:cNvSpPr/>
           <p:nvPr/>
         </p:nvSpPr>
@@ -16179,7 +17523,7 @@
       </p:sp>
       <p:sp>
         <p:nvSpPr>
-          <p:cNvPr id="86" name="TextBox 85"/>
+          <p:cNvPr id="92" name="TextBox 91"/>
           <p:cNvSpPr txBox="1"/>
           <p:nvPr/>
         </p:nvSpPr>
@@ -16221,7 +17565,7 @@
       </p:sp>
       <p:sp>
         <p:nvSpPr>
-          <p:cNvPr id="87" name="Rectangle 86"/>
+          <p:cNvPr id="93" name="Rectangle 92"/>
           <p:cNvSpPr/>
           <p:nvPr/>
         </p:nvSpPr>
@@ -16251,7 +17595,7 @@
       </p:sp>
       <p:sp>
         <p:nvSpPr>
-          <p:cNvPr id="88" name="TextBox 87"/>
+          <p:cNvPr id="94" name="TextBox 93"/>
           <p:cNvSpPr txBox="1"/>
           <p:nvPr/>
         </p:nvSpPr>
@@ -16293,7 +17637,7 @@
       </p:sp>
       <p:sp>
         <p:nvSpPr>
-          <p:cNvPr id="89" name="Rectangle 88"/>
+          <p:cNvPr id="95" name="Rectangle 94"/>
           <p:cNvSpPr/>
           <p:nvPr/>
         </p:nvSpPr>
@@ -16323,7 +17667,7 @@
       </p:sp>
       <p:sp>
         <p:nvSpPr>
-          <p:cNvPr id="90" name="TextBox 89"/>
+          <p:cNvPr id="96" name="TextBox 95"/>
           <p:cNvSpPr txBox="1"/>
           <p:nvPr/>
         </p:nvSpPr>
@@ -16365,7 +17709,7 @@
       </p:sp>
       <p:sp>
         <p:nvSpPr>
-          <p:cNvPr id="91" name="Rectangle 90"/>
+          <p:cNvPr id="97" name="Rectangle 96"/>
           <p:cNvSpPr/>
           <p:nvPr/>
         </p:nvSpPr>
@@ -16395,7 +17739,7 @@
       </p:sp>
       <p:sp>
         <p:nvSpPr>
-          <p:cNvPr id="92" name="TextBox 91"/>
+          <p:cNvPr id="98" name="TextBox 97"/>
           <p:cNvSpPr txBox="1"/>
           <p:nvPr/>
         </p:nvSpPr>
@@ -16437,7 +17781,7 @@
       </p:sp>
       <p:sp>
         <p:nvSpPr>
-          <p:cNvPr id="93" name="Rectangle 92"/>
+          <p:cNvPr id="99" name="Rectangle 98"/>
           <p:cNvSpPr/>
           <p:nvPr/>
         </p:nvSpPr>
@@ -16467,7 +17811,7 @@
       </p:sp>
       <p:sp>
         <p:nvSpPr>
-          <p:cNvPr id="94" name="TextBox 93"/>
+          <p:cNvPr id="100" name="TextBox 99"/>
           <p:cNvSpPr txBox="1"/>
           <p:nvPr/>
         </p:nvSpPr>
@@ -16509,7 +17853,7 @@
       </p:sp>
       <p:sp>
         <p:nvSpPr>
-          <p:cNvPr id="95" name="Rectangle 94"/>
+          <p:cNvPr id="101" name="Rectangle 100"/>
           <p:cNvSpPr/>
           <p:nvPr/>
         </p:nvSpPr>
@@ -16539,7 +17883,7 @@
       </p:sp>
       <p:sp>
         <p:nvSpPr>
-          <p:cNvPr id="96" name="TextBox 95"/>
+          <p:cNvPr id="102" name="TextBox 101"/>
           <p:cNvSpPr txBox="1"/>
           <p:nvPr/>
         </p:nvSpPr>
@@ -16581,7 +17925,7 @@
       </p:sp>
       <p:sp>
         <p:nvSpPr>
-          <p:cNvPr id="97" name="Rectangle 96"/>
+          <p:cNvPr id="103" name="Rectangle 102"/>
           <p:cNvSpPr/>
           <p:nvPr/>
         </p:nvSpPr>
@@ -16611,7 +17955,7 @@
       </p:sp>
       <p:sp>
         <p:nvSpPr>
-          <p:cNvPr id="98" name="TextBox 97"/>
+          <p:cNvPr id="104" name="TextBox 103"/>
           <p:cNvSpPr txBox="1"/>
           <p:nvPr/>
         </p:nvSpPr>
@@ -16653,7 +17997,7 @@
       </p:sp>
       <p:sp>
         <p:nvSpPr>
-          <p:cNvPr id="99" name="Rectangle 98"/>
+          <p:cNvPr id="105" name="Rectangle 104"/>
           <p:cNvSpPr/>
           <p:nvPr/>
         </p:nvSpPr>
@@ -16683,7 +18027,7 @@
       </p:sp>
       <p:sp>
         <p:nvSpPr>
-          <p:cNvPr id="100" name="TextBox 99"/>
+          <p:cNvPr id="106" name="TextBox 105"/>
           <p:cNvSpPr txBox="1"/>
           <p:nvPr/>
         </p:nvSpPr>
@@ -16725,7 +18069,7 @@
       </p:sp>
       <p:sp>
         <p:nvSpPr>
-          <p:cNvPr id="101" name="Rectangle 100"/>
+          <p:cNvPr id="107" name="Rectangle 106"/>
           <p:cNvSpPr/>
           <p:nvPr/>
         </p:nvSpPr>
@@ -16755,7 +18099,7 @@
       </p:sp>
       <p:sp>
         <p:nvSpPr>
-          <p:cNvPr id="102" name="TextBox 101"/>
+          <p:cNvPr id="108" name="TextBox 107"/>
           <p:cNvSpPr txBox="1"/>
           <p:nvPr/>
         </p:nvSpPr>
@@ -16797,7 +18141,7 @@
       </p:sp>
       <p:sp>
         <p:nvSpPr>
-          <p:cNvPr id="103" name="Rectangle 102"/>
+          <p:cNvPr id="109" name="Rectangle 108"/>
           <p:cNvSpPr/>
           <p:nvPr/>
         </p:nvSpPr>
@@ -16827,7 +18171,7 @@
       </p:sp>
       <p:sp>
         <p:nvSpPr>
-          <p:cNvPr id="104" name="TextBox 103"/>
+          <p:cNvPr id="110" name="TextBox 109"/>
           <p:cNvSpPr txBox="1"/>
           <p:nvPr/>
         </p:nvSpPr>
@@ -16869,7 +18213,7 @@
       </p:sp>
       <p:sp>
         <p:nvSpPr>
-          <p:cNvPr id="105" name="Rectangle 104"/>
+          <p:cNvPr id="111" name="Rectangle 110"/>
           <p:cNvSpPr/>
           <p:nvPr/>
         </p:nvSpPr>
@@ -16899,7 +18243,7 @@
       </p:sp>
       <p:sp>
         <p:nvSpPr>
-          <p:cNvPr id="106" name="TextBox 105"/>
+          <p:cNvPr id="112" name="TextBox 111"/>
           <p:cNvSpPr txBox="1"/>
           <p:nvPr/>
         </p:nvSpPr>
@@ -16941,7 +18285,7 @@
       </p:sp>
       <p:sp>
         <p:nvSpPr>
-          <p:cNvPr id="107" name="Rectangle 106"/>
+          <p:cNvPr id="113" name="Rectangle 112"/>
           <p:cNvSpPr/>
           <p:nvPr/>
         </p:nvSpPr>
@@ -16971,7 +18315,7 @@
       </p:sp>
       <p:sp>
         <p:nvSpPr>
-          <p:cNvPr id="108" name="TextBox 107"/>
+          <p:cNvPr id="114" name="TextBox 113"/>
           <p:cNvSpPr txBox="1"/>
           <p:nvPr/>
         </p:nvSpPr>
@@ -17013,7 +18357,7 @@
       </p:sp>
       <p:sp>
         <p:nvSpPr>
-          <p:cNvPr id="109" name="Rectangle 108"/>
+          <p:cNvPr id="115" name="Rectangle 114"/>
           <p:cNvSpPr/>
           <p:nvPr/>
         </p:nvSpPr>
@@ -17043,7 +18387,7 @@
       </p:sp>
       <p:sp>
         <p:nvSpPr>
-          <p:cNvPr id="110" name="TextBox 109"/>
+          <p:cNvPr id="116" name="TextBox 115"/>
           <p:cNvSpPr txBox="1"/>
           <p:nvPr/>
         </p:nvSpPr>
@@ -17085,7 +18429,7 @@
       </p:sp>
       <p:sp>
         <p:nvSpPr>
-          <p:cNvPr id="111" name="Rectangle 110"/>
+          <p:cNvPr id="117" name="Rectangle 116"/>
           <p:cNvSpPr/>
           <p:nvPr/>
         </p:nvSpPr>
@@ -17115,7 +18459,7 @@
       </p:sp>
       <p:sp>
         <p:nvSpPr>
-          <p:cNvPr id="112" name="TextBox 111"/>
+          <p:cNvPr id="118" name="TextBox 117"/>
           <p:cNvSpPr txBox="1"/>
           <p:nvPr/>
         </p:nvSpPr>
@@ -17157,7 +18501,7 @@
       </p:sp>
       <p:sp>
         <p:nvSpPr>
-          <p:cNvPr id="113" name="TextBox 112"/>
+          <p:cNvPr id="119" name="TextBox 118"/>
           <p:cNvSpPr txBox="1"/>
           <p:nvPr/>
         </p:nvSpPr>

--- a/Athanase_Case_Studies.pptx
+++ b/Athanase_Case_Studies.pptx
@@ -27,6 +27,7 @@
     <p:sldId id="275" r:id="rId26"/>
     <p:sldId id="276" r:id="rId27"/>
     <p:sldId id="277" r:id="rId28"/>
+    <p:sldId id="278" r:id="rId29"/>
   </p:sldIdLst>
   <p:sldSz cx="9753904" cy="7315200" type="screen4x3"/>
   <p:notesSz cx="6858000" cy="9144000"/>
@@ -3435,7 +3436,7 @@
                 </a:solidFill>
                 <a:latin typeface="Times New Roman"/>
               </a:rPr>
-              <a:t>Investment case study: Note AB</a:t>
+              <a:t>Investment case study: Kitron ASA</a:t>
             </a:r>
           </a:p>
         </p:txBody>
@@ -3541,7 +3542,7 @@
                 </a:solidFill>
                 <a:latin typeface="Arial"/>
               </a:rPr>
-              <a:t>Note is an electronics-manufacturing and logistics company with production plants near its main customer base in northern Europe, as well as low-cost plants in Eastern Europe and Asia. It focuses on small series with high variability and technology content.</a:t>
+              <a:t>Kitron is one of the leading companies in Scandinavia specialising in the contract manufacturing of goods with electronics content, serving customers in Defence/Aerospace, Utilities, Industry, Medical Devices and Offshore/Marine. The company has operated since the 1960s.</a:t>
             </a:r>
           </a:p>
           <a:p>
@@ -3591,7 +3592,7 @@
                 </a:solidFill>
                 <a:latin typeface="Arial"/>
               </a:rPr>
-              <a:t>Significant turn-around candidate with clear boundaries to losses</a:t>
+              <a:t>Significant turn-around candidate</a:t>
             </a:r>
           </a:p>
           <a:p>
@@ -3619,7 +3620,7 @@
                 </a:solidFill>
                 <a:latin typeface="Arial"/>
               </a:rPr>
-              <a:t>The Polish purchasing business was a wrong strategic choice</a:t>
+              <a:t>Positive shift in industry outlook</a:t>
             </a:r>
           </a:p>
           <a:p>
@@ -3647,7 +3648,7 @@
                 </a:solidFill>
                 <a:latin typeface="Arial"/>
               </a:rPr>
-              <a:t>Higher operating costs than peers</a:t>
+              <a:t>Stable customer base — defence, medical, utilities</a:t>
             </a:r>
           </a:p>
           <a:p>
@@ -3675,7 +3676,7 @@
                 </a:solidFill>
                 <a:latin typeface="Arial"/>
               </a:rPr>
-              <a:t>Significant mal-investments in the components database</a:t>
+              <a:t>Cost-saving opportunities combined with strong growth in core areas</a:t>
             </a:r>
           </a:p>
           <a:p>
@@ -3731,7 +3732,7 @@
                 </a:solidFill>
                 <a:latin typeface="Arial"/>
               </a:rPr>
-              <a:t>Growth given strong customer relationships — high switching costs</a:t>
+              <a:t>Offshore/Marine at an all-time low — additional turn-around upside</a:t>
             </a:r>
           </a:p>
           <a:p>
@@ -3772,7 +3773,7 @@
                 </a:solidFill>
                 <a:latin typeface="Arial"/>
               </a:rPr>
-              <a:t>1) Change the board and elect SC as chairman; 2) close Polish purchasing and the components database and reduce overhead; 3) rights issue to support restructuring; 4) exit loss-making sites; 5) reduce OPEX; 6) grow within existing customers.</a:t>
+              <a:t>1) Reduce costs in Sweden/Norway; 2) board seat through an EGM in early 2017; 3) continued investment in technology to reduce manual labour; 4) acquisition opportunities to build presence; 5) grow within existing customers.</a:t>
             </a:r>
           </a:p>
           <a:p>
@@ -3822,7 +3823,7 @@
                 </a:solidFill>
                 <a:latin typeface="Arial"/>
               </a:rPr>
-              <a:t>Reduced non-profitable sales by changing customers and closing plants</a:t>
+              <a:t>Continued cost-savings plan in Sweden/Norway</a:t>
             </a:r>
           </a:p>
           <a:p>
@@ -3850,7 +3851,7 @@
                 </a:solidFill>
                 <a:latin typeface="Arial"/>
               </a:rPr>
-              <a:t>Shifted out close to 40% of the initial purchase price in dividends</a:t>
+              <a:t>Reached a 7% operating margin in Q2 2017 — a company first</a:t>
             </a:r>
           </a:p>
           <a:p>
@@ -3878,14 +3879,14 @@
                 </a:solidFill>
                 <a:latin typeface="Arial"/>
               </a:rPr>
-              <a:t>EBIT improved from SEK (91)m in FY2009 to SEK 60m in FY2016</a:t>
+              <a:t>Growing significantly with existing customers</a:t>
             </a:r>
           </a:p>
         </p:txBody>
       </p:sp>
       <p:pic>
         <p:nvPicPr>
-          <p:cNvPr id="9" name="Picture 8" descr="col_note.png"/>
+          <p:cNvPr id="9" name="Picture 8" descr="col_kitron.png"/>
           <p:cNvPicPr>
             <a:picLocks noChangeAspect="1"/>
           </p:cNvPicPr>
@@ -4130,7 +4131,7 @@
                 </a:solidFill>
                 <a:latin typeface="Times New Roman"/>
               </a:rPr>
-              <a:t>Investment case study: DistIt / Alcadon</a:t>
+              <a:t>Investment case study: Note AB</a:t>
             </a:r>
           </a:p>
         </p:txBody>
@@ -4236,7 +4237,7 @@
                 </a:solidFill>
                 <a:latin typeface="Arial"/>
               </a:rPr>
-              <a:t>DistIt was a conglomerate of three distributors: Aurora Group (Danish, Nordic sales of IT, electronics and appliances); Alcadon (Swedish/Norwegian sales of active and passive fibre products); and Deltaco (Nordic sales of electronics and appliances).</a:t>
+              <a:t>Note is an electronics-manufacturing and logistics company with production plants near its main customer base in northern Europe, as well as low-cost plants in Eastern Europe and Asia. It focuses on small series with high variability and technology content.</a:t>
             </a:r>
           </a:p>
           <a:p>
@@ -4286,7 +4287,7 @@
                 </a:solidFill>
                 <a:latin typeface="Arial"/>
               </a:rPr>
-              <a:t>No structural integration between divisions — structural upside</a:t>
+              <a:t>Significant turn-around candidate with clear boundaries to losses</a:t>
             </a:r>
           </a:p>
           <a:p>
@@ -4314,7 +4315,7 @@
                 </a:solidFill>
                 <a:latin typeface="Arial"/>
               </a:rPr>
-              <a:t>Market price significantly lower than assets and earnings power</a:t>
+              <a:t>The Polish purchasing business was a wrong strategic choice</a:t>
             </a:r>
           </a:p>
           <a:p>
@@ -4342,7 +4343,7 @@
                 </a:solidFill>
                 <a:latin typeface="Arial"/>
               </a:rPr>
-              <a:t>Alcadon could benefit from being stand-alone — right in the cycle</a:t>
+              <a:t>Higher operating costs than peers</a:t>
             </a:r>
           </a:p>
           <a:p>
@@ -4370,7 +4371,7 @@
                 </a:solidFill>
                 <a:latin typeface="Arial"/>
               </a:rPr>
-              <a:t>Extension opportunities within Aurora; Deltaco a well-known brand</a:t>
+              <a:t>Significant mal-investments in the components database</a:t>
             </a:r>
           </a:p>
           <a:p>
@@ -4398,7 +4399,7 @@
                 </a:solidFill>
                 <a:latin typeface="Arial"/>
               </a:rPr>
-              <a:t>Never a loss-making year, even through downturns</a:t>
+              <a:t>Market price significantly lower than earnings power</a:t>
             </a:r>
           </a:p>
           <a:p>
@@ -4426,7 +4427,7 @@
                 </a:solidFill>
                 <a:latin typeface="Arial"/>
               </a:rPr>
-              <a:t>Stable management team with a strong cost-minimising culture</a:t>
+              <a:t>Growth given strong customer relationships — high switching costs</a:t>
             </a:r>
           </a:p>
           <a:p>
@@ -4467,7 +4468,7 @@
                 </a:solidFill>
                 <a:latin typeface="Arial"/>
               </a:rPr>
-              <a:t>1) Secure a board seat at the next AGM; 2) spin off Alcadon; 3) increase utilisation of the Aurora sales force through product extensions; 4) use 3PL in Deltaco to free up real-estate capital; 5) acquire more companies.</a:t>
+              <a:t>1) Change the board and elect SC as chairman; 2) close Polish purchasing and the components database and reduce overhead; 3) rights issue to support restructuring; 4) exit loss-making sites; 5) reduce OPEX; 6) grow within existing customers.</a:t>
             </a:r>
           </a:p>
           <a:p>
@@ -4517,7 +4518,7 @@
                 </a:solidFill>
                 <a:latin typeface="Arial"/>
               </a:rPr>
-              <a:t>Changed the board; spun out and refinanced Alcadon — which then almost doubled in size through acquisition</a:t>
+              <a:t>Reduced non-profitable sales by changing customers and closing plants</a:t>
             </a:r>
           </a:p>
           <a:p>
@@ -4545,7 +4546,7 @@
                 </a:solidFill>
                 <a:latin typeface="Arial"/>
               </a:rPr>
-              <a:t>Aurora signed Duracell, P&amp;G and Oral-B to leverage the sales force</a:t>
+              <a:t>Shifted out close to 40% of the initial purchase price in dividends</a:t>
             </a:r>
           </a:p>
           <a:p>
@@ -4573,170 +4574,14 @@
                 </a:solidFill>
                 <a:latin typeface="Arial"/>
               </a:rPr>
-              <a:t>Moved Deltaco's warehouse to 3PL, freeing the building</a:t>
-            </a:r>
-          </a:p>
-          <a:p>
-            <a:pPr marL="149162" indent="-149162">
-              <a:lnSpc>
-                <a:spcPct val="106000"/>
-              </a:lnSpc>
-              <a:spcAft>
-                <a:spcPts val="150"/>
-              </a:spcAft>
-            </a:pPr>
-            <a:r>
-              <a:rPr sz="869" b="1">
-                <a:solidFill>
-                  <a:srgbClr val="556A83"/>
-                </a:solidFill>
-                <a:latin typeface="Arial"/>
-              </a:rPr>
-              <a:t>✓  </a:t>
-            </a:r>
-            <a:r>
-              <a:rPr sz="869">
-                <a:solidFill>
-                  <a:srgbClr val="0E1620"/>
-                </a:solidFill>
-                <a:latin typeface="Arial"/>
-              </a:rPr>
-              <a:t>Acquired Septon and Sominis, with another acquisition pending</a:t>
-            </a:r>
-          </a:p>
-          <a:p>
-            <a:pPr marL="149162" indent="-149162">
-              <a:lnSpc>
-                <a:spcPct val="106000"/>
-              </a:lnSpc>
-              <a:spcAft>
-                <a:spcPts val="150"/>
-              </a:spcAft>
-            </a:pPr>
-            <a:r>
-              <a:rPr sz="869" b="1">
-                <a:solidFill>
-                  <a:srgbClr val="556A83"/>
-                </a:solidFill>
-                <a:latin typeface="Arial"/>
-              </a:rPr>
-              <a:t>✓  </a:t>
-            </a:r>
-            <a:r>
-              <a:rPr sz="869">
-                <a:solidFill>
-                  <a:srgbClr val="0E1620"/>
-                </a:solidFill>
-                <a:latin typeface="Arial"/>
-              </a:rPr>
-              <a:t>Real-time pricing software drove sales of mispriced products</a:t>
-            </a:r>
-          </a:p>
-          <a:p>
-            <a:pPr marL="149162" indent="-149162">
-              <a:lnSpc>
-                <a:spcPct val="106000"/>
-              </a:lnSpc>
-              <a:spcAft>
-                <a:spcPts val="150"/>
-              </a:spcAft>
-            </a:pPr>
-            <a:r>
-              <a:rPr sz="869" b="1">
-                <a:solidFill>
-                  <a:srgbClr val="556A83"/>
-                </a:solidFill>
-                <a:latin typeface="Arial"/>
-              </a:rPr>
-              <a:t>✓  </a:t>
-            </a:r>
-            <a:r>
-              <a:rPr sz="869">
-                <a:solidFill>
-                  <a:srgbClr val="0E1620"/>
-                </a:solidFill>
-                <a:latin typeface="Arial"/>
-              </a:rPr>
-              <a:t>Reduced IT costs through outsourcing</a:t>
-            </a:r>
-          </a:p>
-        </p:txBody>
-      </p:sp>
-      <p:sp>
-        <p:nvSpPr>
-          <p:cNvPr id="9" name="Rounded Rectangle 8"/>
-          <p:cNvSpPr/>
-          <p:nvPr/>
-        </p:nvSpPr>
-        <p:spPr>
-          <a:xfrm>
-            <a:off x="4983480" y="1783080"/>
-            <a:ext cx="4297680" cy="384048"/>
-          </a:xfrm>
-          <a:prstGeom prst="roundRect">
-            <a:avLst/>
-          </a:prstGeom>
-          <a:solidFill>
-            <a:srgbClr val="F6F7F9"/>
-          </a:solidFill>
-          <a:ln>
-            <a:noFill/>
-          </a:ln>
-          <a:effectLst/>
-        </p:spPr>
-        <p:txBody>
-          <a:bodyPr rtlCol="0" anchor="ctr"/>
-          <a:lstStyle/>
-          <a:p>
-            <a:pPr algn="ctr"/>
-          </a:p>
-        </p:txBody>
-      </p:sp>
-      <p:sp>
-        <p:nvSpPr>
-          <p:cNvPr id="10" name="TextBox 9"/>
-          <p:cNvSpPr txBox="1"/>
-          <p:nvPr/>
-        </p:nvSpPr>
-        <p:spPr>
-          <a:xfrm>
-            <a:off x="4983480" y="1783080"/>
-            <a:ext cx="4297680" cy="384048"/>
-          </a:xfrm>
-          <a:prstGeom prst="rect">
-            <a:avLst/>
-          </a:prstGeom>
-          <a:noFill/>
-        </p:spPr>
-        <p:txBody>
-          <a:bodyPr wrap="square" anchor="ctr" lIns="0" rIns="0" tIns="0" bIns="0">
-            <a:spAutoFit/>
-          </a:bodyPr>
-          <a:lstStyle/>
-          <a:p>
-            <a:pPr algn="ctr">
-              <a:lnSpc>
-                <a:spcPct val="110000"/>
-              </a:lnSpc>
-              <a:spcAft>
-                <a:spcPts val="0"/>
-              </a:spcAft>
-            </a:pPr>
-            <a:r>
-              <a:rPr sz="1250" b="1" i="0">
-                <a:solidFill>
-                  <a:srgbClr val="314359"/>
-                </a:solidFill>
-                <a:latin typeface="Times New Roman"/>
-              </a:rPr>
-              <a:t>Investment 2015 – present</a:t>
+              <a:t>EBIT improved from SEK (91)m in FY2009 to SEK 60m in FY2016</a:t>
             </a:r>
           </a:p>
         </p:txBody>
       </p:sp>
       <p:pic>
         <p:nvPicPr>
-          <p:cNvPr id="11" name="Picture 10" descr="distit_line.png"/>
+          <p:cNvPr id="9" name="Picture 8" descr="col_note.png"/>
           <p:cNvPicPr>
             <a:picLocks noChangeAspect="1"/>
           </p:cNvPicPr>
@@ -4750,41 +4595,17 @@
         </p:blipFill>
         <p:spPr>
           <a:xfrm>
-            <a:off x="5138223" y="2276856"/>
-            <a:ext cx="3988194" cy="2244852"/>
+            <a:off x="5084146" y="1783080"/>
+            <a:ext cx="4096347" cy="5074920"/>
           </a:xfrm>
           <a:prstGeom prst="rect">
             <a:avLst/>
           </a:prstGeom>
         </p:spPr>
       </p:pic>
-      <p:pic>
-        <p:nvPicPr>
-          <p:cNvPr id="12" name="Picture 11" descr="distit_op.png"/>
-          <p:cNvPicPr>
-            <a:picLocks noChangeAspect="1"/>
-          </p:cNvPicPr>
-          <p:nvPr/>
-        </p:nvPicPr>
-        <p:blipFill>
-          <a:blip r:embed="rId4"/>
-          <a:stretch>
-            <a:fillRect/>
-          </a:stretch>
-        </p:blipFill>
-        <p:spPr>
-          <a:xfrm>
-            <a:off x="5595884" y="4613148"/>
-            <a:ext cx="3072871" cy="2244852"/>
-          </a:xfrm>
-          <a:prstGeom prst="rect">
-            <a:avLst/>
-          </a:prstGeom>
-        </p:spPr>
-      </p:pic>
-      <p:sp>
-        <p:nvSpPr>
-          <p:cNvPr id="13" name="TextBox 12"/>
+      <p:sp>
+        <p:nvSpPr>
+          <p:cNvPr id="10" name="TextBox 9"/>
           <p:cNvSpPr txBox="1"/>
           <p:nvPr/>
         </p:nvSpPr>
@@ -5005,7 +4826,7 @@
                 </a:solidFill>
                 <a:latin typeface="Times New Roman"/>
               </a:rPr>
-              <a:t>Investment case study: Renold plc</a:t>
+              <a:t>Investment case study: DistIt / Alcadon</a:t>
             </a:r>
           </a:p>
         </p:txBody>
@@ -5111,7 +4932,7 @@
                 </a:solidFill>
                 <a:latin typeface="Arial"/>
               </a:rPr>
-              <a:t>Renold plc is a London-listed global leader in industrial chain and torque-transmission products — roller chain, couplings, gearboxes and clutches — serving mining, materials-handling, transport and energy customers worldwide. A market-leading niche franchise (inventor of the bush roller chain, 1879) with a large installed base and recurring aftermarket demand.</a:t>
+              <a:t>DistIt was a conglomerate of three distributors: Aurora Group (Danish, Nordic sales of IT, electronics and appliances); Alcadon (Swedish/Norwegian sales of active and passive fibre products); and Deltaco (Nordic sales of electronics and appliances).</a:t>
             </a:r>
           </a:p>
           <a:p>
@@ -5161,7 +4982,7 @@
                 </a:solidFill>
                 <a:latin typeface="Arial"/>
               </a:rPr>
-              <a:t>Market-leading niche industrial — strong brand, global installed base, recurring aftermarket</a:t>
+              <a:t>No structural integration between divisions — structural upside</a:t>
             </a:r>
           </a:p>
           <a:p>
@@ -5189,7 +5010,7 @@
                 </a:solidFill>
                 <a:latin typeface="Arial"/>
               </a:rPr>
-              <a:t>Mispriced, under-followed UK small-cap at a deep discount to earnings power (~50p)</a:t>
+              <a:t>Market price significantly lower than assets and earnings power</a:t>
             </a:r>
           </a:p>
           <a:p>
@@ -5217,7 +5038,7 @@
                 </a:solidFill>
                 <a:latin typeface="Arial"/>
               </a:rPr>
-              <a:t>Multi-year self-help underway — margin expansion and operational improvement</a:t>
+              <a:t>Alcadon could benefit from being stand-alone — right in the cycle</a:t>
             </a:r>
           </a:p>
           <a:p>
@@ -5245,7 +5066,7 @@
                 </a:solidFill>
                 <a:latin typeface="Arial"/>
               </a:rPr>
-              <a:t>Strong cash generation and a de-risking balance sheet</a:t>
+              <a:t>Extension opportunities within Aurora; Deltaco a well-known brand</a:t>
             </a:r>
           </a:p>
           <a:p>
@@ -5273,7 +5094,35 @@
                 </a:solidFill>
                 <a:latin typeface="Arial"/>
               </a:rPr>
-              <a:t>A credible consolidation / takeover candidate, with limited downside at entry</a:t>
+              <a:t>Never a loss-making year, even through downturns</a:t>
+            </a:r>
+          </a:p>
+          <a:p>
+            <a:pPr marL="149162" indent="-149162">
+              <a:lnSpc>
+                <a:spcPct val="106000"/>
+              </a:lnSpc>
+              <a:spcAft>
+                <a:spcPts val="150"/>
+              </a:spcAft>
+            </a:pPr>
+            <a:r>
+              <a:rPr sz="869" b="1">
+                <a:solidFill>
+                  <a:srgbClr val="556A83"/>
+                </a:solidFill>
+                <a:latin typeface="Arial"/>
+              </a:rPr>
+              <a:t>›  </a:t>
+            </a:r>
+            <a:r>
+              <a:rPr sz="869">
+                <a:solidFill>
+                  <a:srgbClr val="0E1620"/>
+                </a:solidFill>
+                <a:latin typeface="Arial"/>
+              </a:rPr>
+              <a:t>Stable management team with a strong cost-minimising culture</a:t>
             </a:r>
           </a:p>
           <a:p>
@@ -5314,7 +5163,7 @@
                 </a:solidFill>
                 <a:latin typeface="Arial"/>
               </a:rPr>
-              <a:t>An opportunistic position rather than a control engagement: build a meaningful stake at a deep discount to intrinsic value, underwrite the downside through asset and earnings-power support, and let the catalysts — margin improvement and likely strategic interest — close the gap.</a:t>
+              <a:t>1) Secure a board seat at the next AGM; 2) spin off Alcadon; 3) increase utilisation of the Aurora sales force through product extensions; 4) use 3PL in Deltaco to free up real-estate capital; 5) acquire more companies.</a:t>
             </a:r>
           </a:p>
           <a:p>
@@ -5364,7 +5213,7 @@
                 </a:solidFill>
                 <a:latin typeface="Arial"/>
               </a:rPr>
-              <a:t>Built ~5.3m shares at ~50p average from spring 2024; core position from December 2024 — about six months before the takeover</a:t>
+              <a:t>Changed the board; spun out and refinanced Alcadon — which then almost doubled in size through acquisition</a:t>
             </a:r>
           </a:p>
           <a:p>
@@ -5392,7 +5241,7 @@
                 </a:solidFill>
                 <a:latin typeface="Arial"/>
               </a:rPr>
-              <a:t>A recommended cash takeover emerged in 2025 at ~81p per share</a:t>
+              <a:t>Aurora signed Duracell, P&amp;G and Oral-B to leverage the sales force</a:t>
             </a:r>
           </a:p>
           <a:p>
@@ -5420,7 +5269,7 @@
                 </a:solidFill>
                 <a:latin typeface="Arial"/>
               </a:rPr>
-              <a:t>Realised the entire position into the offer at ~81p over June–July 2025</a:t>
+              <a:t>Moved Deltaco's warehouse to 3PL, freeing the building</a:t>
             </a:r>
           </a:p>
           <a:p>
@@ -5448,7 +5297,63 @@
                 </a:solidFill>
                 <a:latin typeface="Arial"/>
               </a:rPr>
-              <a:t>~1.6× money multiple, +62% gross (SEK 20.9m); money-weighted IRR ~234%</a:t>
+              <a:t>Acquired Septon and Sominis, with another acquisition pending</a:t>
+            </a:r>
+          </a:p>
+          <a:p>
+            <a:pPr marL="149162" indent="-149162">
+              <a:lnSpc>
+                <a:spcPct val="106000"/>
+              </a:lnSpc>
+              <a:spcAft>
+                <a:spcPts val="150"/>
+              </a:spcAft>
+            </a:pPr>
+            <a:r>
+              <a:rPr sz="869" b="1">
+                <a:solidFill>
+                  <a:srgbClr val="556A83"/>
+                </a:solidFill>
+                <a:latin typeface="Arial"/>
+              </a:rPr>
+              <a:t>✓  </a:t>
+            </a:r>
+            <a:r>
+              <a:rPr sz="869">
+                <a:solidFill>
+                  <a:srgbClr val="0E1620"/>
+                </a:solidFill>
+                <a:latin typeface="Arial"/>
+              </a:rPr>
+              <a:t>Real-time pricing software drove sales of mispriced products</a:t>
+            </a:r>
+          </a:p>
+          <a:p>
+            <a:pPr marL="149162" indent="-149162">
+              <a:lnSpc>
+                <a:spcPct val="106000"/>
+              </a:lnSpc>
+              <a:spcAft>
+                <a:spcPts val="150"/>
+              </a:spcAft>
+            </a:pPr>
+            <a:r>
+              <a:rPr sz="869" b="1">
+                <a:solidFill>
+                  <a:srgbClr val="556A83"/>
+                </a:solidFill>
+                <a:latin typeface="Arial"/>
+              </a:rPr>
+              <a:t>✓  </a:t>
+            </a:r>
+            <a:r>
+              <a:rPr sz="869">
+                <a:solidFill>
+                  <a:srgbClr val="0E1620"/>
+                </a:solidFill>
+                <a:latin typeface="Arial"/>
+              </a:rPr>
+              <a:t>Reduced IT costs through outsourcing</a:t>
             </a:r>
           </a:p>
         </p:txBody>
@@ -5520,21 +5425,69 @@
                 </a:solidFill>
                 <a:latin typeface="Times New Roman"/>
               </a:rPr>
-              <a:t>IRR 234% · Money multiple 1.6×</a:t>
-            </a:r>
-          </a:p>
-        </p:txBody>
-      </p:sp>
-      <p:sp>
-        <p:nvSpPr>
-          <p:cNvPr id="11" name="TextBox 10"/>
+              <a:t>Investment 2015 – present</a:t>
+            </a:r>
+          </a:p>
+        </p:txBody>
+      </p:sp>
+      <p:pic>
+        <p:nvPicPr>
+          <p:cNvPr id="11" name="Picture 10" descr="distit_line.png"/>
+          <p:cNvPicPr>
+            <a:picLocks noChangeAspect="1"/>
+          </p:cNvPicPr>
+          <p:nvPr/>
+        </p:nvPicPr>
+        <p:blipFill>
+          <a:blip r:embed="rId3"/>
+          <a:stretch>
+            <a:fillRect/>
+          </a:stretch>
+        </p:blipFill>
+        <p:spPr>
+          <a:xfrm>
+            <a:off x="5138223" y="2276856"/>
+            <a:ext cx="3988194" cy="2244852"/>
+          </a:xfrm>
+          <a:prstGeom prst="rect">
+            <a:avLst/>
+          </a:prstGeom>
+        </p:spPr>
+      </p:pic>
+      <p:pic>
+        <p:nvPicPr>
+          <p:cNvPr id="12" name="Picture 11" descr="distit_op.png"/>
+          <p:cNvPicPr>
+            <a:picLocks noChangeAspect="1"/>
+          </p:cNvPicPr>
+          <p:nvPr/>
+        </p:nvPicPr>
+        <p:blipFill>
+          <a:blip r:embed="rId4"/>
+          <a:stretch>
+            <a:fillRect/>
+          </a:stretch>
+        </p:blipFill>
+        <p:spPr>
+          <a:xfrm>
+            <a:off x="5595884" y="4613148"/>
+            <a:ext cx="3072871" cy="2244852"/>
+          </a:xfrm>
+          <a:prstGeom prst="rect">
+            <a:avLst/>
+          </a:prstGeom>
+        </p:spPr>
+      </p:pic>
+      <p:sp>
+        <p:nvSpPr>
+          <p:cNvPr id="13" name="TextBox 12"/>
           <p:cNvSpPr txBox="1"/>
           <p:nvPr/>
         </p:nvSpPr>
         <p:spPr>
           <a:xfrm>
-            <a:off x="4983480" y="2350008"/>
-            <a:ext cx="4297680" cy="274320"/>
+            <a:off x="502920" y="6967728"/>
+            <a:ext cx="4846320" cy="274320"/>
           </a:xfrm>
           <a:prstGeom prst="rect">
             <a:avLst/>
@@ -5547,406 +5500,22 @@
           </a:bodyPr>
           <a:lstStyle/>
           <a:p>
-            <a:pPr algn="ctr">
-              <a:lnSpc>
-                <a:spcPct val="110000"/>
+            <a:pPr algn="l">
+              <a:lnSpc>
+                <a:spcPct val="100000"/>
               </a:lnSpc>
               <a:spcAft>
                 <a:spcPts val="0"/>
               </a:spcAft>
             </a:pPr>
             <a:r>
-              <a:rPr sz="1100" b="1" i="0">
-                <a:solidFill>
-                  <a:srgbClr val="314359"/>
-                </a:solidFill>
-                <a:latin typeface="Times New Roman"/>
-              </a:rPr>
-              <a:t>Capital invested vs. realised proceeds</a:t>
-            </a:r>
-          </a:p>
-        </p:txBody>
-      </p:sp>
-      <p:sp>
-        <p:nvSpPr>
-          <p:cNvPr id="12" name="Rectangle 11"/>
-          <p:cNvSpPr/>
-          <p:nvPr/>
-        </p:nvSpPr>
-        <p:spPr>
-          <a:xfrm>
-            <a:off x="5074920" y="4773168"/>
-            <a:ext cx="4114800" cy="12700"/>
-          </a:xfrm>
-          <a:prstGeom prst="rect">
-            <a:avLst/>
-          </a:prstGeom>
-          <a:solidFill>
-            <a:srgbClr val="E2E5E9"/>
-          </a:solidFill>
-          <a:ln>
-            <a:noFill/>
-          </a:ln>
-          <a:effectLst/>
-        </p:spPr>
-        <p:txBody>
-          <a:bodyPr rtlCol="0" anchor="ctr"/>
-          <a:lstStyle/>
-          <a:p>
-            <a:pPr algn="ctr"/>
-          </a:p>
-        </p:txBody>
-      </p:sp>
-      <p:sp>
-        <p:nvSpPr>
-          <p:cNvPr id="13" name="Rectangle 12"/>
-          <p:cNvSpPr/>
-          <p:nvPr/>
-        </p:nvSpPr>
-        <p:spPr>
-          <a:xfrm>
-            <a:off x="5577840" y="3756092"/>
-            <a:ext cx="1051560" cy="1017076"/>
-          </a:xfrm>
-          <a:prstGeom prst="rect">
-            <a:avLst/>
-          </a:prstGeom>
-          <a:solidFill>
-            <a:srgbClr val="152130"/>
-          </a:solidFill>
-          <a:ln>
-            <a:noFill/>
-          </a:ln>
-          <a:effectLst/>
-        </p:spPr>
-        <p:txBody>
-          <a:bodyPr rtlCol="0" anchor="ctr"/>
-          <a:lstStyle/>
-          <a:p>
-            <a:pPr algn="ctr"/>
-          </a:p>
-        </p:txBody>
-      </p:sp>
-      <p:sp>
-        <p:nvSpPr>
-          <p:cNvPr id="14" name="TextBox 13"/>
-          <p:cNvSpPr txBox="1"/>
-          <p:nvPr/>
-        </p:nvSpPr>
-        <p:spPr>
-          <a:xfrm>
-            <a:off x="5303520" y="3481772"/>
-            <a:ext cx="1600200" cy="256032"/>
-          </a:xfrm>
-          <a:prstGeom prst="rect">
-            <a:avLst/>
-          </a:prstGeom>
-          <a:noFill/>
-        </p:spPr>
-        <p:txBody>
-          <a:bodyPr wrap="square" anchor="t" lIns="0" rIns="0" tIns="0" bIns="0">
-            <a:spAutoFit/>
-          </a:bodyPr>
-          <a:lstStyle/>
-          <a:p>
-            <a:pPr algn="ctr">
-              <a:lnSpc>
-                <a:spcPct val="110000"/>
-              </a:lnSpc>
-              <a:spcAft>
-                <a:spcPts val="0"/>
-              </a:spcAft>
-            </a:pPr>
-            <a:r>
-              <a:rPr sz="1300" b="1" i="0">
-                <a:solidFill>
-                  <a:srgbClr val="314359"/>
-                </a:solidFill>
-                <a:latin typeface="Times New Roman"/>
-              </a:rPr>
-              <a:t>35</a:t>
-            </a:r>
-          </a:p>
-        </p:txBody>
-      </p:sp>
-      <p:sp>
-        <p:nvSpPr>
-          <p:cNvPr id="15" name="TextBox 14"/>
-          <p:cNvSpPr txBox="1"/>
-          <p:nvPr/>
-        </p:nvSpPr>
-        <p:spPr>
-          <a:xfrm>
-            <a:off x="5074920" y="4828032"/>
-            <a:ext cx="2057400" cy="310896"/>
-          </a:xfrm>
-          <a:prstGeom prst="rect">
-            <a:avLst/>
-          </a:prstGeom>
-          <a:noFill/>
-        </p:spPr>
-        <p:txBody>
-          <a:bodyPr wrap="square" anchor="t" lIns="0" rIns="0" tIns="0" bIns="0">
-            <a:spAutoFit/>
-          </a:bodyPr>
-          <a:lstStyle/>
-          <a:p>
-            <a:pPr algn="ctr">
-              <a:lnSpc>
-                <a:spcPct val="110000"/>
-              </a:lnSpc>
-              <a:spcAft>
-                <a:spcPts val="0"/>
-              </a:spcAft>
-            </a:pPr>
-            <a:r>
-              <a:rPr sz="950" b="0" i="0">
-                <a:solidFill>
-                  <a:srgbClr val="0E1620"/>
-                </a:solidFill>
-                <a:latin typeface="Arial"/>
-              </a:rPr>
-              <a:t>Capital invested</a:t>
-            </a:r>
-          </a:p>
-        </p:txBody>
-      </p:sp>
-      <p:sp>
-        <p:nvSpPr>
-          <p:cNvPr id="16" name="Rectangle 15"/>
-          <p:cNvSpPr/>
-          <p:nvPr/>
-        </p:nvSpPr>
-        <p:spPr>
-          <a:xfrm>
-            <a:off x="7635240" y="3145846"/>
-            <a:ext cx="1051560" cy="1627322"/>
-          </a:xfrm>
-          <a:prstGeom prst="rect">
-            <a:avLst/>
-          </a:prstGeom>
-          <a:solidFill>
-            <a:srgbClr val="152130"/>
-          </a:solidFill>
-          <a:ln>
-            <a:noFill/>
-          </a:ln>
-          <a:effectLst/>
-        </p:spPr>
-        <p:txBody>
-          <a:bodyPr rtlCol="0" anchor="ctr"/>
-          <a:lstStyle/>
-          <a:p>
-            <a:pPr algn="ctr"/>
-          </a:p>
-        </p:txBody>
-      </p:sp>
-      <p:sp>
-        <p:nvSpPr>
-          <p:cNvPr id="17" name="TextBox 16"/>
-          <p:cNvSpPr txBox="1"/>
-          <p:nvPr/>
-        </p:nvSpPr>
-        <p:spPr>
-          <a:xfrm>
-            <a:off x="7360920" y="2871526"/>
-            <a:ext cx="1600200" cy="256032"/>
-          </a:xfrm>
-          <a:prstGeom prst="rect">
-            <a:avLst/>
-          </a:prstGeom>
-          <a:noFill/>
-        </p:spPr>
-        <p:txBody>
-          <a:bodyPr wrap="square" anchor="t" lIns="0" rIns="0" tIns="0" bIns="0">
-            <a:spAutoFit/>
-          </a:bodyPr>
-          <a:lstStyle/>
-          <a:p>
-            <a:pPr algn="ctr">
-              <a:lnSpc>
-                <a:spcPct val="110000"/>
-              </a:lnSpc>
-              <a:spcAft>
-                <a:spcPts val="0"/>
-              </a:spcAft>
-            </a:pPr>
-            <a:r>
-              <a:rPr sz="1300" b="1" i="0">
-                <a:solidFill>
-                  <a:srgbClr val="314359"/>
-                </a:solidFill>
-                <a:latin typeface="Times New Roman"/>
-              </a:rPr>
-              <a:t>56</a:t>
-            </a:r>
-          </a:p>
-        </p:txBody>
-      </p:sp>
-      <p:sp>
-        <p:nvSpPr>
-          <p:cNvPr id="18" name="TextBox 17"/>
-          <p:cNvSpPr txBox="1"/>
-          <p:nvPr/>
-        </p:nvSpPr>
-        <p:spPr>
-          <a:xfrm>
-            <a:off x="7132320" y="4828032"/>
-            <a:ext cx="2057400" cy="310896"/>
-          </a:xfrm>
-          <a:prstGeom prst="rect">
-            <a:avLst/>
-          </a:prstGeom>
-          <a:noFill/>
-        </p:spPr>
-        <p:txBody>
-          <a:bodyPr wrap="square" anchor="t" lIns="0" rIns="0" tIns="0" bIns="0">
-            <a:spAutoFit/>
-          </a:bodyPr>
-          <a:lstStyle/>
-          <a:p>
-            <a:pPr algn="ctr">
-              <a:lnSpc>
-                <a:spcPct val="110000"/>
-              </a:lnSpc>
-              <a:spcAft>
-                <a:spcPts val="0"/>
-              </a:spcAft>
-            </a:pPr>
-            <a:r>
-              <a:rPr sz="950" b="0" i="0">
-                <a:solidFill>
-                  <a:srgbClr val="0E1620"/>
-                </a:solidFill>
-                <a:latin typeface="Arial"/>
-              </a:rPr>
-              <a:t>Realised proceeds</a:t>
-            </a:r>
-          </a:p>
-        </p:txBody>
-      </p:sp>
-      <p:sp>
-        <p:nvSpPr>
-          <p:cNvPr id="19" name="TextBox 18"/>
-          <p:cNvSpPr txBox="1"/>
-          <p:nvPr/>
-        </p:nvSpPr>
-        <p:spPr>
-          <a:xfrm>
-            <a:off x="4983480" y="5157216"/>
-            <a:ext cx="4297680" cy="201168"/>
-          </a:xfrm>
-          <a:prstGeom prst="rect">
-            <a:avLst/>
-          </a:prstGeom>
-          <a:noFill/>
-        </p:spPr>
-        <p:txBody>
-          <a:bodyPr wrap="square" anchor="t" lIns="0" rIns="0" tIns="0" bIns="0">
-            <a:spAutoFit/>
-          </a:bodyPr>
-          <a:lstStyle/>
-          <a:p>
-            <a:pPr algn="l">
-              <a:lnSpc>
-                <a:spcPct val="110000"/>
-              </a:lnSpc>
-              <a:spcAft>
-                <a:spcPts val="0"/>
-              </a:spcAft>
-            </a:pPr>
-            <a:r>
-              <a:rPr sz="850" b="0" i="1">
+              <a:rPr sz="750" b="0" i="1">
                 <a:solidFill>
                   <a:srgbClr val="556A83"/>
                 </a:solidFill>
                 <a:latin typeface="Arial"/>
               </a:rPr>
-              <a:t>SEK m</a:t>
-            </a:r>
-          </a:p>
-        </p:txBody>
-      </p:sp>
-      <p:sp>
-        <p:nvSpPr>
-          <p:cNvPr id="20" name="TextBox 19"/>
-          <p:cNvSpPr txBox="1"/>
-          <p:nvPr/>
-        </p:nvSpPr>
-        <p:spPr>
-          <a:xfrm>
-            <a:off x="4983480" y="5029200"/>
-            <a:ext cx="4297680" cy="731520"/>
-          </a:xfrm>
-          <a:prstGeom prst="rect">
-            <a:avLst/>
-          </a:prstGeom>
-          <a:noFill/>
-        </p:spPr>
-        <p:txBody>
-          <a:bodyPr wrap="square" anchor="t" lIns="0" rIns="0" tIns="0" bIns="0">
-            <a:spAutoFit/>
-          </a:bodyPr>
-          <a:lstStyle/>
-          <a:p>
-            <a:pPr algn="ctr">
-              <a:lnSpc>
-                <a:spcPct val="110000"/>
-              </a:lnSpc>
-              <a:spcAft>
-                <a:spcPts val="0"/>
-              </a:spcAft>
-            </a:pPr>
-            <a:r>
-              <a:rPr sz="1200" b="1" i="0">
-                <a:solidFill>
-                  <a:srgbClr val="314359"/>
-                </a:solidFill>
-                <a:latin typeface="Times New Roman"/>
-              </a:rPr>
-              <a:t>Bought at ~50p; acquired at ~81p in a recommended takeover</a:t>
-            </a:r>
-          </a:p>
-        </p:txBody>
-      </p:sp>
-      <p:sp>
-        <p:nvSpPr>
-          <p:cNvPr id="21" name="TextBox 20"/>
-          <p:cNvSpPr txBox="1"/>
-          <p:nvPr/>
-        </p:nvSpPr>
-        <p:spPr>
-          <a:xfrm>
-            <a:off x="502920" y="6967728"/>
-            <a:ext cx="4846320" cy="274320"/>
-          </a:xfrm>
-          <a:prstGeom prst="rect">
-            <a:avLst/>
-          </a:prstGeom>
-          <a:noFill/>
-        </p:spPr>
-        <p:txBody>
-          <a:bodyPr wrap="square" anchor="t" lIns="0" rIns="0" tIns="0" bIns="0">
-            <a:spAutoFit/>
-          </a:bodyPr>
-          <a:lstStyle/>
-          <a:p>
-            <a:pPr algn="l">
-              <a:lnSpc>
-                <a:spcPct val="100000"/>
-              </a:lnSpc>
-              <a:spcAft>
-                <a:spcPts val="0"/>
-              </a:spcAft>
-            </a:pPr>
-            <a:r>
-              <a:rPr sz="750" b="0" i="1">
-                <a:solidFill>
-                  <a:srgbClr val="556A83"/>
-                </a:solidFill>
-                <a:latin typeface="Arial"/>
-              </a:rPr>
-              <a:t>Source: AIPFII transaction history (Apr 2024 – Jul 2025). IRR is money-weighted; the short opportunistic hold lifts the annualised figure. Past performance is not indicative of future results.</a:t>
+              <a:t>Note: share price re-based to 100 at investment and includes dividends; benchmark OMXS30 / MSCI. Past performance is not indicative of future results.</a:t>
             </a:r>
           </a:p>
         </p:txBody>
@@ -5984,7 +5553,7 @@
             <a:avLst/>
           </a:prstGeom>
           <a:solidFill>
-            <a:srgbClr val="152130"/>
+            <a:srgbClr val="FFFFFF"/>
           </a:solidFill>
           <a:ln>
             <a:noFill/>
@@ -6001,7 +5570,7 @@
       </p:sp>
       <p:pic>
         <p:nvPicPr>
-          <p:cNvPr id="3" name="Picture 2" descr="logo_white.png"/>
+          <p:cNvPr id="3" name="Picture 2" descr="mark_dark.png"/>
           <p:cNvPicPr>
             <a:picLocks noChangeAspect="1"/>
           </p:cNvPicPr>
@@ -6015,8 +5584,8 @@
         </p:blipFill>
         <p:spPr>
           <a:xfrm>
-            <a:off x="548640" y="502920"/>
-            <a:ext cx="2337572" cy="502920"/>
+            <a:off x="457200" y="219456"/>
+            <a:ext cx="280009" cy="237744"/>
           </a:xfrm>
           <a:prstGeom prst="rect">
             <a:avLst/>
@@ -6025,20 +5594,62 @@
       </p:pic>
       <p:sp>
         <p:nvSpPr>
-          <p:cNvPr id="4" name="Rectangle 3"/>
+          <p:cNvPr id="4" name="TextBox 3"/>
+          <p:cNvSpPr txBox="1"/>
+          <p:nvPr/>
+        </p:nvSpPr>
+        <p:spPr>
+          <a:xfrm>
+            <a:off x="841248" y="246888"/>
+            <a:ext cx="5486400" cy="274320"/>
+          </a:xfrm>
+          <a:prstGeom prst="rect">
+            <a:avLst/>
+          </a:prstGeom>
+          <a:noFill/>
+        </p:spPr>
+        <p:txBody>
+          <a:bodyPr wrap="square" anchor="t" lIns="0" rIns="0" tIns="0" bIns="0">
+            <a:spAutoFit/>
+          </a:bodyPr>
+          <a:lstStyle/>
+          <a:p>
+            <a:pPr algn="l">
+              <a:lnSpc>
+                <a:spcPct val="110000"/>
+              </a:lnSpc>
+              <a:spcAft>
+                <a:spcPts val="0"/>
+              </a:spcAft>
+            </a:pPr>
+            <a:r>
+              <a:rPr sz="1100" b="0" i="0">
+                <a:solidFill>
+                  <a:srgbClr val="556A83"/>
+                </a:solidFill>
+                <a:latin typeface="Arial"/>
+              </a:rPr>
+              <a:t>Case · AIP fund era</a:t>
+            </a:r>
+          </a:p>
+        </p:txBody>
+      </p:sp>
+      <p:sp>
+        <p:nvSpPr>
+          <p:cNvPr id="5" name="Rectangle 4"/>
           <p:cNvSpPr/>
           <p:nvPr/>
         </p:nvSpPr>
         <p:spPr>
           <a:xfrm>
-            <a:off x="566928" y="2788920"/>
-            <a:ext cx="457200" cy="27940"/>
+            <a:off x="0" y="566928"/>
+            <a:ext cx="9753904" cy="914400"/>
           </a:xfrm>
           <a:prstGeom prst="rect">
             <a:avLst/>
           </a:prstGeom>
           <a:solidFill>
-            <a:srgbClr val="556A83"/>
+            <a:srgbClr val="F6F7F9"/>
           </a:solidFill>
           <a:ln>
             <a:noFill/>
@@ -6055,14 +5666,14 @@
       </p:sp>
       <p:sp>
         <p:nvSpPr>
-          <p:cNvPr id="5" name="TextBox 4"/>
+          <p:cNvPr id="6" name="TextBox 5"/>
           <p:cNvSpPr txBox="1"/>
           <p:nvPr/>
         </p:nvSpPr>
         <p:spPr>
           <a:xfrm>
-            <a:off x="548640" y="2971800"/>
-            <a:ext cx="8686800" cy="457200"/>
+            <a:off x="502920" y="713232"/>
+            <a:ext cx="8778240" cy="640080"/>
           </a:xfrm>
           <a:prstGeom prst="rect">
             <a:avLst/>
@@ -6084,27 +5695,27 @@
               </a:spcAft>
             </a:pPr>
             <a:r>
-              <a:rPr sz="1300" b="0" i="0">
-                <a:solidFill>
-                  <a:srgbClr val="556A83"/>
-                </a:solidFill>
-                <a:latin typeface="Arial"/>
-              </a:rPr>
-              <a:t>PART II · INVESTMENT AB ÖRESUND (1994–2007)</a:t>
-            </a:r>
-          </a:p>
-        </p:txBody>
-      </p:sp>
-      <p:sp>
-        <p:nvSpPr>
-          <p:cNvPr id="6" name="TextBox 5"/>
+              <a:rPr sz="2600" b="0" i="0" spc="-78">
+                <a:solidFill>
+                  <a:srgbClr val="314359"/>
+                </a:solidFill>
+                <a:latin typeface="Times New Roman"/>
+              </a:rPr>
+              <a:t>Investment case study: Renold plc</a:t>
+            </a:r>
+          </a:p>
+        </p:txBody>
+      </p:sp>
+      <p:sp>
+        <p:nvSpPr>
+          <p:cNvPr id="7" name="TextBox 6"/>
           <p:cNvSpPr txBox="1"/>
           <p:nvPr/>
         </p:nvSpPr>
         <p:spPr>
           <a:xfrm>
-            <a:off x="548640" y="3291840"/>
-            <a:ext cx="8686800" cy="1280160"/>
+            <a:off x="5486400" y="6967728"/>
+            <a:ext cx="4023360" cy="274320"/>
           </a:xfrm>
           <a:prstGeom prst="rect">
             <a:avLst/>
@@ -6117,22 +5728,921 @@
           </a:bodyPr>
           <a:lstStyle/>
           <a:p>
+            <a:pPr algn="r">
+              <a:lnSpc>
+                <a:spcPct val="110000"/>
+              </a:lnSpc>
+              <a:spcAft>
+                <a:spcPts val="0"/>
+              </a:spcAft>
+            </a:pPr>
+            <a:r>
+              <a:rPr sz="850" b="0" i="0">
+                <a:solidFill>
+                  <a:srgbClr val="556A83"/>
+                </a:solidFill>
+                <a:latin typeface="Arial"/>
+              </a:rPr>
+              <a:t>Strictly confidential          11</a:t>
+            </a:r>
+          </a:p>
+        </p:txBody>
+      </p:sp>
+      <p:sp>
+        <p:nvSpPr>
+          <p:cNvPr id="8" name="TextBox 7"/>
+          <p:cNvSpPr txBox="1"/>
+          <p:nvPr/>
+        </p:nvSpPr>
+        <p:spPr>
+          <a:xfrm>
+            <a:off x="502920" y="1783080"/>
+            <a:ext cx="4160520" cy="5120640"/>
+          </a:xfrm>
+          <a:prstGeom prst="rect">
+            <a:avLst/>
+          </a:prstGeom>
+          <a:noFill/>
+        </p:spPr>
+        <p:txBody>
+          <a:bodyPr wrap="square" anchor="t" lIns="0" rIns="0" tIns="0" bIns="0">
+            <a:spAutoFit/>
+          </a:bodyPr>
+          <a:lstStyle/>
+          <a:p>
             <a:pPr algn="l">
               <a:lnSpc>
                 <a:spcPct val="110000"/>
               </a:lnSpc>
-              <a:spcAft>
+              <a:spcBef>
                 <a:spcPts val="0"/>
-              </a:spcAft>
-            </a:pPr>
-            <a:r>
-              <a:rPr sz="3400" b="0" i="1" spc="-102">
-                <a:solidFill>
-                  <a:srgbClr val="E2E5E9"/>
+              </a:spcBef>
+              <a:spcAft>
+                <a:spcPts val="250"/>
+              </a:spcAft>
+            </a:pPr>
+            <a:r>
+              <a:rPr sz="1100" b="1" i="0">
+                <a:solidFill>
+                  <a:srgbClr val="314359"/>
                 </a:solidFill>
                 <a:latin typeface="Times New Roman"/>
               </a:rPr>
-              <a:t>Earlier track record</a:t>
+              <a:t>Company description</a:t>
+            </a:r>
+          </a:p>
+          <a:p>
+            <a:pPr algn="l">
+              <a:lnSpc>
+                <a:spcPct val="108000"/>
+              </a:lnSpc>
+              <a:spcAft>
+                <a:spcPts val="200"/>
+              </a:spcAft>
+            </a:pPr>
+            <a:r>
+              <a:rPr sz="869" b="0" i="0">
+                <a:solidFill>
+                  <a:srgbClr val="0E1620"/>
+                </a:solidFill>
+                <a:latin typeface="Arial"/>
+              </a:rPr>
+              <a:t>Renold plc is a London-listed global leader in industrial chain and torque-transmission products — roller chain, couplings, gearboxes and clutches — serving mining, materials-handling, transport and energy customers worldwide. A market-leading niche franchise (inventor of the bush roller chain, 1879) with a large installed base and recurring aftermarket demand.</a:t>
+            </a:r>
+          </a:p>
+          <a:p>
+            <a:pPr algn="l">
+              <a:lnSpc>
+                <a:spcPct val="110000"/>
+              </a:lnSpc>
+              <a:spcBef>
+                <a:spcPts val="700"/>
+              </a:spcBef>
+              <a:spcAft>
+                <a:spcPts val="250"/>
+              </a:spcAft>
+            </a:pPr>
+            <a:r>
+              <a:rPr sz="1100" b="1" i="0">
+                <a:solidFill>
+                  <a:srgbClr val="314359"/>
+                </a:solidFill>
+                <a:latin typeface="Times New Roman"/>
+              </a:rPr>
+              <a:t>Recognized opportunities</a:t>
+            </a:r>
+          </a:p>
+          <a:p>
+            <a:pPr marL="149162" indent="-149162">
+              <a:lnSpc>
+                <a:spcPct val="106000"/>
+              </a:lnSpc>
+              <a:spcAft>
+                <a:spcPts val="150"/>
+              </a:spcAft>
+            </a:pPr>
+            <a:r>
+              <a:rPr sz="869" b="1">
+                <a:solidFill>
+                  <a:srgbClr val="556A83"/>
+                </a:solidFill>
+                <a:latin typeface="Arial"/>
+              </a:rPr>
+              <a:t>›  </a:t>
+            </a:r>
+            <a:r>
+              <a:rPr sz="869">
+                <a:solidFill>
+                  <a:srgbClr val="0E1620"/>
+                </a:solidFill>
+                <a:latin typeface="Arial"/>
+              </a:rPr>
+              <a:t>Market-leading niche industrial — strong brand, global installed base, recurring aftermarket</a:t>
+            </a:r>
+          </a:p>
+          <a:p>
+            <a:pPr marL="149162" indent="-149162">
+              <a:lnSpc>
+                <a:spcPct val="106000"/>
+              </a:lnSpc>
+              <a:spcAft>
+                <a:spcPts val="150"/>
+              </a:spcAft>
+            </a:pPr>
+            <a:r>
+              <a:rPr sz="869" b="1">
+                <a:solidFill>
+                  <a:srgbClr val="556A83"/>
+                </a:solidFill>
+                <a:latin typeface="Arial"/>
+              </a:rPr>
+              <a:t>›  </a:t>
+            </a:r>
+            <a:r>
+              <a:rPr sz="869">
+                <a:solidFill>
+                  <a:srgbClr val="0E1620"/>
+                </a:solidFill>
+                <a:latin typeface="Arial"/>
+              </a:rPr>
+              <a:t>Mispriced, under-followed UK small-cap at a deep discount to earnings power (~50p)</a:t>
+            </a:r>
+          </a:p>
+          <a:p>
+            <a:pPr marL="149162" indent="-149162">
+              <a:lnSpc>
+                <a:spcPct val="106000"/>
+              </a:lnSpc>
+              <a:spcAft>
+                <a:spcPts val="150"/>
+              </a:spcAft>
+            </a:pPr>
+            <a:r>
+              <a:rPr sz="869" b="1">
+                <a:solidFill>
+                  <a:srgbClr val="556A83"/>
+                </a:solidFill>
+                <a:latin typeface="Arial"/>
+              </a:rPr>
+              <a:t>›  </a:t>
+            </a:r>
+            <a:r>
+              <a:rPr sz="869">
+                <a:solidFill>
+                  <a:srgbClr val="0E1620"/>
+                </a:solidFill>
+                <a:latin typeface="Arial"/>
+              </a:rPr>
+              <a:t>Multi-year self-help underway — margin expansion and operational improvement</a:t>
+            </a:r>
+          </a:p>
+          <a:p>
+            <a:pPr marL="149162" indent="-149162">
+              <a:lnSpc>
+                <a:spcPct val="106000"/>
+              </a:lnSpc>
+              <a:spcAft>
+                <a:spcPts val="150"/>
+              </a:spcAft>
+            </a:pPr>
+            <a:r>
+              <a:rPr sz="869" b="1">
+                <a:solidFill>
+                  <a:srgbClr val="556A83"/>
+                </a:solidFill>
+                <a:latin typeface="Arial"/>
+              </a:rPr>
+              <a:t>›  </a:t>
+            </a:r>
+            <a:r>
+              <a:rPr sz="869">
+                <a:solidFill>
+                  <a:srgbClr val="0E1620"/>
+                </a:solidFill>
+                <a:latin typeface="Arial"/>
+              </a:rPr>
+              <a:t>Strong cash generation and a de-risking balance sheet</a:t>
+            </a:r>
+          </a:p>
+          <a:p>
+            <a:pPr marL="149162" indent="-149162">
+              <a:lnSpc>
+                <a:spcPct val="106000"/>
+              </a:lnSpc>
+              <a:spcAft>
+                <a:spcPts val="150"/>
+              </a:spcAft>
+            </a:pPr>
+            <a:r>
+              <a:rPr sz="869" b="1">
+                <a:solidFill>
+                  <a:srgbClr val="556A83"/>
+                </a:solidFill>
+                <a:latin typeface="Arial"/>
+              </a:rPr>
+              <a:t>›  </a:t>
+            </a:r>
+            <a:r>
+              <a:rPr sz="869">
+                <a:solidFill>
+                  <a:srgbClr val="0E1620"/>
+                </a:solidFill>
+                <a:latin typeface="Arial"/>
+              </a:rPr>
+              <a:t>A credible consolidation / takeover candidate, with limited downside at entry</a:t>
+            </a:r>
+          </a:p>
+          <a:p>
+            <a:pPr algn="l">
+              <a:lnSpc>
+                <a:spcPct val="110000"/>
+              </a:lnSpc>
+              <a:spcBef>
+                <a:spcPts val="700"/>
+              </a:spcBef>
+              <a:spcAft>
+                <a:spcPts val="250"/>
+              </a:spcAft>
+            </a:pPr>
+            <a:r>
+              <a:rPr sz="1100" b="1" i="0">
+                <a:solidFill>
+                  <a:srgbClr val="314359"/>
+                </a:solidFill>
+                <a:latin typeface="Times New Roman"/>
+              </a:rPr>
+              <a:t>Initial plan</a:t>
+            </a:r>
+          </a:p>
+          <a:p>
+            <a:pPr algn="l">
+              <a:lnSpc>
+                <a:spcPct val="108000"/>
+              </a:lnSpc>
+              <a:spcAft>
+                <a:spcPts val="200"/>
+              </a:spcAft>
+            </a:pPr>
+            <a:r>
+              <a:rPr sz="869" b="0" i="0">
+                <a:solidFill>
+                  <a:srgbClr val="0E1620"/>
+                </a:solidFill>
+                <a:latin typeface="Arial"/>
+              </a:rPr>
+              <a:t>An opportunistic position rather than a control engagement: build a meaningful stake at a deep discount to intrinsic value, underwrite the downside through asset and earnings-power support, and let the catalysts — margin improvement and likely strategic interest — close the gap.</a:t>
+            </a:r>
+          </a:p>
+          <a:p>
+            <a:pPr algn="l">
+              <a:lnSpc>
+                <a:spcPct val="110000"/>
+              </a:lnSpc>
+              <a:spcBef>
+                <a:spcPts val="700"/>
+              </a:spcBef>
+              <a:spcAft>
+                <a:spcPts val="250"/>
+              </a:spcAft>
+            </a:pPr>
+            <a:r>
+              <a:rPr sz="1100" b="1" i="0">
+                <a:solidFill>
+                  <a:srgbClr val="314359"/>
+                </a:solidFill>
+                <a:latin typeface="Times New Roman"/>
+              </a:rPr>
+              <a:t>Results</a:t>
+            </a:r>
+          </a:p>
+          <a:p>
+            <a:pPr marL="149162" indent="-149162">
+              <a:lnSpc>
+                <a:spcPct val="106000"/>
+              </a:lnSpc>
+              <a:spcAft>
+                <a:spcPts val="150"/>
+              </a:spcAft>
+            </a:pPr>
+            <a:r>
+              <a:rPr sz="869" b="1">
+                <a:solidFill>
+                  <a:srgbClr val="556A83"/>
+                </a:solidFill>
+                <a:latin typeface="Arial"/>
+              </a:rPr>
+              <a:t>✓  </a:t>
+            </a:r>
+            <a:r>
+              <a:rPr sz="869">
+                <a:solidFill>
+                  <a:srgbClr val="0E1620"/>
+                </a:solidFill>
+                <a:latin typeface="Arial"/>
+              </a:rPr>
+              <a:t>Built ~5.3m shares at ~50p average from spring 2024; core position from December 2024 — about six months before the takeover</a:t>
+            </a:r>
+          </a:p>
+          <a:p>
+            <a:pPr marL="149162" indent="-149162">
+              <a:lnSpc>
+                <a:spcPct val="106000"/>
+              </a:lnSpc>
+              <a:spcAft>
+                <a:spcPts val="150"/>
+              </a:spcAft>
+            </a:pPr>
+            <a:r>
+              <a:rPr sz="869" b="1">
+                <a:solidFill>
+                  <a:srgbClr val="556A83"/>
+                </a:solidFill>
+                <a:latin typeface="Arial"/>
+              </a:rPr>
+              <a:t>✓  </a:t>
+            </a:r>
+            <a:r>
+              <a:rPr sz="869">
+                <a:solidFill>
+                  <a:srgbClr val="0E1620"/>
+                </a:solidFill>
+                <a:latin typeface="Arial"/>
+              </a:rPr>
+              <a:t>A recommended cash takeover emerged in 2025 at ~81p per share</a:t>
+            </a:r>
+          </a:p>
+          <a:p>
+            <a:pPr marL="149162" indent="-149162">
+              <a:lnSpc>
+                <a:spcPct val="106000"/>
+              </a:lnSpc>
+              <a:spcAft>
+                <a:spcPts val="150"/>
+              </a:spcAft>
+            </a:pPr>
+            <a:r>
+              <a:rPr sz="869" b="1">
+                <a:solidFill>
+                  <a:srgbClr val="556A83"/>
+                </a:solidFill>
+                <a:latin typeface="Arial"/>
+              </a:rPr>
+              <a:t>✓  </a:t>
+            </a:r>
+            <a:r>
+              <a:rPr sz="869">
+                <a:solidFill>
+                  <a:srgbClr val="0E1620"/>
+                </a:solidFill>
+                <a:latin typeface="Arial"/>
+              </a:rPr>
+              <a:t>Realised the entire position into the offer at ~81p over June–July 2025</a:t>
+            </a:r>
+          </a:p>
+          <a:p>
+            <a:pPr marL="149162" indent="-149162">
+              <a:lnSpc>
+                <a:spcPct val="106000"/>
+              </a:lnSpc>
+              <a:spcAft>
+                <a:spcPts val="150"/>
+              </a:spcAft>
+            </a:pPr>
+            <a:r>
+              <a:rPr sz="869" b="1">
+                <a:solidFill>
+                  <a:srgbClr val="556A83"/>
+                </a:solidFill>
+                <a:latin typeface="Arial"/>
+              </a:rPr>
+              <a:t>✓  </a:t>
+            </a:r>
+            <a:r>
+              <a:rPr sz="869">
+                <a:solidFill>
+                  <a:srgbClr val="0E1620"/>
+                </a:solidFill>
+                <a:latin typeface="Arial"/>
+              </a:rPr>
+              <a:t>~1.6× money multiple, +62% gross (SEK 20.9m); money-weighted IRR ~234%</a:t>
+            </a:r>
+          </a:p>
+        </p:txBody>
+      </p:sp>
+      <p:sp>
+        <p:nvSpPr>
+          <p:cNvPr id="9" name="Rounded Rectangle 8"/>
+          <p:cNvSpPr/>
+          <p:nvPr/>
+        </p:nvSpPr>
+        <p:spPr>
+          <a:xfrm>
+            <a:off x="4983480" y="1783080"/>
+            <a:ext cx="4297680" cy="384048"/>
+          </a:xfrm>
+          <a:prstGeom prst="roundRect">
+            <a:avLst/>
+          </a:prstGeom>
+          <a:solidFill>
+            <a:srgbClr val="F6F7F9"/>
+          </a:solidFill>
+          <a:ln>
+            <a:noFill/>
+          </a:ln>
+          <a:effectLst/>
+        </p:spPr>
+        <p:txBody>
+          <a:bodyPr rtlCol="0" anchor="ctr"/>
+          <a:lstStyle/>
+          <a:p>
+            <a:pPr algn="ctr"/>
+          </a:p>
+        </p:txBody>
+      </p:sp>
+      <p:sp>
+        <p:nvSpPr>
+          <p:cNvPr id="10" name="TextBox 9"/>
+          <p:cNvSpPr txBox="1"/>
+          <p:nvPr/>
+        </p:nvSpPr>
+        <p:spPr>
+          <a:xfrm>
+            <a:off x="4983480" y="1783080"/>
+            <a:ext cx="4297680" cy="384048"/>
+          </a:xfrm>
+          <a:prstGeom prst="rect">
+            <a:avLst/>
+          </a:prstGeom>
+          <a:noFill/>
+        </p:spPr>
+        <p:txBody>
+          <a:bodyPr wrap="square" anchor="ctr" lIns="0" rIns="0" tIns="0" bIns="0">
+            <a:spAutoFit/>
+          </a:bodyPr>
+          <a:lstStyle/>
+          <a:p>
+            <a:pPr algn="ctr">
+              <a:lnSpc>
+                <a:spcPct val="110000"/>
+              </a:lnSpc>
+              <a:spcAft>
+                <a:spcPts val="0"/>
+              </a:spcAft>
+            </a:pPr>
+            <a:r>
+              <a:rPr sz="1250" b="1" i="0">
+                <a:solidFill>
+                  <a:srgbClr val="314359"/>
+                </a:solidFill>
+                <a:latin typeface="Times New Roman"/>
+              </a:rPr>
+              <a:t>IRR 234% · Money multiple 1.6×</a:t>
+            </a:r>
+          </a:p>
+        </p:txBody>
+      </p:sp>
+      <p:sp>
+        <p:nvSpPr>
+          <p:cNvPr id="11" name="TextBox 10"/>
+          <p:cNvSpPr txBox="1"/>
+          <p:nvPr/>
+        </p:nvSpPr>
+        <p:spPr>
+          <a:xfrm>
+            <a:off x="4983480" y="2350008"/>
+            <a:ext cx="4297680" cy="274320"/>
+          </a:xfrm>
+          <a:prstGeom prst="rect">
+            <a:avLst/>
+          </a:prstGeom>
+          <a:noFill/>
+        </p:spPr>
+        <p:txBody>
+          <a:bodyPr wrap="square" anchor="t" lIns="0" rIns="0" tIns="0" bIns="0">
+            <a:spAutoFit/>
+          </a:bodyPr>
+          <a:lstStyle/>
+          <a:p>
+            <a:pPr algn="ctr">
+              <a:lnSpc>
+                <a:spcPct val="110000"/>
+              </a:lnSpc>
+              <a:spcAft>
+                <a:spcPts val="0"/>
+              </a:spcAft>
+            </a:pPr>
+            <a:r>
+              <a:rPr sz="1100" b="1" i="0">
+                <a:solidFill>
+                  <a:srgbClr val="314359"/>
+                </a:solidFill>
+                <a:latin typeface="Times New Roman"/>
+              </a:rPr>
+              <a:t>Capital invested vs. realised proceeds</a:t>
+            </a:r>
+          </a:p>
+        </p:txBody>
+      </p:sp>
+      <p:sp>
+        <p:nvSpPr>
+          <p:cNvPr id="12" name="Rectangle 11"/>
+          <p:cNvSpPr/>
+          <p:nvPr/>
+        </p:nvSpPr>
+        <p:spPr>
+          <a:xfrm>
+            <a:off x="5074920" y="4773168"/>
+            <a:ext cx="4114800" cy="12700"/>
+          </a:xfrm>
+          <a:prstGeom prst="rect">
+            <a:avLst/>
+          </a:prstGeom>
+          <a:solidFill>
+            <a:srgbClr val="E2E5E9"/>
+          </a:solidFill>
+          <a:ln>
+            <a:noFill/>
+          </a:ln>
+          <a:effectLst/>
+        </p:spPr>
+        <p:txBody>
+          <a:bodyPr rtlCol="0" anchor="ctr"/>
+          <a:lstStyle/>
+          <a:p>
+            <a:pPr algn="ctr"/>
+          </a:p>
+        </p:txBody>
+      </p:sp>
+      <p:sp>
+        <p:nvSpPr>
+          <p:cNvPr id="13" name="Rectangle 12"/>
+          <p:cNvSpPr/>
+          <p:nvPr/>
+        </p:nvSpPr>
+        <p:spPr>
+          <a:xfrm>
+            <a:off x="5577840" y="3756092"/>
+            <a:ext cx="1051560" cy="1017076"/>
+          </a:xfrm>
+          <a:prstGeom prst="rect">
+            <a:avLst/>
+          </a:prstGeom>
+          <a:solidFill>
+            <a:srgbClr val="152130"/>
+          </a:solidFill>
+          <a:ln>
+            <a:noFill/>
+          </a:ln>
+          <a:effectLst/>
+        </p:spPr>
+        <p:txBody>
+          <a:bodyPr rtlCol="0" anchor="ctr"/>
+          <a:lstStyle/>
+          <a:p>
+            <a:pPr algn="ctr"/>
+          </a:p>
+        </p:txBody>
+      </p:sp>
+      <p:sp>
+        <p:nvSpPr>
+          <p:cNvPr id="14" name="TextBox 13"/>
+          <p:cNvSpPr txBox="1"/>
+          <p:nvPr/>
+        </p:nvSpPr>
+        <p:spPr>
+          <a:xfrm>
+            <a:off x="5303520" y="3481772"/>
+            <a:ext cx="1600200" cy="256032"/>
+          </a:xfrm>
+          <a:prstGeom prst="rect">
+            <a:avLst/>
+          </a:prstGeom>
+          <a:noFill/>
+        </p:spPr>
+        <p:txBody>
+          <a:bodyPr wrap="square" anchor="t" lIns="0" rIns="0" tIns="0" bIns="0">
+            <a:spAutoFit/>
+          </a:bodyPr>
+          <a:lstStyle/>
+          <a:p>
+            <a:pPr algn="ctr">
+              <a:lnSpc>
+                <a:spcPct val="110000"/>
+              </a:lnSpc>
+              <a:spcAft>
+                <a:spcPts val="0"/>
+              </a:spcAft>
+            </a:pPr>
+            <a:r>
+              <a:rPr sz="1300" b="1" i="0">
+                <a:solidFill>
+                  <a:srgbClr val="314359"/>
+                </a:solidFill>
+                <a:latin typeface="Times New Roman"/>
+              </a:rPr>
+              <a:t>35</a:t>
+            </a:r>
+          </a:p>
+        </p:txBody>
+      </p:sp>
+      <p:sp>
+        <p:nvSpPr>
+          <p:cNvPr id="15" name="TextBox 14"/>
+          <p:cNvSpPr txBox="1"/>
+          <p:nvPr/>
+        </p:nvSpPr>
+        <p:spPr>
+          <a:xfrm>
+            <a:off x="5074920" y="4828032"/>
+            <a:ext cx="2057400" cy="310896"/>
+          </a:xfrm>
+          <a:prstGeom prst="rect">
+            <a:avLst/>
+          </a:prstGeom>
+          <a:noFill/>
+        </p:spPr>
+        <p:txBody>
+          <a:bodyPr wrap="square" anchor="t" lIns="0" rIns="0" tIns="0" bIns="0">
+            <a:spAutoFit/>
+          </a:bodyPr>
+          <a:lstStyle/>
+          <a:p>
+            <a:pPr algn="ctr">
+              <a:lnSpc>
+                <a:spcPct val="110000"/>
+              </a:lnSpc>
+              <a:spcAft>
+                <a:spcPts val="0"/>
+              </a:spcAft>
+            </a:pPr>
+            <a:r>
+              <a:rPr sz="950" b="0" i="0">
+                <a:solidFill>
+                  <a:srgbClr val="0E1620"/>
+                </a:solidFill>
+                <a:latin typeface="Arial"/>
+              </a:rPr>
+              <a:t>Capital invested</a:t>
+            </a:r>
+          </a:p>
+        </p:txBody>
+      </p:sp>
+      <p:sp>
+        <p:nvSpPr>
+          <p:cNvPr id="16" name="Rectangle 15"/>
+          <p:cNvSpPr/>
+          <p:nvPr/>
+        </p:nvSpPr>
+        <p:spPr>
+          <a:xfrm>
+            <a:off x="7635240" y="3145846"/>
+            <a:ext cx="1051560" cy="1627322"/>
+          </a:xfrm>
+          <a:prstGeom prst="rect">
+            <a:avLst/>
+          </a:prstGeom>
+          <a:solidFill>
+            <a:srgbClr val="152130"/>
+          </a:solidFill>
+          <a:ln>
+            <a:noFill/>
+          </a:ln>
+          <a:effectLst/>
+        </p:spPr>
+        <p:txBody>
+          <a:bodyPr rtlCol="0" anchor="ctr"/>
+          <a:lstStyle/>
+          <a:p>
+            <a:pPr algn="ctr"/>
+          </a:p>
+        </p:txBody>
+      </p:sp>
+      <p:sp>
+        <p:nvSpPr>
+          <p:cNvPr id="17" name="TextBox 16"/>
+          <p:cNvSpPr txBox="1"/>
+          <p:nvPr/>
+        </p:nvSpPr>
+        <p:spPr>
+          <a:xfrm>
+            <a:off x="7360920" y="2871526"/>
+            <a:ext cx="1600200" cy="256032"/>
+          </a:xfrm>
+          <a:prstGeom prst="rect">
+            <a:avLst/>
+          </a:prstGeom>
+          <a:noFill/>
+        </p:spPr>
+        <p:txBody>
+          <a:bodyPr wrap="square" anchor="t" lIns="0" rIns="0" tIns="0" bIns="0">
+            <a:spAutoFit/>
+          </a:bodyPr>
+          <a:lstStyle/>
+          <a:p>
+            <a:pPr algn="ctr">
+              <a:lnSpc>
+                <a:spcPct val="110000"/>
+              </a:lnSpc>
+              <a:spcAft>
+                <a:spcPts val="0"/>
+              </a:spcAft>
+            </a:pPr>
+            <a:r>
+              <a:rPr sz="1300" b="1" i="0">
+                <a:solidFill>
+                  <a:srgbClr val="314359"/>
+                </a:solidFill>
+                <a:latin typeface="Times New Roman"/>
+              </a:rPr>
+              <a:t>56</a:t>
+            </a:r>
+          </a:p>
+        </p:txBody>
+      </p:sp>
+      <p:sp>
+        <p:nvSpPr>
+          <p:cNvPr id="18" name="TextBox 17"/>
+          <p:cNvSpPr txBox="1"/>
+          <p:nvPr/>
+        </p:nvSpPr>
+        <p:spPr>
+          <a:xfrm>
+            <a:off x="7132320" y="4828032"/>
+            <a:ext cx="2057400" cy="310896"/>
+          </a:xfrm>
+          <a:prstGeom prst="rect">
+            <a:avLst/>
+          </a:prstGeom>
+          <a:noFill/>
+        </p:spPr>
+        <p:txBody>
+          <a:bodyPr wrap="square" anchor="t" lIns="0" rIns="0" tIns="0" bIns="0">
+            <a:spAutoFit/>
+          </a:bodyPr>
+          <a:lstStyle/>
+          <a:p>
+            <a:pPr algn="ctr">
+              <a:lnSpc>
+                <a:spcPct val="110000"/>
+              </a:lnSpc>
+              <a:spcAft>
+                <a:spcPts val="0"/>
+              </a:spcAft>
+            </a:pPr>
+            <a:r>
+              <a:rPr sz="950" b="0" i="0">
+                <a:solidFill>
+                  <a:srgbClr val="0E1620"/>
+                </a:solidFill>
+                <a:latin typeface="Arial"/>
+              </a:rPr>
+              <a:t>Realised proceeds</a:t>
+            </a:r>
+          </a:p>
+        </p:txBody>
+      </p:sp>
+      <p:sp>
+        <p:nvSpPr>
+          <p:cNvPr id="19" name="TextBox 18"/>
+          <p:cNvSpPr txBox="1"/>
+          <p:nvPr/>
+        </p:nvSpPr>
+        <p:spPr>
+          <a:xfrm>
+            <a:off x="4983480" y="5157216"/>
+            <a:ext cx="4297680" cy="201168"/>
+          </a:xfrm>
+          <a:prstGeom prst="rect">
+            <a:avLst/>
+          </a:prstGeom>
+          <a:noFill/>
+        </p:spPr>
+        <p:txBody>
+          <a:bodyPr wrap="square" anchor="t" lIns="0" rIns="0" tIns="0" bIns="0">
+            <a:spAutoFit/>
+          </a:bodyPr>
+          <a:lstStyle/>
+          <a:p>
+            <a:pPr algn="l">
+              <a:lnSpc>
+                <a:spcPct val="110000"/>
+              </a:lnSpc>
+              <a:spcAft>
+                <a:spcPts val="0"/>
+              </a:spcAft>
+            </a:pPr>
+            <a:r>
+              <a:rPr sz="850" b="0" i="1">
+                <a:solidFill>
+                  <a:srgbClr val="556A83"/>
+                </a:solidFill>
+                <a:latin typeface="Arial"/>
+              </a:rPr>
+              <a:t>SEK m</a:t>
+            </a:r>
+          </a:p>
+        </p:txBody>
+      </p:sp>
+      <p:sp>
+        <p:nvSpPr>
+          <p:cNvPr id="20" name="TextBox 19"/>
+          <p:cNvSpPr txBox="1"/>
+          <p:nvPr/>
+        </p:nvSpPr>
+        <p:spPr>
+          <a:xfrm>
+            <a:off x="4983480" y="5029200"/>
+            <a:ext cx="4297680" cy="731520"/>
+          </a:xfrm>
+          <a:prstGeom prst="rect">
+            <a:avLst/>
+          </a:prstGeom>
+          <a:noFill/>
+        </p:spPr>
+        <p:txBody>
+          <a:bodyPr wrap="square" anchor="t" lIns="0" rIns="0" tIns="0" bIns="0">
+            <a:spAutoFit/>
+          </a:bodyPr>
+          <a:lstStyle/>
+          <a:p>
+            <a:pPr algn="ctr">
+              <a:lnSpc>
+                <a:spcPct val="110000"/>
+              </a:lnSpc>
+              <a:spcAft>
+                <a:spcPts val="0"/>
+              </a:spcAft>
+            </a:pPr>
+            <a:r>
+              <a:rPr sz="1200" b="1" i="0">
+                <a:solidFill>
+                  <a:srgbClr val="314359"/>
+                </a:solidFill>
+                <a:latin typeface="Times New Roman"/>
+              </a:rPr>
+              <a:t>Bought at ~50p; acquired at ~81p in a recommended takeover</a:t>
+            </a:r>
+          </a:p>
+        </p:txBody>
+      </p:sp>
+      <p:sp>
+        <p:nvSpPr>
+          <p:cNvPr id="21" name="TextBox 20"/>
+          <p:cNvSpPr txBox="1"/>
+          <p:nvPr/>
+        </p:nvSpPr>
+        <p:spPr>
+          <a:xfrm>
+            <a:off x="502920" y="6967728"/>
+            <a:ext cx="4846320" cy="274320"/>
+          </a:xfrm>
+          <a:prstGeom prst="rect">
+            <a:avLst/>
+          </a:prstGeom>
+          <a:noFill/>
+        </p:spPr>
+        <p:txBody>
+          <a:bodyPr wrap="square" anchor="t" lIns="0" rIns="0" tIns="0" bIns="0">
+            <a:spAutoFit/>
+          </a:bodyPr>
+          <a:lstStyle/>
+          <a:p>
+            <a:pPr algn="l">
+              <a:lnSpc>
+                <a:spcPct val="100000"/>
+              </a:lnSpc>
+              <a:spcAft>
+                <a:spcPts val="0"/>
+              </a:spcAft>
+            </a:pPr>
+            <a:r>
+              <a:rPr sz="750" b="0" i="1">
+                <a:solidFill>
+                  <a:srgbClr val="556A83"/>
+                </a:solidFill>
+                <a:latin typeface="Arial"/>
+              </a:rPr>
+              <a:t>Source: AIPFII transaction history (Apr 2024 – Jul 2025). IRR is money-weighted; the short opportunistic hold lifts the annualised figure. Past performance is not indicative of future results.</a:t>
             </a:r>
           </a:p>
         </p:txBody>
@@ -6170,7 +6680,7 @@
             <a:avLst/>
           </a:prstGeom>
           <a:solidFill>
-            <a:srgbClr val="FFFFFF"/>
+            <a:srgbClr val="152130"/>
           </a:solidFill>
           <a:ln>
             <a:noFill/>
@@ -6187,7 +6697,7 @@
       </p:sp>
       <p:pic>
         <p:nvPicPr>
-          <p:cNvPr id="3" name="Picture 2" descr="mark_dark.png"/>
+          <p:cNvPr id="3" name="Picture 2" descr="logo_white.png"/>
           <p:cNvPicPr>
             <a:picLocks noChangeAspect="1"/>
           </p:cNvPicPr>
@@ -6201,8 +6711,8 @@
         </p:blipFill>
         <p:spPr>
           <a:xfrm>
-            <a:off x="457200" y="219456"/>
-            <a:ext cx="280009" cy="237744"/>
+            <a:off x="548640" y="502920"/>
+            <a:ext cx="2337572" cy="502920"/>
           </a:xfrm>
           <a:prstGeom prst="rect">
             <a:avLst/>
@@ -6211,62 +6721,20 @@
       </p:pic>
       <p:sp>
         <p:nvSpPr>
-          <p:cNvPr id="4" name="TextBox 3"/>
-          <p:cNvSpPr txBox="1"/>
-          <p:nvPr/>
-        </p:nvSpPr>
-        <p:spPr>
-          <a:xfrm>
-            <a:off x="841248" y="246888"/>
-            <a:ext cx="5486400" cy="274320"/>
-          </a:xfrm>
-          <a:prstGeom prst="rect">
-            <a:avLst/>
-          </a:prstGeom>
-          <a:noFill/>
-        </p:spPr>
-        <p:txBody>
-          <a:bodyPr wrap="square" anchor="t" lIns="0" rIns="0" tIns="0" bIns="0">
-            <a:spAutoFit/>
-          </a:bodyPr>
-          <a:lstStyle/>
-          <a:p>
-            <a:pPr algn="l">
-              <a:lnSpc>
-                <a:spcPct val="110000"/>
-              </a:lnSpc>
-              <a:spcAft>
-                <a:spcPts val="0"/>
-              </a:spcAft>
-            </a:pPr>
-            <a:r>
-              <a:rPr sz="1100" b="0" i="0">
-                <a:solidFill>
-                  <a:srgbClr val="556A83"/>
-                </a:solidFill>
-                <a:latin typeface="Arial"/>
-              </a:rPr>
-              <a:t>Case · Öresund era</a:t>
-            </a:r>
-          </a:p>
-        </p:txBody>
-      </p:sp>
-      <p:sp>
-        <p:nvSpPr>
-          <p:cNvPr id="5" name="Rectangle 4"/>
+          <p:cNvPr id="4" name="Rectangle 3"/>
           <p:cNvSpPr/>
           <p:nvPr/>
         </p:nvSpPr>
         <p:spPr>
           <a:xfrm>
-            <a:off x="0" y="566928"/>
-            <a:ext cx="9753904" cy="914400"/>
+            <a:off x="566928" y="2788920"/>
+            <a:ext cx="457200" cy="27940"/>
           </a:xfrm>
           <a:prstGeom prst="rect">
             <a:avLst/>
           </a:prstGeom>
           <a:solidFill>
-            <a:srgbClr val="F6F7F9"/>
+            <a:srgbClr val="556A83"/>
           </a:solidFill>
           <a:ln>
             <a:noFill/>
@@ -6283,14 +6751,14 @@
       </p:sp>
       <p:sp>
         <p:nvSpPr>
-          <p:cNvPr id="6" name="TextBox 5"/>
+          <p:cNvPr id="5" name="TextBox 4"/>
           <p:cNvSpPr txBox="1"/>
           <p:nvPr/>
         </p:nvSpPr>
         <p:spPr>
           <a:xfrm>
-            <a:off x="502920" y="713232"/>
-            <a:ext cx="8778240" cy="640080"/>
+            <a:off x="548640" y="2971800"/>
+            <a:ext cx="8686800" cy="457200"/>
           </a:xfrm>
           <a:prstGeom prst="rect">
             <a:avLst/>
@@ -6312,27 +6780,27 @@
               </a:spcAft>
             </a:pPr>
             <a:r>
-              <a:rPr sz="2600" b="0" i="0" spc="-78">
-                <a:solidFill>
-                  <a:srgbClr val="314359"/>
-                </a:solidFill>
-                <a:latin typeface="Times New Roman"/>
-              </a:rPr>
-              <a:t>Investment case study: Custos</a:t>
-            </a:r>
-          </a:p>
-        </p:txBody>
-      </p:sp>
-      <p:sp>
-        <p:nvSpPr>
-          <p:cNvPr id="7" name="TextBox 6"/>
+              <a:rPr sz="1300" b="0" i="0">
+                <a:solidFill>
+                  <a:srgbClr val="556A83"/>
+                </a:solidFill>
+                <a:latin typeface="Arial"/>
+              </a:rPr>
+              <a:t>PART II · INVESTMENT AB ÖRESUND (1994–2007)</a:t>
+            </a:r>
+          </a:p>
+        </p:txBody>
+      </p:sp>
+      <p:sp>
+        <p:nvSpPr>
+          <p:cNvPr id="6" name="TextBox 5"/>
           <p:cNvSpPr txBox="1"/>
           <p:nvPr/>
         </p:nvSpPr>
         <p:spPr>
           <a:xfrm>
-            <a:off x="5486400" y="6967728"/>
-            <a:ext cx="4023360" cy="274320"/>
+            <a:off x="548640" y="3291840"/>
+            <a:ext cx="8686800" cy="1280160"/>
           </a:xfrm>
           <a:prstGeom prst="rect">
             <a:avLst/>
@@ -6345,7 +6813,7 @@
           </a:bodyPr>
           <a:lstStyle/>
           <a:p>
-            <a:pPr algn="r">
+            <a:pPr algn="l">
               <a:lnSpc>
                 <a:spcPct val="110000"/>
               </a:lnSpc>
@@ -6354,678 +6822,13 @@
               </a:spcAft>
             </a:pPr>
             <a:r>
-              <a:rPr sz="850" b="0" i="0">
-                <a:solidFill>
-                  <a:srgbClr val="556A83"/>
-                </a:solidFill>
-                <a:latin typeface="Arial"/>
-              </a:rPr>
-              <a:t>Strictly confidential          11</a:t>
-            </a:r>
-          </a:p>
-        </p:txBody>
-      </p:sp>
-      <p:sp>
-        <p:nvSpPr>
-          <p:cNvPr id="8" name="TextBox 7"/>
-          <p:cNvSpPr txBox="1"/>
-          <p:nvPr/>
-        </p:nvSpPr>
-        <p:spPr>
-          <a:xfrm>
-            <a:off x="502920" y="1783080"/>
-            <a:ext cx="4160520" cy="5120640"/>
-          </a:xfrm>
-          <a:prstGeom prst="rect">
-            <a:avLst/>
-          </a:prstGeom>
-          <a:noFill/>
-        </p:spPr>
-        <p:txBody>
-          <a:bodyPr wrap="square" anchor="t" lIns="0" rIns="0" tIns="0" bIns="0">
-            <a:spAutoFit/>
-          </a:bodyPr>
-          <a:lstStyle/>
-          <a:p>
-            <a:pPr algn="l">
-              <a:lnSpc>
-                <a:spcPct val="110000"/>
-              </a:lnSpc>
-              <a:spcBef>
-                <a:spcPts val="0"/>
-              </a:spcBef>
-              <a:spcAft>
-                <a:spcPts val="250"/>
-              </a:spcAft>
-            </a:pPr>
-            <a:r>
-              <a:rPr sz="1100" b="1" i="0">
-                <a:solidFill>
-                  <a:srgbClr val="314359"/>
+              <a:rPr sz="3400" b="0" i="1" spc="-102">
+                <a:solidFill>
+                  <a:srgbClr val="E2E5E9"/>
                 </a:solidFill>
                 <a:latin typeface="Times New Roman"/>
               </a:rPr>
-              <a:t>Company description</a:t>
-            </a:r>
-          </a:p>
-          <a:p>
-            <a:pPr algn="l">
-              <a:lnSpc>
-                <a:spcPct val="108000"/>
-              </a:lnSpc>
-              <a:spcAft>
-                <a:spcPts val="200"/>
-              </a:spcAft>
-            </a:pPr>
-            <a:r>
-              <a:rPr sz="869" b="0" i="0">
-                <a:solidFill>
-                  <a:srgbClr val="0E1620"/>
-                </a:solidFill>
-                <a:latin typeface="Arial"/>
-              </a:rPr>
-              <a:t>Custos was a Swedish listed investment company holding a portfolio of listed companies. It traded at a significant discount to net asset value and had an inefficient capital structure.</a:t>
-            </a:r>
-          </a:p>
-          <a:p>
-            <a:pPr algn="l">
-              <a:lnSpc>
-                <a:spcPct val="110000"/>
-              </a:lnSpc>
-              <a:spcBef>
-                <a:spcPts val="700"/>
-              </a:spcBef>
-              <a:spcAft>
-                <a:spcPts val="250"/>
-              </a:spcAft>
-            </a:pPr>
-            <a:r>
-              <a:rPr sz="1100" b="1" i="0">
-                <a:solidFill>
-                  <a:srgbClr val="314359"/>
-                </a:solidFill>
-                <a:latin typeface="Times New Roman"/>
-              </a:rPr>
-              <a:t>Recognized opportunities</a:t>
-            </a:r>
-          </a:p>
-          <a:p>
-            <a:pPr marL="149162" indent="-149162">
-              <a:lnSpc>
-                <a:spcPct val="106000"/>
-              </a:lnSpc>
-              <a:spcAft>
-                <a:spcPts val="150"/>
-              </a:spcAft>
-            </a:pPr>
-            <a:r>
-              <a:rPr sz="869" b="1">
-                <a:solidFill>
-                  <a:srgbClr val="556A83"/>
-                </a:solidFill>
-                <a:latin typeface="Arial"/>
-              </a:rPr>
-              <a:t>›  </a:t>
-            </a:r>
-            <a:r>
-              <a:rPr sz="869">
-                <a:solidFill>
-                  <a:srgbClr val="0E1620"/>
-                </a:solidFill>
-                <a:latin typeface="Arial"/>
-              </a:rPr>
-              <a:t>Investment companies traded at a discount to NAV</a:t>
-            </a:r>
-          </a:p>
-          <a:p>
-            <a:pPr marL="149162" indent="-149162">
-              <a:lnSpc>
-                <a:spcPct val="106000"/>
-              </a:lnSpc>
-              <a:spcAft>
-                <a:spcPts val="150"/>
-              </a:spcAft>
-            </a:pPr>
-            <a:r>
-              <a:rPr sz="869" b="1">
-                <a:solidFill>
-                  <a:srgbClr val="556A83"/>
-                </a:solidFill>
-                <a:latin typeface="Arial"/>
-              </a:rPr>
-              <a:t>›  </a:t>
-            </a:r>
-            <a:r>
-              <a:rPr sz="869">
-                <a:solidFill>
-                  <a:srgbClr val="0E1620"/>
-                </a:solidFill>
-                <a:latin typeface="Arial"/>
-              </a:rPr>
-              <a:t>Inefficient capital structure</a:t>
-            </a:r>
-          </a:p>
-          <a:p>
-            <a:pPr marL="149162" indent="-149162">
-              <a:lnSpc>
-                <a:spcPct val="106000"/>
-              </a:lnSpc>
-              <a:spcAft>
-                <a:spcPts val="150"/>
-              </a:spcAft>
-            </a:pPr>
-            <a:r>
-              <a:rPr sz="869" b="1">
-                <a:solidFill>
-                  <a:srgbClr val="556A83"/>
-                </a:solidFill>
-                <a:latin typeface="Arial"/>
-              </a:rPr>
-              <a:t>›  </a:t>
-            </a:r>
-            <a:r>
-              <a:rPr sz="869">
-                <a:solidFill>
-                  <a:srgbClr val="0E1620"/>
-                </a:solidFill>
-                <a:latin typeface="Arial"/>
-              </a:rPr>
-              <a:t>An interesting portfolio of companies not optimally managed</a:t>
-            </a:r>
-          </a:p>
-          <a:p>
-            <a:pPr marL="149162" indent="-149162">
-              <a:lnSpc>
-                <a:spcPct val="106000"/>
-              </a:lnSpc>
-              <a:spcAft>
-                <a:spcPts val="150"/>
-              </a:spcAft>
-            </a:pPr>
-            <a:r>
-              <a:rPr sz="869" b="1">
-                <a:solidFill>
-                  <a:srgbClr val="556A83"/>
-                </a:solidFill>
-                <a:latin typeface="Arial"/>
-              </a:rPr>
-              <a:t>›  </a:t>
-            </a:r>
-            <a:r>
-              <a:rPr sz="869">
-                <a:solidFill>
-                  <a:srgbClr val="0E1620"/>
-                </a:solidFill>
-                <a:latin typeface="Arial"/>
-              </a:rPr>
-              <a:t>Opportunity to buy the underlying assets at a ~30% discount</a:t>
-            </a:r>
-          </a:p>
-          <a:p>
-            <a:pPr marL="149162" indent="-149162">
-              <a:lnSpc>
-                <a:spcPct val="106000"/>
-              </a:lnSpc>
-              <a:spcAft>
-                <a:spcPts val="150"/>
-              </a:spcAft>
-            </a:pPr>
-            <a:r>
-              <a:rPr sz="869" b="1">
-                <a:solidFill>
-                  <a:srgbClr val="556A83"/>
-                </a:solidFill>
-                <a:latin typeface="Arial"/>
-              </a:rPr>
-              <a:t>›  </a:t>
-            </a:r>
-            <a:r>
-              <a:rPr sz="869">
-                <a:solidFill>
-                  <a:srgbClr val="0E1620"/>
-                </a:solidFill>
-                <a:latin typeface="Arial"/>
-              </a:rPr>
-              <a:t>The largest shareholder, Skanska, had sold its holding in 1994</a:t>
-            </a:r>
-          </a:p>
-          <a:p>
-            <a:pPr marL="149162" indent="-149162">
-              <a:lnSpc>
-                <a:spcPct val="106000"/>
-              </a:lnSpc>
-              <a:spcAft>
-                <a:spcPts val="150"/>
-              </a:spcAft>
-            </a:pPr>
-            <a:r>
-              <a:rPr sz="869" b="1">
-                <a:solidFill>
-                  <a:srgbClr val="556A83"/>
-                </a:solidFill>
-                <a:latin typeface="Arial"/>
-              </a:rPr>
-              <a:t>›  </a:t>
-            </a:r>
-            <a:r>
-              <a:rPr sz="869">
-                <a:solidFill>
-                  <a:srgbClr val="0E1620"/>
-                </a:solidFill>
-                <a:latin typeface="Arial"/>
-              </a:rPr>
-              <a:t>The board was not focused on creating shareholder value</a:t>
-            </a:r>
-          </a:p>
-          <a:p>
-            <a:pPr algn="l">
-              <a:lnSpc>
-                <a:spcPct val="110000"/>
-              </a:lnSpc>
-              <a:spcBef>
-                <a:spcPts val="700"/>
-              </a:spcBef>
-              <a:spcAft>
-                <a:spcPts val="250"/>
-              </a:spcAft>
-            </a:pPr>
-            <a:r>
-              <a:rPr sz="1100" b="1" i="0">
-                <a:solidFill>
-                  <a:srgbClr val="314359"/>
-                </a:solidFill>
-                <a:latin typeface="Times New Roman"/>
-              </a:rPr>
-              <a:t>Initial plan</a:t>
-            </a:r>
-          </a:p>
-          <a:p>
-            <a:pPr algn="l">
-              <a:lnSpc>
-                <a:spcPct val="108000"/>
-              </a:lnSpc>
-              <a:spcAft>
-                <a:spcPts val="200"/>
-              </a:spcAft>
-            </a:pPr>
-            <a:r>
-              <a:rPr sz="869" b="0" i="0">
-                <a:solidFill>
-                  <a:srgbClr val="0E1620"/>
-                </a:solidFill>
-                <a:latin typeface="Arial"/>
-              </a:rPr>
-              <a:t>1) Increase shareholder value through extended engagement in holdings via active board management; 2) form a more heterogeneous board to enhance dialogue and decision-making; 3) reduce the discount to NAV through, if necessary, redemption of holdings/cash and synthetic buy-back programs.</a:t>
-            </a:r>
-          </a:p>
-          <a:p>
-            <a:pPr algn="l">
-              <a:lnSpc>
-                <a:spcPct val="110000"/>
-              </a:lnSpc>
-              <a:spcBef>
-                <a:spcPts val="700"/>
-              </a:spcBef>
-              <a:spcAft>
-                <a:spcPts val="250"/>
-              </a:spcAft>
-            </a:pPr>
-            <a:r>
-              <a:rPr sz="1100" b="1" i="0">
-                <a:solidFill>
-                  <a:srgbClr val="314359"/>
-                </a:solidFill>
-                <a:latin typeface="Times New Roman"/>
-              </a:rPr>
-              <a:t>Results</a:t>
-            </a:r>
-          </a:p>
-          <a:p>
-            <a:pPr marL="149162" indent="-149162">
-              <a:lnSpc>
-                <a:spcPct val="106000"/>
-              </a:lnSpc>
-              <a:spcAft>
-                <a:spcPts val="150"/>
-              </a:spcAft>
-            </a:pPr>
-            <a:r>
-              <a:rPr sz="869" b="1">
-                <a:solidFill>
-                  <a:srgbClr val="556A83"/>
-                </a:solidFill>
-                <a:latin typeface="Arial"/>
-              </a:rPr>
-              <a:t>✓  </a:t>
-            </a:r>
-            <a:r>
-              <a:rPr sz="869">
-                <a:solidFill>
-                  <a:srgbClr val="0E1620"/>
-                </a:solidFill>
-                <a:latin typeface="Arial"/>
-              </a:rPr>
-              <a:t>New board and CEO (Christer Gardell); active ownership reduced the NAV discount</a:t>
-            </a:r>
-          </a:p>
-          <a:p>
-            <a:pPr marL="149162" indent="-149162">
-              <a:lnSpc>
-                <a:spcPct val="106000"/>
-              </a:lnSpc>
-              <a:spcAft>
-                <a:spcPts val="150"/>
-              </a:spcAft>
-            </a:pPr>
-            <a:r>
-              <a:rPr sz="869" b="1">
-                <a:solidFill>
-                  <a:srgbClr val="556A83"/>
-                </a:solidFill>
-                <a:latin typeface="Arial"/>
-              </a:rPr>
-              <a:t>✓  </a:t>
-            </a:r>
-            <a:r>
-              <a:rPr sz="869">
-                <a:solidFill>
-                  <a:srgbClr val="0E1620"/>
-                </a:solidFill>
-                <a:latin typeface="Arial"/>
-              </a:rPr>
-              <a:t>Distributed Hufvudstaden to shareholders; sold ASG to Deutsche Post</a:t>
-            </a:r>
-          </a:p>
-          <a:p>
-            <a:pPr marL="149162" indent="-149162">
-              <a:lnSpc>
-                <a:spcPct val="106000"/>
-              </a:lnSpc>
-              <a:spcAft>
-                <a:spcPts val="150"/>
-              </a:spcAft>
-            </a:pPr>
-            <a:r>
-              <a:rPr sz="869" b="1">
-                <a:solidFill>
-                  <a:srgbClr val="556A83"/>
-                </a:solidFill>
-                <a:latin typeface="Arial"/>
-              </a:rPr>
-              <a:t>✓  </a:t>
-            </a:r>
-            <a:r>
-              <a:rPr sz="869">
-                <a:solidFill>
-                  <a:srgbClr val="0E1620"/>
-                </a:solidFill>
-                <a:latin typeface="Arial"/>
-              </a:rPr>
-              <a:t>Founded Acando; synthetic buy-back distributing SEK 1.6bn</a:t>
-            </a:r>
-          </a:p>
-          <a:p>
-            <a:pPr marL="149162" indent="-149162">
-              <a:lnSpc>
-                <a:spcPct val="106000"/>
-              </a:lnSpc>
-              <a:spcAft>
-                <a:spcPts val="150"/>
-              </a:spcAft>
-            </a:pPr>
-            <a:r>
-              <a:rPr sz="869" b="1">
-                <a:solidFill>
-                  <a:srgbClr val="556A83"/>
-                </a:solidFill>
-                <a:latin typeface="Arial"/>
-              </a:rPr>
-              <a:t>✓  </a:t>
-            </a:r>
-            <a:r>
-              <a:rPr sz="869">
-                <a:solidFill>
-                  <a:srgbClr val="0E1620"/>
-                </a:solidFill>
-                <a:latin typeface="Arial"/>
-              </a:rPr>
-              <a:t>~SEK 3.5bn distributed via buy-back and the distribution of SCA</a:t>
-            </a:r>
-          </a:p>
-          <a:p>
-            <a:pPr marL="149162" indent="-149162">
-              <a:lnSpc>
-                <a:spcPct val="106000"/>
-              </a:lnSpc>
-              <a:spcAft>
-                <a:spcPts val="150"/>
-              </a:spcAft>
-            </a:pPr>
-            <a:r>
-              <a:rPr sz="869" b="1">
-                <a:solidFill>
-                  <a:srgbClr val="556A83"/>
-                </a:solidFill>
-                <a:latin typeface="Arial"/>
-              </a:rPr>
-              <a:t>✓  </a:t>
-            </a:r>
-            <a:r>
-              <a:rPr sz="869">
-                <a:solidFill>
-                  <a:srgbClr val="0E1620"/>
-                </a:solidFill>
-                <a:latin typeface="Arial"/>
-              </a:rPr>
-              <a:t>Bilia and Acando distributed to shareholders</a:t>
-            </a:r>
-          </a:p>
-          <a:p>
-            <a:pPr marL="149162" indent="-149162">
-              <a:lnSpc>
-                <a:spcPct val="106000"/>
-              </a:lnSpc>
-              <a:spcAft>
-                <a:spcPts val="150"/>
-              </a:spcAft>
-            </a:pPr>
-            <a:r>
-              <a:rPr sz="869" b="1">
-                <a:solidFill>
-                  <a:srgbClr val="556A83"/>
-                </a:solidFill>
-                <a:latin typeface="Arial"/>
-              </a:rPr>
-              <a:t>✓  </a:t>
-            </a:r>
-            <a:r>
-              <a:rPr sz="869">
-                <a:solidFill>
-                  <a:srgbClr val="0E1620"/>
-                </a:solidFill>
-                <a:latin typeface="Arial"/>
-              </a:rPr>
-              <a:t>Custos ultimately merged with Öresund</a:t>
-            </a:r>
-          </a:p>
-        </p:txBody>
-      </p:sp>
-      <p:sp>
-        <p:nvSpPr>
-          <p:cNvPr id="9" name="Rounded Rectangle 8"/>
-          <p:cNvSpPr/>
-          <p:nvPr/>
-        </p:nvSpPr>
-        <p:spPr>
-          <a:xfrm>
-            <a:off x="4983480" y="1783080"/>
-            <a:ext cx="4297680" cy="384048"/>
-          </a:xfrm>
-          <a:prstGeom prst="roundRect">
-            <a:avLst/>
-          </a:prstGeom>
-          <a:solidFill>
-            <a:srgbClr val="F6F7F9"/>
-          </a:solidFill>
-          <a:ln>
-            <a:noFill/>
-          </a:ln>
-          <a:effectLst/>
-        </p:spPr>
-        <p:txBody>
-          <a:bodyPr rtlCol="0" anchor="ctr"/>
-          <a:lstStyle/>
-          <a:p>
-            <a:pPr algn="ctr"/>
-          </a:p>
-        </p:txBody>
-      </p:sp>
-      <p:sp>
-        <p:nvSpPr>
-          <p:cNvPr id="10" name="TextBox 9"/>
-          <p:cNvSpPr txBox="1"/>
-          <p:nvPr/>
-        </p:nvSpPr>
-        <p:spPr>
-          <a:xfrm>
-            <a:off x="4983480" y="1783080"/>
-            <a:ext cx="4297680" cy="384048"/>
-          </a:xfrm>
-          <a:prstGeom prst="rect">
-            <a:avLst/>
-          </a:prstGeom>
-          <a:noFill/>
-        </p:spPr>
-        <p:txBody>
-          <a:bodyPr wrap="square" anchor="ctr" lIns="0" rIns="0" tIns="0" bIns="0">
-            <a:spAutoFit/>
-          </a:bodyPr>
-          <a:lstStyle/>
-          <a:p>
-            <a:pPr algn="ctr">
-              <a:lnSpc>
-                <a:spcPct val="110000"/>
-              </a:lnSpc>
-              <a:spcAft>
-                <a:spcPts val="0"/>
-              </a:spcAft>
-            </a:pPr>
-            <a:r>
-              <a:rPr sz="1250" b="1" i="0">
-                <a:solidFill>
-                  <a:srgbClr val="314359"/>
-                </a:solidFill>
-                <a:latin typeface="Times New Roman"/>
-              </a:rPr>
-              <a:t>IRR 58.9% · 2000–2004</a:t>
-            </a:r>
-          </a:p>
-        </p:txBody>
-      </p:sp>
-      <p:pic>
-        <p:nvPicPr>
-          <p:cNvPr id="11" name="Picture 10" descr="custos_line.png"/>
-          <p:cNvPicPr>
-            <a:picLocks noChangeAspect="1"/>
-          </p:cNvPicPr>
-          <p:nvPr/>
-        </p:nvPicPr>
-        <p:blipFill>
-          <a:blip r:embed="rId3"/>
-          <a:stretch>
-            <a:fillRect/>
-          </a:stretch>
-        </p:blipFill>
-        <p:spPr>
-          <a:xfrm>
-            <a:off x="4983480" y="2276856"/>
-            <a:ext cx="4297680" cy="2479862"/>
-          </a:xfrm>
-          <a:prstGeom prst="rect">
-            <a:avLst/>
-          </a:prstGeom>
-        </p:spPr>
-      </p:pic>
-      <p:sp>
-        <p:nvSpPr>
-          <p:cNvPr id="12" name="TextBox 11"/>
-          <p:cNvSpPr txBox="1"/>
-          <p:nvPr/>
-        </p:nvSpPr>
-        <p:spPr>
-          <a:xfrm>
-            <a:off x="4983480" y="4848158"/>
-            <a:ext cx="4297680" cy="457200"/>
-          </a:xfrm>
-          <a:prstGeom prst="rect">
-            <a:avLst/>
-          </a:prstGeom>
-          <a:noFill/>
-        </p:spPr>
-        <p:txBody>
-          <a:bodyPr wrap="square" anchor="t" lIns="0" rIns="0" tIns="0" bIns="0">
-            <a:spAutoFit/>
-          </a:bodyPr>
-          <a:lstStyle/>
-          <a:p>
-            <a:pPr algn="ctr">
-              <a:lnSpc>
-                <a:spcPct val="110000"/>
-              </a:lnSpc>
-              <a:spcAft>
-                <a:spcPts val="0"/>
-              </a:spcAft>
-            </a:pPr>
-            <a:r>
-              <a:rPr sz="1200" b="1" i="0">
-                <a:solidFill>
-                  <a:srgbClr val="314359"/>
-                </a:solidFill>
-                <a:latin typeface="Times New Roman"/>
-              </a:rPr>
-              <a:t>≈ SEK 11bn of shareholder value created over nine years</a:t>
-            </a:r>
-          </a:p>
-        </p:txBody>
-      </p:sp>
-      <p:sp>
-        <p:nvSpPr>
-          <p:cNvPr id="13" name="TextBox 12"/>
-          <p:cNvSpPr txBox="1"/>
-          <p:nvPr/>
-        </p:nvSpPr>
-        <p:spPr>
-          <a:xfrm>
-            <a:off x="502920" y="6967728"/>
-            <a:ext cx="4846320" cy="274320"/>
-          </a:xfrm>
-          <a:prstGeom prst="rect">
-            <a:avLst/>
-          </a:prstGeom>
-          <a:noFill/>
-        </p:spPr>
-        <p:txBody>
-          <a:bodyPr wrap="square" anchor="t" lIns="0" rIns="0" tIns="0" bIns="0">
-            <a:spAutoFit/>
-          </a:bodyPr>
-          <a:lstStyle/>
-          <a:p>
-            <a:pPr algn="l">
-              <a:lnSpc>
-                <a:spcPct val="100000"/>
-              </a:lnSpc>
-              <a:spcAft>
-                <a:spcPts val="0"/>
-              </a:spcAft>
-            </a:pPr>
-            <a:r>
-              <a:rPr sz="750" b="0" i="1">
-                <a:solidFill>
-                  <a:srgbClr val="556A83"/>
-                </a:solidFill>
-                <a:latin typeface="Arial"/>
-              </a:rPr>
-              <a:t>Note: 9 SEK ≈ 1€. IRR unleveraged and net of all costs. Executed by members of the team at Investment AB Öresund.</a:t>
+              <a:t>Earlier track record</a:t>
             </a:r>
           </a:p>
         </p:txBody>
@@ -7211,7 +7014,7 @@
                 </a:solidFill>
                 <a:latin typeface="Times New Roman"/>
               </a:rPr>
-              <a:t>Investment case study: Johnson Pump</a:t>
+              <a:t>Investment case study: Custos</a:t>
             </a:r>
           </a:p>
         </p:txBody>
@@ -7317,7 +7120,7 @@
                 </a:solidFill>
                 <a:latin typeface="Arial"/>
               </a:rPr>
-              <a:t>Johnson Pump was a traditional industrial business — a pump OEM with an extensive sales force and a strong brand. It had suffered profitability issues but had started to recover, with revenues of SEK 647m and a negative EBIT.</a:t>
+              <a:t>Custos was a Swedish listed investment company holding a portfolio of listed companies. It traded at a significant discount to net asset value and had an inefficient capital structure.</a:t>
             </a:r>
           </a:p>
           <a:p>
@@ -7367,7 +7170,7 @@
                 </a:solidFill>
                 <a:latin typeface="Arial"/>
               </a:rPr>
-              <a:t>Low profitability was largely a cost issue — customers kept buying and the gross margin was decent</a:t>
+              <a:t>Investment companies traded at a discount to NAV</a:t>
             </a:r>
           </a:p>
           <a:p>
@@ -7395,7 +7198,7 @@
                 </a:solidFill>
                 <a:latin typeface="Arial"/>
               </a:rPr>
-              <a:t>Significant upside on cost in both factories and sales offices</a:t>
+              <a:t>Inefficient capital structure</a:t>
             </a:r>
           </a:p>
           <a:p>
@@ -7423,7 +7226,7 @@
                 </a:solidFill>
                 <a:latin typeface="Arial"/>
               </a:rPr>
-              <a:t>The sales force could be leveraged with a wider product range (R&amp;D, 3rd-party products, M&amp;A)</a:t>
+              <a:t>An interesting portfolio of companies not optimally managed</a:t>
             </a:r>
           </a:p>
           <a:p>
@@ -7451,7 +7254,7 @@
                 </a:solidFill>
                 <a:latin typeface="Arial"/>
               </a:rPr>
-              <a:t>Market segmentation should reveal further niche potential</a:t>
+              <a:t>Opportunity to buy the underlying assets at a ~30% discount</a:t>
             </a:r>
           </a:p>
           <a:p>
@@ -7479,7 +7282,35 @@
                 </a:solidFill>
                 <a:latin typeface="Arial"/>
               </a:rPr>
-              <a:t>Geographic expansion to follow customers moving to low-cost countries</a:t>
+              <a:t>The largest shareholder, Skanska, had sold its holding in 1994</a:t>
+            </a:r>
+          </a:p>
+          <a:p>
+            <a:pPr marL="149162" indent="-149162">
+              <a:lnSpc>
+                <a:spcPct val="106000"/>
+              </a:lnSpc>
+              <a:spcAft>
+                <a:spcPts val="150"/>
+              </a:spcAft>
+            </a:pPr>
+            <a:r>
+              <a:rPr sz="869" b="1">
+                <a:solidFill>
+                  <a:srgbClr val="556A83"/>
+                </a:solidFill>
+                <a:latin typeface="Arial"/>
+              </a:rPr>
+              <a:t>›  </a:t>
+            </a:r>
+            <a:r>
+              <a:rPr sz="869">
+                <a:solidFill>
+                  <a:srgbClr val="0E1620"/>
+                </a:solidFill>
+                <a:latin typeface="Arial"/>
+              </a:rPr>
+              <a:t>The board was not focused on creating shareholder value</a:t>
             </a:r>
           </a:p>
           <a:p>
@@ -7520,7 +7351,7 @@
                 </a:solidFill>
                 <a:latin typeface="Arial"/>
               </a:rPr>
-              <a:t>Reduce costs in factories and sales offices, build a uniform sales process and a simplified product range, expand the range and geography, and grow in adjacencies through M&amp;A.</a:t>
+              <a:t>1) Increase shareholder value through extended engagement in holdings via active board management; 2) form a more heterogeneous board to enhance dialogue and decision-making; 3) reduce the discount to NAV through, if necessary, redemption of holdings/cash and synthetic buy-back programs.</a:t>
             </a:r>
           </a:p>
           <a:p>
@@ -7570,7 +7401,7 @@
                 </a:solidFill>
                 <a:latin typeface="Arial"/>
               </a:rPr>
-              <a:t>New ERP system (2002); component manufacturing moved to India (2003)</a:t>
+              <a:t>New board and CEO (Christer Gardell); active ownership reduced the NAV discount</a:t>
             </a:r>
           </a:p>
           <a:p>
@@ -7598,7 +7429,7 @@
                 </a:solidFill>
                 <a:latin typeface="Arial"/>
               </a:rPr>
-              <a:t>Restructured Dutch operations and centralised sourcing (2004–05)</a:t>
+              <a:t>Distributed Hufvudstaden to shareholders; sold ASG to Deutsche Post</a:t>
             </a:r>
           </a:p>
           <a:p>
@@ -7626,7 +7457,7 @@
                 </a:solidFill>
                 <a:latin typeface="Arial"/>
               </a:rPr>
-              <a:t>New CEO Stefan Charette (2006); separated Marine, acquired Tigerholm, launched an export organisation</a:t>
+              <a:t>Founded Acando; synthetic buy-back distributing SEK 1.6bn</a:t>
             </a:r>
           </a:p>
           <a:p>
@@ -7654,7 +7485,7 @@
                 </a:solidFill>
                 <a:latin typeface="Arial"/>
               </a:rPr>
-              <a:t>Revenues +~17%; SG&amp;A −~18%; operating result +~SEK 62m (−15m to +47m)</a:t>
+              <a:t>~SEK 3.5bn distributed via buy-back and the distribution of SCA</a:t>
             </a:r>
           </a:p>
           <a:p>
@@ -7682,7 +7513,35 @@
                 </a:solidFill>
                 <a:latin typeface="Arial"/>
               </a:rPr>
-              <a:t>SPX Corporation public offer accepted by &gt;90% of shareholders; delisted</a:t>
+              <a:t>Bilia and Acando distributed to shareholders</a:t>
+            </a:r>
+          </a:p>
+          <a:p>
+            <a:pPr marL="149162" indent="-149162">
+              <a:lnSpc>
+                <a:spcPct val="106000"/>
+              </a:lnSpc>
+              <a:spcAft>
+                <a:spcPts val="150"/>
+              </a:spcAft>
+            </a:pPr>
+            <a:r>
+              <a:rPr sz="869" b="1">
+                <a:solidFill>
+                  <a:srgbClr val="556A83"/>
+                </a:solidFill>
+                <a:latin typeface="Arial"/>
+              </a:rPr>
+              <a:t>✓  </a:t>
+            </a:r>
+            <a:r>
+              <a:rPr sz="869">
+                <a:solidFill>
+                  <a:srgbClr val="0E1620"/>
+                </a:solidFill>
+                <a:latin typeface="Arial"/>
+              </a:rPr>
+              <a:t>Custos ultimately merged with Öresund</a:t>
             </a:r>
           </a:p>
         </p:txBody>
@@ -7754,14 +7613,14 @@
                 </a:solidFill>
                 <a:latin typeface="Times New Roman"/>
               </a:rPr>
-              <a:t>IRR 34.4% · 2002–2006</a:t>
+              <a:t>IRR 58.9% · 2000–2004</a:t>
             </a:r>
           </a:p>
         </p:txBody>
       </p:sp>
       <p:pic>
         <p:nvPicPr>
-          <p:cNvPr id="11" name="Picture 10" descr="jp_line.png"/>
+          <p:cNvPr id="11" name="Picture 10" descr="custos_line.png"/>
           <p:cNvPicPr>
             <a:picLocks noChangeAspect="1"/>
           </p:cNvPicPr>
@@ -7786,6 +7645,48 @@
       <p:sp>
         <p:nvSpPr>
           <p:cNvPr id="12" name="TextBox 11"/>
+          <p:cNvSpPr txBox="1"/>
+          <p:nvPr/>
+        </p:nvSpPr>
+        <p:spPr>
+          <a:xfrm>
+            <a:off x="4983480" y="4848158"/>
+            <a:ext cx="4297680" cy="457200"/>
+          </a:xfrm>
+          <a:prstGeom prst="rect">
+            <a:avLst/>
+          </a:prstGeom>
+          <a:noFill/>
+        </p:spPr>
+        <p:txBody>
+          <a:bodyPr wrap="square" anchor="t" lIns="0" rIns="0" tIns="0" bIns="0">
+            <a:spAutoFit/>
+          </a:bodyPr>
+          <a:lstStyle/>
+          <a:p>
+            <a:pPr algn="ctr">
+              <a:lnSpc>
+                <a:spcPct val="110000"/>
+              </a:lnSpc>
+              <a:spcAft>
+                <a:spcPts val="0"/>
+              </a:spcAft>
+            </a:pPr>
+            <a:r>
+              <a:rPr sz="1200" b="1" i="0">
+                <a:solidFill>
+                  <a:srgbClr val="314359"/>
+                </a:solidFill>
+                <a:latin typeface="Times New Roman"/>
+              </a:rPr>
+              <a:t>≈ SEK 11bn of shareholder value created over nine years</a:t>
+            </a:r>
+          </a:p>
+        </p:txBody>
+      </p:sp>
+      <p:sp>
+        <p:nvSpPr>
+          <p:cNvPr id="13" name="TextBox 12"/>
           <p:cNvSpPr txBox="1"/>
           <p:nvPr/>
         </p:nvSpPr>
@@ -8006,7 +7907,7 @@
                 </a:solidFill>
                 <a:latin typeface="Times New Roman"/>
               </a:rPr>
-              <a:t>Investment case study: Wihlborgs / Drott</a:t>
+              <a:t>Investment case study: Johnson Pump</a:t>
             </a:r>
           </a:p>
         </p:txBody>
@@ -8112,7 +8013,7 @@
                 </a:solidFill>
                 <a:latin typeface="Arial"/>
               </a:rPr>
-              <a:t>Wihlborgs and Drott were Swedish listed real-estate companies holding commercial and residential properties in the growing Stockholm and Malmö regions, trading at a discount to NAV with no active owner.</a:t>
+              <a:t>Johnson Pump was a traditional industrial business — a pump OEM with an extensive sales force and a strong brand. It had suffered profitability issues but had started to recover, with revenues of SEK 647m and a negative EBIT.</a:t>
             </a:r>
           </a:p>
           <a:p>
@@ -8162,7 +8063,7 @@
                 </a:solidFill>
                 <a:latin typeface="Arial"/>
               </a:rPr>
-              <a:t>Shares traded at a discount to NAV for real-estate companies</a:t>
+              <a:t>Low profitability was largely a cost issue — customers kept buying and the gross margin was decent</a:t>
             </a:r>
           </a:p>
           <a:p>
@@ -8190,7 +8091,7 @@
                 </a:solidFill>
                 <a:latin typeface="Arial"/>
               </a:rPr>
-              <a:t>Hidden values in both Wihlborgs and Drott</a:t>
+              <a:t>Significant upside on cost in both factories and sales offices</a:t>
             </a:r>
           </a:p>
           <a:p>
@@ -8218,7 +8119,7 @@
                 </a:solidFill>
                 <a:latin typeface="Arial"/>
               </a:rPr>
-              <a:t>Limited active ownership; inefficient debt/capital structure</a:t>
+              <a:t>The sales force could be leveraged with a wider product range (R&amp;D, 3rd-party products, M&amp;A)</a:t>
             </a:r>
           </a:p>
           <a:p>
@@ -8246,7 +8147,7 @@
                 </a:solidFill>
                 <a:latin typeface="Arial"/>
               </a:rPr>
-              <a:t>Limited synergies between commercial and residential — divest</a:t>
+              <a:t>Market segmentation should reveal further niche potential</a:t>
             </a:r>
           </a:p>
           <a:p>
@@ -8274,35 +8175,7 @@
                 </a:solidFill>
                 <a:latin typeface="Arial"/>
               </a:rPr>
-              <a:t>Inefficient organisations</a:t>
-            </a:r>
-          </a:p>
-          <a:p>
-            <a:pPr marL="149162" indent="-149162">
-              <a:lnSpc>
-                <a:spcPct val="106000"/>
-              </a:lnSpc>
-              <a:spcAft>
-                <a:spcPts val="150"/>
-              </a:spcAft>
-            </a:pPr>
-            <a:r>
-              <a:rPr sz="869" b="1">
-                <a:solidFill>
-                  <a:srgbClr val="556A83"/>
-                </a:solidFill>
-                <a:latin typeface="Arial"/>
-              </a:rPr>
-              <a:t>›  </a:t>
-            </a:r>
-            <a:r>
-              <a:rPr sz="869">
-                <a:solidFill>
-                  <a:srgbClr val="0E1620"/>
-                </a:solidFill>
-                <a:latin typeface="Arial"/>
-              </a:rPr>
-              <a:t>Property-investment funds were pushing prices upwards</a:t>
+              <a:t>Geographic expansion to follow customers moving to low-cost countries</a:t>
             </a:r>
           </a:p>
           <a:p>
@@ -8343,7 +8216,7 @@
                 </a:solidFill>
                 <a:latin typeface="Arial"/>
               </a:rPr>
-              <a:t>Divest properties and reduce costs to enable cash distribution; split commercial and residential into separate companies — one for the Öresund/Malmö region and one for Stockholm; refinance to lower the cost of debt.</a:t>
+              <a:t>Reduce costs in factories and sales offices, build a uniform sales process and a simplified product range, expand the range and geography, and grow in adjacencies through M&amp;A.</a:t>
             </a:r>
           </a:p>
           <a:p>
@@ -8393,7 +8266,7 @@
                 </a:solidFill>
                 <a:latin typeface="Arial"/>
               </a:rPr>
-              <a:t>Öresund acquired 12% of Wihlborgs (2001); new board members joined</a:t>
+              <a:t>New ERP system (2002); component manufacturing moved to India (2003)</a:t>
             </a:r>
           </a:p>
           <a:p>
@@ -8421,7 +8294,7 @@
                 </a:solidFill>
                 <a:latin typeface="Arial"/>
               </a:rPr>
-              <a:t>Wihlborgs built a ~10% position in Drott; a new board was elected</a:t>
+              <a:t>Restructured Dutch operations and centralised sourcing (2004–05)</a:t>
             </a:r>
           </a:p>
           <a:p>
@@ -8449,7 +8322,7 @@
                 </a:solidFill>
                 <a:latin typeface="Arial"/>
               </a:rPr>
-              <a:t>New management plan with ~SEK 85m of yearly savings</a:t>
+              <a:t>New CEO Stefan Charette (2006); separated Marine, acquired Tigerholm, launched an export organisation</a:t>
             </a:r>
           </a:p>
           <a:p>
@@ -8477,7 +8350,7 @@
                 </a:solidFill>
                 <a:latin typeface="Arial"/>
               </a:rPr>
-              <a:t>Several properties divested — SEK 3.3bn cash redemption (2004)</a:t>
+              <a:t>Revenues +~17%; SG&amp;A −~18%; operating result +~SEK 62m (−15m to +47m)</a:t>
             </a:r>
           </a:p>
           <a:p>
@@ -8505,35 +8378,7 @@
                 </a:solidFill>
                 <a:latin typeface="Arial"/>
               </a:rPr>
-              <a:t>Drott split into BAB Drott (residential, sold to Stena) and Fabege (commercial, acquired by Wihlborgs)</a:t>
-            </a:r>
-          </a:p>
-          <a:p>
-            <a:pPr marL="149162" indent="-149162">
-              <a:lnSpc>
-                <a:spcPct val="106000"/>
-              </a:lnSpc>
-              <a:spcAft>
-                <a:spcPts val="150"/>
-              </a:spcAft>
-            </a:pPr>
-            <a:r>
-              <a:rPr sz="869" b="1">
-                <a:solidFill>
-                  <a:srgbClr val="556A83"/>
-                </a:solidFill>
-                <a:latin typeface="Arial"/>
-              </a:rPr>
-              <a:t>✓  </a:t>
-            </a:r>
-            <a:r>
-              <a:rPr sz="869">
-                <a:solidFill>
-                  <a:srgbClr val="0E1620"/>
-                </a:solidFill>
-                <a:latin typeface="Arial"/>
-              </a:rPr>
-              <a:t>Combined operations later split into two regional companies</a:t>
+              <a:t>SPX Corporation public offer accepted by &gt;90% of shareholders; delisted</a:t>
             </a:r>
           </a:p>
         </p:txBody>
@@ -8605,14 +8450,14 @@
                 </a:solidFill>
                 <a:latin typeface="Times New Roman"/>
               </a:rPr>
-              <a:t>IRR 31.0% · 2002–2004</a:t>
+              <a:t>IRR 34.4% · 2002–2006</a:t>
             </a:r>
           </a:p>
         </p:txBody>
       </p:sp>
       <p:pic>
         <p:nvPicPr>
-          <p:cNvPr id="11" name="Picture 10" descr="drott_line.png"/>
+          <p:cNvPr id="11" name="Picture 10" descr="jp_line.png"/>
           <p:cNvPicPr>
             <a:picLocks noChangeAspect="1"/>
           </p:cNvPicPr>
@@ -8637,48 +8482,6 @@
       <p:sp>
         <p:nvSpPr>
           <p:cNvPr id="12" name="TextBox 11"/>
-          <p:cNvSpPr txBox="1"/>
-          <p:nvPr/>
-        </p:nvSpPr>
-        <p:spPr>
-          <a:xfrm>
-            <a:off x="4983480" y="4848158"/>
-            <a:ext cx="4297680" cy="457200"/>
-          </a:xfrm>
-          <a:prstGeom prst="rect">
-            <a:avLst/>
-          </a:prstGeom>
-          <a:noFill/>
-        </p:spPr>
-        <p:txBody>
-          <a:bodyPr wrap="square" anchor="t" lIns="0" rIns="0" tIns="0" bIns="0">
-            <a:spAutoFit/>
-          </a:bodyPr>
-          <a:lstStyle/>
-          <a:p>
-            <a:pPr algn="ctr">
-              <a:lnSpc>
-                <a:spcPct val="110000"/>
-              </a:lnSpc>
-              <a:spcAft>
-                <a:spcPts val="0"/>
-              </a:spcAft>
-            </a:pPr>
-            <a:r>
-              <a:rPr sz="1200" b="1" i="0">
-                <a:solidFill>
-                  <a:srgbClr val="314359"/>
-                </a:solidFill>
-                <a:latin typeface="Times New Roman"/>
-              </a:rPr>
-              <a:t>≈ SEK 3bn of net value created in 15 months</a:t>
-            </a:r>
-          </a:p>
-        </p:txBody>
-      </p:sp>
-      <p:sp>
-        <p:nvSpPr>
-          <p:cNvPr id="13" name="TextBox 12"/>
           <p:cNvSpPr txBox="1"/>
           <p:nvPr/>
         </p:nvSpPr>
@@ -8899,7 +8702,7 @@
                 </a:solidFill>
                 <a:latin typeface="Times New Roman"/>
               </a:rPr>
-              <a:t>Investment case study: J&amp;W</a:t>
+              <a:t>Investment case study: Wihlborgs / Drott</a:t>
             </a:r>
           </a:p>
         </p:txBody>
@@ -9005,7 +8808,7 @@
                 </a:solidFill>
                 <a:latin typeface="Arial"/>
               </a:rPr>
-              <a:t>J&amp;W (Jacobson &amp; Widmark) was a Swedish technical-consulting firm. Öresund first invested in 1994 and took a controlling interest in 2000.</a:t>
+              <a:t>Wihlborgs and Drott were Swedish listed real-estate companies holding commercial and residential properties in the growing Stockholm and Malmö regions, trading at a discount to NAV with no active owner.</a:t>
             </a:r>
           </a:p>
           <a:p>
@@ -9055,7 +8858,7 @@
                 </a:solidFill>
                 <a:latin typeface="Arial"/>
               </a:rPr>
-              <a:t>Over-funded pension plans — cash to be returned from the SPP pension trust (now Alecta)</a:t>
+              <a:t>Shares traded at a discount to NAV for real-estate companies</a:t>
             </a:r>
           </a:p>
           <a:p>
@@ -9083,7 +8886,7 @@
                 </a:solidFill>
                 <a:latin typeface="Arial"/>
               </a:rPr>
-              <a:t>A fragmented consulting market with consolidation potential</a:t>
+              <a:t>Hidden values in both Wihlborgs and Drott</a:t>
             </a:r>
           </a:p>
           <a:p>
@@ -9111,7 +8914,91 @@
                 </a:solidFill>
                 <a:latin typeface="Arial"/>
               </a:rPr>
-              <a:t>A non-core subsidiary (Benima Ferator) that could be divested</a:t>
+              <a:t>Limited active ownership; inefficient debt/capital structure</a:t>
+            </a:r>
+          </a:p>
+          <a:p>
+            <a:pPr marL="149162" indent="-149162">
+              <a:lnSpc>
+                <a:spcPct val="106000"/>
+              </a:lnSpc>
+              <a:spcAft>
+                <a:spcPts val="150"/>
+              </a:spcAft>
+            </a:pPr>
+            <a:r>
+              <a:rPr sz="869" b="1">
+                <a:solidFill>
+                  <a:srgbClr val="556A83"/>
+                </a:solidFill>
+                <a:latin typeface="Arial"/>
+              </a:rPr>
+              <a:t>›  </a:t>
+            </a:r>
+            <a:r>
+              <a:rPr sz="869">
+                <a:solidFill>
+                  <a:srgbClr val="0E1620"/>
+                </a:solidFill>
+                <a:latin typeface="Arial"/>
+              </a:rPr>
+              <a:t>Limited synergies between commercial and residential — divest</a:t>
+            </a:r>
+          </a:p>
+          <a:p>
+            <a:pPr marL="149162" indent="-149162">
+              <a:lnSpc>
+                <a:spcPct val="106000"/>
+              </a:lnSpc>
+              <a:spcAft>
+                <a:spcPts val="150"/>
+              </a:spcAft>
+            </a:pPr>
+            <a:r>
+              <a:rPr sz="869" b="1">
+                <a:solidFill>
+                  <a:srgbClr val="556A83"/>
+                </a:solidFill>
+                <a:latin typeface="Arial"/>
+              </a:rPr>
+              <a:t>›  </a:t>
+            </a:r>
+            <a:r>
+              <a:rPr sz="869">
+                <a:solidFill>
+                  <a:srgbClr val="0E1620"/>
+                </a:solidFill>
+                <a:latin typeface="Arial"/>
+              </a:rPr>
+              <a:t>Inefficient organisations</a:t>
+            </a:r>
+          </a:p>
+          <a:p>
+            <a:pPr marL="149162" indent="-149162">
+              <a:lnSpc>
+                <a:spcPct val="106000"/>
+              </a:lnSpc>
+              <a:spcAft>
+                <a:spcPts val="150"/>
+              </a:spcAft>
+            </a:pPr>
+            <a:r>
+              <a:rPr sz="869" b="1">
+                <a:solidFill>
+                  <a:srgbClr val="556A83"/>
+                </a:solidFill>
+                <a:latin typeface="Arial"/>
+              </a:rPr>
+              <a:t>›  </a:t>
+            </a:r>
+            <a:r>
+              <a:rPr sz="869">
+                <a:solidFill>
+                  <a:srgbClr val="0E1620"/>
+                </a:solidFill>
+                <a:latin typeface="Arial"/>
+              </a:rPr>
+              <a:t>Property-investment funds were pushing prices upwards</a:t>
             </a:r>
           </a:p>
           <a:p>
@@ -9152,7 +9039,7 @@
                 </a:solidFill>
                 <a:latin typeface="Arial"/>
               </a:rPr>
-              <a:t>Return excess cash to shareholders, divest non-core operations, and consolidate the fragmented technical-consulting market through acquisitions.</a:t>
+              <a:t>Divest properties and reduce costs to enable cash distribution; split commercial and residential into separate companies — one for the Öresund/Malmö region and one for Stockholm; refinance to lower the cost of debt.</a:t>
             </a:r>
           </a:p>
           <a:p>
@@ -9202,7 +9089,7 @@
                 </a:solidFill>
                 <a:latin typeface="Arial"/>
               </a:rPr>
-              <a:t>Spun off Benima Ferator to shareholders (later acquired by Sigma)</a:t>
+              <a:t>Öresund acquired 12% of Wihlborgs (2001); new board members joined</a:t>
             </a:r>
           </a:p>
           <a:p>
@@ -9230,7 +9117,7 @@
                 </a:solidFill>
                 <a:latin typeface="Arial"/>
               </a:rPr>
-              <a:t>Transferred SPP pension-plan cash to shareholders</a:t>
+              <a:t>Wihlborgs built a ~10% position in Drott; a new board was elected</a:t>
             </a:r>
           </a:p>
           <a:p>
@@ -9258,7 +9145,7 @@
                 </a:solidFill>
                 <a:latin typeface="Arial"/>
               </a:rPr>
-              <a:t>Acquired several smaller competitors and the larger Kjessler &amp; Mannerstråle (KM)</a:t>
+              <a:t>New management plan with ~SEK 85m of yearly savings</a:t>
             </a:r>
           </a:p>
           <a:p>
@@ -9286,7 +9173,63 @@
                 </a:solidFill>
                 <a:latin typeface="Arial"/>
               </a:rPr>
-              <a:t>J&amp;W was subsequently sold to WSP</a:t>
+              <a:t>Several properties divested — SEK 3.3bn cash redemption (2004)</a:t>
+            </a:r>
+          </a:p>
+          <a:p>
+            <a:pPr marL="149162" indent="-149162">
+              <a:lnSpc>
+                <a:spcPct val="106000"/>
+              </a:lnSpc>
+              <a:spcAft>
+                <a:spcPts val="150"/>
+              </a:spcAft>
+            </a:pPr>
+            <a:r>
+              <a:rPr sz="869" b="1">
+                <a:solidFill>
+                  <a:srgbClr val="556A83"/>
+                </a:solidFill>
+                <a:latin typeface="Arial"/>
+              </a:rPr>
+              <a:t>✓  </a:t>
+            </a:r>
+            <a:r>
+              <a:rPr sz="869">
+                <a:solidFill>
+                  <a:srgbClr val="0E1620"/>
+                </a:solidFill>
+                <a:latin typeface="Arial"/>
+              </a:rPr>
+              <a:t>Drott split into BAB Drott (residential, sold to Stena) and Fabege (commercial, acquired by Wihlborgs)</a:t>
+            </a:r>
+          </a:p>
+          <a:p>
+            <a:pPr marL="149162" indent="-149162">
+              <a:lnSpc>
+                <a:spcPct val="106000"/>
+              </a:lnSpc>
+              <a:spcAft>
+                <a:spcPts val="150"/>
+              </a:spcAft>
+            </a:pPr>
+            <a:r>
+              <a:rPr sz="869" b="1">
+                <a:solidFill>
+                  <a:srgbClr val="556A83"/>
+                </a:solidFill>
+                <a:latin typeface="Arial"/>
+              </a:rPr>
+              <a:t>✓  </a:t>
+            </a:r>
+            <a:r>
+              <a:rPr sz="869">
+                <a:solidFill>
+                  <a:srgbClr val="0E1620"/>
+                </a:solidFill>
+                <a:latin typeface="Arial"/>
+              </a:rPr>
+              <a:t>Combined operations later split into two regional companies</a:t>
             </a:r>
           </a:p>
         </p:txBody>
@@ -9358,21 +9301,45 @@
                 </a:solidFill>
                 <a:latin typeface="Times New Roman"/>
               </a:rPr>
-              <a:t>IRR 94.4% · 2000–2001 · Technical consultants</a:t>
-            </a:r>
-          </a:p>
-        </p:txBody>
-      </p:sp>
-      <p:sp>
-        <p:nvSpPr>
-          <p:cNvPr id="11" name="TextBox 10"/>
+              <a:t>IRR 31.0% · 2002–2004</a:t>
+            </a:r>
+          </a:p>
+        </p:txBody>
+      </p:sp>
+      <p:pic>
+        <p:nvPicPr>
+          <p:cNvPr id="11" name="Picture 10" descr="drott_line.png"/>
+          <p:cNvPicPr>
+            <a:picLocks noChangeAspect="1"/>
+          </p:cNvPicPr>
+          <p:nvPr/>
+        </p:nvPicPr>
+        <p:blipFill>
+          <a:blip r:embed="rId3"/>
+          <a:stretch>
+            <a:fillRect/>
+          </a:stretch>
+        </p:blipFill>
+        <p:spPr>
+          <a:xfrm>
+            <a:off x="4983480" y="2276856"/>
+            <a:ext cx="4297680" cy="2479862"/>
+          </a:xfrm>
+          <a:prstGeom prst="rect">
+            <a:avLst/>
+          </a:prstGeom>
+        </p:spPr>
+      </p:pic>
+      <p:sp>
+        <p:nvSpPr>
+          <p:cNvPr id="12" name="TextBox 11"/>
           <p:cNvSpPr txBox="1"/>
           <p:nvPr/>
         </p:nvSpPr>
         <p:spPr>
           <a:xfrm>
-            <a:off x="4983480" y="2350008"/>
-            <a:ext cx="4297680" cy="274320"/>
+            <a:off x="4983480" y="4848158"/>
+            <a:ext cx="4297680" cy="457200"/>
           </a:xfrm>
           <a:prstGeom prst="rect">
             <a:avLst/>
@@ -9394,320 +9361,20 @@
               </a:spcAft>
             </a:pPr>
             <a:r>
-              <a:rPr sz="1100" b="1" i="0">
+              <a:rPr sz="1200" b="1" i="0">
                 <a:solidFill>
                   <a:srgbClr val="314359"/>
                 </a:solidFill>
                 <a:latin typeface="Times New Roman"/>
               </a:rPr>
-              <a:t>Initial investment vs. current value</a:t>
-            </a:r>
-          </a:p>
-        </p:txBody>
-      </p:sp>
-      <p:sp>
-        <p:nvSpPr>
-          <p:cNvPr id="12" name="Rectangle 11"/>
-          <p:cNvSpPr/>
-          <p:nvPr/>
-        </p:nvSpPr>
-        <p:spPr>
-          <a:xfrm>
-            <a:off x="5074920" y="4773168"/>
-            <a:ext cx="4114800" cy="12700"/>
-          </a:xfrm>
-          <a:prstGeom prst="rect">
-            <a:avLst/>
-          </a:prstGeom>
-          <a:solidFill>
-            <a:srgbClr val="E2E5E9"/>
-          </a:solidFill>
-          <a:ln>
-            <a:noFill/>
-          </a:ln>
-          <a:effectLst/>
-        </p:spPr>
-        <p:txBody>
-          <a:bodyPr rtlCol="0" anchor="ctr"/>
-          <a:lstStyle/>
-          <a:p>
-            <a:pPr algn="ctr"/>
-          </a:p>
-        </p:txBody>
-      </p:sp>
-      <p:sp>
-        <p:nvSpPr>
-          <p:cNvPr id="13" name="Rectangle 12"/>
-          <p:cNvSpPr/>
-          <p:nvPr/>
-        </p:nvSpPr>
-        <p:spPr>
-          <a:xfrm>
-            <a:off x="5577840" y="4044976"/>
-            <a:ext cx="1051560" cy="728192"/>
-          </a:xfrm>
-          <a:prstGeom prst="rect">
-            <a:avLst/>
-          </a:prstGeom>
-          <a:solidFill>
-            <a:srgbClr val="152130"/>
-          </a:solidFill>
-          <a:ln>
-            <a:noFill/>
-          </a:ln>
-          <a:effectLst/>
-        </p:spPr>
-        <p:txBody>
-          <a:bodyPr rtlCol="0" anchor="ctr"/>
-          <a:lstStyle/>
-          <a:p>
-            <a:pPr algn="ctr"/>
-          </a:p>
-        </p:txBody>
-      </p:sp>
-      <p:sp>
-        <p:nvSpPr>
-          <p:cNvPr id="14" name="TextBox 13"/>
-          <p:cNvSpPr txBox="1"/>
-          <p:nvPr/>
-        </p:nvSpPr>
-        <p:spPr>
-          <a:xfrm>
-            <a:off x="5303520" y="3770656"/>
-            <a:ext cx="1600200" cy="256032"/>
-          </a:xfrm>
-          <a:prstGeom prst="rect">
-            <a:avLst/>
-          </a:prstGeom>
-          <a:noFill/>
-        </p:spPr>
-        <p:txBody>
-          <a:bodyPr wrap="square" anchor="t" lIns="0" rIns="0" tIns="0" bIns="0">
-            <a:spAutoFit/>
-          </a:bodyPr>
-          <a:lstStyle/>
-          <a:p>
-            <a:pPr algn="ctr">
-              <a:lnSpc>
-                <a:spcPct val="110000"/>
-              </a:lnSpc>
-              <a:spcAft>
-                <a:spcPts val="0"/>
-              </a:spcAft>
-            </a:pPr>
-            <a:r>
-              <a:rPr sz="1300" b="1" i="0">
-                <a:solidFill>
-                  <a:srgbClr val="314359"/>
-                </a:solidFill>
-                <a:latin typeface="Times New Roman"/>
-              </a:rPr>
-              <a:t>213</a:t>
-            </a:r>
-          </a:p>
-        </p:txBody>
-      </p:sp>
-      <p:sp>
-        <p:nvSpPr>
-          <p:cNvPr id="15" name="TextBox 14"/>
-          <p:cNvSpPr txBox="1"/>
-          <p:nvPr/>
-        </p:nvSpPr>
-        <p:spPr>
-          <a:xfrm>
-            <a:off x="5074920" y="4828032"/>
-            <a:ext cx="2057400" cy="310896"/>
-          </a:xfrm>
-          <a:prstGeom prst="rect">
-            <a:avLst/>
-          </a:prstGeom>
-          <a:noFill/>
-        </p:spPr>
-        <p:txBody>
-          <a:bodyPr wrap="square" anchor="t" lIns="0" rIns="0" tIns="0" bIns="0">
-            <a:spAutoFit/>
-          </a:bodyPr>
-          <a:lstStyle/>
-          <a:p>
-            <a:pPr algn="ctr">
-              <a:lnSpc>
-                <a:spcPct val="110000"/>
-              </a:lnSpc>
-              <a:spcAft>
-                <a:spcPts val="0"/>
-              </a:spcAft>
-            </a:pPr>
-            <a:r>
-              <a:rPr sz="950" b="0" i="0">
-                <a:solidFill>
-                  <a:srgbClr val="0E1620"/>
-                </a:solidFill>
-                <a:latin typeface="Arial"/>
-              </a:rPr>
-              <a:t>Initial investment</a:t>
-            </a:r>
-          </a:p>
-        </p:txBody>
-      </p:sp>
-      <p:sp>
-        <p:nvSpPr>
-          <p:cNvPr id="16" name="Rectangle 15"/>
-          <p:cNvSpPr/>
-          <p:nvPr/>
-        </p:nvSpPr>
-        <p:spPr>
-          <a:xfrm>
-            <a:off x="7635240" y="3145846"/>
-            <a:ext cx="1051560" cy="1627322"/>
-          </a:xfrm>
-          <a:prstGeom prst="rect">
-            <a:avLst/>
-          </a:prstGeom>
-          <a:solidFill>
-            <a:srgbClr val="152130"/>
-          </a:solidFill>
-          <a:ln>
-            <a:noFill/>
-          </a:ln>
-          <a:effectLst/>
-        </p:spPr>
-        <p:txBody>
-          <a:bodyPr rtlCol="0" anchor="ctr"/>
-          <a:lstStyle/>
-          <a:p>
-            <a:pPr algn="ctr"/>
-          </a:p>
-        </p:txBody>
-      </p:sp>
-      <p:sp>
-        <p:nvSpPr>
-          <p:cNvPr id="17" name="TextBox 16"/>
-          <p:cNvSpPr txBox="1"/>
-          <p:nvPr/>
-        </p:nvSpPr>
-        <p:spPr>
-          <a:xfrm>
-            <a:off x="7360920" y="2871526"/>
-            <a:ext cx="1600200" cy="256032"/>
-          </a:xfrm>
-          <a:prstGeom prst="rect">
-            <a:avLst/>
-          </a:prstGeom>
-          <a:noFill/>
-        </p:spPr>
-        <p:txBody>
-          <a:bodyPr wrap="square" anchor="t" lIns="0" rIns="0" tIns="0" bIns="0">
-            <a:spAutoFit/>
-          </a:bodyPr>
-          <a:lstStyle/>
-          <a:p>
-            <a:pPr algn="ctr">
-              <a:lnSpc>
-                <a:spcPct val="110000"/>
-              </a:lnSpc>
-              <a:spcAft>
-                <a:spcPts val="0"/>
-              </a:spcAft>
-            </a:pPr>
-            <a:r>
-              <a:rPr sz="1300" b="1" i="0">
-                <a:solidFill>
-                  <a:srgbClr val="314359"/>
-                </a:solidFill>
-                <a:latin typeface="Times New Roman"/>
-              </a:rPr>
-              <a:t>476</a:t>
-            </a:r>
-          </a:p>
-        </p:txBody>
-      </p:sp>
-      <p:sp>
-        <p:nvSpPr>
-          <p:cNvPr id="18" name="TextBox 17"/>
-          <p:cNvSpPr txBox="1"/>
-          <p:nvPr/>
-        </p:nvSpPr>
-        <p:spPr>
-          <a:xfrm>
-            <a:off x="7132320" y="4828032"/>
-            <a:ext cx="2057400" cy="310896"/>
-          </a:xfrm>
-          <a:prstGeom prst="rect">
-            <a:avLst/>
-          </a:prstGeom>
-          <a:noFill/>
-        </p:spPr>
-        <p:txBody>
-          <a:bodyPr wrap="square" anchor="t" lIns="0" rIns="0" tIns="0" bIns="0">
-            <a:spAutoFit/>
-          </a:bodyPr>
-          <a:lstStyle/>
-          <a:p>
-            <a:pPr algn="ctr">
-              <a:lnSpc>
-                <a:spcPct val="110000"/>
-              </a:lnSpc>
-              <a:spcAft>
-                <a:spcPts val="0"/>
-              </a:spcAft>
-            </a:pPr>
-            <a:r>
-              <a:rPr sz="950" b="0" i="0">
-                <a:solidFill>
-                  <a:srgbClr val="0E1620"/>
-                </a:solidFill>
-                <a:latin typeface="Arial"/>
-              </a:rPr>
-              <a:t>Current value</a:t>
-            </a:r>
-          </a:p>
-        </p:txBody>
-      </p:sp>
-      <p:sp>
-        <p:nvSpPr>
-          <p:cNvPr id="19" name="TextBox 18"/>
-          <p:cNvSpPr txBox="1"/>
-          <p:nvPr/>
-        </p:nvSpPr>
-        <p:spPr>
-          <a:xfrm>
-            <a:off x="4983480" y="5157216"/>
-            <a:ext cx="4297680" cy="201168"/>
-          </a:xfrm>
-          <a:prstGeom prst="rect">
-            <a:avLst/>
-          </a:prstGeom>
-          <a:noFill/>
-        </p:spPr>
-        <p:txBody>
-          <a:bodyPr wrap="square" anchor="t" lIns="0" rIns="0" tIns="0" bIns="0">
-            <a:spAutoFit/>
-          </a:bodyPr>
-          <a:lstStyle/>
-          <a:p>
-            <a:pPr algn="l">
-              <a:lnSpc>
-                <a:spcPct val="110000"/>
-              </a:lnSpc>
-              <a:spcAft>
-                <a:spcPts val="0"/>
-              </a:spcAft>
-            </a:pPr>
-            <a:r>
-              <a:rPr sz="850" b="0" i="1">
-                <a:solidFill>
-                  <a:srgbClr val="556A83"/>
-                </a:solidFill>
-                <a:latin typeface="Arial"/>
-              </a:rPr>
-              <a:t>SEK M</a:t>
-            </a:r>
-          </a:p>
-        </p:txBody>
-      </p:sp>
-      <p:sp>
-        <p:nvSpPr>
-          <p:cNvPr id="20" name="TextBox 19"/>
+              <a:t>≈ SEK 3bn of net value created in 15 months</a:t>
+            </a:r>
+          </a:p>
+        </p:txBody>
+      </p:sp>
+      <p:sp>
+        <p:nvSpPr>
+          <p:cNvPr id="13" name="TextBox 12"/>
           <p:cNvSpPr txBox="1"/>
           <p:nvPr/>
         </p:nvSpPr>
@@ -9928,7 +9595,7 @@
                 </a:solidFill>
                 <a:latin typeface="Times New Roman"/>
               </a:rPr>
-              <a:t>Investment case study: Nobia</a:t>
+              <a:t>Investment case study: J&amp;W</a:t>
             </a:r>
           </a:p>
         </p:txBody>
@@ -10034,7 +9701,7 @@
                 </a:solidFill>
                 <a:latin typeface="Arial"/>
               </a:rPr>
-              <a:t>Nobia is a European kitchen company. Originally active across several construction-component areas, it was streamlined to focus on kitchens.</a:t>
+              <a:t>J&amp;W (Jacobson &amp; Widmark) was a Swedish technical-consulting firm. Öresund first invested in 1994 and took a controlling interest in 2000.</a:t>
             </a:r>
           </a:p>
           <a:p>
@@ -10084,7 +9751,7 @@
                 </a:solidFill>
                 <a:latin typeface="Arial"/>
               </a:rPr>
-              <a:t>Active across several construction-component areas — focus opportunity</a:t>
+              <a:t>Over-funded pension plans — cash to be returned from the SPP pension trust (now Alecta)</a:t>
             </a:r>
           </a:p>
           <a:p>
@@ -10112,7 +9779,35 @@
                 </a:solidFill>
                 <a:latin typeface="Arial"/>
               </a:rPr>
-              <a:t>A fragmented European kitchen market with consolidation potential</a:t>
+              <a:t>A fragmented consulting market with consolidation potential</a:t>
+            </a:r>
+          </a:p>
+          <a:p>
+            <a:pPr marL="149162" indent="-149162">
+              <a:lnSpc>
+                <a:spcPct val="106000"/>
+              </a:lnSpc>
+              <a:spcAft>
+                <a:spcPts val="150"/>
+              </a:spcAft>
+            </a:pPr>
+            <a:r>
+              <a:rPr sz="869" b="1">
+                <a:solidFill>
+                  <a:srgbClr val="556A83"/>
+                </a:solidFill>
+                <a:latin typeface="Arial"/>
+              </a:rPr>
+              <a:t>›  </a:t>
+            </a:r>
+            <a:r>
+              <a:rPr sz="869">
+                <a:solidFill>
+                  <a:srgbClr val="0E1620"/>
+                </a:solidFill>
+                <a:latin typeface="Arial"/>
+              </a:rPr>
+              <a:t>A non-core subsidiary (Benima Ferator) that could be divested</a:t>
             </a:r>
           </a:p>
           <a:p>
@@ -10153,7 +9848,7 @@
                 </a:solidFill>
                 <a:latin typeface="Arial"/>
               </a:rPr>
-              <a:t>Streamline Nobia to focus on kitchens by divesting other areas, and consolidate the European kitchen market through acquisitions.</a:t>
+              <a:t>Return excess cash to shareholders, divest non-core operations, and consolidate the fragmented technical-consulting market through acquisitions.</a:t>
             </a:r>
           </a:p>
           <a:p>
@@ -10203,7 +9898,7 @@
                 </a:solidFill>
                 <a:latin typeface="Arial"/>
               </a:rPr>
-              <a:t>Streamlined to focus on kitchens (sold Doors &amp; Windows)</a:t>
+              <a:t>Spun off Benima Ferator to shareholders (later acquired by Sigma)</a:t>
             </a:r>
           </a:p>
           <a:p>
@@ -10231,7 +9926,7 @@
                 </a:solidFill>
                 <a:latin typeface="Arial"/>
               </a:rPr>
-              <a:t>Acquired Gower, EWE-FM and Hygena — the largest kitchen company in Europe</a:t>
+              <a:t>Transferred SPP pension-plan cash to shareholders</a:t>
             </a:r>
           </a:p>
           <a:p>
@@ -10259,7 +9954,7 @@
                 </a:solidFill>
                 <a:latin typeface="Arial"/>
               </a:rPr>
-              <a:t>Turnover up from SEK 9.2bn (2003) to SEK 16.1bn (12m to Jun 2007)</a:t>
+              <a:t>Acquired several smaller competitors and the larger Kjessler &amp; Mannerstråle (KM)</a:t>
             </a:r>
           </a:p>
           <a:p>
@@ -10287,7 +9982,7 @@
                 </a:solidFill>
                 <a:latin typeface="Arial"/>
               </a:rPr>
-              <a:t>EBIT up from SEK 560m to SEK 1,360m</a:t>
+              <a:t>J&amp;W was subsequently sold to WSP</a:t>
             </a:r>
           </a:p>
         </p:txBody>
@@ -10359,7 +10054,7 @@
                 </a:solidFill>
                 <a:latin typeface="Times New Roman"/>
               </a:rPr>
-              <a:t>IRR 33.1% · 2002– · Consumer discretionary</a:t>
+              <a:t>IRR 94.4% · 2000–2001 · Technical consultants</a:t>
             </a:r>
           </a:p>
         </p:txBody>
@@ -10444,8 +10139,8 @@
         </p:nvSpPr>
         <p:spPr>
           <a:xfrm>
-            <a:off x="5577840" y="4529746"/>
-            <a:ext cx="1051560" cy="243422"/>
+            <a:off x="5577840" y="4044976"/>
+            <a:ext cx="1051560" cy="728192"/>
           </a:xfrm>
           <a:prstGeom prst="rect">
             <a:avLst/>
@@ -10474,7 +10169,7 @@
         </p:nvSpPr>
         <p:spPr>
           <a:xfrm>
-            <a:off x="5303520" y="4255426"/>
+            <a:off x="5303520" y="3770656"/>
             <a:ext cx="1600200" cy="256032"/>
           </a:xfrm>
           <a:prstGeom prst="rect">
@@ -10503,7 +10198,7 @@
                 </a:solidFill>
                 <a:latin typeface="Times New Roman"/>
               </a:rPr>
-              <a:t>162</a:t>
+              <a:t>213</a:t>
             </a:r>
           </a:p>
         </p:txBody>
@@ -10617,7 +10312,7 @@
                 </a:solidFill>
                 <a:latin typeface="Times New Roman"/>
               </a:rPr>
-              <a:t>1,083</a:t>
+              <a:t>476</a:t>
             </a:r>
           </a:p>
         </p:txBody>
@@ -10929,7 +10624,7 @@
                 </a:solidFill>
                 <a:latin typeface="Times New Roman"/>
               </a:rPr>
-              <a:t>Investment case study: HQ / Avanza</a:t>
+              <a:t>Investment case study: Nobia</a:t>
             </a:r>
           </a:p>
         </p:txBody>
@@ -11035,7 +10730,7 @@
                 </a:solidFill>
                 <a:latin typeface="Arial"/>
               </a:rPr>
-              <a:t>Hagströmer &amp; Qviberg (HQ) and Avanza are Swedish financial companies — brokerage, fund management, wealth management and online brokerage. Sven Hagströmer founded Hagströmer Fondkommission in 1986; Mats Qviberg joined in 1989.</a:t>
+              <a:t>Nobia is a European kitchen company. Originally active across several construction-component areas, it was streamlined to focus on kitchens.</a:t>
             </a:r>
           </a:p>
           <a:p>
@@ -11085,7 +10780,7 @@
                 </a:solidFill>
                 <a:latin typeface="Arial"/>
               </a:rPr>
-              <a:t>Separate online brokerage / fund management from traditional brokerage and investment banking</a:t>
+              <a:t>Active across several construction-component areas — focus opportunity</a:t>
             </a:r>
           </a:p>
           <a:p>
@@ -11113,7 +10808,7 @@
                 </a:solidFill>
                 <a:latin typeface="Arial"/>
               </a:rPr>
-              <a:t>Consolidation opportunities among internet brokerages</a:t>
+              <a:t>A fragmented European kitchen market with consolidation potential</a:t>
             </a:r>
           </a:p>
           <a:p>
@@ -11154,7 +10849,7 @@
                 </a:solidFill>
                 <a:latin typeface="Arial"/>
               </a:rPr>
-              <a:t>Split HQ into focused entities, consolidate internet brokerages into Avanza, and build a wealth-management business.</a:t>
+              <a:t>Streamline Nobia to focus on kitchens by divesting other areas, and consolidate the European kitchen market through acquisitions.</a:t>
             </a:r>
           </a:p>
           <a:p>
@@ -11204,7 +10899,7 @@
                 </a:solidFill>
                 <a:latin typeface="Arial"/>
               </a:rPr>
-              <a:t>HQ split (2000) into HQ.SE (internet brokerage, fund management) and Hagströmer &amp; Qviberg</a:t>
+              <a:t>Streamlined to focus on kitchens (sold Doors &amp; Windows)</a:t>
             </a:r>
           </a:p>
           <a:p>
@@ -11232,7 +10927,7 @@
                 </a:solidFill>
                 <a:latin typeface="Arial"/>
               </a:rPr>
-              <a:t>HQ.SE acquired Aktiespar FK and Avanza; split into HQ Fonder and Avanza</a:t>
+              <a:t>Acquired Gower, EWE-FM and Hygena — the largest kitchen company in Europe</a:t>
             </a:r>
           </a:p>
           <a:p>
@@ -11260,7 +10955,7 @@
                 </a:solidFill>
                 <a:latin typeface="Arial"/>
               </a:rPr>
-              <a:t>Avanza expanded into pensions, fund distribution, corporate finance and banking</a:t>
+              <a:t>Turnover up from SEK 9.2bn (2003) to SEK 16.1bn (12m to Jun 2007)</a:t>
             </a:r>
           </a:p>
           <a:p>
@@ -11288,7 +10983,7 @@
                 </a:solidFill>
                 <a:latin typeface="Arial"/>
               </a:rPr>
-              <a:t>HQ Fonder merged with Hagströmer &amp; Qviberg (2005) — SEK 85bn AUM</a:t>
+              <a:t>EBIT up from SEK 560m to SEK 1,360m</a:t>
             </a:r>
           </a:p>
         </p:txBody>
@@ -11360,7 +11055,7 @@
                 </a:solidFill>
                 <a:latin typeface="Times New Roman"/>
               </a:rPr>
-              <a:t>IRR 37.8% · 2000– · Finance</a:t>
+              <a:t>IRR 33.1% · 2002– · Consumer discretionary</a:t>
             </a:r>
           </a:p>
         </p:txBody>
@@ -11445,8 +11140,8 @@
         </p:nvSpPr>
         <p:spPr>
           <a:xfrm>
-            <a:off x="5577840" y="4341998"/>
-            <a:ext cx="1051560" cy="431170"/>
+            <a:off x="5577840" y="4529746"/>
+            <a:ext cx="1051560" cy="243422"/>
           </a:xfrm>
           <a:prstGeom prst="rect">
             <a:avLst/>
@@ -11475,7 +11170,7 @@
         </p:nvSpPr>
         <p:spPr>
           <a:xfrm>
-            <a:off x="5303520" y="4067678"/>
+            <a:off x="5303520" y="4255426"/>
             <a:ext cx="1600200" cy="256032"/>
           </a:xfrm>
           <a:prstGeom prst="rect">
@@ -11504,7 +11199,7 @@
                 </a:solidFill>
                 <a:latin typeface="Times New Roman"/>
               </a:rPr>
-              <a:t>744</a:t>
+              <a:t>162</a:t>
             </a:r>
           </a:p>
         </p:txBody>
@@ -11618,7 +11313,7 @@
                 </a:solidFill>
                 <a:latin typeface="Times New Roman"/>
               </a:rPr>
-              <a:t>2,808</a:t>
+              <a:t>1,083</a:t>
             </a:r>
           </a:p>
         </p:txBody>
@@ -12246,7 +11941,7 @@
                 </a:solidFill>
                 <a:latin typeface="Times New Roman"/>
               </a:rPr>
-              <a:t>Investment case study: SkiStar</a:t>
+              <a:t>Investment case study: HQ / Avanza</a:t>
             </a:r>
           </a:p>
         </p:txBody>
@@ -12352,7 +12047,7 @@
                 </a:solidFill>
                 <a:latin typeface="Arial"/>
               </a:rPr>
-              <a:t>SkiStar is a Scandinavian operator of alpine ski resorts, built through the consolidation of several destinations into a single listed leisure company.</a:t>
+              <a:t>Hagströmer &amp; Qviberg (HQ) and Avanza are Swedish financial companies — brokerage, fund management, wealth management and online brokerage. Sven Hagströmer founded Hagströmer Fondkommission in 1986; Mats Qviberg joined in 1989.</a:t>
             </a:r>
           </a:p>
           <a:p>
@@ -12402,7 +12097,7 @@
                 </a:solidFill>
                 <a:latin typeface="Arial"/>
               </a:rPr>
-              <a:t>A fragmented ski-resort market with consolidation potential</a:t>
+              <a:t>Separate online brokerage / fund management from traditional brokerage and investment banking</a:t>
             </a:r>
           </a:p>
           <a:p>
@@ -12430,7 +12125,7 @@
                 </a:solidFill>
                 <a:latin typeface="Arial"/>
               </a:rPr>
-              <a:t>Opportunity to build a leading Scandinavian leisure platform</a:t>
+              <a:t>Consolidation opportunities among internet brokerages</a:t>
             </a:r>
           </a:p>
           <a:p>
@@ -12471,7 +12166,7 @@
                 </a:solidFill>
                 <a:latin typeface="Arial"/>
               </a:rPr>
-              <a:t>Consolidate alpine destinations into a single listed leisure company.</a:t>
+              <a:t>Split HQ into focused entities, consolidate internet brokerages into Avanza, and build a wealth-management business.</a:t>
             </a:r>
           </a:p>
           <a:p>
@@ -12521,7 +12216,7 @@
                 </a:solidFill>
                 <a:latin typeface="Arial"/>
               </a:rPr>
-              <a:t>Hundfjället acquired Tandådalen; the combined entity was restructured</a:t>
+              <a:t>HQ split (2000) into HQ.SE (internet brokerage, fund management) and Hagströmer &amp; Qviberg</a:t>
             </a:r>
           </a:p>
           <a:p>
@@ -12549,7 +12244,7 @@
                 </a:solidFill>
                 <a:latin typeface="Arial"/>
               </a:rPr>
-              <a:t>Acquired Lindvallen; the combined entity was listed</a:t>
+              <a:t>HQ.SE acquired Aktiespar FK and Avanza; split into HQ Fonder and Avanza</a:t>
             </a:r>
           </a:p>
           <a:p>
@@ -12577,7 +12272,7 @@
                 </a:solidFill>
                 <a:latin typeface="Arial"/>
               </a:rPr>
-              <a:t>Acquired Åre, Duved and Vemdalen from Bure — renamed SkiStar</a:t>
+              <a:t>Avanza expanded into pensions, fund distribution, corporate finance and banking</a:t>
             </a:r>
           </a:p>
           <a:p>
@@ -12605,7 +12300,7 @@
                 </a:solidFill>
                 <a:latin typeface="Arial"/>
               </a:rPr>
-              <a:t>Acquired Hemsedal (and later Trysil)</a:t>
+              <a:t>HQ Fonder merged with Hagströmer &amp; Qviberg (2005) — SEK 85bn AUM</a:t>
             </a:r>
           </a:p>
         </p:txBody>
@@ -12677,7 +12372,7 @@
                 </a:solidFill>
                 <a:latin typeface="Times New Roman"/>
               </a:rPr>
-              <a:t>IRR 33.0% · 2000– · Leisure</a:t>
+              <a:t>IRR 37.8% · 2000– · Finance</a:t>
             </a:r>
           </a:p>
         </p:txBody>
@@ -12762,8 +12457,8 @@
         </p:nvSpPr>
         <p:spPr>
           <a:xfrm>
-            <a:off x="5577840" y="4378068"/>
-            <a:ext cx="1051560" cy="395100"/>
+            <a:off x="5577840" y="4341998"/>
+            <a:ext cx="1051560" cy="431170"/>
           </a:xfrm>
           <a:prstGeom prst="rect">
             <a:avLst/>
@@ -12792,7 +12487,7 @@
         </p:nvSpPr>
         <p:spPr>
           <a:xfrm>
-            <a:off x="5303520" y="4103748"/>
+            <a:off x="5303520" y="4067678"/>
             <a:ext cx="1600200" cy="256032"/>
           </a:xfrm>
           <a:prstGeom prst="rect">
@@ -12821,7 +12516,7 @@
                 </a:solidFill>
                 <a:latin typeface="Times New Roman"/>
               </a:rPr>
-              <a:t>160</a:t>
+              <a:t>744</a:t>
             </a:r>
           </a:p>
         </p:txBody>
@@ -12935,7 +12630,7 @@
                 </a:solidFill>
                 <a:latin typeface="Times New Roman"/>
               </a:rPr>
-              <a:t>659</a:t>
+              <a:t>2,808</a:t>
             </a:r>
           </a:p>
         </p:txBody>
@@ -13247,7 +12942,7 @@
                 </a:solidFill>
                 <a:latin typeface="Times New Roman"/>
               </a:rPr>
-              <a:t>Investment case study: Bilia</a:t>
+              <a:t>Investment case study: SkiStar</a:t>
             </a:r>
           </a:p>
         </p:txBody>
@@ -13353,7 +13048,7 @@
                 </a:solidFill>
                 <a:latin typeface="Arial"/>
               </a:rPr>
-              <a:t>Bilia is a leading Nordic car retailer and car-service company. Öresund became an owner in 2003 through a redemption of shares from Custos.</a:t>
+              <a:t>SkiStar is a Scandinavian operator of alpine ski resorts, built through the consolidation of several destinations into a single listed leisure company.</a:t>
             </a:r>
           </a:p>
           <a:p>
@@ -13403,7 +13098,7 @@
                 </a:solidFill>
                 <a:latin typeface="Arial"/>
               </a:rPr>
-              <a:t>Opportunity to separate trucks/heavy vehicles from the car business</a:t>
+              <a:t>A fragmented ski-resort market with consolidation potential</a:t>
             </a:r>
           </a:p>
           <a:p>
@@ -13431,35 +13126,7 @@
                 </a:solidFill>
                 <a:latin typeface="Arial"/>
               </a:rPr>
-              <a:t>Strong cash flow to fund consolidation of car retailers</a:t>
-            </a:r>
-          </a:p>
-          <a:p>
-            <a:pPr marL="149162" indent="-149162">
-              <a:lnSpc>
-                <a:spcPct val="106000"/>
-              </a:lnSpc>
-              <a:spcAft>
-                <a:spcPts val="150"/>
-              </a:spcAft>
-            </a:pPr>
-            <a:r>
-              <a:rPr sz="869" b="1">
-                <a:solidFill>
-                  <a:srgbClr val="556A83"/>
-                </a:solidFill>
-                <a:latin typeface="Arial"/>
-              </a:rPr>
-              <a:t>›  </a:t>
-            </a:r>
-            <a:r>
-              <a:rPr sz="869">
-                <a:solidFill>
-                  <a:srgbClr val="0E1620"/>
-                </a:solidFill>
-                <a:latin typeface="Arial"/>
-              </a:rPr>
-              <a:t>Hidden real-estate value</a:t>
+              <a:t>Opportunity to build a leading Scandinavian leisure platform</a:t>
             </a:r>
           </a:p>
           <a:p>
@@ -13500,7 +13167,7 @@
                 </a:solidFill>
                 <a:latin typeface="Arial"/>
               </a:rPr>
-              <a:t>Separate the heavy-vehicle and car businesses, use strong cash flow to acquire competing car retailers, and unlock real-estate value.</a:t>
+              <a:t>Consolidate alpine destinations into a single listed leisure company.</a:t>
             </a:r>
           </a:p>
           <a:p>
@@ -13550,7 +13217,7 @@
                 </a:solidFill>
                 <a:latin typeface="Arial"/>
               </a:rPr>
-              <a:t>Split into heavy vehicles (LV) and cars (PV); Volvo AB acquired the LV business for PV shares — leaving a pure car retailer</a:t>
+              <a:t>Hundfjället acquired Tandådalen; the combined entity was restructured</a:t>
             </a:r>
           </a:p>
           <a:p>
@@ -13578,7 +13245,7 @@
                 </a:solidFill>
                 <a:latin typeface="Arial"/>
               </a:rPr>
-              <a:t>Acquired several competing car retailers, expanding geography and brands; transferred excess cash to shareholders</a:t>
+              <a:t>Acquired Lindvallen; the combined entity was listed</a:t>
             </a:r>
           </a:p>
           <a:p>
@@ -13606,7 +13273,35 @@
                 </a:solidFill>
                 <a:latin typeface="Arial"/>
               </a:rPr>
-              <a:t>Spun off the real estate as Catena (2006), distributed to shareholders and listed</a:t>
+              <a:t>Acquired Åre, Duved and Vemdalen from Bure — renamed SkiStar</a:t>
+            </a:r>
+          </a:p>
+          <a:p>
+            <a:pPr marL="149162" indent="-149162">
+              <a:lnSpc>
+                <a:spcPct val="106000"/>
+              </a:lnSpc>
+              <a:spcAft>
+                <a:spcPts val="150"/>
+              </a:spcAft>
+            </a:pPr>
+            <a:r>
+              <a:rPr sz="869" b="1">
+                <a:solidFill>
+                  <a:srgbClr val="556A83"/>
+                </a:solidFill>
+                <a:latin typeface="Arial"/>
+              </a:rPr>
+              <a:t>✓  </a:t>
+            </a:r>
+            <a:r>
+              <a:rPr sz="869">
+                <a:solidFill>
+                  <a:srgbClr val="0E1620"/>
+                </a:solidFill>
+                <a:latin typeface="Arial"/>
+              </a:rPr>
+              <a:t>Acquired Hemsedal (and later Trysil)</a:t>
             </a:r>
           </a:p>
         </p:txBody>
@@ -13678,7 +13373,7 @@
                 </a:solidFill>
                 <a:latin typeface="Times New Roman"/>
               </a:rPr>
-              <a:t>IRR 26.0% · 2003– · Consumer discretionary</a:t>
+              <a:t>IRR 33.0% · 2000– · Leisure</a:t>
             </a:r>
           </a:p>
         </p:txBody>
@@ -13763,8 +13458,8 @@
         </p:nvSpPr>
         <p:spPr>
           <a:xfrm>
-            <a:off x="5577840" y="3993410"/>
-            <a:ext cx="1051560" cy="779758"/>
+            <a:off x="5577840" y="4378068"/>
+            <a:ext cx="1051560" cy="395100"/>
           </a:xfrm>
           <a:prstGeom prst="rect">
             <a:avLst/>
@@ -13793,7 +13488,7 @@
         </p:nvSpPr>
         <p:spPr>
           <a:xfrm>
-            <a:off x="5303520" y="3719090"/>
+            <a:off x="5303520" y="4103748"/>
             <a:ext cx="1600200" cy="256032"/>
           </a:xfrm>
           <a:prstGeom prst="rect">
@@ -13822,7 +13517,7 @@
                 </a:solidFill>
                 <a:latin typeface="Times New Roman"/>
               </a:rPr>
-              <a:t>506</a:t>
+              <a:t>160</a:t>
             </a:r>
           </a:p>
         </p:txBody>
@@ -13936,7 +13631,7 @@
                 </a:solidFill>
                 <a:latin typeface="Times New Roman"/>
               </a:rPr>
-              <a:t>1,056</a:t>
+              <a:t>659</a:t>
             </a:r>
           </a:p>
         </p:txBody>
@@ -14100,6 +13795,1007 @@
             <a:avLst/>
           </a:prstGeom>
           <a:solidFill>
+            <a:srgbClr val="FFFFFF"/>
+          </a:solidFill>
+          <a:ln>
+            <a:noFill/>
+          </a:ln>
+          <a:effectLst/>
+        </p:spPr>
+        <p:txBody>
+          <a:bodyPr rtlCol="0" anchor="ctr"/>
+          <a:lstStyle/>
+          <a:p>
+            <a:pPr algn="ctr"/>
+          </a:p>
+        </p:txBody>
+      </p:sp>
+      <p:pic>
+        <p:nvPicPr>
+          <p:cNvPr id="3" name="Picture 2" descr="mark_dark.png"/>
+          <p:cNvPicPr>
+            <a:picLocks noChangeAspect="1"/>
+          </p:cNvPicPr>
+          <p:nvPr/>
+        </p:nvPicPr>
+        <p:blipFill>
+          <a:blip r:embed="rId2"/>
+          <a:stretch>
+            <a:fillRect/>
+          </a:stretch>
+        </p:blipFill>
+        <p:spPr>
+          <a:xfrm>
+            <a:off x="457200" y="219456"/>
+            <a:ext cx="280009" cy="237744"/>
+          </a:xfrm>
+          <a:prstGeom prst="rect">
+            <a:avLst/>
+          </a:prstGeom>
+        </p:spPr>
+      </p:pic>
+      <p:sp>
+        <p:nvSpPr>
+          <p:cNvPr id="4" name="TextBox 3"/>
+          <p:cNvSpPr txBox="1"/>
+          <p:nvPr/>
+        </p:nvSpPr>
+        <p:spPr>
+          <a:xfrm>
+            <a:off x="841248" y="246888"/>
+            <a:ext cx="5486400" cy="274320"/>
+          </a:xfrm>
+          <a:prstGeom prst="rect">
+            <a:avLst/>
+          </a:prstGeom>
+          <a:noFill/>
+        </p:spPr>
+        <p:txBody>
+          <a:bodyPr wrap="square" anchor="t" lIns="0" rIns="0" tIns="0" bIns="0">
+            <a:spAutoFit/>
+          </a:bodyPr>
+          <a:lstStyle/>
+          <a:p>
+            <a:pPr algn="l">
+              <a:lnSpc>
+                <a:spcPct val="110000"/>
+              </a:lnSpc>
+              <a:spcAft>
+                <a:spcPts val="0"/>
+              </a:spcAft>
+            </a:pPr>
+            <a:r>
+              <a:rPr sz="1100" b="0" i="0">
+                <a:solidFill>
+                  <a:srgbClr val="556A83"/>
+                </a:solidFill>
+                <a:latin typeface="Arial"/>
+              </a:rPr>
+              <a:t>Case · Öresund era</a:t>
+            </a:r>
+          </a:p>
+        </p:txBody>
+      </p:sp>
+      <p:sp>
+        <p:nvSpPr>
+          <p:cNvPr id="5" name="Rectangle 4"/>
+          <p:cNvSpPr/>
+          <p:nvPr/>
+        </p:nvSpPr>
+        <p:spPr>
+          <a:xfrm>
+            <a:off x="0" y="566928"/>
+            <a:ext cx="9753904" cy="914400"/>
+          </a:xfrm>
+          <a:prstGeom prst="rect">
+            <a:avLst/>
+          </a:prstGeom>
+          <a:solidFill>
+            <a:srgbClr val="F6F7F9"/>
+          </a:solidFill>
+          <a:ln>
+            <a:noFill/>
+          </a:ln>
+          <a:effectLst/>
+        </p:spPr>
+        <p:txBody>
+          <a:bodyPr rtlCol="0" anchor="ctr"/>
+          <a:lstStyle/>
+          <a:p>
+            <a:pPr algn="ctr"/>
+          </a:p>
+        </p:txBody>
+      </p:sp>
+      <p:sp>
+        <p:nvSpPr>
+          <p:cNvPr id="6" name="TextBox 5"/>
+          <p:cNvSpPr txBox="1"/>
+          <p:nvPr/>
+        </p:nvSpPr>
+        <p:spPr>
+          <a:xfrm>
+            <a:off x="502920" y="713232"/>
+            <a:ext cx="8778240" cy="640080"/>
+          </a:xfrm>
+          <a:prstGeom prst="rect">
+            <a:avLst/>
+          </a:prstGeom>
+          <a:noFill/>
+        </p:spPr>
+        <p:txBody>
+          <a:bodyPr wrap="square" anchor="t" lIns="0" rIns="0" tIns="0" bIns="0">
+            <a:spAutoFit/>
+          </a:bodyPr>
+          <a:lstStyle/>
+          <a:p>
+            <a:pPr algn="l">
+              <a:lnSpc>
+                <a:spcPct val="110000"/>
+              </a:lnSpc>
+              <a:spcAft>
+                <a:spcPts val="0"/>
+              </a:spcAft>
+            </a:pPr>
+            <a:r>
+              <a:rPr sz="2600" b="0" i="0" spc="-78">
+                <a:solidFill>
+                  <a:srgbClr val="314359"/>
+                </a:solidFill>
+                <a:latin typeface="Times New Roman"/>
+              </a:rPr>
+              <a:t>Investment case study: Bilia</a:t>
+            </a:r>
+          </a:p>
+        </p:txBody>
+      </p:sp>
+      <p:sp>
+        <p:nvSpPr>
+          <p:cNvPr id="7" name="TextBox 6"/>
+          <p:cNvSpPr txBox="1"/>
+          <p:nvPr/>
+        </p:nvSpPr>
+        <p:spPr>
+          <a:xfrm>
+            <a:off x="5486400" y="6967728"/>
+            <a:ext cx="4023360" cy="274320"/>
+          </a:xfrm>
+          <a:prstGeom prst="rect">
+            <a:avLst/>
+          </a:prstGeom>
+          <a:noFill/>
+        </p:spPr>
+        <p:txBody>
+          <a:bodyPr wrap="square" anchor="t" lIns="0" rIns="0" tIns="0" bIns="0">
+            <a:spAutoFit/>
+          </a:bodyPr>
+          <a:lstStyle/>
+          <a:p>
+            <a:pPr algn="r">
+              <a:lnSpc>
+                <a:spcPct val="110000"/>
+              </a:lnSpc>
+              <a:spcAft>
+                <a:spcPts val="0"/>
+              </a:spcAft>
+            </a:pPr>
+            <a:r>
+              <a:rPr sz="850" b="0" i="0">
+                <a:solidFill>
+                  <a:srgbClr val="556A83"/>
+                </a:solidFill>
+                <a:latin typeface="Arial"/>
+              </a:rPr>
+              <a:t>Strictly confidential          19</a:t>
+            </a:r>
+          </a:p>
+        </p:txBody>
+      </p:sp>
+      <p:sp>
+        <p:nvSpPr>
+          <p:cNvPr id="8" name="TextBox 7"/>
+          <p:cNvSpPr txBox="1"/>
+          <p:nvPr/>
+        </p:nvSpPr>
+        <p:spPr>
+          <a:xfrm>
+            <a:off x="502920" y="1783080"/>
+            <a:ext cx="4160520" cy="5120640"/>
+          </a:xfrm>
+          <a:prstGeom prst="rect">
+            <a:avLst/>
+          </a:prstGeom>
+          <a:noFill/>
+        </p:spPr>
+        <p:txBody>
+          <a:bodyPr wrap="square" anchor="t" lIns="0" rIns="0" tIns="0" bIns="0">
+            <a:spAutoFit/>
+          </a:bodyPr>
+          <a:lstStyle/>
+          <a:p>
+            <a:pPr algn="l">
+              <a:lnSpc>
+                <a:spcPct val="110000"/>
+              </a:lnSpc>
+              <a:spcBef>
+                <a:spcPts val="0"/>
+              </a:spcBef>
+              <a:spcAft>
+                <a:spcPts val="250"/>
+              </a:spcAft>
+            </a:pPr>
+            <a:r>
+              <a:rPr sz="1100" b="1" i="0">
+                <a:solidFill>
+                  <a:srgbClr val="314359"/>
+                </a:solidFill>
+                <a:latin typeface="Times New Roman"/>
+              </a:rPr>
+              <a:t>Company description</a:t>
+            </a:r>
+          </a:p>
+          <a:p>
+            <a:pPr algn="l">
+              <a:lnSpc>
+                <a:spcPct val="108000"/>
+              </a:lnSpc>
+              <a:spcAft>
+                <a:spcPts val="200"/>
+              </a:spcAft>
+            </a:pPr>
+            <a:r>
+              <a:rPr sz="869" b="0" i="0">
+                <a:solidFill>
+                  <a:srgbClr val="0E1620"/>
+                </a:solidFill>
+                <a:latin typeface="Arial"/>
+              </a:rPr>
+              <a:t>Bilia is a leading Nordic car retailer and car-service company. Öresund became an owner in 2003 through a redemption of shares from Custos.</a:t>
+            </a:r>
+          </a:p>
+          <a:p>
+            <a:pPr algn="l">
+              <a:lnSpc>
+                <a:spcPct val="110000"/>
+              </a:lnSpc>
+              <a:spcBef>
+                <a:spcPts val="700"/>
+              </a:spcBef>
+              <a:spcAft>
+                <a:spcPts val="250"/>
+              </a:spcAft>
+            </a:pPr>
+            <a:r>
+              <a:rPr sz="1100" b="1" i="0">
+                <a:solidFill>
+                  <a:srgbClr val="314359"/>
+                </a:solidFill>
+                <a:latin typeface="Times New Roman"/>
+              </a:rPr>
+              <a:t>Recognized opportunities</a:t>
+            </a:r>
+          </a:p>
+          <a:p>
+            <a:pPr marL="149162" indent="-149162">
+              <a:lnSpc>
+                <a:spcPct val="106000"/>
+              </a:lnSpc>
+              <a:spcAft>
+                <a:spcPts val="150"/>
+              </a:spcAft>
+            </a:pPr>
+            <a:r>
+              <a:rPr sz="869" b="1">
+                <a:solidFill>
+                  <a:srgbClr val="556A83"/>
+                </a:solidFill>
+                <a:latin typeface="Arial"/>
+              </a:rPr>
+              <a:t>›  </a:t>
+            </a:r>
+            <a:r>
+              <a:rPr sz="869">
+                <a:solidFill>
+                  <a:srgbClr val="0E1620"/>
+                </a:solidFill>
+                <a:latin typeface="Arial"/>
+              </a:rPr>
+              <a:t>Opportunity to separate trucks/heavy vehicles from the car business</a:t>
+            </a:r>
+          </a:p>
+          <a:p>
+            <a:pPr marL="149162" indent="-149162">
+              <a:lnSpc>
+                <a:spcPct val="106000"/>
+              </a:lnSpc>
+              <a:spcAft>
+                <a:spcPts val="150"/>
+              </a:spcAft>
+            </a:pPr>
+            <a:r>
+              <a:rPr sz="869" b="1">
+                <a:solidFill>
+                  <a:srgbClr val="556A83"/>
+                </a:solidFill>
+                <a:latin typeface="Arial"/>
+              </a:rPr>
+              <a:t>›  </a:t>
+            </a:r>
+            <a:r>
+              <a:rPr sz="869">
+                <a:solidFill>
+                  <a:srgbClr val="0E1620"/>
+                </a:solidFill>
+                <a:latin typeface="Arial"/>
+              </a:rPr>
+              <a:t>Strong cash flow to fund consolidation of car retailers</a:t>
+            </a:r>
+          </a:p>
+          <a:p>
+            <a:pPr marL="149162" indent="-149162">
+              <a:lnSpc>
+                <a:spcPct val="106000"/>
+              </a:lnSpc>
+              <a:spcAft>
+                <a:spcPts val="150"/>
+              </a:spcAft>
+            </a:pPr>
+            <a:r>
+              <a:rPr sz="869" b="1">
+                <a:solidFill>
+                  <a:srgbClr val="556A83"/>
+                </a:solidFill>
+                <a:latin typeface="Arial"/>
+              </a:rPr>
+              <a:t>›  </a:t>
+            </a:r>
+            <a:r>
+              <a:rPr sz="869">
+                <a:solidFill>
+                  <a:srgbClr val="0E1620"/>
+                </a:solidFill>
+                <a:latin typeface="Arial"/>
+              </a:rPr>
+              <a:t>Hidden real-estate value</a:t>
+            </a:r>
+          </a:p>
+          <a:p>
+            <a:pPr algn="l">
+              <a:lnSpc>
+                <a:spcPct val="110000"/>
+              </a:lnSpc>
+              <a:spcBef>
+                <a:spcPts val="700"/>
+              </a:spcBef>
+              <a:spcAft>
+                <a:spcPts val="250"/>
+              </a:spcAft>
+            </a:pPr>
+            <a:r>
+              <a:rPr sz="1100" b="1" i="0">
+                <a:solidFill>
+                  <a:srgbClr val="314359"/>
+                </a:solidFill>
+                <a:latin typeface="Times New Roman"/>
+              </a:rPr>
+              <a:t>Initial plan</a:t>
+            </a:r>
+          </a:p>
+          <a:p>
+            <a:pPr algn="l">
+              <a:lnSpc>
+                <a:spcPct val="108000"/>
+              </a:lnSpc>
+              <a:spcAft>
+                <a:spcPts val="200"/>
+              </a:spcAft>
+            </a:pPr>
+            <a:r>
+              <a:rPr sz="869" b="0" i="0">
+                <a:solidFill>
+                  <a:srgbClr val="0E1620"/>
+                </a:solidFill>
+                <a:latin typeface="Arial"/>
+              </a:rPr>
+              <a:t>Separate the heavy-vehicle and car businesses, use strong cash flow to acquire competing car retailers, and unlock real-estate value.</a:t>
+            </a:r>
+          </a:p>
+          <a:p>
+            <a:pPr algn="l">
+              <a:lnSpc>
+                <a:spcPct val="110000"/>
+              </a:lnSpc>
+              <a:spcBef>
+                <a:spcPts val="700"/>
+              </a:spcBef>
+              <a:spcAft>
+                <a:spcPts val="250"/>
+              </a:spcAft>
+            </a:pPr>
+            <a:r>
+              <a:rPr sz="1100" b="1" i="0">
+                <a:solidFill>
+                  <a:srgbClr val="314359"/>
+                </a:solidFill>
+                <a:latin typeface="Times New Roman"/>
+              </a:rPr>
+              <a:t>Results</a:t>
+            </a:r>
+          </a:p>
+          <a:p>
+            <a:pPr marL="149162" indent="-149162">
+              <a:lnSpc>
+                <a:spcPct val="106000"/>
+              </a:lnSpc>
+              <a:spcAft>
+                <a:spcPts val="150"/>
+              </a:spcAft>
+            </a:pPr>
+            <a:r>
+              <a:rPr sz="869" b="1">
+                <a:solidFill>
+                  <a:srgbClr val="556A83"/>
+                </a:solidFill>
+                <a:latin typeface="Arial"/>
+              </a:rPr>
+              <a:t>✓  </a:t>
+            </a:r>
+            <a:r>
+              <a:rPr sz="869">
+                <a:solidFill>
+                  <a:srgbClr val="0E1620"/>
+                </a:solidFill>
+                <a:latin typeface="Arial"/>
+              </a:rPr>
+              <a:t>Split into heavy vehicles (LV) and cars (PV); Volvo AB acquired the LV business for PV shares — leaving a pure car retailer</a:t>
+            </a:r>
+          </a:p>
+          <a:p>
+            <a:pPr marL="149162" indent="-149162">
+              <a:lnSpc>
+                <a:spcPct val="106000"/>
+              </a:lnSpc>
+              <a:spcAft>
+                <a:spcPts val="150"/>
+              </a:spcAft>
+            </a:pPr>
+            <a:r>
+              <a:rPr sz="869" b="1">
+                <a:solidFill>
+                  <a:srgbClr val="556A83"/>
+                </a:solidFill>
+                <a:latin typeface="Arial"/>
+              </a:rPr>
+              <a:t>✓  </a:t>
+            </a:r>
+            <a:r>
+              <a:rPr sz="869">
+                <a:solidFill>
+                  <a:srgbClr val="0E1620"/>
+                </a:solidFill>
+                <a:latin typeface="Arial"/>
+              </a:rPr>
+              <a:t>Acquired several competing car retailers, expanding geography and brands; transferred excess cash to shareholders</a:t>
+            </a:r>
+          </a:p>
+          <a:p>
+            <a:pPr marL="149162" indent="-149162">
+              <a:lnSpc>
+                <a:spcPct val="106000"/>
+              </a:lnSpc>
+              <a:spcAft>
+                <a:spcPts val="150"/>
+              </a:spcAft>
+            </a:pPr>
+            <a:r>
+              <a:rPr sz="869" b="1">
+                <a:solidFill>
+                  <a:srgbClr val="556A83"/>
+                </a:solidFill>
+                <a:latin typeface="Arial"/>
+              </a:rPr>
+              <a:t>✓  </a:t>
+            </a:r>
+            <a:r>
+              <a:rPr sz="869">
+                <a:solidFill>
+                  <a:srgbClr val="0E1620"/>
+                </a:solidFill>
+                <a:latin typeface="Arial"/>
+              </a:rPr>
+              <a:t>Spun off the real estate as Catena (2006), distributed to shareholders and listed</a:t>
+            </a:r>
+          </a:p>
+        </p:txBody>
+      </p:sp>
+      <p:sp>
+        <p:nvSpPr>
+          <p:cNvPr id="9" name="Rounded Rectangle 8"/>
+          <p:cNvSpPr/>
+          <p:nvPr/>
+        </p:nvSpPr>
+        <p:spPr>
+          <a:xfrm>
+            <a:off x="4983480" y="1783080"/>
+            <a:ext cx="4297680" cy="384048"/>
+          </a:xfrm>
+          <a:prstGeom prst="roundRect">
+            <a:avLst/>
+          </a:prstGeom>
+          <a:solidFill>
+            <a:srgbClr val="F6F7F9"/>
+          </a:solidFill>
+          <a:ln>
+            <a:noFill/>
+          </a:ln>
+          <a:effectLst/>
+        </p:spPr>
+        <p:txBody>
+          <a:bodyPr rtlCol="0" anchor="ctr"/>
+          <a:lstStyle/>
+          <a:p>
+            <a:pPr algn="ctr"/>
+          </a:p>
+        </p:txBody>
+      </p:sp>
+      <p:sp>
+        <p:nvSpPr>
+          <p:cNvPr id="10" name="TextBox 9"/>
+          <p:cNvSpPr txBox="1"/>
+          <p:nvPr/>
+        </p:nvSpPr>
+        <p:spPr>
+          <a:xfrm>
+            <a:off x="4983480" y="1783080"/>
+            <a:ext cx="4297680" cy="384048"/>
+          </a:xfrm>
+          <a:prstGeom prst="rect">
+            <a:avLst/>
+          </a:prstGeom>
+          <a:noFill/>
+        </p:spPr>
+        <p:txBody>
+          <a:bodyPr wrap="square" anchor="ctr" lIns="0" rIns="0" tIns="0" bIns="0">
+            <a:spAutoFit/>
+          </a:bodyPr>
+          <a:lstStyle/>
+          <a:p>
+            <a:pPr algn="ctr">
+              <a:lnSpc>
+                <a:spcPct val="110000"/>
+              </a:lnSpc>
+              <a:spcAft>
+                <a:spcPts val="0"/>
+              </a:spcAft>
+            </a:pPr>
+            <a:r>
+              <a:rPr sz="1250" b="1" i="0">
+                <a:solidFill>
+                  <a:srgbClr val="314359"/>
+                </a:solidFill>
+                <a:latin typeface="Times New Roman"/>
+              </a:rPr>
+              <a:t>IRR 26.0% · 2003– · Consumer discretionary</a:t>
+            </a:r>
+          </a:p>
+        </p:txBody>
+      </p:sp>
+      <p:sp>
+        <p:nvSpPr>
+          <p:cNvPr id="11" name="TextBox 10"/>
+          <p:cNvSpPr txBox="1"/>
+          <p:nvPr/>
+        </p:nvSpPr>
+        <p:spPr>
+          <a:xfrm>
+            <a:off x="4983480" y="2350008"/>
+            <a:ext cx="4297680" cy="274320"/>
+          </a:xfrm>
+          <a:prstGeom prst="rect">
+            <a:avLst/>
+          </a:prstGeom>
+          <a:noFill/>
+        </p:spPr>
+        <p:txBody>
+          <a:bodyPr wrap="square" anchor="t" lIns="0" rIns="0" tIns="0" bIns="0">
+            <a:spAutoFit/>
+          </a:bodyPr>
+          <a:lstStyle/>
+          <a:p>
+            <a:pPr algn="ctr">
+              <a:lnSpc>
+                <a:spcPct val="110000"/>
+              </a:lnSpc>
+              <a:spcAft>
+                <a:spcPts val="0"/>
+              </a:spcAft>
+            </a:pPr>
+            <a:r>
+              <a:rPr sz="1100" b="1" i="0">
+                <a:solidFill>
+                  <a:srgbClr val="314359"/>
+                </a:solidFill>
+                <a:latin typeface="Times New Roman"/>
+              </a:rPr>
+              <a:t>Initial investment vs. current value</a:t>
+            </a:r>
+          </a:p>
+        </p:txBody>
+      </p:sp>
+      <p:sp>
+        <p:nvSpPr>
+          <p:cNvPr id="12" name="Rectangle 11"/>
+          <p:cNvSpPr/>
+          <p:nvPr/>
+        </p:nvSpPr>
+        <p:spPr>
+          <a:xfrm>
+            <a:off x="5074920" y="4773168"/>
+            <a:ext cx="4114800" cy="12700"/>
+          </a:xfrm>
+          <a:prstGeom prst="rect">
+            <a:avLst/>
+          </a:prstGeom>
+          <a:solidFill>
+            <a:srgbClr val="E2E5E9"/>
+          </a:solidFill>
+          <a:ln>
+            <a:noFill/>
+          </a:ln>
+          <a:effectLst/>
+        </p:spPr>
+        <p:txBody>
+          <a:bodyPr rtlCol="0" anchor="ctr"/>
+          <a:lstStyle/>
+          <a:p>
+            <a:pPr algn="ctr"/>
+          </a:p>
+        </p:txBody>
+      </p:sp>
+      <p:sp>
+        <p:nvSpPr>
+          <p:cNvPr id="13" name="Rectangle 12"/>
+          <p:cNvSpPr/>
+          <p:nvPr/>
+        </p:nvSpPr>
+        <p:spPr>
+          <a:xfrm>
+            <a:off x="5577840" y="3993410"/>
+            <a:ext cx="1051560" cy="779758"/>
+          </a:xfrm>
+          <a:prstGeom prst="rect">
+            <a:avLst/>
+          </a:prstGeom>
+          <a:solidFill>
+            <a:srgbClr val="152130"/>
+          </a:solidFill>
+          <a:ln>
+            <a:noFill/>
+          </a:ln>
+          <a:effectLst/>
+        </p:spPr>
+        <p:txBody>
+          <a:bodyPr rtlCol="0" anchor="ctr"/>
+          <a:lstStyle/>
+          <a:p>
+            <a:pPr algn="ctr"/>
+          </a:p>
+        </p:txBody>
+      </p:sp>
+      <p:sp>
+        <p:nvSpPr>
+          <p:cNvPr id="14" name="TextBox 13"/>
+          <p:cNvSpPr txBox="1"/>
+          <p:nvPr/>
+        </p:nvSpPr>
+        <p:spPr>
+          <a:xfrm>
+            <a:off x="5303520" y="3719090"/>
+            <a:ext cx="1600200" cy="256032"/>
+          </a:xfrm>
+          <a:prstGeom prst="rect">
+            <a:avLst/>
+          </a:prstGeom>
+          <a:noFill/>
+        </p:spPr>
+        <p:txBody>
+          <a:bodyPr wrap="square" anchor="t" lIns="0" rIns="0" tIns="0" bIns="0">
+            <a:spAutoFit/>
+          </a:bodyPr>
+          <a:lstStyle/>
+          <a:p>
+            <a:pPr algn="ctr">
+              <a:lnSpc>
+                <a:spcPct val="110000"/>
+              </a:lnSpc>
+              <a:spcAft>
+                <a:spcPts val="0"/>
+              </a:spcAft>
+            </a:pPr>
+            <a:r>
+              <a:rPr sz="1300" b="1" i="0">
+                <a:solidFill>
+                  <a:srgbClr val="314359"/>
+                </a:solidFill>
+                <a:latin typeface="Times New Roman"/>
+              </a:rPr>
+              <a:t>506</a:t>
+            </a:r>
+          </a:p>
+        </p:txBody>
+      </p:sp>
+      <p:sp>
+        <p:nvSpPr>
+          <p:cNvPr id="15" name="TextBox 14"/>
+          <p:cNvSpPr txBox="1"/>
+          <p:nvPr/>
+        </p:nvSpPr>
+        <p:spPr>
+          <a:xfrm>
+            <a:off x="5074920" y="4828032"/>
+            <a:ext cx="2057400" cy="310896"/>
+          </a:xfrm>
+          <a:prstGeom prst="rect">
+            <a:avLst/>
+          </a:prstGeom>
+          <a:noFill/>
+        </p:spPr>
+        <p:txBody>
+          <a:bodyPr wrap="square" anchor="t" lIns="0" rIns="0" tIns="0" bIns="0">
+            <a:spAutoFit/>
+          </a:bodyPr>
+          <a:lstStyle/>
+          <a:p>
+            <a:pPr algn="ctr">
+              <a:lnSpc>
+                <a:spcPct val="110000"/>
+              </a:lnSpc>
+              <a:spcAft>
+                <a:spcPts val="0"/>
+              </a:spcAft>
+            </a:pPr>
+            <a:r>
+              <a:rPr sz="950" b="0" i="0">
+                <a:solidFill>
+                  <a:srgbClr val="0E1620"/>
+                </a:solidFill>
+                <a:latin typeface="Arial"/>
+              </a:rPr>
+              <a:t>Initial investment</a:t>
+            </a:r>
+          </a:p>
+        </p:txBody>
+      </p:sp>
+      <p:sp>
+        <p:nvSpPr>
+          <p:cNvPr id="16" name="Rectangle 15"/>
+          <p:cNvSpPr/>
+          <p:nvPr/>
+        </p:nvSpPr>
+        <p:spPr>
+          <a:xfrm>
+            <a:off x="7635240" y="3145846"/>
+            <a:ext cx="1051560" cy="1627322"/>
+          </a:xfrm>
+          <a:prstGeom prst="rect">
+            <a:avLst/>
+          </a:prstGeom>
+          <a:solidFill>
+            <a:srgbClr val="152130"/>
+          </a:solidFill>
+          <a:ln>
+            <a:noFill/>
+          </a:ln>
+          <a:effectLst/>
+        </p:spPr>
+        <p:txBody>
+          <a:bodyPr rtlCol="0" anchor="ctr"/>
+          <a:lstStyle/>
+          <a:p>
+            <a:pPr algn="ctr"/>
+          </a:p>
+        </p:txBody>
+      </p:sp>
+      <p:sp>
+        <p:nvSpPr>
+          <p:cNvPr id="17" name="TextBox 16"/>
+          <p:cNvSpPr txBox="1"/>
+          <p:nvPr/>
+        </p:nvSpPr>
+        <p:spPr>
+          <a:xfrm>
+            <a:off x="7360920" y="2871526"/>
+            <a:ext cx="1600200" cy="256032"/>
+          </a:xfrm>
+          <a:prstGeom prst="rect">
+            <a:avLst/>
+          </a:prstGeom>
+          <a:noFill/>
+        </p:spPr>
+        <p:txBody>
+          <a:bodyPr wrap="square" anchor="t" lIns="0" rIns="0" tIns="0" bIns="0">
+            <a:spAutoFit/>
+          </a:bodyPr>
+          <a:lstStyle/>
+          <a:p>
+            <a:pPr algn="ctr">
+              <a:lnSpc>
+                <a:spcPct val="110000"/>
+              </a:lnSpc>
+              <a:spcAft>
+                <a:spcPts val="0"/>
+              </a:spcAft>
+            </a:pPr>
+            <a:r>
+              <a:rPr sz="1300" b="1" i="0">
+                <a:solidFill>
+                  <a:srgbClr val="314359"/>
+                </a:solidFill>
+                <a:latin typeface="Times New Roman"/>
+              </a:rPr>
+              <a:t>1,056</a:t>
+            </a:r>
+          </a:p>
+        </p:txBody>
+      </p:sp>
+      <p:sp>
+        <p:nvSpPr>
+          <p:cNvPr id="18" name="TextBox 17"/>
+          <p:cNvSpPr txBox="1"/>
+          <p:nvPr/>
+        </p:nvSpPr>
+        <p:spPr>
+          <a:xfrm>
+            <a:off x="7132320" y="4828032"/>
+            <a:ext cx="2057400" cy="310896"/>
+          </a:xfrm>
+          <a:prstGeom prst="rect">
+            <a:avLst/>
+          </a:prstGeom>
+          <a:noFill/>
+        </p:spPr>
+        <p:txBody>
+          <a:bodyPr wrap="square" anchor="t" lIns="0" rIns="0" tIns="0" bIns="0">
+            <a:spAutoFit/>
+          </a:bodyPr>
+          <a:lstStyle/>
+          <a:p>
+            <a:pPr algn="ctr">
+              <a:lnSpc>
+                <a:spcPct val="110000"/>
+              </a:lnSpc>
+              <a:spcAft>
+                <a:spcPts val="0"/>
+              </a:spcAft>
+            </a:pPr>
+            <a:r>
+              <a:rPr sz="950" b="0" i="0">
+                <a:solidFill>
+                  <a:srgbClr val="0E1620"/>
+                </a:solidFill>
+                <a:latin typeface="Arial"/>
+              </a:rPr>
+              <a:t>Current value</a:t>
+            </a:r>
+          </a:p>
+        </p:txBody>
+      </p:sp>
+      <p:sp>
+        <p:nvSpPr>
+          <p:cNvPr id="19" name="TextBox 18"/>
+          <p:cNvSpPr txBox="1"/>
+          <p:nvPr/>
+        </p:nvSpPr>
+        <p:spPr>
+          <a:xfrm>
+            <a:off x="4983480" y="5157216"/>
+            <a:ext cx="4297680" cy="201168"/>
+          </a:xfrm>
+          <a:prstGeom prst="rect">
+            <a:avLst/>
+          </a:prstGeom>
+          <a:noFill/>
+        </p:spPr>
+        <p:txBody>
+          <a:bodyPr wrap="square" anchor="t" lIns="0" rIns="0" tIns="0" bIns="0">
+            <a:spAutoFit/>
+          </a:bodyPr>
+          <a:lstStyle/>
+          <a:p>
+            <a:pPr algn="l">
+              <a:lnSpc>
+                <a:spcPct val="110000"/>
+              </a:lnSpc>
+              <a:spcAft>
+                <a:spcPts val="0"/>
+              </a:spcAft>
+            </a:pPr>
+            <a:r>
+              <a:rPr sz="850" b="0" i="1">
+                <a:solidFill>
+                  <a:srgbClr val="556A83"/>
+                </a:solidFill>
+                <a:latin typeface="Arial"/>
+              </a:rPr>
+              <a:t>SEK M</a:t>
+            </a:r>
+          </a:p>
+        </p:txBody>
+      </p:sp>
+      <p:sp>
+        <p:nvSpPr>
+          <p:cNvPr id="20" name="TextBox 19"/>
+          <p:cNvSpPr txBox="1"/>
+          <p:nvPr/>
+        </p:nvSpPr>
+        <p:spPr>
+          <a:xfrm>
+            <a:off x="502920" y="6967728"/>
+            <a:ext cx="4846320" cy="274320"/>
+          </a:xfrm>
+          <a:prstGeom prst="rect">
+            <a:avLst/>
+          </a:prstGeom>
+          <a:noFill/>
+        </p:spPr>
+        <p:txBody>
+          <a:bodyPr wrap="square" anchor="t" lIns="0" rIns="0" tIns="0" bIns="0">
+            <a:spAutoFit/>
+          </a:bodyPr>
+          <a:lstStyle/>
+          <a:p>
+            <a:pPr algn="l">
+              <a:lnSpc>
+                <a:spcPct val="100000"/>
+              </a:lnSpc>
+              <a:spcAft>
+                <a:spcPts val="0"/>
+              </a:spcAft>
+            </a:pPr>
+            <a:r>
+              <a:rPr sz="750" b="0" i="1">
+                <a:solidFill>
+                  <a:srgbClr val="556A83"/>
+                </a:solidFill>
+                <a:latin typeface="Arial"/>
+              </a:rPr>
+              <a:t>Note: 9 SEK ≈ 1€. IRR unleveraged and net of all costs. Executed by members of the team at Investment AB Öresund.</a:t>
+            </a:r>
+          </a:p>
+        </p:txBody>
+      </p:sp>
+    </p:spTree>
+  </p:cSld>
+  <p:clrMapOvr>
+    <a:masterClrMapping/>
+  </p:clrMapOvr>
+</p:sld>
+</file>
+
+<file path=ppt/slides/slide23.xml><?xml version="1.0" encoding="utf-8"?>
+<p:sld xmlns:a="http://schemas.openxmlformats.org/drawingml/2006/main" xmlns:p="http://schemas.openxmlformats.org/presentationml/2006/main" xmlns:r="http://schemas.openxmlformats.org/officeDocument/2006/relationships">
+  <p:cSld>
+    <p:spTree>
+      <p:nvGrpSpPr>
+        <p:cNvPr id="1" name=""/>
+        <p:cNvGrpSpPr/>
+        <p:nvPr/>
+      </p:nvGrpSpPr>
+      <p:grpSpPr/>
+      <p:sp>
+        <p:nvSpPr>
+          <p:cNvPr id="2" name="Rectangle 1"/>
+          <p:cNvSpPr/>
+          <p:nvPr/>
+        </p:nvSpPr>
+        <p:spPr>
+          <a:xfrm>
+            <a:off x="0" y="0"/>
+            <a:ext cx="9753904" cy="7315200"/>
+          </a:xfrm>
+          <a:prstGeom prst="rect">
+            <a:avLst/>
+          </a:prstGeom>
+          <a:solidFill>
             <a:srgbClr val="152130"/>
           </a:solidFill>
           <a:ln>
@@ -15284,7 +15980,7 @@
                 </a:solidFill>
                 <a:latin typeface="Arial"/>
               </a:rPr>
-              <a:t>Kitron ASA</a:t>
+              <a:t>Concentric AB</a:t>
             </a:r>
           </a:p>
         </p:txBody>
@@ -15356,7 +16052,7 @@
                 </a:solidFill>
                 <a:latin typeface="Arial"/>
               </a:rPr>
-              <a:t>49%</a:t>
+              <a:t>81%</a:t>
             </a:r>
           </a:p>
         </p:txBody>
@@ -15428,7 +16124,7 @@
                 </a:solidFill>
                 <a:latin typeface="Arial"/>
               </a:rPr>
-              <a:t>1.6×</a:t>
+              <a:t>3.9×</a:t>
             </a:r>
           </a:p>
         </p:txBody>
@@ -15500,7 +16196,7 @@
                 </a:solidFill>
                 <a:latin typeface="Arial"/>
               </a:rPr>
-              <a:t>Note AB</a:t>
+              <a:t>Kitron ASA</a:t>
             </a:r>
           </a:p>
         </p:txBody>
@@ -15572,7 +16268,7 @@
                 </a:solidFill>
                 <a:latin typeface="Arial"/>
               </a:rPr>
-              <a:t>33%</a:t>
+              <a:t>49%</a:t>
             </a:r>
           </a:p>
         </p:txBody>
@@ -15644,7 +16340,7 @@
                 </a:solidFill>
                 <a:latin typeface="Arial"/>
               </a:rPr>
-              <a:t>5.1×</a:t>
+              <a:t>1.6×</a:t>
             </a:r>
           </a:p>
         </p:txBody>
@@ -15716,7 +16412,7 @@
                 </a:solidFill>
                 <a:latin typeface="Arial"/>
               </a:rPr>
-              <a:t>Lindab AB</a:t>
+              <a:t>Note AB</a:t>
             </a:r>
           </a:p>
         </p:txBody>
@@ -15788,7 +16484,7 @@
                 </a:solidFill>
                 <a:latin typeface="Arial"/>
               </a:rPr>
-              <a:t>32%</a:t>
+              <a:t>33%</a:t>
             </a:r>
           </a:p>
         </p:txBody>
@@ -15860,7 +16556,7 @@
                 </a:solidFill>
                 <a:latin typeface="Arial"/>
               </a:rPr>
-              <a:t>1.6×</a:t>
+              <a:t>5.1×</a:t>
             </a:r>
           </a:p>
         </p:txBody>
@@ -15932,7 +16628,7 @@
                 </a:solidFill>
                 <a:latin typeface="Arial"/>
               </a:rPr>
-              <a:t>Transcom SA</a:t>
+              <a:t>Lindab AB</a:t>
             </a:r>
           </a:p>
         </p:txBody>
@@ -16004,7 +16700,7 @@
                 </a:solidFill>
                 <a:latin typeface="Arial"/>
               </a:rPr>
-              <a:t>30%</a:t>
+              <a:t>32%</a:t>
             </a:r>
           </a:p>
         </p:txBody>
@@ -16076,7 +16772,7 @@
                 </a:solidFill>
                 <a:latin typeface="Arial"/>
               </a:rPr>
-              <a:t>3.0×</a:t>
+              <a:t>1.6×</a:t>
             </a:r>
           </a:p>
         </p:txBody>
@@ -16148,7 +16844,7 @@
                 </a:solidFill>
                 <a:latin typeface="Arial"/>
               </a:rPr>
-              <a:t>DistIt / Alcadon</a:t>
+              <a:t>Transcom SA</a:t>
             </a:r>
           </a:p>
         </p:txBody>
@@ -16220,7 +16916,7 @@
                 </a:solidFill>
                 <a:latin typeface="Arial"/>
               </a:rPr>
-              <a:t>—</a:t>
+              <a:t>30%</a:t>
             </a:r>
           </a:p>
         </p:txBody>
@@ -16292,7 +16988,7 @@
                 </a:solidFill>
                 <a:latin typeface="Arial"/>
               </a:rPr>
-              <a:t>—</a:t>
+              <a:t>3.0×</a:t>
             </a:r>
           </a:p>
         </p:txBody>
@@ -16364,7 +17060,7 @@
                 </a:solidFill>
                 <a:latin typeface="Arial"/>
               </a:rPr>
-              <a:t>Renold plc</a:t>
+              <a:t>DistIt / Alcadon</a:t>
             </a:r>
           </a:p>
         </p:txBody>
@@ -16436,7 +17132,7 @@
                 </a:solidFill>
                 <a:latin typeface="Arial"/>
               </a:rPr>
-              <a:t>234%</a:t>
+              <a:t>—</a:t>
             </a:r>
           </a:p>
         </p:txBody>
@@ -16508,6 +17204,222 @@
                 </a:solidFill>
                 <a:latin typeface="Arial"/>
               </a:rPr>
+              <a:t>—</a:t>
+            </a:r>
+          </a:p>
+        </p:txBody>
+      </p:sp>
+      <p:sp>
+        <p:nvSpPr>
+          <p:cNvPr id="64" name="Rectangle 63"/>
+          <p:cNvSpPr/>
+          <p:nvPr/>
+        </p:nvSpPr>
+        <p:spPr>
+          <a:xfrm>
+            <a:off x="502920" y="4956048"/>
+            <a:ext cx="2240280" cy="274320"/>
+          </a:xfrm>
+          <a:prstGeom prst="rect">
+            <a:avLst/>
+          </a:prstGeom>
+          <a:solidFill>
+            <a:srgbClr val="F6F7F9"/>
+          </a:solidFill>
+          <a:ln>
+            <a:noFill/>
+          </a:ln>
+          <a:effectLst/>
+        </p:spPr>
+        <p:txBody>
+          <a:bodyPr rtlCol="0" anchor="ctr"/>
+          <a:lstStyle/>
+          <a:p>
+            <a:pPr algn="ctr"/>
+          </a:p>
+        </p:txBody>
+      </p:sp>
+      <p:sp>
+        <p:nvSpPr>
+          <p:cNvPr id="65" name="TextBox 64"/>
+          <p:cNvSpPr txBox="1"/>
+          <p:nvPr/>
+        </p:nvSpPr>
+        <p:spPr>
+          <a:xfrm>
+            <a:off x="557784" y="4956048"/>
+            <a:ext cx="2148840" cy="274320"/>
+          </a:xfrm>
+          <a:prstGeom prst="rect">
+            <a:avLst/>
+          </a:prstGeom>
+          <a:noFill/>
+        </p:spPr>
+        <p:txBody>
+          <a:bodyPr wrap="square" anchor="ctr" lIns="0" rIns="0" tIns="0" bIns="0">
+            <a:spAutoFit/>
+          </a:bodyPr>
+          <a:lstStyle/>
+          <a:p>
+            <a:pPr algn="l">
+              <a:lnSpc>
+                <a:spcPct val="110000"/>
+              </a:lnSpc>
+              <a:spcAft>
+                <a:spcPts val="0"/>
+              </a:spcAft>
+            </a:pPr>
+            <a:r>
+              <a:rPr sz="869" b="1" i="0">
+                <a:solidFill>
+                  <a:srgbClr val="314359"/>
+                </a:solidFill>
+                <a:latin typeface="Arial"/>
+              </a:rPr>
+              <a:t>Renold plc</a:t>
+            </a:r>
+          </a:p>
+        </p:txBody>
+      </p:sp>
+      <p:sp>
+        <p:nvSpPr>
+          <p:cNvPr id="66" name="Rectangle 65"/>
+          <p:cNvSpPr/>
+          <p:nvPr/>
+        </p:nvSpPr>
+        <p:spPr>
+          <a:xfrm>
+            <a:off x="2743200" y="4956048"/>
+            <a:ext cx="960120" cy="274320"/>
+          </a:xfrm>
+          <a:prstGeom prst="rect">
+            <a:avLst/>
+          </a:prstGeom>
+          <a:solidFill>
+            <a:srgbClr val="F6F7F9"/>
+          </a:solidFill>
+          <a:ln>
+            <a:noFill/>
+          </a:ln>
+          <a:effectLst/>
+        </p:spPr>
+        <p:txBody>
+          <a:bodyPr rtlCol="0" anchor="ctr"/>
+          <a:lstStyle/>
+          <a:p>
+            <a:pPr algn="ctr"/>
+          </a:p>
+        </p:txBody>
+      </p:sp>
+      <p:sp>
+        <p:nvSpPr>
+          <p:cNvPr id="67" name="TextBox 66"/>
+          <p:cNvSpPr txBox="1"/>
+          <p:nvPr/>
+        </p:nvSpPr>
+        <p:spPr>
+          <a:xfrm>
+            <a:off x="2798064" y="4956048"/>
+            <a:ext cx="868680" cy="274320"/>
+          </a:xfrm>
+          <a:prstGeom prst="rect">
+            <a:avLst/>
+          </a:prstGeom>
+          <a:noFill/>
+        </p:spPr>
+        <p:txBody>
+          <a:bodyPr wrap="square" anchor="ctr" lIns="0" rIns="0" tIns="0" bIns="0">
+            <a:spAutoFit/>
+          </a:bodyPr>
+          <a:lstStyle/>
+          <a:p>
+            <a:pPr algn="r">
+              <a:lnSpc>
+                <a:spcPct val="110000"/>
+              </a:lnSpc>
+              <a:spcAft>
+                <a:spcPts val="0"/>
+              </a:spcAft>
+            </a:pPr>
+            <a:r>
+              <a:rPr sz="869" b="0" i="0">
+                <a:solidFill>
+                  <a:srgbClr val="0E1620"/>
+                </a:solidFill>
+                <a:latin typeface="Arial"/>
+              </a:rPr>
+              <a:t>234%</a:t>
+            </a:r>
+          </a:p>
+        </p:txBody>
+      </p:sp>
+      <p:sp>
+        <p:nvSpPr>
+          <p:cNvPr id="68" name="Rectangle 67"/>
+          <p:cNvSpPr/>
+          <p:nvPr/>
+        </p:nvSpPr>
+        <p:spPr>
+          <a:xfrm>
+            <a:off x="3703320" y="4956048"/>
+            <a:ext cx="960120" cy="274320"/>
+          </a:xfrm>
+          <a:prstGeom prst="rect">
+            <a:avLst/>
+          </a:prstGeom>
+          <a:solidFill>
+            <a:srgbClr val="F6F7F9"/>
+          </a:solidFill>
+          <a:ln>
+            <a:noFill/>
+          </a:ln>
+          <a:effectLst/>
+        </p:spPr>
+        <p:txBody>
+          <a:bodyPr rtlCol="0" anchor="ctr"/>
+          <a:lstStyle/>
+          <a:p>
+            <a:pPr algn="ctr"/>
+          </a:p>
+        </p:txBody>
+      </p:sp>
+      <p:sp>
+        <p:nvSpPr>
+          <p:cNvPr id="69" name="TextBox 68"/>
+          <p:cNvSpPr txBox="1"/>
+          <p:nvPr/>
+        </p:nvSpPr>
+        <p:spPr>
+          <a:xfrm>
+            <a:off x="3758184" y="4956048"/>
+            <a:ext cx="868680" cy="274320"/>
+          </a:xfrm>
+          <a:prstGeom prst="rect">
+            <a:avLst/>
+          </a:prstGeom>
+          <a:noFill/>
+        </p:spPr>
+        <p:txBody>
+          <a:bodyPr wrap="square" anchor="ctr" lIns="0" rIns="0" tIns="0" bIns="0">
+            <a:spAutoFit/>
+          </a:bodyPr>
+          <a:lstStyle/>
+          <a:p>
+            <a:pPr algn="r">
+              <a:lnSpc>
+                <a:spcPct val="110000"/>
+              </a:lnSpc>
+              <a:spcAft>
+                <a:spcPts val="0"/>
+              </a:spcAft>
+            </a:pPr>
+            <a:r>
+              <a:rPr sz="869" b="0" i="0">
+                <a:solidFill>
+                  <a:srgbClr val="0E1620"/>
+                </a:solidFill>
+                <a:latin typeface="Arial"/>
+              </a:rPr>
               <a:t>1.6×</a:t>
             </a:r>
           </a:p>
@@ -16515,7 +17427,7 @@
       </p:sp>
       <p:sp>
         <p:nvSpPr>
-          <p:cNvPr id="64" name="TextBox 63"/>
+          <p:cNvPr id="70" name="TextBox 69"/>
           <p:cNvSpPr txBox="1"/>
           <p:nvPr/>
         </p:nvSpPr>
@@ -16557,7 +17469,7 @@
       </p:sp>
       <p:sp>
         <p:nvSpPr>
-          <p:cNvPr id="65" name="Rectangle 64"/>
+          <p:cNvPr id="71" name="Rectangle 70"/>
           <p:cNvSpPr/>
           <p:nvPr/>
         </p:nvSpPr>
@@ -16587,7 +17499,7 @@
       </p:sp>
       <p:sp>
         <p:nvSpPr>
-          <p:cNvPr id="66" name="TextBox 65"/>
+          <p:cNvPr id="72" name="TextBox 71"/>
           <p:cNvSpPr txBox="1"/>
           <p:nvPr/>
         </p:nvSpPr>
@@ -16629,7 +17541,7 @@
       </p:sp>
       <p:sp>
         <p:nvSpPr>
-          <p:cNvPr id="67" name="Rectangle 66"/>
+          <p:cNvPr id="73" name="Rectangle 72"/>
           <p:cNvSpPr/>
           <p:nvPr/>
         </p:nvSpPr>
@@ -16659,7 +17571,7 @@
       </p:sp>
       <p:sp>
         <p:nvSpPr>
-          <p:cNvPr id="68" name="TextBox 67"/>
+          <p:cNvPr id="74" name="TextBox 73"/>
           <p:cNvSpPr txBox="1"/>
           <p:nvPr/>
         </p:nvSpPr>
@@ -16701,7 +17613,7 @@
       </p:sp>
       <p:sp>
         <p:nvSpPr>
-          <p:cNvPr id="69" name="Rectangle 68"/>
+          <p:cNvPr id="75" name="Rectangle 74"/>
           <p:cNvSpPr/>
           <p:nvPr/>
         </p:nvSpPr>
@@ -16731,7 +17643,7 @@
       </p:sp>
       <p:sp>
         <p:nvSpPr>
-          <p:cNvPr id="70" name="TextBox 69"/>
+          <p:cNvPr id="76" name="TextBox 75"/>
           <p:cNvSpPr txBox="1"/>
           <p:nvPr/>
         </p:nvSpPr>
@@ -16773,7 +17685,7 @@
       </p:sp>
       <p:sp>
         <p:nvSpPr>
-          <p:cNvPr id="71" name="Rectangle 70"/>
+          <p:cNvPr id="77" name="Rectangle 76"/>
           <p:cNvSpPr/>
           <p:nvPr/>
         </p:nvSpPr>
@@ -16803,7 +17715,7 @@
       </p:sp>
       <p:sp>
         <p:nvSpPr>
-          <p:cNvPr id="72" name="TextBox 71"/>
+          <p:cNvPr id="78" name="TextBox 77"/>
           <p:cNvSpPr txBox="1"/>
           <p:nvPr/>
         </p:nvSpPr>
@@ -16845,7 +17757,7 @@
       </p:sp>
       <p:sp>
         <p:nvSpPr>
-          <p:cNvPr id="73" name="Rectangle 72"/>
+          <p:cNvPr id="79" name="Rectangle 78"/>
           <p:cNvSpPr/>
           <p:nvPr/>
         </p:nvSpPr>
@@ -16875,7 +17787,7 @@
       </p:sp>
       <p:sp>
         <p:nvSpPr>
-          <p:cNvPr id="74" name="TextBox 73"/>
+          <p:cNvPr id="80" name="TextBox 79"/>
           <p:cNvSpPr txBox="1"/>
           <p:nvPr/>
         </p:nvSpPr>
@@ -16917,7 +17829,7 @@
       </p:sp>
       <p:sp>
         <p:nvSpPr>
-          <p:cNvPr id="75" name="Rectangle 74"/>
+          <p:cNvPr id="81" name="Rectangle 80"/>
           <p:cNvSpPr/>
           <p:nvPr/>
         </p:nvSpPr>
@@ -16947,7 +17859,7 @@
       </p:sp>
       <p:sp>
         <p:nvSpPr>
-          <p:cNvPr id="76" name="TextBox 75"/>
+          <p:cNvPr id="82" name="TextBox 81"/>
           <p:cNvSpPr txBox="1"/>
           <p:nvPr/>
         </p:nvSpPr>
@@ -16989,7 +17901,7 @@
       </p:sp>
       <p:sp>
         <p:nvSpPr>
-          <p:cNvPr id="77" name="Rectangle 76"/>
+          <p:cNvPr id="83" name="Rectangle 82"/>
           <p:cNvSpPr/>
           <p:nvPr/>
         </p:nvSpPr>
@@ -17019,7 +17931,7 @@
       </p:sp>
       <p:sp>
         <p:nvSpPr>
-          <p:cNvPr id="78" name="TextBox 77"/>
+          <p:cNvPr id="84" name="TextBox 83"/>
           <p:cNvSpPr txBox="1"/>
           <p:nvPr/>
         </p:nvSpPr>
@@ -17061,7 +17973,7 @@
       </p:sp>
       <p:sp>
         <p:nvSpPr>
-          <p:cNvPr id="79" name="Rectangle 78"/>
+          <p:cNvPr id="85" name="Rectangle 84"/>
           <p:cNvSpPr/>
           <p:nvPr/>
         </p:nvSpPr>
@@ -17091,7 +18003,7 @@
       </p:sp>
       <p:sp>
         <p:nvSpPr>
-          <p:cNvPr id="80" name="TextBox 79"/>
+          <p:cNvPr id="86" name="TextBox 85"/>
           <p:cNvSpPr txBox="1"/>
           <p:nvPr/>
         </p:nvSpPr>
@@ -17133,7 +18045,7 @@
       </p:sp>
       <p:sp>
         <p:nvSpPr>
-          <p:cNvPr id="81" name="Rectangle 80"/>
+          <p:cNvPr id="87" name="Rectangle 86"/>
           <p:cNvSpPr/>
           <p:nvPr/>
         </p:nvSpPr>
@@ -17163,7 +18075,7 @@
       </p:sp>
       <p:sp>
         <p:nvSpPr>
-          <p:cNvPr id="82" name="TextBox 81"/>
+          <p:cNvPr id="88" name="TextBox 87"/>
           <p:cNvSpPr txBox="1"/>
           <p:nvPr/>
         </p:nvSpPr>
@@ -17205,7 +18117,7 @@
       </p:sp>
       <p:sp>
         <p:nvSpPr>
-          <p:cNvPr id="83" name="Rectangle 82"/>
+          <p:cNvPr id="89" name="Rectangle 88"/>
           <p:cNvSpPr/>
           <p:nvPr/>
         </p:nvSpPr>
@@ -17235,7 +18147,7 @@
       </p:sp>
       <p:sp>
         <p:nvSpPr>
-          <p:cNvPr id="84" name="TextBox 83"/>
+          <p:cNvPr id="90" name="TextBox 89"/>
           <p:cNvSpPr txBox="1"/>
           <p:nvPr/>
         </p:nvSpPr>
@@ -17277,7 +18189,7 @@
       </p:sp>
       <p:sp>
         <p:nvSpPr>
-          <p:cNvPr id="85" name="Rectangle 84"/>
+          <p:cNvPr id="91" name="Rectangle 90"/>
           <p:cNvSpPr/>
           <p:nvPr/>
         </p:nvSpPr>
@@ -17307,7 +18219,7 @@
       </p:sp>
       <p:sp>
         <p:nvSpPr>
-          <p:cNvPr id="86" name="TextBox 85"/>
+          <p:cNvPr id="92" name="TextBox 91"/>
           <p:cNvSpPr txBox="1"/>
           <p:nvPr/>
         </p:nvSpPr>
@@ -17349,7 +18261,7 @@
       </p:sp>
       <p:sp>
         <p:nvSpPr>
-          <p:cNvPr id="87" name="Rectangle 86"/>
+          <p:cNvPr id="93" name="Rectangle 92"/>
           <p:cNvSpPr/>
           <p:nvPr/>
         </p:nvSpPr>
@@ -17379,7 +18291,7 @@
       </p:sp>
       <p:sp>
         <p:nvSpPr>
-          <p:cNvPr id="88" name="TextBox 87"/>
+          <p:cNvPr id="94" name="TextBox 93"/>
           <p:cNvSpPr txBox="1"/>
           <p:nvPr/>
         </p:nvSpPr>
@@ -17421,7 +18333,7 @@
       </p:sp>
       <p:sp>
         <p:nvSpPr>
-          <p:cNvPr id="89" name="Rectangle 88"/>
+          <p:cNvPr id="95" name="Rectangle 94"/>
           <p:cNvSpPr/>
           <p:nvPr/>
         </p:nvSpPr>
@@ -17451,7 +18363,7 @@
       </p:sp>
       <p:sp>
         <p:nvSpPr>
-          <p:cNvPr id="90" name="TextBox 89"/>
+          <p:cNvPr id="96" name="TextBox 95"/>
           <p:cNvSpPr txBox="1"/>
           <p:nvPr/>
         </p:nvSpPr>
@@ -17493,7 +18405,7 @@
       </p:sp>
       <p:sp>
         <p:nvSpPr>
-          <p:cNvPr id="91" name="Rectangle 90"/>
+          <p:cNvPr id="97" name="Rectangle 96"/>
           <p:cNvSpPr/>
           <p:nvPr/>
         </p:nvSpPr>
@@ -17523,7 +18435,7 @@
       </p:sp>
       <p:sp>
         <p:nvSpPr>
-          <p:cNvPr id="92" name="TextBox 91"/>
+          <p:cNvPr id="98" name="TextBox 97"/>
           <p:cNvSpPr txBox="1"/>
           <p:nvPr/>
         </p:nvSpPr>
@@ -17565,7 +18477,7 @@
       </p:sp>
       <p:sp>
         <p:nvSpPr>
-          <p:cNvPr id="93" name="Rectangle 92"/>
+          <p:cNvPr id="99" name="Rectangle 98"/>
           <p:cNvSpPr/>
           <p:nvPr/>
         </p:nvSpPr>
@@ -17595,7 +18507,7 @@
       </p:sp>
       <p:sp>
         <p:nvSpPr>
-          <p:cNvPr id="94" name="TextBox 93"/>
+          <p:cNvPr id="100" name="TextBox 99"/>
           <p:cNvSpPr txBox="1"/>
           <p:nvPr/>
         </p:nvSpPr>
@@ -17637,7 +18549,7 @@
       </p:sp>
       <p:sp>
         <p:nvSpPr>
-          <p:cNvPr id="95" name="Rectangle 94"/>
+          <p:cNvPr id="101" name="Rectangle 100"/>
           <p:cNvSpPr/>
           <p:nvPr/>
         </p:nvSpPr>
@@ -17667,7 +18579,7 @@
       </p:sp>
       <p:sp>
         <p:nvSpPr>
-          <p:cNvPr id="96" name="TextBox 95"/>
+          <p:cNvPr id="102" name="TextBox 101"/>
           <p:cNvSpPr txBox="1"/>
           <p:nvPr/>
         </p:nvSpPr>
@@ -17709,7 +18621,7 @@
       </p:sp>
       <p:sp>
         <p:nvSpPr>
-          <p:cNvPr id="97" name="Rectangle 96"/>
+          <p:cNvPr id="103" name="Rectangle 102"/>
           <p:cNvSpPr/>
           <p:nvPr/>
         </p:nvSpPr>
@@ -17739,7 +18651,7 @@
       </p:sp>
       <p:sp>
         <p:nvSpPr>
-          <p:cNvPr id="98" name="TextBox 97"/>
+          <p:cNvPr id="104" name="TextBox 103"/>
           <p:cNvSpPr txBox="1"/>
           <p:nvPr/>
         </p:nvSpPr>
@@ -17781,7 +18693,7 @@
       </p:sp>
       <p:sp>
         <p:nvSpPr>
-          <p:cNvPr id="99" name="Rectangle 98"/>
+          <p:cNvPr id="105" name="Rectangle 104"/>
           <p:cNvSpPr/>
           <p:nvPr/>
         </p:nvSpPr>
@@ -17811,7 +18723,7 @@
       </p:sp>
       <p:sp>
         <p:nvSpPr>
-          <p:cNvPr id="100" name="TextBox 99"/>
+          <p:cNvPr id="106" name="TextBox 105"/>
           <p:cNvSpPr txBox="1"/>
           <p:nvPr/>
         </p:nvSpPr>
@@ -17853,7 +18765,7 @@
       </p:sp>
       <p:sp>
         <p:nvSpPr>
-          <p:cNvPr id="101" name="Rectangle 100"/>
+          <p:cNvPr id="107" name="Rectangle 106"/>
           <p:cNvSpPr/>
           <p:nvPr/>
         </p:nvSpPr>
@@ -17883,7 +18795,7 @@
       </p:sp>
       <p:sp>
         <p:nvSpPr>
-          <p:cNvPr id="102" name="TextBox 101"/>
+          <p:cNvPr id="108" name="TextBox 107"/>
           <p:cNvSpPr txBox="1"/>
           <p:nvPr/>
         </p:nvSpPr>
@@ -17925,7 +18837,7 @@
       </p:sp>
       <p:sp>
         <p:nvSpPr>
-          <p:cNvPr id="103" name="Rectangle 102"/>
+          <p:cNvPr id="109" name="Rectangle 108"/>
           <p:cNvSpPr/>
           <p:nvPr/>
         </p:nvSpPr>
@@ -17955,7 +18867,7 @@
       </p:sp>
       <p:sp>
         <p:nvSpPr>
-          <p:cNvPr id="104" name="TextBox 103"/>
+          <p:cNvPr id="110" name="TextBox 109"/>
           <p:cNvSpPr txBox="1"/>
           <p:nvPr/>
         </p:nvSpPr>
@@ -17997,7 +18909,7 @@
       </p:sp>
       <p:sp>
         <p:nvSpPr>
-          <p:cNvPr id="105" name="Rectangle 104"/>
+          <p:cNvPr id="111" name="Rectangle 110"/>
           <p:cNvSpPr/>
           <p:nvPr/>
         </p:nvSpPr>
@@ -18027,7 +18939,7 @@
       </p:sp>
       <p:sp>
         <p:nvSpPr>
-          <p:cNvPr id="106" name="TextBox 105"/>
+          <p:cNvPr id="112" name="TextBox 111"/>
           <p:cNvSpPr txBox="1"/>
           <p:nvPr/>
         </p:nvSpPr>
@@ -18069,7 +18981,7 @@
       </p:sp>
       <p:sp>
         <p:nvSpPr>
-          <p:cNvPr id="107" name="Rectangle 106"/>
+          <p:cNvPr id="113" name="Rectangle 112"/>
           <p:cNvSpPr/>
           <p:nvPr/>
         </p:nvSpPr>
@@ -18099,7 +19011,7 @@
       </p:sp>
       <p:sp>
         <p:nvSpPr>
-          <p:cNvPr id="108" name="TextBox 107"/>
+          <p:cNvPr id="114" name="TextBox 113"/>
           <p:cNvSpPr txBox="1"/>
           <p:nvPr/>
         </p:nvSpPr>
@@ -18141,7 +19053,7 @@
       </p:sp>
       <p:sp>
         <p:nvSpPr>
-          <p:cNvPr id="109" name="Rectangle 108"/>
+          <p:cNvPr id="115" name="Rectangle 114"/>
           <p:cNvSpPr/>
           <p:nvPr/>
         </p:nvSpPr>
@@ -18171,7 +19083,7 @@
       </p:sp>
       <p:sp>
         <p:nvSpPr>
-          <p:cNvPr id="110" name="TextBox 109"/>
+          <p:cNvPr id="116" name="TextBox 115"/>
           <p:cNvSpPr txBox="1"/>
           <p:nvPr/>
         </p:nvSpPr>
@@ -18213,7 +19125,7 @@
       </p:sp>
       <p:sp>
         <p:nvSpPr>
-          <p:cNvPr id="111" name="Rectangle 110"/>
+          <p:cNvPr id="117" name="Rectangle 116"/>
           <p:cNvSpPr/>
           <p:nvPr/>
         </p:nvSpPr>
@@ -18243,7 +19155,7 @@
       </p:sp>
       <p:sp>
         <p:nvSpPr>
-          <p:cNvPr id="112" name="TextBox 111"/>
+          <p:cNvPr id="118" name="TextBox 117"/>
           <p:cNvSpPr txBox="1"/>
           <p:nvPr/>
         </p:nvSpPr>
@@ -18285,7 +19197,7 @@
       </p:sp>
       <p:sp>
         <p:nvSpPr>
-          <p:cNvPr id="113" name="Rectangle 112"/>
+          <p:cNvPr id="119" name="Rectangle 118"/>
           <p:cNvSpPr/>
           <p:nvPr/>
         </p:nvSpPr>
@@ -18315,7 +19227,7 @@
       </p:sp>
       <p:sp>
         <p:nvSpPr>
-          <p:cNvPr id="114" name="TextBox 113"/>
+          <p:cNvPr id="120" name="TextBox 119"/>
           <p:cNvSpPr txBox="1"/>
           <p:nvPr/>
         </p:nvSpPr>
@@ -18357,7 +19269,7 @@
       </p:sp>
       <p:sp>
         <p:nvSpPr>
-          <p:cNvPr id="115" name="Rectangle 114"/>
+          <p:cNvPr id="121" name="Rectangle 120"/>
           <p:cNvSpPr/>
           <p:nvPr/>
         </p:nvSpPr>
@@ -18387,7 +19299,7 @@
       </p:sp>
       <p:sp>
         <p:nvSpPr>
-          <p:cNvPr id="116" name="TextBox 115"/>
+          <p:cNvPr id="122" name="TextBox 121"/>
           <p:cNvSpPr txBox="1"/>
           <p:nvPr/>
         </p:nvSpPr>
@@ -18429,7 +19341,7 @@
       </p:sp>
       <p:sp>
         <p:nvSpPr>
-          <p:cNvPr id="117" name="Rectangle 116"/>
+          <p:cNvPr id="123" name="Rectangle 122"/>
           <p:cNvSpPr/>
           <p:nvPr/>
         </p:nvSpPr>
@@ -18459,7 +19371,7 @@
       </p:sp>
       <p:sp>
         <p:nvSpPr>
-          <p:cNvPr id="118" name="TextBox 117"/>
+          <p:cNvPr id="124" name="TextBox 123"/>
           <p:cNvSpPr txBox="1"/>
           <p:nvPr/>
         </p:nvSpPr>
@@ -18501,7 +19413,7 @@
       </p:sp>
       <p:sp>
         <p:nvSpPr>
-          <p:cNvPr id="119" name="TextBox 118"/>
+          <p:cNvPr id="125" name="TextBox 124"/>
           <p:cNvSpPr txBox="1"/>
           <p:nvPr/>
         </p:nvSpPr>
@@ -19687,7 +20599,7 @@
                 </a:solidFill>
                 <a:latin typeface="Times New Roman"/>
               </a:rPr>
-              <a:t>Investment case study: Haldex AB — second investment</a:t>
+              <a:t>Investment case study: Concentric AB</a:t>
             </a:r>
           </a:p>
         </p:txBody>
@@ -19793,7 +20705,7 @@
                 </a:solidFill>
                 <a:latin typeface="Arial"/>
               </a:rPr>
-              <a:t>Industrial company manufacturing and selling braking products for on-highway trucks and trailers. AIP re-invested by buying shares at a discount during the COVID crisis, after a takeover bid from competitor Knorr-Bremse had been blocked by the EU and US authorities.</a:t>
+              <a:t>Concentric AB is a world-leading manufacturer of pumps and hydraulic systems — oil, water and fuel pumps and hydraulic solutions for diesel engines and off-/on-highway vehicles. It was the pumps division of Haldex (~25% of group sales), spun off and separately listed on Nasdaq Stockholm in 2011 as part of the Haldex restructuring.</a:t>
             </a:r>
           </a:p>
           <a:p>
@@ -19843,7 +20755,7 @@
                 </a:solidFill>
                 <a:latin typeface="Arial"/>
               </a:rPr>
-              <a:t>Company in limbo after the blocked Knorr-Bremse takeover</a:t>
+              <a:t>A high-quality, market-leading niche business hidden inside the Haldex conglomerate</a:t>
             </a:r>
           </a:p>
           <a:p>
@@ -19871,7 +20783,7 @@
                 </a:solidFill>
                 <a:latin typeface="Arial"/>
               </a:rPr>
-              <a:t>Subsequent poor management decisions and bad capital allocation</a:t>
+              <a:t>Profitable core with strong margins and high return on capital, masked by the group structure</a:t>
             </a:r>
           </a:p>
           <a:p>
@@ -19899,7 +20811,7 @@
                 </a:solidFill>
                 <a:latin typeface="Arial"/>
               </a:rPr>
-              <a:t>Loss-making products with growing revenue eroded the balance sheet</a:t>
+              <a:t>A pure-play listing would remove the conglomerate discount and let the market value it on its own merits</a:t>
             </a:r>
           </a:p>
           <a:p>
@@ -19927,7 +20839,7 @@
                 </a:solidFill>
                 <a:latin typeface="Arial"/>
               </a:rPr>
-              <a:t>Key management was leaving due to lack of leadership</a:t>
+              <a:t>Clear margin and cost opportunity as a focused, independent company</a:t>
             </a:r>
           </a:p>
           <a:p>
@@ -19955,7 +20867,7 @@
                 </a:solidFill>
                 <a:latin typeface="Arial"/>
               </a:rPr>
-              <a:t>Inexperienced board consisting of consultants</a:t>
+              <a:t>Strong cash generation to support capital return and bolt-on growth</a:t>
             </a:r>
           </a:p>
           <a:p>
@@ -19996,7 +20908,7 @@
                 </a:solidFill>
                 <a:latin typeface="Arial"/>
               </a:rPr>
-              <a:t>Change the board to members with industrial experience rather than lawyers and bankers; change the management team to an experienced team. Two large institutions (AP4 and AMF) and AIP jointly decided that Stefan Charette should take the board chair.</a:t>
+              <a:t>Realise the hidden value in Haldex's pumps division by spinning it off as the independent, pure-play Concentric AB; install a focused board and management, drive margin improvement and capital discipline as a stand-alone company, and let the public market re-rate the business.</a:t>
             </a:r>
           </a:p>
           <a:p>
@@ -20046,7 +20958,7 @@
                 </a:solidFill>
                 <a:latin typeface="Arial"/>
               </a:rPr>
-              <a:t>Changed the whole board and management</a:t>
+              <a:t>Spun off and separately listed on Nasdaq Stockholm in 2011</a:t>
             </a:r>
           </a:p>
           <a:p>
@@ -20074,7 +20986,7 @@
                 </a:solidFill>
                 <a:latin typeface="Arial"/>
               </a:rPr>
-              <a:t>Supported management in renegotiating disc-brake contracts</a:t>
+              <a:t>Focused board and management; cost and margin programme as an independent company</a:t>
             </a:r>
           </a:p>
           <a:p>
@@ -20102,7 +21014,7 @@
                 </a:solidFill>
                 <a:latin typeface="Arial"/>
               </a:rPr>
-              <a:t>Significantly reduced product costs and overhead; focused R&amp;D</a:t>
+              <a:t>Annual EBIT growth of ~19% over the holding period</a:t>
             </a:r>
           </a:p>
           <a:p>
@@ -20130,7 +21042,7 @@
                 </a:solidFill>
                 <a:latin typeface="Arial"/>
               </a:rPr>
-              <a:t>Exited unprofitable products</a:t>
+              <a:t>Strong cash generation funded dividends, buy-backs and bolt-on M&amp;A</a:t>
             </a:r>
           </a:p>
           <a:p>
@@ -20158,7 +21070,7 @@
                 </a:solidFill>
                 <a:latin typeface="Arial"/>
               </a:rPr>
-              <a:t>Company sold to SAFHolland one year later</a:t>
+              <a:t>Re-rated as a pure-play — realised at ~81% IRR / ~3.9×, outperforming the parent</a:t>
             </a:r>
           </a:p>
         </p:txBody>
@@ -20230,7 +21142,7 @@
                 </a:solidFill>
                 <a:latin typeface="Times New Roman"/>
               </a:rPr>
-              <a:t>IRR 100% · Money multiple 2.0×</a:t>
+              <a:t>IRR 81% · Money multiple 3.9×</a:t>
             </a:r>
           </a:p>
         </p:txBody>
@@ -20243,50 +21155,8 @@
         </p:nvSpPr>
         <p:spPr>
           <a:xfrm>
-            <a:off x="4983480" y="3291840"/>
-            <a:ext cx="4297680" cy="1463040"/>
-          </a:xfrm>
-          <a:prstGeom prst="rect">
-            <a:avLst/>
-          </a:prstGeom>
-          <a:noFill/>
-        </p:spPr>
-        <p:txBody>
-          <a:bodyPr wrap="square" anchor="ctr" lIns="0" rIns="0" tIns="0" bIns="0">
-            <a:spAutoFit/>
-          </a:bodyPr>
-          <a:lstStyle/>
-          <a:p>
-            <a:pPr algn="ctr">
-              <a:lnSpc>
-                <a:spcPct val="110000"/>
-              </a:lnSpc>
-              <a:spcAft>
-                <a:spcPts val="0"/>
-              </a:spcAft>
-            </a:pPr>
-            <a:r>
-              <a:rPr sz="1900" b="0" i="1">
-                <a:solidFill>
-                  <a:srgbClr val="314359"/>
-                </a:solidFill>
-                <a:latin typeface="Times New Roman"/>
-              </a:rPr>
-              <a:t>“Our investment returned 100% within a one-year time period.”</a:t>
-            </a:r>
-          </a:p>
-        </p:txBody>
-      </p:sp>
-      <p:sp>
-        <p:nvSpPr>
-          <p:cNvPr id="12" name="TextBox 11"/>
-          <p:cNvSpPr txBox="1"/>
-          <p:nvPr/>
-        </p:nvSpPr>
-        <p:spPr>
-          <a:xfrm>
-            <a:off x="502920" y="6967728"/>
-            <a:ext cx="4846320" cy="274320"/>
+            <a:off x="4983480" y="2350008"/>
+            <a:ext cx="4297680" cy="274320"/>
           </a:xfrm>
           <a:prstGeom prst="rect">
             <a:avLst/>
@@ -20299,8 +21169,392 @@
           </a:bodyPr>
           <a:lstStyle/>
           <a:p>
+            <a:pPr algn="ctr">
+              <a:lnSpc>
+                <a:spcPct val="110000"/>
+              </a:lnSpc>
+              <a:spcAft>
+                <a:spcPts val="0"/>
+              </a:spcAft>
+            </a:pPr>
+            <a:r>
+              <a:rPr sz="1100" b="1" i="0">
+                <a:solidFill>
+                  <a:srgbClr val="314359"/>
+                </a:solidFill>
+                <a:latin typeface="Times New Roman"/>
+              </a:rPr>
+              <a:t>Operational improvement (annualised)</a:t>
+            </a:r>
+          </a:p>
+        </p:txBody>
+      </p:sp>
+      <p:sp>
+        <p:nvSpPr>
+          <p:cNvPr id="12" name="Rectangle 11"/>
+          <p:cNvSpPr/>
+          <p:nvPr/>
+        </p:nvSpPr>
+        <p:spPr>
+          <a:xfrm>
+            <a:off x="5074920" y="4773168"/>
+            <a:ext cx="4114800" cy="12700"/>
+          </a:xfrm>
+          <a:prstGeom prst="rect">
+            <a:avLst/>
+          </a:prstGeom>
+          <a:solidFill>
+            <a:srgbClr val="E2E5E9"/>
+          </a:solidFill>
+          <a:ln>
+            <a:noFill/>
+          </a:ln>
+          <a:effectLst/>
+        </p:spPr>
+        <p:txBody>
+          <a:bodyPr rtlCol="0" anchor="ctr"/>
+          <a:lstStyle/>
+          <a:p>
+            <a:pPr algn="ctr"/>
+          </a:p>
+        </p:txBody>
+      </p:sp>
+      <p:sp>
+        <p:nvSpPr>
+          <p:cNvPr id="13" name="Rectangle 12"/>
+          <p:cNvSpPr/>
+          <p:nvPr/>
+        </p:nvSpPr>
+        <p:spPr>
+          <a:xfrm>
+            <a:off x="5577840" y="4601871"/>
+            <a:ext cx="1051560" cy="171297"/>
+          </a:xfrm>
+          <a:prstGeom prst="rect">
+            <a:avLst/>
+          </a:prstGeom>
+          <a:solidFill>
+            <a:srgbClr val="152130"/>
+          </a:solidFill>
+          <a:ln>
+            <a:noFill/>
+          </a:ln>
+          <a:effectLst/>
+        </p:spPr>
+        <p:txBody>
+          <a:bodyPr rtlCol="0" anchor="ctr"/>
+          <a:lstStyle/>
+          <a:p>
+            <a:pPr algn="ctr"/>
+          </a:p>
+        </p:txBody>
+      </p:sp>
+      <p:sp>
+        <p:nvSpPr>
+          <p:cNvPr id="14" name="TextBox 13"/>
+          <p:cNvSpPr txBox="1"/>
+          <p:nvPr/>
+        </p:nvSpPr>
+        <p:spPr>
+          <a:xfrm>
+            <a:off x="5303520" y="4327551"/>
+            <a:ext cx="1600200" cy="256032"/>
+          </a:xfrm>
+          <a:prstGeom prst="rect">
+            <a:avLst/>
+          </a:prstGeom>
+          <a:noFill/>
+        </p:spPr>
+        <p:txBody>
+          <a:bodyPr wrap="square" anchor="t" lIns="0" rIns="0" tIns="0" bIns="0">
+            <a:spAutoFit/>
+          </a:bodyPr>
+          <a:lstStyle/>
+          <a:p>
+            <a:pPr algn="ctr">
+              <a:lnSpc>
+                <a:spcPct val="110000"/>
+              </a:lnSpc>
+              <a:spcAft>
+                <a:spcPts val="0"/>
+              </a:spcAft>
+            </a:pPr>
+            <a:r>
+              <a:rPr sz="1300" b="1" i="0">
+                <a:solidFill>
+                  <a:srgbClr val="314359"/>
+                </a:solidFill>
+                <a:latin typeface="Times New Roman"/>
+              </a:rPr>
+              <a:t>2%</a:t>
+            </a:r>
+          </a:p>
+        </p:txBody>
+      </p:sp>
+      <p:sp>
+        <p:nvSpPr>
+          <p:cNvPr id="15" name="TextBox 14"/>
+          <p:cNvSpPr txBox="1"/>
+          <p:nvPr/>
+        </p:nvSpPr>
+        <p:spPr>
+          <a:xfrm>
+            <a:off x="5074920" y="4828032"/>
+            <a:ext cx="2057400" cy="310896"/>
+          </a:xfrm>
+          <a:prstGeom prst="rect">
+            <a:avLst/>
+          </a:prstGeom>
+          <a:noFill/>
+        </p:spPr>
+        <p:txBody>
+          <a:bodyPr wrap="square" anchor="t" lIns="0" rIns="0" tIns="0" bIns="0">
+            <a:spAutoFit/>
+          </a:bodyPr>
+          <a:lstStyle/>
+          <a:p>
+            <a:pPr algn="ctr">
+              <a:lnSpc>
+                <a:spcPct val="110000"/>
+              </a:lnSpc>
+              <a:spcAft>
+                <a:spcPts val="0"/>
+              </a:spcAft>
+            </a:pPr>
+            <a:r>
+              <a:rPr sz="950" b="0" i="0">
+                <a:solidFill>
+                  <a:srgbClr val="0E1620"/>
+                </a:solidFill>
+                <a:latin typeface="Arial"/>
+              </a:rPr>
+              <a:t>Annual sales growth</a:t>
+            </a:r>
+          </a:p>
+        </p:txBody>
+      </p:sp>
+      <p:sp>
+        <p:nvSpPr>
+          <p:cNvPr id="16" name="Rectangle 15"/>
+          <p:cNvSpPr/>
+          <p:nvPr/>
+        </p:nvSpPr>
+        <p:spPr>
+          <a:xfrm>
+            <a:off x="7635240" y="3145846"/>
+            <a:ext cx="1051560" cy="1627322"/>
+          </a:xfrm>
+          <a:prstGeom prst="rect">
+            <a:avLst/>
+          </a:prstGeom>
+          <a:solidFill>
+            <a:srgbClr val="152130"/>
+          </a:solidFill>
+          <a:ln>
+            <a:noFill/>
+          </a:ln>
+          <a:effectLst/>
+        </p:spPr>
+        <p:txBody>
+          <a:bodyPr rtlCol="0" anchor="ctr"/>
+          <a:lstStyle/>
+          <a:p>
+            <a:pPr algn="ctr"/>
+          </a:p>
+        </p:txBody>
+      </p:sp>
+      <p:sp>
+        <p:nvSpPr>
+          <p:cNvPr id="17" name="TextBox 16"/>
+          <p:cNvSpPr txBox="1"/>
+          <p:nvPr/>
+        </p:nvSpPr>
+        <p:spPr>
+          <a:xfrm>
+            <a:off x="7360920" y="2871526"/>
+            <a:ext cx="1600200" cy="256032"/>
+          </a:xfrm>
+          <a:prstGeom prst="rect">
+            <a:avLst/>
+          </a:prstGeom>
+          <a:noFill/>
+        </p:spPr>
+        <p:txBody>
+          <a:bodyPr wrap="square" anchor="t" lIns="0" rIns="0" tIns="0" bIns="0">
+            <a:spAutoFit/>
+          </a:bodyPr>
+          <a:lstStyle/>
+          <a:p>
+            <a:pPr algn="ctr">
+              <a:lnSpc>
+                <a:spcPct val="110000"/>
+              </a:lnSpc>
+              <a:spcAft>
+                <a:spcPts val="0"/>
+              </a:spcAft>
+            </a:pPr>
+            <a:r>
+              <a:rPr sz="1300" b="1" i="0">
+                <a:solidFill>
+                  <a:srgbClr val="314359"/>
+                </a:solidFill>
+                <a:latin typeface="Times New Roman"/>
+              </a:rPr>
+              <a:t>19%</a:t>
+            </a:r>
+          </a:p>
+        </p:txBody>
+      </p:sp>
+      <p:sp>
+        <p:nvSpPr>
+          <p:cNvPr id="18" name="TextBox 17"/>
+          <p:cNvSpPr txBox="1"/>
+          <p:nvPr/>
+        </p:nvSpPr>
+        <p:spPr>
+          <a:xfrm>
+            <a:off x="7132320" y="4828032"/>
+            <a:ext cx="2057400" cy="310896"/>
+          </a:xfrm>
+          <a:prstGeom prst="rect">
+            <a:avLst/>
+          </a:prstGeom>
+          <a:noFill/>
+        </p:spPr>
+        <p:txBody>
+          <a:bodyPr wrap="square" anchor="t" lIns="0" rIns="0" tIns="0" bIns="0">
+            <a:spAutoFit/>
+          </a:bodyPr>
+          <a:lstStyle/>
+          <a:p>
+            <a:pPr algn="ctr">
+              <a:lnSpc>
+                <a:spcPct val="110000"/>
+              </a:lnSpc>
+              <a:spcAft>
+                <a:spcPts val="0"/>
+              </a:spcAft>
+            </a:pPr>
+            <a:r>
+              <a:rPr sz="950" b="0" i="0">
+                <a:solidFill>
+                  <a:srgbClr val="0E1620"/>
+                </a:solidFill>
+                <a:latin typeface="Arial"/>
+              </a:rPr>
+              <a:t>Annual EBIT growth</a:t>
+            </a:r>
+          </a:p>
+        </p:txBody>
+      </p:sp>
+      <p:sp>
+        <p:nvSpPr>
+          <p:cNvPr id="19" name="TextBox 18"/>
+          <p:cNvSpPr txBox="1"/>
+          <p:nvPr/>
+        </p:nvSpPr>
+        <p:spPr>
+          <a:xfrm>
+            <a:off x="4983480" y="5157216"/>
+            <a:ext cx="4297680" cy="201168"/>
+          </a:xfrm>
+          <a:prstGeom prst="rect">
+            <a:avLst/>
+          </a:prstGeom>
+          <a:noFill/>
+        </p:spPr>
+        <p:txBody>
+          <a:bodyPr wrap="square" anchor="t" lIns="0" rIns="0" tIns="0" bIns="0">
+            <a:spAutoFit/>
+          </a:bodyPr>
+          <a:lstStyle/>
+          <a:p>
             <a:pPr algn="l">
               <a:lnSpc>
+                <a:spcPct val="110000"/>
+              </a:lnSpc>
+              <a:spcAft>
+                <a:spcPts val="0"/>
+              </a:spcAft>
+            </a:pPr>
+            <a:r>
+              <a:rPr sz="850" b="0" i="1">
+                <a:solidFill>
+                  <a:srgbClr val="556A83"/>
+                </a:solidFill>
+                <a:latin typeface="Arial"/>
+              </a:rPr>
+              <a:t>% per year, over the holding period</a:t>
+            </a:r>
+          </a:p>
+        </p:txBody>
+      </p:sp>
+      <p:sp>
+        <p:nvSpPr>
+          <p:cNvPr id="20" name="TextBox 19"/>
+          <p:cNvSpPr txBox="1"/>
+          <p:nvPr/>
+        </p:nvSpPr>
+        <p:spPr>
+          <a:xfrm>
+            <a:off x="4983480" y="5029200"/>
+            <a:ext cx="4297680" cy="731520"/>
+          </a:xfrm>
+          <a:prstGeom prst="rect">
+            <a:avLst/>
+          </a:prstGeom>
+          <a:noFill/>
+        </p:spPr>
+        <p:txBody>
+          <a:bodyPr wrap="square" anchor="t" lIns="0" rIns="0" tIns="0" bIns="0">
+            <a:spAutoFit/>
+          </a:bodyPr>
+          <a:lstStyle/>
+          <a:p>
+            <a:pPr algn="ctr">
+              <a:lnSpc>
+                <a:spcPct val="110000"/>
+              </a:lnSpc>
+              <a:spcAft>
+                <a:spcPts val="0"/>
+              </a:spcAft>
+            </a:pPr>
+            <a:r>
+              <a:rPr sz="1200" b="1" i="0">
+                <a:solidFill>
+                  <a:srgbClr val="314359"/>
+                </a:solidFill>
+                <a:latin typeface="Times New Roman"/>
+              </a:rPr>
+              <a:t>Spun off from Haldex and listed in 2011 — outperformed the parent</a:t>
+            </a:r>
+          </a:p>
+        </p:txBody>
+      </p:sp>
+      <p:sp>
+        <p:nvSpPr>
+          <p:cNvPr id="21" name="TextBox 20"/>
+          <p:cNvSpPr txBox="1"/>
+          <p:nvPr/>
+        </p:nvSpPr>
+        <p:spPr>
+          <a:xfrm>
+            <a:off x="502920" y="6967728"/>
+            <a:ext cx="4846320" cy="274320"/>
+          </a:xfrm>
+          <a:prstGeom prst="rect">
+            <a:avLst/>
+          </a:prstGeom>
+          <a:noFill/>
+        </p:spPr>
+        <p:txBody>
+          <a:bodyPr wrap="square" anchor="t" lIns="0" rIns="0" tIns="0" bIns="0">
+            <a:spAutoFit/>
+          </a:bodyPr>
+          <a:lstStyle/>
+          <a:p>
+            <a:pPr algn="l">
+              <a:lnSpc>
                 <a:spcPct val="100000"/>
               </a:lnSpc>
               <a:spcAft>
@@ -20314,7 +21568,7 @@
                 </a:solidFill>
                 <a:latin typeface="Arial"/>
               </a:rPr>
-              <a:t>Note: share price re-based to 100 at investment and includes dividends; benchmark OMXS30 / MSCI. Past performance is not indicative of future results.</a:t>
+              <a:t>Note: Concentric was spun off from Haldex and held and realised as a separate listed company; figures relate to the team's Haldex-era investment. Past performance is not indicative of future results.</a:t>
             </a:r>
           </a:p>
         </p:txBody>
@@ -20500,7 +21754,7 @@
                 </a:solidFill>
                 <a:latin typeface="Times New Roman"/>
               </a:rPr>
-              <a:t>Investment case study: Lindab AB</a:t>
+              <a:t>Investment case study: Haldex AB — second investment</a:t>
             </a:r>
           </a:p>
         </p:txBody>
@@ -20606,7 +21860,7 @@
                 </a:solidFill>
                 <a:latin typeface="Arial"/>
               </a:rPr>
-              <a:t>Lindab is an international company that develops, manufactures and distributes products and system solutions for simplified construction and improved indoor climate. It used to be a conglomerate with three divisions: Ventilation (indoor-climate products sold through own distribution centres); Components (roof, wall and floor systems — gutters, rivets, screws); and Building Systems (solutions for residential and commercial properties).</a:t>
+              <a:t>Industrial company manufacturing and selling braking products for on-highway trucks and trailers. AIP re-invested by buying shares at a discount during the COVID crisis, after a takeover bid from competitor Knorr-Bremse had been blocked by the EU and US authorities.</a:t>
             </a:r>
           </a:p>
           <a:p>
@@ -20656,7 +21910,7 @@
                 </a:solidFill>
                 <a:latin typeface="Arial"/>
               </a:rPr>
-              <a:t>All three divisions had a profitable, growing core with strong market positions</a:t>
+              <a:t>Company in limbo after the blocked Knorr-Bremse takeover</a:t>
             </a:r>
           </a:p>
           <a:p>
@@ -20684,7 +21938,7 @@
                 </a:solidFill>
                 <a:latin typeface="Arial"/>
               </a:rPr>
-              <a:t>Poor historical cost management — savings opportunities</a:t>
+              <a:t>Subsequent poor management decisions and bad capital allocation</a:t>
             </a:r>
           </a:p>
           <a:p>
@@ -20712,7 +21966,7 @@
                 </a:solidFill>
                 <a:latin typeface="Arial"/>
               </a:rPr>
-              <a:t>Scalable by adding more distribution centres without heavy capex</a:t>
+              <a:t>Loss-making products with growing revenue eroded the balance sheet</a:t>
             </a:r>
           </a:p>
           <a:p>
@@ -20740,7 +21994,7 @@
                 </a:solidFill>
                 <a:latin typeface="Arial"/>
               </a:rPr>
-              <a:t>No structural integration — break-up / consolidation upside</a:t>
+              <a:t>Key management was leaving due to lack of leadership</a:t>
             </a:r>
           </a:p>
           <a:p>
@@ -20768,35 +22022,7 @@
                 </a:solidFill>
                 <a:latin typeface="Arial"/>
               </a:rPr>
-              <a:t>Market price significantly lower than assets and earnings power</a:t>
-            </a:r>
-          </a:p>
-          <a:p>
-            <a:pPr marL="149162" indent="-149162">
-              <a:lnSpc>
-                <a:spcPct val="106000"/>
-              </a:lnSpc>
-              <a:spcAft>
-                <a:spcPts val="150"/>
-              </a:spcAft>
-            </a:pPr>
-            <a:r>
-              <a:rPr sz="869" b="1">
-                <a:solidFill>
-                  <a:srgbClr val="556A83"/>
-                </a:solidFill>
-                <a:latin typeface="Arial"/>
-              </a:rPr>
-              <a:t>›  </a:t>
-            </a:r>
-            <a:r>
-              <a:rPr sz="869">
-                <a:solidFill>
-                  <a:srgbClr val="0E1620"/>
-                </a:solidFill>
-                <a:latin typeface="Arial"/>
-              </a:rPr>
-              <a:t>Late-cycle company with exposure to Europe</a:t>
+              <a:t>Inexperienced board consisting of consultants</a:t>
             </a:r>
           </a:p>
           <a:p>
@@ -20837,7 +22063,7 @@
                 </a:solidFill>
                 <a:latin typeface="Arial"/>
               </a:rPr>
-              <a:t>1) Change the board; 2) consolidate Ventilation and Components or divest Components; 3) reduce OPEX and logistics complexity; 4) grow sales through the distribution centres; 5) allocate capital to winning products and markets; 6) renegotiate financing and leases.</a:t>
+              <a:t>Change the board to members with industrial experience rather than lawyers and bankers; change the management team to an experienced team. Two large institutions (AP4 and AMF) and AIP jointly decided that Stefan Charette should take the board chair.</a:t>
             </a:r>
           </a:p>
           <a:p>
@@ -20887,7 +22113,7 @@
                 </a:solidFill>
                 <a:latin typeface="Arial"/>
               </a:rPr>
-              <a:t>Refinanced debt and lease structure; changed board and management</a:t>
+              <a:t>Changed the whole board and management</a:t>
             </a:r>
           </a:p>
           <a:p>
@@ -20915,7 +22141,7 @@
                 </a:solidFill>
                 <a:latin typeface="Arial"/>
               </a:rPr>
-              <a:t>Consolidated the Ventilation &amp; Components business</a:t>
+              <a:t>Supported management in renegotiating disc-brake contracts</a:t>
             </a:r>
           </a:p>
           <a:p>
@@ -20943,7 +22169,7 @@
                 </a:solidFill>
                 <a:latin typeface="Arial"/>
               </a:rPr>
-              <a:t>Significant profit potential through organic and acquired growth</a:t>
+              <a:t>Significantly reduced product costs and overhead; focused R&amp;D</a:t>
             </a:r>
           </a:p>
           <a:p>
@@ -20971,7 +22197,7 @@
                 </a:solidFill>
                 <a:latin typeface="Arial"/>
               </a:rPr>
-              <a:t>Identified ~22% EBIT uplift on current net sales via cost savings</a:t>
+              <a:t>Exited unprofitable products</a:t>
             </a:r>
           </a:p>
           <a:p>
@@ -20999,38 +22225,128 @@
                 </a:solidFill>
                 <a:latin typeface="Arial"/>
               </a:rPr>
-              <a:t>Opportunity to spin off or sell Building Systems</a:t>
-            </a:r>
-          </a:p>
-        </p:txBody>
-      </p:sp>
-      <p:pic>
-        <p:nvPicPr>
-          <p:cNvPr id="9" name="Picture 8" descr="col_lindab.png"/>
-          <p:cNvPicPr>
-            <a:picLocks noChangeAspect="1"/>
-          </p:cNvPicPr>
-          <p:nvPr/>
-        </p:nvPicPr>
-        <p:blipFill>
-          <a:blip r:embed="rId3"/>
-          <a:stretch>
-            <a:fillRect/>
-          </a:stretch>
-        </p:blipFill>
-        <p:spPr>
-          <a:xfrm>
-            <a:off x="5084146" y="1783080"/>
-            <a:ext cx="4096347" cy="5074920"/>
-          </a:xfrm>
-          <a:prstGeom prst="rect">
-            <a:avLst/>
-          </a:prstGeom>
-        </p:spPr>
-      </p:pic>
+              <a:t>Company sold to SAFHolland one year later</a:t>
+            </a:r>
+          </a:p>
+        </p:txBody>
+      </p:sp>
+      <p:sp>
+        <p:nvSpPr>
+          <p:cNvPr id="9" name="Rounded Rectangle 8"/>
+          <p:cNvSpPr/>
+          <p:nvPr/>
+        </p:nvSpPr>
+        <p:spPr>
+          <a:xfrm>
+            <a:off x="4983480" y="1783080"/>
+            <a:ext cx="4297680" cy="384048"/>
+          </a:xfrm>
+          <a:prstGeom prst="roundRect">
+            <a:avLst/>
+          </a:prstGeom>
+          <a:solidFill>
+            <a:srgbClr val="F6F7F9"/>
+          </a:solidFill>
+          <a:ln>
+            <a:noFill/>
+          </a:ln>
+          <a:effectLst/>
+        </p:spPr>
+        <p:txBody>
+          <a:bodyPr rtlCol="0" anchor="ctr"/>
+          <a:lstStyle/>
+          <a:p>
+            <a:pPr algn="ctr"/>
+          </a:p>
+        </p:txBody>
+      </p:sp>
       <p:sp>
         <p:nvSpPr>
           <p:cNvPr id="10" name="TextBox 9"/>
+          <p:cNvSpPr txBox="1"/>
+          <p:nvPr/>
+        </p:nvSpPr>
+        <p:spPr>
+          <a:xfrm>
+            <a:off x="4983480" y="1783080"/>
+            <a:ext cx="4297680" cy="384048"/>
+          </a:xfrm>
+          <a:prstGeom prst="rect">
+            <a:avLst/>
+          </a:prstGeom>
+          <a:noFill/>
+        </p:spPr>
+        <p:txBody>
+          <a:bodyPr wrap="square" anchor="ctr" lIns="0" rIns="0" tIns="0" bIns="0">
+            <a:spAutoFit/>
+          </a:bodyPr>
+          <a:lstStyle/>
+          <a:p>
+            <a:pPr algn="ctr">
+              <a:lnSpc>
+                <a:spcPct val="110000"/>
+              </a:lnSpc>
+              <a:spcAft>
+                <a:spcPts val="0"/>
+              </a:spcAft>
+            </a:pPr>
+            <a:r>
+              <a:rPr sz="1250" b="1" i="0">
+                <a:solidFill>
+                  <a:srgbClr val="314359"/>
+                </a:solidFill>
+                <a:latin typeface="Times New Roman"/>
+              </a:rPr>
+              <a:t>IRR 100% · Money multiple 2.0×</a:t>
+            </a:r>
+          </a:p>
+        </p:txBody>
+      </p:sp>
+      <p:sp>
+        <p:nvSpPr>
+          <p:cNvPr id="11" name="TextBox 10"/>
+          <p:cNvSpPr txBox="1"/>
+          <p:nvPr/>
+        </p:nvSpPr>
+        <p:spPr>
+          <a:xfrm>
+            <a:off x="4983480" y="3291840"/>
+            <a:ext cx="4297680" cy="1463040"/>
+          </a:xfrm>
+          <a:prstGeom prst="rect">
+            <a:avLst/>
+          </a:prstGeom>
+          <a:noFill/>
+        </p:spPr>
+        <p:txBody>
+          <a:bodyPr wrap="square" anchor="ctr" lIns="0" rIns="0" tIns="0" bIns="0">
+            <a:spAutoFit/>
+          </a:bodyPr>
+          <a:lstStyle/>
+          <a:p>
+            <a:pPr algn="ctr">
+              <a:lnSpc>
+                <a:spcPct val="110000"/>
+              </a:lnSpc>
+              <a:spcAft>
+                <a:spcPts val="0"/>
+              </a:spcAft>
+            </a:pPr>
+            <a:r>
+              <a:rPr sz="1900" b="0" i="1">
+                <a:solidFill>
+                  <a:srgbClr val="314359"/>
+                </a:solidFill>
+                <a:latin typeface="Times New Roman"/>
+              </a:rPr>
+              <a:t>“Our investment returned 100% within a one-year time period.”</a:t>
+            </a:r>
+          </a:p>
+        </p:txBody>
+      </p:sp>
+      <p:sp>
+        <p:nvSpPr>
+          <p:cNvPr id="12" name="TextBox 11"/>
           <p:cNvSpPr txBox="1"/>
           <p:nvPr/>
         </p:nvSpPr>
@@ -21251,7 +22567,7 @@
                 </a:solidFill>
                 <a:latin typeface="Times New Roman"/>
               </a:rPr>
-              <a:t>Investment case study: Transcom SA</a:t>
+              <a:t>Investment case study: Lindab AB</a:t>
             </a:r>
           </a:p>
         </p:txBody>
@@ -21357,7 +22673,7 @@
                 </a:solidFill>
                 <a:latin typeface="Arial"/>
               </a:rPr>
-              <a:t>Transcom is a global customer-care company providing customer care, sales, technical support and credit-management services through an extensive network of contact centres and work-at-home agents. It also operated a credit-management (CMS) company across Europe.</a:t>
+              <a:t>Lindab is an international company that develops, manufactures and distributes products and system solutions for simplified construction and improved indoor climate. It used to be a conglomerate with three divisions: Ventilation (indoor-climate products sold through own distribution centres); Components (roof, wall and floor systems — gutters, rivets, screws); and Building Systems (solutions for residential and commercial properties).</a:t>
             </a:r>
           </a:p>
           <a:p>
@@ -21407,7 +22723,7 @@
                 </a:solidFill>
                 <a:latin typeface="Arial"/>
               </a:rPr>
-              <a:t>Two separate businesses with limited integration — sale/spin-off of the CMS business</a:t>
+              <a:t>All three divisions had a profitable, growing core with strong market positions</a:t>
             </a:r>
           </a:p>
           <a:p>
@@ -21435,7 +22751,7 @@
                 </a:solidFill>
                 <a:latin typeface="Arial"/>
               </a:rPr>
-              <a:t>Losses in France reduced operating profit to break-even</a:t>
+              <a:t>Poor historical cost management — savings opportunities</a:t>
             </a:r>
           </a:p>
           <a:p>
@@ -21463,7 +22779,7 @@
                 </a:solidFill>
                 <a:latin typeface="Arial"/>
               </a:rPr>
-              <a:t>Higher operating costs than peers — cost-saving opportunity</a:t>
+              <a:t>Scalable by adding more distribution centres without heavy capex</a:t>
             </a:r>
           </a:p>
           <a:p>
@@ -21491,7 +22807,7 @@
                 </a:solidFill>
                 <a:latin typeface="Arial"/>
               </a:rPr>
-              <a:t>Problems with transfer taxes, reporting and product quality</a:t>
+              <a:t>No structural integration — break-up / consolidation upside</a:t>
             </a:r>
           </a:p>
           <a:p>
@@ -21519,7 +22835,7 @@
                 </a:solidFill>
                 <a:latin typeface="Arial"/>
               </a:rPr>
-              <a:t>Market price below earnings-power potential (incl. rights issue)</a:t>
+              <a:t>Market price significantly lower than assets and earnings power</a:t>
             </a:r>
           </a:p>
           <a:p>
@@ -21547,7 +22863,7 @@
                 </a:solidFill>
                 <a:latin typeface="Arial"/>
               </a:rPr>
-              <a:t>Growth opportunities given strong customer relationships</a:t>
+              <a:t>Late-cycle company with exposure to Europe</a:t>
             </a:r>
           </a:p>
           <a:p>
@@ -21588,7 +22904,7 @@
                 </a:solidFill>
                 <a:latin typeface="Arial"/>
               </a:rPr>
-              <a:t>1) Call an EGM to gain a board seat; 2) close the French operation and settle the Italian tax claim; 3) rights issue; 4) spin off or sell the CMS business; 5) divest other assets; 6) exit loss-making sites; 7) reduce OPEX; 8) reinvest in IT to grow the non-voice product.</a:t>
+              <a:t>1) Change the board; 2) consolidate Ventilation and Components or divest Components; 3) reduce OPEX and logistics complexity; 4) grow sales through the distribution centres; 5) allocate capital to winning products and markets; 6) renegotiate financing and leases.</a:t>
             </a:r>
           </a:p>
           <a:p>
@@ -21638,7 +22954,7 @@
                 </a:solidFill>
                 <a:latin typeface="Arial"/>
               </a:rPr>
-              <a:t>Changed board and management; rights issue and new financing</a:t>
+              <a:t>Refinanced debt and lease structure; changed board and management</a:t>
             </a:r>
           </a:p>
           <a:p>
@@ -21666,7 +22982,7 @@
                 </a:solidFill>
                 <a:latin typeface="Arial"/>
               </a:rPr>
-              <a:t>Doubled EBIT potential at the same net sales — in line with peers</a:t>
+              <a:t>Consolidated the Ventilation &amp; Components business</a:t>
             </a:r>
           </a:p>
           <a:p>
@@ -21694,7 +23010,7 @@
                 </a:solidFill>
                 <a:latin typeface="Arial"/>
               </a:rPr>
-              <a:t>Separated CMS with its own CEO; sold it in pieces to industrial and PE buyers</a:t>
+              <a:t>Significant profit potential through organic and acquired growth</a:t>
             </a:r>
           </a:p>
           <a:p>
@@ -21722,7 +23038,7 @@
                 </a:solidFill>
                 <a:latin typeface="Arial"/>
               </a:rPr>
-              <a:t>Liquidated the French subsidiary far cheaper (€5M vs €20M)</a:t>
+              <a:t>Identified ~22% EBIT uplift on current net sales via cost savings</a:t>
             </a:r>
           </a:p>
           <a:p>
@@ -21750,42 +23066,14 @@
                 </a:solidFill>
                 <a:latin typeface="Arial"/>
               </a:rPr>
-              <a:t>Negotiated Italian tax claims down to 3/5; won back the largest customer</a:t>
-            </a:r>
-          </a:p>
-          <a:p>
-            <a:pPr marL="149162" indent="-149162">
-              <a:lnSpc>
-                <a:spcPct val="106000"/>
-              </a:lnSpc>
-              <a:spcAft>
-                <a:spcPts val="150"/>
-              </a:spcAft>
-            </a:pPr>
-            <a:r>
-              <a:rPr sz="869" b="1">
-                <a:solidFill>
-                  <a:srgbClr val="556A83"/>
-                </a:solidFill>
-                <a:latin typeface="Arial"/>
-              </a:rPr>
-              <a:t>✓  </a:t>
-            </a:r>
-            <a:r>
-              <a:rPr sz="869">
-                <a:solidFill>
-                  <a:srgbClr val="0E1620"/>
-                </a:solidFill>
-                <a:latin typeface="Arial"/>
-              </a:rPr>
-              <a:t>Closed unprofitable sites; introduced new non-voice products</a:t>
+              <a:t>Opportunity to spin off or sell Building Systems</a:t>
             </a:r>
           </a:p>
         </p:txBody>
       </p:sp>
       <p:pic>
         <p:nvPicPr>
-          <p:cNvPr id="9" name="Picture 8" descr="col_transcom.png"/>
+          <p:cNvPr id="9" name="Picture 8" descr="col_lindab.png"/>
           <p:cNvPicPr>
             <a:picLocks noChangeAspect="1"/>
           </p:cNvPicPr>
@@ -22030,7 +23318,7 @@
                 </a:solidFill>
                 <a:latin typeface="Times New Roman"/>
               </a:rPr>
-              <a:t>Investment case study: Kitron ASA</a:t>
+              <a:t>Investment case study: Transcom SA</a:t>
             </a:r>
           </a:p>
         </p:txBody>
@@ -22136,7 +23424,7 @@
                 </a:solidFill>
                 <a:latin typeface="Arial"/>
               </a:rPr>
-              <a:t>Kitron is one of the leading companies in Scandinavia specialising in the contract manufacturing of goods with electronics content, serving customers in Defence/Aerospace, Utilities, Industry, Medical Devices and Offshore/Marine. The company has operated since the 1960s.</a:t>
+              <a:t>Transcom is a global customer-care company providing customer care, sales, technical support and credit-management services through an extensive network of contact centres and work-at-home agents. It also operated a credit-management (CMS) company across Europe.</a:t>
             </a:r>
           </a:p>
           <a:p>
@@ -22186,7 +23474,7 @@
                 </a:solidFill>
                 <a:latin typeface="Arial"/>
               </a:rPr>
-              <a:t>Significant turn-around candidate</a:t>
+              <a:t>Two separate businesses with limited integration — sale/spin-off of the CMS business</a:t>
             </a:r>
           </a:p>
           <a:p>
@@ -22214,7 +23502,7 @@
                 </a:solidFill>
                 <a:latin typeface="Arial"/>
               </a:rPr>
-              <a:t>Positive shift in industry outlook</a:t>
+              <a:t>Losses in France reduced operating profit to break-even</a:t>
             </a:r>
           </a:p>
           <a:p>
@@ -22242,7 +23530,7 @@
                 </a:solidFill>
                 <a:latin typeface="Arial"/>
               </a:rPr>
-              <a:t>Stable customer base — defence, medical, utilities</a:t>
+              <a:t>Higher operating costs than peers — cost-saving opportunity</a:t>
             </a:r>
           </a:p>
           <a:p>
@@ -22270,7 +23558,7 @@
                 </a:solidFill>
                 <a:latin typeface="Arial"/>
               </a:rPr>
-              <a:t>Cost-saving opportunities combined with strong growth in core areas</a:t>
+              <a:t>Problems with transfer taxes, reporting and product quality</a:t>
             </a:r>
           </a:p>
           <a:p>
@@ -22298,7 +23586,7 @@
                 </a:solidFill>
                 <a:latin typeface="Arial"/>
               </a:rPr>
-              <a:t>Market price significantly lower than earnings power</a:t>
+              <a:t>Market price below earnings-power potential (incl. rights issue)</a:t>
             </a:r>
           </a:p>
           <a:p>
@@ -22326,7 +23614,7 @@
                 </a:solidFill>
                 <a:latin typeface="Arial"/>
               </a:rPr>
-              <a:t>Offshore/Marine at an all-time low — additional turn-around upside</a:t>
+              <a:t>Growth opportunities given strong customer relationships</a:t>
             </a:r>
           </a:p>
           <a:p>
@@ -22367,7 +23655,7 @@
                 </a:solidFill>
                 <a:latin typeface="Arial"/>
               </a:rPr>
-              <a:t>1) Reduce costs in Sweden/Norway; 2) board seat through an EGM in early 2017; 3) continued investment in technology to reduce manual labour; 4) acquisition opportunities to build presence; 5) grow within existing customers.</a:t>
+              <a:t>1) Call an EGM to gain a board seat; 2) close the French operation and settle the Italian tax claim; 3) rights issue; 4) spin off or sell the CMS business; 5) divest other assets; 6) exit loss-making sites; 7) reduce OPEX; 8) reinvest in IT to grow the non-voice product.</a:t>
             </a:r>
           </a:p>
           <a:p>
@@ -22417,7 +23705,7 @@
                 </a:solidFill>
                 <a:latin typeface="Arial"/>
               </a:rPr>
-              <a:t>Continued cost-savings plan in Sweden/Norway</a:t>
+              <a:t>Changed board and management; rights issue and new financing</a:t>
             </a:r>
           </a:p>
           <a:p>
@@ -22445,7 +23733,7 @@
                 </a:solidFill>
                 <a:latin typeface="Arial"/>
               </a:rPr>
-              <a:t>Reached a 7% operating margin in Q2 2017 — a company first</a:t>
+              <a:t>Doubled EBIT potential at the same net sales — in line with peers</a:t>
             </a:r>
           </a:p>
           <a:p>
@@ -22473,14 +23761,98 @@
                 </a:solidFill>
                 <a:latin typeface="Arial"/>
               </a:rPr>
-              <a:t>Growing significantly with existing customers</a:t>
+              <a:t>Separated CMS with its own CEO; sold it in pieces to industrial and PE buyers</a:t>
+            </a:r>
+          </a:p>
+          <a:p>
+            <a:pPr marL="149162" indent="-149162">
+              <a:lnSpc>
+                <a:spcPct val="106000"/>
+              </a:lnSpc>
+              <a:spcAft>
+                <a:spcPts val="150"/>
+              </a:spcAft>
+            </a:pPr>
+            <a:r>
+              <a:rPr sz="869" b="1">
+                <a:solidFill>
+                  <a:srgbClr val="556A83"/>
+                </a:solidFill>
+                <a:latin typeface="Arial"/>
+              </a:rPr>
+              <a:t>✓  </a:t>
+            </a:r>
+            <a:r>
+              <a:rPr sz="869">
+                <a:solidFill>
+                  <a:srgbClr val="0E1620"/>
+                </a:solidFill>
+                <a:latin typeface="Arial"/>
+              </a:rPr>
+              <a:t>Liquidated the French subsidiary far cheaper (€5M vs €20M)</a:t>
+            </a:r>
+          </a:p>
+          <a:p>
+            <a:pPr marL="149162" indent="-149162">
+              <a:lnSpc>
+                <a:spcPct val="106000"/>
+              </a:lnSpc>
+              <a:spcAft>
+                <a:spcPts val="150"/>
+              </a:spcAft>
+            </a:pPr>
+            <a:r>
+              <a:rPr sz="869" b="1">
+                <a:solidFill>
+                  <a:srgbClr val="556A83"/>
+                </a:solidFill>
+                <a:latin typeface="Arial"/>
+              </a:rPr>
+              <a:t>✓  </a:t>
+            </a:r>
+            <a:r>
+              <a:rPr sz="869">
+                <a:solidFill>
+                  <a:srgbClr val="0E1620"/>
+                </a:solidFill>
+                <a:latin typeface="Arial"/>
+              </a:rPr>
+              <a:t>Negotiated Italian tax claims down to 3/5; won back the largest customer</a:t>
+            </a:r>
+          </a:p>
+          <a:p>
+            <a:pPr marL="149162" indent="-149162">
+              <a:lnSpc>
+                <a:spcPct val="106000"/>
+              </a:lnSpc>
+              <a:spcAft>
+                <a:spcPts val="150"/>
+              </a:spcAft>
+            </a:pPr>
+            <a:r>
+              <a:rPr sz="869" b="1">
+                <a:solidFill>
+                  <a:srgbClr val="556A83"/>
+                </a:solidFill>
+                <a:latin typeface="Arial"/>
+              </a:rPr>
+              <a:t>✓  </a:t>
+            </a:r>
+            <a:r>
+              <a:rPr sz="869">
+                <a:solidFill>
+                  <a:srgbClr val="0E1620"/>
+                </a:solidFill>
+                <a:latin typeface="Arial"/>
+              </a:rPr>
+              <a:t>Closed unprofitable sites; introduced new non-voice products</a:t>
             </a:r>
           </a:p>
         </p:txBody>
       </p:sp>
       <p:pic>
         <p:nvPicPr>
-          <p:cNvPr id="9" name="Picture 8" descr="col_kitron.png"/>
+          <p:cNvPr id="9" name="Picture 8" descr="col_transcom.png"/>
           <p:cNvPicPr>
             <a:picLocks noChangeAspect="1"/>
           </p:cNvPicPr>

--- a/Athanase_Case_Studies.pptx
+++ b/Athanase_Case_Studies.pptx
@@ -28,6 +28,7 @@
     <p:sldId id="276" r:id="rId27"/>
     <p:sldId id="277" r:id="rId28"/>
     <p:sldId id="278" r:id="rId29"/>
+    <p:sldId id="279" r:id="rId30"/>
   </p:sldIdLst>
   <p:sldSz cx="9753904" cy="7315200" type="screen4x3"/>
   <p:notesSz cx="6858000" cy="9144000"/>
@@ -6680,7 +6681,7 @@
             <a:avLst/>
           </a:prstGeom>
           <a:solidFill>
-            <a:srgbClr val="152130"/>
+            <a:srgbClr val="FFFFFF"/>
           </a:solidFill>
           <a:ln>
             <a:noFill/>
@@ -6697,7 +6698,7 @@
       </p:sp>
       <p:pic>
         <p:nvPicPr>
-          <p:cNvPr id="3" name="Picture 2" descr="logo_white.png"/>
+          <p:cNvPr id="3" name="Picture 2" descr="mark_dark.png"/>
           <p:cNvPicPr>
             <a:picLocks noChangeAspect="1"/>
           </p:cNvPicPr>
@@ -6711,8 +6712,8 @@
         </p:blipFill>
         <p:spPr>
           <a:xfrm>
-            <a:off x="548640" y="502920"/>
-            <a:ext cx="2337572" cy="502920"/>
+            <a:off x="457200" y="219456"/>
+            <a:ext cx="280009" cy="237744"/>
           </a:xfrm>
           <a:prstGeom prst="rect">
             <a:avLst/>
@@ -6721,20 +6722,62 @@
       </p:pic>
       <p:sp>
         <p:nvSpPr>
-          <p:cNvPr id="4" name="Rectangle 3"/>
+          <p:cNvPr id="4" name="TextBox 3"/>
+          <p:cNvSpPr txBox="1"/>
+          <p:nvPr/>
+        </p:nvSpPr>
+        <p:spPr>
+          <a:xfrm>
+            <a:off x="841248" y="246888"/>
+            <a:ext cx="5486400" cy="274320"/>
+          </a:xfrm>
+          <a:prstGeom prst="rect">
+            <a:avLst/>
+          </a:prstGeom>
+          <a:noFill/>
+        </p:spPr>
+        <p:txBody>
+          <a:bodyPr wrap="square" anchor="t" lIns="0" rIns="0" tIns="0" bIns="0">
+            <a:spAutoFit/>
+          </a:bodyPr>
+          <a:lstStyle/>
+          <a:p>
+            <a:pPr algn="l">
+              <a:lnSpc>
+                <a:spcPct val="110000"/>
+              </a:lnSpc>
+              <a:spcAft>
+                <a:spcPts val="0"/>
+              </a:spcAft>
+            </a:pPr>
+            <a:r>
+              <a:rPr sz="1100" b="0" i="0">
+                <a:solidFill>
+                  <a:srgbClr val="556A83"/>
+                </a:solidFill>
+                <a:latin typeface="Arial"/>
+              </a:rPr>
+              <a:t>Case · AIP fund era</a:t>
+            </a:r>
+          </a:p>
+        </p:txBody>
+      </p:sp>
+      <p:sp>
+        <p:nvSpPr>
+          <p:cNvPr id="5" name="Rectangle 4"/>
           <p:cNvSpPr/>
           <p:nvPr/>
         </p:nvSpPr>
         <p:spPr>
           <a:xfrm>
-            <a:off x="566928" y="2788920"/>
-            <a:ext cx="457200" cy="27940"/>
+            <a:off x="0" y="566928"/>
+            <a:ext cx="9753904" cy="914400"/>
           </a:xfrm>
           <a:prstGeom prst="rect">
             <a:avLst/>
           </a:prstGeom>
           <a:solidFill>
-            <a:srgbClr val="556A83"/>
+            <a:srgbClr val="F6F7F9"/>
           </a:solidFill>
           <a:ln>
             <a:noFill/>
@@ -6751,14 +6794,14 @@
       </p:sp>
       <p:sp>
         <p:nvSpPr>
-          <p:cNvPr id="5" name="TextBox 4"/>
+          <p:cNvPr id="6" name="TextBox 5"/>
           <p:cNvSpPr txBox="1"/>
           <p:nvPr/>
         </p:nvSpPr>
         <p:spPr>
           <a:xfrm>
-            <a:off x="548640" y="2971800"/>
-            <a:ext cx="8686800" cy="457200"/>
+            <a:off x="502920" y="713232"/>
+            <a:ext cx="8778240" cy="640080"/>
           </a:xfrm>
           <a:prstGeom prst="rect">
             <a:avLst/>
@@ -6780,27 +6823,27 @@
               </a:spcAft>
             </a:pPr>
             <a:r>
-              <a:rPr sz="1300" b="0" i="0">
-                <a:solidFill>
-                  <a:srgbClr val="556A83"/>
-                </a:solidFill>
-                <a:latin typeface="Arial"/>
-              </a:rPr>
-              <a:t>PART II · INVESTMENT AB ÖRESUND (1994–2007)</a:t>
-            </a:r>
-          </a:p>
-        </p:txBody>
-      </p:sp>
-      <p:sp>
-        <p:nvSpPr>
-          <p:cNvPr id="6" name="TextBox 5"/>
+              <a:rPr sz="2600" b="0" i="0" spc="-78">
+                <a:solidFill>
+                  <a:srgbClr val="314359"/>
+                </a:solidFill>
+                <a:latin typeface="Times New Roman"/>
+              </a:rPr>
+              <a:t>Investment case study: Robit Plc</a:t>
+            </a:r>
+          </a:p>
+        </p:txBody>
+      </p:sp>
+      <p:sp>
+        <p:nvSpPr>
+          <p:cNvPr id="7" name="TextBox 6"/>
           <p:cNvSpPr txBox="1"/>
           <p:nvPr/>
         </p:nvSpPr>
         <p:spPr>
           <a:xfrm>
-            <a:off x="548640" y="3291840"/>
-            <a:ext cx="8686800" cy="1280160"/>
+            <a:off x="5486400" y="6967728"/>
+            <a:ext cx="4023360" cy="274320"/>
           </a:xfrm>
           <a:prstGeom prst="rect">
             <a:avLst/>
@@ -6813,22 +6856,921 @@
           </a:bodyPr>
           <a:lstStyle/>
           <a:p>
+            <a:pPr algn="r">
+              <a:lnSpc>
+                <a:spcPct val="110000"/>
+              </a:lnSpc>
+              <a:spcAft>
+                <a:spcPts val="0"/>
+              </a:spcAft>
+            </a:pPr>
+            <a:r>
+              <a:rPr sz="850" b="0" i="0">
+                <a:solidFill>
+                  <a:srgbClr val="556A83"/>
+                </a:solidFill>
+                <a:latin typeface="Arial"/>
+              </a:rPr>
+              <a:t>Strictly confidential          12</a:t>
+            </a:r>
+          </a:p>
+        </p:txBody>
+      </p:sp>
+      <p:sp>
+        <p:nvSpPr>
+          <p:cNvPr id="8" name="TextBox 7"/>
+          <p:cNvSpPr txBox="1"/>
+          <p:nvPr/>
+        </p:nvSpPr>
+        <p:spPr>
+          <a:xfrm>
+            <a:off x="502920" y="1783080"/>
+            <a:ext cx="4160520" cy="5120640"/>
+          </a:xfrm>
+          <a:prstGeom prst="rect">
+            <a:avLst/>
+          </a:prstGeom>
+          <a:noFill/>
+        </p:spPr>
+        <p:txBody>
+          <a:bodyPr wrap="square" anchor="t" lIns="0" rIns="0" tIns="0" bIns="0">
+            <a:spAutoFit/>
+          </a:bodyPr>
+          <a:lstStyle/>
+          <a:p>
             <a:pPr algn="l">
               <a:lnSpc>
                 <a:spcPct val="110000"/>
               </a:lnSpc>
-              <a:spcAft>
+              <a:spcBef>
                 <a:spcPts val="0"/>
-              </a:spcAft>
-            </a:pPr>
-            <a:r>
-              <a:rPr sz="3400" b="0" i="1" spc="-102">
-                <a:solidFill>
-                  <a:srgbClr val="E2E5E9"/>
+              </a:spcBef>
+              <a:spcAft>
+                <a:spcPts val="250"/>
+              </a:spcAft>
+            </a:pPr>
+            <a:r>
+              <a:rPr sz="1100" b="1" i="0">
+                <a:solidFill>
+                  <a:srgbClr val="314359"/>
                 </a:solidFill>
                 <a:latin typeface="Times New Roman"/>
               </a:rPr>
-              <a:t>Earlier track record</a:t>
+              <a:t>Company description</a:t>
+            </a:r>
+          </a:p>
+          <a:p>
+            <a:pPr algn="l">
+              <a:lnSpc>
+                <a:spcPct val="108000"/>
+              </a:lnSpc>
+              <a:spcAft>
+                <a:spcPts val="200"/>
+              </a:spcAft>
+            </a:pPr>
+            <a:r>
+              <a:rPr sz="869" b="0" i="0">
+                <a:solidFill>
+                  <a:srgbClr val="0E1620"/>
+                </a:solidFill>
+                <a:latin typeface="Arial"/>
+              </a:rPr>
+              <a:t>Robit Plc is a Finnish-listed (Nasdaq Helsinki) manufacturer of drilling tools and consumables for mining, construction and well-drilling — a niche industrial with a global distribution footprint and recurring aftermarket demand.</a:t>
+            </a:r>
+          </a:p>
+          <a:p>
+            <a:pPr algn="l">
+              <a:lnSpc>
+                <a:spcPct val="110000"/>
+              </a:lnSpc>
+              <a:spcBef>
+                <a:spcPts val="700"/>
+              </a:spcBef>
+              <a:spcAft>
+                <a:spcPts val="250"/>
+              </a:spcAft>
+            </a:pPr>
+            <a:r>
+              <a:rPr sz="1100" b="1" i="0">
+                <a:solidFill>
+                  <a:srgbClr val="314359"/>
+                </a:solidFill>
+                <a:latin typeface="Times New Roman"/>
+              </a:rPr>
+              <a:t>Why we invested</a:t>
+            </a:r>
+          </a:p>
+          <a:p>
+            <a:pPr marL="149162" indent="-149162">
+              <a:lnSpc>
+                <a:spcPct val="106000"/>
+              </a:lnSpc>
+              <a:spcAft>
+                <a:spcPts val="150"/>
+              </a:spcAft>
+            </a:pPr>
+            <a:r>
+              <a:rPr sz="869" b="1">
+                <a:solidFill>
+                  <a:srgbClr val="556A83"/>
+                </a:solidFill>
+                <a:latin typeface="Arial"/>
+              </a:rPr>
+              <a:t>›  </a:t>
+            </a:r>
+            <a:r>
+              <a:rPr sz="869">
+                <a:solidFill>
+                  <a:srgbClr val="0E1620"/>
+                </a:solidFill>
+                <a:latin typeface="Arial"/>
+              </a:rPr>
+              <a:t>An under-followed Nordic small-cap with a recurring-revenue consumables franchise</a:t>
+            </a:r>
+          </a:p>
+          <a:p>
+            <a:pPr marL="149162" indent="-149162">
+              <a:lnSpc>
+                <a:spcPct val="106000"/>
+              </a:lnSpc>
+              <a:spcAft>
+                <a:spcPts val="150"/>
+              </a:spcAft>
+            </a:pPr>
+            <a:r>
+              <a:rPr sz="869" b="1">
+                <a:solidFill>
+                  <a:srgbClr val="556A83"/>
+                </a:solidFill>
+                <a:latin typeface="Arial"/>
+              </a:rPr>
+              <a:t>›  </a:t>
+            </a:r>
+            <a:r>
+              <a:rPr sz="869">
+                <a:solidFill>
+                  <a:srgbClr val="0E1620"/>
+                </a:solidFill>
+                <a:latin typeface="Arial"/>
+              </a:rPr>
+              <a:t>Trading well below intrinsic value, with a correctable cost base and footprint</a:t>
+            </a:r>
+          </a:p>
+          <a:p>
+            <a:pPr marL="149162" indent="-149162">
+              <a:lnSpc>
+                <a:spcPct val="106000"/>
+              </a:lnSpc>
+              <a:spcAft>
+                <a:spcPts val="150"/>
+              </a:spcAft>
+            </a:pPr>
+            <a:r>
+              <a:rPr sz="869" b="1">
+                <a:solidFill>
+                  <a:srgbClr val="556A83"/>
+                </a:solidFill>
+                <a:latin typeface="Arial"/>
+              </a:rPr>
+              <a:t>›  </a:t>
+            </a:r>
+            <a:r>
+              <a:rPr sz="869">
+                <a:solidFill>
+                  <a:srgbClr val="0E1620"/>
+                </a:solidFill>
+                <a:latin typeface="Arial"/>
+              </a:rPr>
+              <a:t>A clear path to value through board-level engagement and capital discipline</a:t>
+            </a:r>
+          </a:p>
+          <a:p>
+            <a:pPr marL="149162" indent="-149162">
+              <a:lnSpc>
+                <a:spcPct val="106000"/>
+              </a:lnSpc>
+              <a:spcAft>
+                <a:spcPts val="150"/>
+              </a:spcAft>
+            </a:pPr>
+            <a:r>
+              <a:rPr sz="869" b="1">
+                <a:solidFill>
+                  <a:srgbClr val="556A83"/>
+                </a:solidFill>
+                <a:latin typeface="Arial"/>
+              </a:rPr>
+              <a:t>›  </a:t>
+            </a:r>
+            <a:r>
+              <a:rPr sz="869">
+                <a:solidFill>
+                  <a:srgbClr val="0E1620"/>
+                </a:solidFill>
+                <a:latin typeface="Arial"/>
+              </a:rPr>
+              <a:t>Limited downside at entry; a multi-year compounding opportunity</a:t>
+            </a:r>
+          </a:p>
+          <a:p>
+            <a:pPr algn="l">
+              <a:lnSpc>
+                <a:spcPct val="110000"/>
+              </a:lnSpc>
+              <a:spcBef>
+                <a:spcPts val="700"/>
+              </a:spcBef>
+              <a:spcAft>
+                <a:spcPts val="250"/>
+              </a:spcAft>
+            </a:pPr>
+            <a:r>
+              <a:rPr sz="1100" b="1" i="0">
+                <a:solidFill>
+                  <a:srgbClr val="314359"/>
+                </a:solidFill>
+                <a:latin typeface="Times New Roman"/>
+              </a:rPr>
+              <a:t>The engagement plan</a:t>
+            </a:r>
+          </a:p>
+          <a:p>
+            <a:pPr algn="l">
+              <a:lnSpc>
+                <a:spcPct val="108000"/>
+              </a:lnSpc>
+              <a:spcAft>
+                <a:spcPts val="200"/>
+              </a:spcAft>
+            </a:pPr>
+            <a:r>
+              <a:rPr sz="869" b="0" i="0">
+                <a:solidFill>
+                  <a:srgbClr val="0E1620"/>
+                </a:solidFill>
+                <a:latin typeface="Arial"/>
+              </a:rPr>
+              <a:t>Build the position in stages, follow the company closely, and secure a board seat to drive the operational and capital-allocation changes — engaged ownership, not a passive bet.</a:t>
+            </a:r>
+          </a:p>
+          <a:p>
+            <a:pPr algn="l">
+              <a:lnSpc>
+                <a:spcPct val="110000"/>
+              </a:lnSpc>
+              <a:spcBef>
+                <a:spcPts val="700"/>
+              </a:spcBef>
+              <a:spcAft>
+                <a:spcPts val="250"/>
+              </a:spcAft>
+            </a:pPr>
+            <a:r>
+              <a:rPr sz="1100" b="1" i="0">
+                <a:solidFill>
+                  <a:srgbClr val="314359"/>
+                </a:solidFill>
+                <a:latin typeface="Times New Roman"/>
+              </a:rPr>
+              <a:t>What happened — and the discipline</a:t>
+            </a:r>
+          </a:p>
+          <a:p>
+            <a:pPr marL="149162" indent="-149162">
+              <a:lnSpc>
+                <a:spcPct val="106000"/>
+              </a:lnSpc>
+              <a:spcAft>
+                <a:spcPts val="150"/>
+              </a:spcAft>
+            </a:pPr>
+            <a:r>
+              <a:rPr sz="869" b="1">
+                <a:solidFill>
+                  <a:srgbClr val="556A83"/>
+                </a:solidFill>
+                <a:latin typeface="Arial"/>
+              </a:rPr>
+              <a:t>✓  </a:t>
+            </a:r>
+            <a:r>
+              <a:rPr sz="869">
+                <a:solidFill>
+                  <a:srgbClr val="0E1620"/>
+                </a:solidFill>
+                <a:latin typeface="Arial"/>
+              </a:rPr>
+              <a:t>First invested May 2015; followed the company and added on over several years</a:t>
+            </a:r>
+          </a:p>
+          <a:p>
+            <a:pPr marL="149162" indent="-149162">
+              <a:lnSpc>
+                <a:spcPct val="106000"/>
+              </a:lnSpc>
+              <a:spcAft>
+                <a:spcPts val="150"/>
+              </a:spcAft>
+            </a:pPr>
+            <a:r>
+              <a:rPr sz="869" b="1">
+                <a:solidFill>
+                  <a:srgbClr val="556A83"/>
+                </a:solidFill>
+                <a:latin typeface="Arial"/>
+              </a:rPr>
+              <a:t>✓  </a:t>
+            </a:r>
+            <a:r>
+              <a:rPr sz="869">
+                <a:solidFill>
+                  <a:srgbClr val="0E1620"/>
+                </a:solidFill>
+                <a:latin typeface="Arial"/>
+              </a:rPr>
+              <a:t>Began negotiating a board seat in 2019 to formalise the engagement</a:t>
+            </a:r>
+          </a:p>
+          <a:p>
+            <a:pPr marL="149162" indent="-149162">
+              <a:lnSpc>
+                <a:spcPct val="106000"/>
+              </a:lnSpc>
+              <a:spcAft>
+                <a:spcPts val="150"/>
+              </a:spcAft>
+            </a:pPr>
+            <a:r>
+              <a:rPr sz="869" b="1">
+                <a:solidFill>
+                  <a:srgbClr val="556A83"/>
+                </a:solidFill>
+                <a:latin typeface="Arial"/>
+              </a:rPr>
+              <a:t>✓  </a:t>
+            </a:r>
+            <a:r>
+              <a:rPr sz="869">
+                <a:solidFill>
+                  <a:srgbClr val="0E1620"/>
+                </a:solidFill>
+                <a:latin typeface="Arial"/>
+              </a:rPr>
+              <a:t>Unable to secure board alignment, we exited rather than stay without influence</a:t>
+            </a:r>
+          </a:p>
+          <a:p>
+            <a:pPr marL="149162" indent="-149162">
+              <a:lnSpc>
+                <a:spcPct val="106000"/>
+              </a:lnSpc>
+              <a:spcAft>
+                <a:spcPts val="150"/>
+              </a:spcAft>
+            </a:pPr>
+            <a:r>
+              <a:rPr sz="869" b="1">
+                <a:solidFill>
+                  <a:srgbClr val="556A83"/>
+                </a:solidFill>
+                <a:latin typeface="Arial"/>
+              </a:rPr>
+              <a:t>✓  </a:t>
+            </a:r>
+            <a:r>
+              <a:rPr sz="869">
+                <a:solidFill>
+                  <a:srgbClr val="0E1620"/>
+                </a:solidFill>
+                <a:latin typeface="Arial"/>
+              </a:rPr>
+              <a:t>Still profitable: a ~14% annual IRR — more than twice the index over the hold</a:t>
+            </a:r>
+          </a:p>
+          <a:p>
+            <a:pPr marL="149162" indent="-149162">
+              <a:lnSpc>
+                <a:spcPct val="106000"/>
+              </a:lnSpc>
+              <a:spcAft>
+                <a:spcPts val="150"/>
+              </a:spcAft>
+            </a:pPr>
+            <a:r>
+              <a:rPr sz="869" b="1">
+                <a:solidFill>
+                  <a:srgbClr val="556A83"/>
+                </a:solidFill>
+                <a:latin typeface="Arial"/>
+              </a:rPr>
+              <a:t>✓  </a:t>
+            </a:r>
+            <a:r>
+              <a:rPr sz="869">
+                <a:solidFill>
+                  <a:srgbClr val="0E1620"/>
+                </a:solidFill>
+                <a:latin typeface="Arial"/>
+              </a:rPr>
+              <a:t>Since our exit the shares have roughly halved — walking away was also avoided loss</a:t>
+            </a:r>
+          </a:p>
+        </p:txBody>
+      </p:sp>
+      <p:sp>
+        <p:nvSpPr>
+          <p:cNvPr id="9" name="Rounded Rectangle 8"/>
+          <p:cNvSpPr/>
+          <p:nvPr/>
+        </p:nvSpPr>
+        <p:spPr>
+          <a:xfrm>
+            <a:off x="4983480" y="1783080"/>
+            <a:ext cx="4297680" cy="384048"/>
+          </a:xfrm>
+          <a:prstGeom prst="roundRect">
+            <a:avLst/>
+          </a:prstGeom>
+          <a:solidFill>
+            <a:srgbClr val="F6F7F9"/>
+          </a:solidFill>
+          <a:ln>
+            <a:noFill/>
+          </a:ln>
+          <a:effectLst/>
+        </p:spPr>
+        <p:txBody>
+          <a:bodyPr rtlCol="0" anchor="ctr"/>
+          <a:lstStyle/>
+          <a:p>
+            <a:pPr algn="ctr"/>
+          </a:p>
+        </p:txBody>
+      </p:sp>
+      <p:sp>
+        <p:nvSpPr>
+          <p:cNvPr id="10" name="TextBox 9"/>
+          <p:cNvSpPr txBox="1"/>
+          <p:nvPr/>
+        </p:nvSpPr>
+        <p:spPr>
+          <a:xfrm>
+            <a:off x="4983480" y="1783080"/>
+            <a:ext cx="4297680" cy="384048"/>
+          </a:xfrm>
+          <a:prstGeom prst="rect">
+            <a:avLst/>
+          </a:prstGeom>
+          <a:noFill/>
+        </p:spPr>
+        <p:txBody>
+          <a:bodyPr wrap="square" anchor="ctr" lIns="0" rIns="0" tIns="0" bIns="0">
+            <a:spAutoFit/>
+          </a:bodyPr>
+          <a:lstStyle/>
+          <a:p>
+            <a:pPr algn="ctr">
+              <a:lnSpc>
+                <a:spcPct val="110000"/>
+              </a:lnSpc>
+              <a:spcAft>
+                <a:spcPts val="0"/>
+              </a:spcAft>
+            </a:pPr>
+            <a:r>
+              <a:rPr sz="1250" b="1" i="0">
+                <a:solidFill>
+                  <a:srgbClr val="314359"/>
+                </a:solidFill>
+                <a:latin typeface="Times New Roman"/>
+              </a:rPr>
+              <a:t>IRR ~14% p.a. · &gt; 2× the index · disciplined exit</a:t>
+            </a:r>
+          </a:p>
+        </p:txBody>
+      </p:sp>
+      <p:sp>
+        <p:nvSpPr>
+          <p:cNvPr id="11" name="TextBox 10"/>
+          <p:cNvSpPr txBox="1"/>
+          <p:nvPr/>
+        </p:nvSpPr>
+        <p:spPr>
+          <a:xfrm>
+            <a:off x="4983480" y="2350008"/>
+            <a:ext cx="4297680" cy="274320"/>
+          </a:xfrm>
+          <a:prstGeom prst="rect">
+            <a:avLst/>
+          </a:prstGeom>
+          <a:noFill/>
+        </p:spPr>
+        <p:txBody>
+          <a:bodyPr wrap="square" anchor="t" lIns="0" rIns="0" tIns="0" bIns="0">
+            <a:spAutoFit/>
+          </a:bodyPr>
+          <a:lstStyle/>
+          <a:p>
+            <a:pPr algn="ctr">
+              <a:lnSpc>
+                <a:spcPct val="110000"/>
+              </a:lnSpc>
+              <a:spcAft>
+                <a:spcPts val="0"/>
+              </a:spcAft>
+            </a:pPr>
+            <a:r>
+              <a:rPr sz="1100" b="1" i="0">
+                <a:solidFill>
+                  <a:srgbClr val="314359"/>
+                </a:solidFill>
+                <a:latin typeface="Times New Roman"/>
+              </a:rPr>
+              <a:t>Robit share price after we exited</a:t>
+            </a:r>
+          </a:p>
+        </p:txBody>
+      </p:sp>
+      <p:sp>
+        <p:nvSpPr>
+          <p:cNvPr id="12" name="Rectangle 11"/>
+          <p:cNvSpPr/>
+          <p:nvPr/>
+        </p:nvSpPr>
+        <p:spPr>
+          <a:xfrm>
+            <a:off x="5074920" y="4773168"/>
+            <a:ext cx="4114800" cy="12700"/>
+          </a:xfrm>
+          <a:prstGeom prst="rect">
+            <a:avLst/>
+          </a:prstGeom>
+          <a:solidFill>
+            <a:srgbClr val="E2E5E9"/>
+          </a:solidFill>
+          <a:ln>
+            <a:noFill/>
+          </a:ln>
+          <a:effectLst/>
+        </p:spPr>
+        <p:txBody>
+          <a:bodyPr rtlCol="0" anchor="ctr"/>
+          <a:lstStyle/>
+          <a:p>
+            <a:pPr algn="ctr"/>
+          </a:p>
+        </p:txBody>
+      </p:sp>
+      <p:sp>
+        <p:nvSpPr>
+          <p:cNvPr id="13" name="Rectangle 12"/>
+          <p:cNvSpPr/>
+          <p:nvPr/>
+        </p:nvSpPr>
+        <p:spPr>
+          <a:xfrm>
+            <a:off x="5577840" y="3145846"/>
+            <a:ext cx="1051560" cy="1627322"/>
+          </a:xfrm>
+          <a:prstGeom prst="rect">
+            <a:avLst/>
+          </a:prstGeom>
+          <a:solidFill>
+            <a:srgbClr val="152130"/>
+          </a:solidFill>
+          <a:ln>
+            <a:noFill/>
+          </a:ln>
+          <a:effectLst/>
+        </p:spPr>
+        <p:txBody>
+          <a:bodyPr rtlCol="0" anchor="ctr"/>
+          <a:lstStyle/>
+          <a:p>
+            <a:pPr algn="ctr"/>
+          </a:p>
+        </p:txBody>
+      </p:sp>
+      <p:sp>
+        <p:nvSpPr>
+          <p:cNvPr id="14" name="TextBox 13"/>
+          <p:cNvSpPr txBox="1"/>
+          <p:nvPr/>
+        </p:nvSpPr>
+        <p:spPr>
+          <a:xfrm>
+            <a:off x="5303520" y="2871526"/>
+            <a:ext cx="1600200" cy="256032"/>
+          </a:xfrm>
+          <a:prstGeom prst="rect">
+            <a:avLst/>
+          </a:prstGeom>
+          <a:noFill/>
+        </p:spPr>
+        <p:txBody>
+          <a:bodyPr wrap="square" anchor="t" lIns="0" rIns="0" tIns="0" bIns="0">
+            <a:spAutoFit/>
+          </a:bodyPr>
+          <a:lstStyle/>
+          <a:p>
+            <a:pPr algn="ctr">
+              <a:lnSpc>
+                <a:spcPct val="110000"/>
+              </a:lnSpc>
+              <a:spcAft>
+                <a:spcPts val="0"/>
+              </a:spcAft>
+            </a:pPr>
+            <a:r>
+              <a:rPr sz="1300" b="1" i="0">
+                <a:solidFill>
+                  <a:srgbClr val="314359"/>
+                </a:solidFill>
+                <a:latin typeface="Times New Roman"/>
+              </a:rPr>
+              <a:t>100</a:t>
+            </a:r>
+          </a:p>
+        </p:txBody>
+      </p:sp>
+      <p:sp>
+        <p:nvSpPr>
+          <p:cNvPr id="15" name="TextBox 14"/>
+          <p:cNvSpPr txBox="1"/>
+          <p:nvPr/>
+        </p:nvSpPr>
+        <p:spPr>
+          <a:xfrm>
+            <a:off x="5074920" y="4828032"/>
+            <a:ext cx="2057400" cy="310896"/>
+          </a:xfrm>
+          <a:prstGeom prst="rect">
+            <a:avLst/>
+          </a:prstGeom>
+          <a:noFill/>
+        </p:spPr>
+        <p:txBody>
+          <a:bodyPr wrap="square" anchor="t" lIns="0" rIns="0" tIns="0" bIns="0">
+            <a:spAutoFit/>
+          </a:bodyPr>
+          <a:lstStyle/>
+          <a:p>
+            <a:pPr algn="ctr">
+              <a:lnSpc>
+                <a:spcPct val="110000"/>
+              </a:lnSpc>
+              <a:spcAft>
+                <a:spcPts val="0"/>
+              </a:spcAft>
+            </a:pPr>
+            <a:r>
+              <a:rPr sz="950" b="0" i="0">
+                <a:solidFill>
+                  <a:srgbClr val="0E1620"/>
+                </a:solidFill>
+                <a:latin typeface="Arial"/>
+              </a:rPr>
+              <a:t>At our exit</a:t>
+            </a:r>
+          </a:p>
+        </p:txBody>
+      </p:sp>
+      <p:sp>
+        <p:nvSpPr>
+          <p:cNvPr id="16" name="Rectangle 15"/>
+          <p:cNvSpPr/>
+          <p:nvPr/>
+        </p:nvSpPr>
+        <p:spPr>
+          <a:xfrm>
+            <a:off x="7635240" y="3959507"/>
+            <a:ext cx="1051560" cy="813661"/>
+          </a:xfrm>
+          <a:prstGeom prst="rect">
+            <a:avLst/>
+          </a:prstGeom>
+          <a:solidFill>
+            <a:srgbClr val="152130"/>
+          </a:solidFill>
+          <a:ln>
+            <a:noFill/>
+          </a:ln>
+          <a:effectLst/>
+        </p:spPr>
+        <p:txBody>
+          <a:bodyPr rtlCol="0" anchor="ctr"/>
+          <a:lstStyle/>
+          <a:p>
+            <a:pPr algn="ctr"/>
+          </a:p>
+        </p:txBody>
+      </p:sp>
+      <p:sp>
+        <p:nvSpPr>
+          <p:cNvPr id="17" name="TextBox 16"/>
+          <p:cNvSpPr txBox="1"/>
+          <p:nvPr/>
+        </p:nvSpPr>
+        <p:spPr>
+          <a:xfrm>
+            <a:off x="7360920" y="3685187"/>
+            <a:ext cx="1600200" cy="256032"/>
+          </a:xfrm>
+          <a:prstGeom prst="rect">
+            <a:avLst/>
+          </a:prstGeom>
+          <a:noFill/>
+        </p:spPr>
+        <p:txBody>
+          <a:bodyPr wrap="square" anchor="t" lIns="0" rIns="0" tIns="0" bIns="0">
+            <a:spAutoFit/>
+          </a:bodyPr>
+          <a:lstStyle/>
+          <a:p>
+            <a:pPr algn="ctr">
+              <a:lnSpc>
+                <a:spcPct val="110000"/>
+              </a:lnSpc>
+              <a:spcAft>
+                <a:spcPts val="0"/>
+              </a:spcAft>
+            </a:pPr>
+            <a:r>
+              <a:rPr sz="1300" b="1" i="0">
+                <a:solidFill>
+                  <a:srgbClr val="314359"/>
+                </a:solidFill>
+                <a:latin typeface="Times New Roman"/>
+              </a:rPr>
+              <a:t>50</a:t>
+            </a:r>
+          </a:p>
+        </p:txBody>
+      </p:sp>
+      <p:sp>
+        <p:nvSpPr>
+          <p:cNvPr id="18" name="TextBox 17"/>
+          <p:cNvSpPr txBox="1"/>
+          <p:nvPr/>
+        </p:nvSpPr>
+        <p:spPr>
+          <a:xfrm>
+            <a:off x="7132320" y="4828032"/>
+            <a:ext cx="2057400" cy="310896"/>
+          </a:xfrm>
+          <a:prstGeom prst="rect">
+            <a:avLst/>
+          </a:prstGeom>
+          <a:noFill/>
+        </p:spPr>
+        <p:txBody>
+          <a:bodyPr wrap="square" anchor="t" lIns="0" rIns="0" tIns="0" bIns="0">
+            <a:spAutoFit/>
+          </a:bodyPr>
+          <a:lstStyle/>
+          <a:p>
+            <a:pPr algn="ctr">
+              <a:lnSpc>
+                <a:spcPct val="110000"/>
+              </a:lnSpc>
+              <a:spcAft>
+                <a:spcPts val="0"/>
+              </a:spcAft>
+            </a:pPr>
+            <a:r>
+              <a:rPr sz="950" b="0" i="0">
+                <a:solidFill>
+                  <a:srgbClr val="0E1620"/>
+                </a:solidFill>
+                <a:latin typeface="Arial"/>
+              </a:rPr>
+              <a:t>Today</a:t>
+            </a:r>
+          </a:p>
+        </p:txBody>
+      </p:sp>
+      <p:sp>
+        <p:nvSpPr>
+          <p:cNvPr id="19" name="TextBox 18"/>
+          <p:cNvSpPr txBox="1"/>
+          <p:nvPr/>
+        </p:nvSpPr>
+        <p:spPr>
+          <a:xfrm>
+            <a:off x="4983480" y="5157216"/>
+            <a:ext cx="4297680" cy="201168"/>
+          </a:xfrm>
+          <a:prstGeom prst="rect">
+            <a:avLst/>
+          </a:prstGeom>
+          <a:noFill/>
+        </p:spPr>
+        <p:txBody>
+          <a:bodyPr wrap="square" anchor="t" lIns="0" rIns="0" tIns="0" bIns="0">
+            <a:spAutoFit/>
+          </a:bodyPr>
+          <a:lstStyle/>
+          <a:p>
+            <a:pPr algn="l">
+              <a:lnSpc>
+                <a:spcPct val="110000"/>
+              </a:lnSpc>
+              <a:spcAft>
+                <a:spcPts val="0"/>
+              </a:spcAft>
+            </a:pPr>
+            <a:r>
+              <a:rPr sz="850" b="0" i="1">
+                <a:solidFill>
+                  <a:srgbClr val="556A83"/>
+                </a:solidFill>
+                <a:latin typeface="Arial"/>
+              </a:rPr>
+              <a:t>Indexed to 100 at our exit (indicative)</a:t>
+            </a:r>
+          </a:p>
+        </p:txBody>
+      </p:sp>
+      <p:sp>
+        <p:nvSpPr>
+          <p:cNvPr id="20" name="TextBox 19"/>
+          <p:cNvSpPr txBox="1"/>
+          <p:nvPr/>
+        </p:nvSpPr>
+        <p:spPr>
+          <a:xfrm>
+            <a:off x="4983480" y="5029200"/>
+            <a:ext cx="4297680" cy="731520"/>
+          </a:xfrm>
+          <a:prstGeom prst="rect">
+            <a:avLst/>
+          </a:prstGeom>
+          <a:noFill/>
+        </p:spPr>
+        <p:txBody>
+          <a:bodyPr wrap="square" anchor="t" lIns="0" rIns="0" tIns="0" bIns="0">
+            <a:spAutoFit/>
+          </a:bodyPr>
+          <a:lstStyle/>
+          <a:p>
+            <a:pPr algn="ctr">
+              <a:lnSpc>
+                <a:spcPct val="110000"/>
+              </a:lnSpc>
+              <a:spcAft>
+                <a:spcPts val="0"/>
+              </a:spcAft>
+            </a:pPr>
+            <a:r>
+              <a:rPr sz="1200" b="1" i="0">
+                <a:solidFill>
+                  <a:srgbClr val="314359"/>
+                </a:solidFill>
+                <a:latin typeface="Times New Roman"/>
+              </a:rPr>
+              <a:t>We exited profitably (~14% IRR); the shares then halved</a:t>
+            </a:r>
+          </a:p>
+        </p:txBody>
+      </p:sp>
+      <p:sp>
+        <p:nvSpPr>
+          <p:cNvPr id="21" name="TextBox 20"/>
+          <p:cNvSpPr txBox="1"/>
+          <p:nvPr/>
+        </p:nvSpPr>
+        <p:spPr>
+          <a:xfrm>
+            <a:off x="502920" y="6967728"/>
+            <a:ext cx="4846320" cy="274320"/>
+          </a:xfrm>
+          <a:prstGeom prst="rect">
+            <a:avLst/>
+          </a:prstGeom>
+          <a:noFill/>
+        </p:spPr>
+        <p:txBody>
+          <a:bodyPr wrap="square" anchor="t" lIns="0" rIns="0" tIns="0" bIns="0">
+            <a:spAutoFit/>
+          </a:bodyPr>
+          <a:lstStyle/>
+          <a:p>
+            <a:pPr algn="l">
+              <a:lnSpc>
+                <a:spcPct val="100000"/>
+              </a:lnSpc>
+              <a:spcAft>
+                <a:spcPts val="0"/>
+              </a:spcAft>
+            </a:pPr>
+            <a:r>
+              <a:rPr sz="750" b="0" i="1">
+                <a:solidFill>
+                  <a:srgbClr val="556A83"/>
+                </a:solidFill>
+                <a:latin typeface="Arial"/>
+              </a:rPr>
+              <a:t>Source: AIPFII transaction history (first investment May 2015; board-seat negotiation 2019; exited thereafter). IRR is money-weighted and net of costs; benchmark is the relevant equity index; the post-exit move is indicative. Past performance is not indicative of future results.</a:t>
             </a:r>
           </a:p>
         </p:txBody>
@@ -6866,7 +7808,7 @@
             <a:avLst/>
           </a:prstGeom>
           <a:solidFill>
-            <a:srgbClr val="FFFFFF"/>
+            <a:srgbClr val="152130"/>
           </a:solidFill>
           <a:ln>
             <a:noFill/>
@@ -6883,7 +7825,7 @@
       </p:sp>
       <p:pic>
         <p:nvPicPr>
-          <p:cNvPr id="3" name="Picture 2" descr="mark_dark.png"/>
+          <p:cNvPr id="3" name="Picture 2" descr="logo_white.png"/>
           <p:cNvPicPr>
             <a:picLocks noChangeAspect="1"/>
           </p:cNvPicPr>
@@ -6897,8 +7839,8 @@
         </p:blipFill>
         <p:spPr>
           <a:xfrm>
-            <a:off x="457200" y="219456"/>
-            <a:ext cx="280009" cy="237744"/>
+            <a:off x="548640" y="502920"/>
+            <a:ext cx="2337572" cy="502920"/>
           </a:xfrm>
           <a:prstGeom prst="rect">
             <a:avLst/>
@@ -6907,62 +7849,20 @@
       </p:pic>
       <p:sp>
         <p:nvSpPr>
-          <p:cNvPr id="4" name="TextBox 3"/>
-          <p:cNvSpPr txBox="1"/>
-          <p:nvPr/>
-        </p:nvSpPr>
-        <p:spPr>
-          <a:xfrm>
-            <a:off x="841248" y="246888"/>
-            <a:ext cx="5486400" cy="274320"/>
-          </a:xfrm>
-          <a:prstGeom prst="rect">
-            <a:avLst/>
-          </a:prstGeom>
-          <a:noFill/>
-        </p:spPr>
-        <p:txBody>
-          <a:bodyPr wrap="square" anchor="t" lIns="0" rIns="0" tIns="0" bIns="0">
-            <a:spAutoFit/>
-          </a:bodyPr>
-          <a:lstStyle/>
-          <a:p>
-            <a:pPr algn="l">
-              <a:lnSpc>
-                <a:spcPct val="110000"/>
-              </a:lnSpc>
-              <a:spcAft>
-                <a:spcPts val="0"/>
-              </a:spcAft>
-            </a:pPr>
-            <a:r>
-              <a:rPr sz="1100" b="0" i="0">
-                <a:solidFill>
-                  <a:srgbClr val="556A83"/>
-                </a:solidFill>
-                <a:latin typeface="Arial"/>
-              </a:rPr>
-              <a:t>Case · Öresund era</a:t>
-            </a:r>
-          </a:p>
-        </p:txBody>
-      </p:sp>
-      <p:sp>
-        <p:nvSpPr>
-          <p:cNvPr id="5" name="Rectangle 4"/>
+          <p:cNvPr id="4" name="Rectangle 3"/>
           <p:cNvSpPr/>
           <p:nvPr/>
         </p:nvSpPr>
         <p:spPr>
           <a:xfrm>
-            <a:off x="0" y="566928"/>
-            <a:ext cx="9753904" cy="914400"/>
+            <a:off x="566928" y="2788920"/>
+            <a:ext cx="457200" cy="27940"/>
           </a:xfrm>
           <a:prstGeom prst="rect">
             <a:avLst/>
           </a:prstGeom>
           <a:solidFill>
-            <a:srgbClr val="F6F7F9"/>
+            <a:srgbClr val="556A83"/>
           </a:solidFill>
           <a:ln>
             <a:noFill/>
@@ -6979,14 +7879,14 @@
       </p:sp>
       <p:sp>
         <p:nvSpPr>
-          <p:cNvPr id="6" name="TextBox 5"/>
+          <p:cNvPr id="5" name="TextBox 4"/>
           <p:cNvSpPr txBox="1"/>
           <p:nvPr/>
         </p:nvSpPr>
         <p:spPr>
           <a:xfrm>
-            <a:off x="502920" y="713232"/>
-            <a:ext cx="8778240" cy="640080"/>
+            <a:off x="548640" y="2971800"/>
+            <a:ext cx="8686800" cy="457200"/>
           </a:xfrm>
           <a:prstGeom prst="rect">
             <a:avLst/>
@@ -7008,27 +7908,27 @@
               </a:spcAft>
             </a:pPr>
             <a:r>
-              <a:rPr sz="2600" b="0" i="0" spc="-78">
-                <a:solidFill>
-                  <a:srgbClr val="314359"/>
-                </a:solidFill>
-                <a:latin typeface="Times New Roman"/>
-              </a:rPr>
-              <a:t>Investment case study: Custos</a:t>
-            </a:r>
-          </a:p>
-        </p:txBody>
-      </p:sp>
-      <p:sp>
-        <p:nvSpPr>
-          <p:cNvPr id="7" name="TextBox 6"/>
+              <a:rPr sz="1300" b="0" i="0">
+                <a:solidFill>
+                  <a:srgbClr val="556A83"/>
+                </a:solidFill>
+                <a:latin typeface="Arial"/>
+              </a:rPr>
+              <a:t>PART II · INVESTMENT AB ÖRESUND (1994–2007)</a:t>
+            </a:r>
+          </a:p>
+        </p:txBody>
+      </p:sp>
+      <p:sp>
+        <p:nvSpPr>
+          <p:cNvPr id="6" name="TextBox 5"/>
           <p:cNvSpPr txBox="1"/>
           <p:nvPr/>
         </p:nvSpPr>
         <p:spPr>
           <a:xfrm>
-            <a:off x="5486400" y="6967728"/>
-            <a:ext cx="4023360" cy="274320"/>
+            <a:off x="548640" y="3291840"/>
+            <a:ext cx="8686800" cy="1280160"/>
           </a:xfrm>
           <a:prstGeom prst="rect">
             <a:avLst/>
@@ -7041,7 +7941,7 @@
           </a:bodyPr>
           <a:lstStyle/>
           <a:p>
-            <a:pPr algn="r">
+            <a:pPr algn="l">
               <a:lnSpc>
                 <a:spcPct val="110000"/>
               </a:lnSpc>
@@ -7050,678 +7950,13 @@
               </a:spcAft>
             </a:pPr>
             <a:r>
-              <a:rPr sz="850" b="0" i="0">
-                <a:solidFill>
-                  <a:srgbClr val="556A83"/>
-                </a:solidFill>
-                <a:latin typeface="Arial"/>
-              </a:rPr>
-              <a:t>Strictly confidential          12</a:t>
-            </a:r>
-          </a:p>
-        </p:txBody>
-      </p:sp>
-      <p:sp>
-        <p:nvSpPr>
-          <p:cNvPr id="8" name="TextBox 7"/>
-          <p:cNvSpPr txBox="1"/>
-          <p:nvPr/>
-        </p:nvSpPr>
-        <p:spPr>
-          <a:xfrm>
-            <a:off x="502920" y="1783080"/>
-            <a:ext cx="4160520" cy="5120640"/>
-          </a:xfrm>
-          <a:prstGeom prst="rect">
-            <a:avLst/>
-          </a:prstGeom>
-          <a:noFill/>
-        </p:spPr>
-        <p:txBody>
-          <a:bodyPr wrap="square" anchor="t" lIns="0" rIns="0" tIns="0" bIns="0">
-            <a:spAutoFit/>
-          </a:bodyPr>
-          <a:lstStyle/>
-          <a:p>
-            <a:pPr algn="l">
-              <a:lnSpc>
-                <a:spcPct val="110000"/>
-              </a:lnSpc>
-              <a:spcBef>
-                <a:spcPts val="0"/>
-              </a:spcBef>
-              <a:spcAft>
-                <a:spcPts val="250"/>
-              </a:spcAft>
-            </a:pPr>
-            <a:r>
-              <a:rPr sz="1100" b="1" i="0">
-                <a:solidFill>
-                  <a:srgbClr val="314359"/>
+              <a:rPr sz="3400" b="0" i="1" spc="-102">
+                <a:solidFill>
+                  <a:srgbClr val="E2E5E9"/>
                 </a:solidFill>
                 <a:latin typeface="Times New Roman"/>
               </a:rPr>
-              <a:t>Company description</a:t>
-            </a:r>
-          </a:p>
-          <a:p>
-            <a:pPr algn="l">
-              <a:lnSpc>
-                <a:spcPct val="108000"/>
-              </a:lnSpc>
-              <a:spcAft>
-                <a:spcPts val="200"/>
-              </a:spcAft>
-            </a:pPr>
-            <a:r>
-              <a:rPr sz="869" b="0" i="0">
-                <a:solidFill>
-                  <a:srgbClr val="0E1620"/>
-                </a:solidFill>
-                <a:latin typeface="Arial"/>
-              </a:rPr>
-              <a:t>Custos was a Swedish listed investment company holding a portfolio of listed companies. It traded at a significant discount to net asset value and had an inefficient capital structure.</a:t>
-            </a:r>
-          </a:p>
-          <a:p>
-            <a:pPr algn="l">
-              <a:lnSpc>
-                <a:spcPct val="110000"/>
-              </a:lnSpc>
-              <a:spcBef>
-                <a:spcPts val="700"/>
-              </a:spcBef>
-              <a:spcAft>
-                <a:spcPts val="250"/>
-              </a:spcAft>
-            </a:pPr>
-            <a:r>
-              <a:rPr sz="1100" b="1" i="0">
-                <a:solidFill>
-                  <a:srgbClr val="314359"/>
-                </a:solidFill>
-                <a:latin typeface="Times New Roman"/>
-              </a:rPr>
-              <a:t>Recognized opportunities</a:t>
-            </a:r>
-          </a:p>
-          <a:p>
-            <a:pPr marL="149162" indent="-149162">
-              <a:lnSpc>
-                <a:spcPct val="106000"/>
-              </a:lnSpc>
-              <a:spcAft>
-                <a:spcPts val="150"/>
-              </a:spcAft>
-            </a:pPr>
-            <a:r>
-              <a:rPr sz="869" b="1">
-                <a:solidFill>
-                  <a:srgbClr val="556A83"/>
-                </a:solidFill>
-                <a:latin typeface="Arial"/>
-              </a:rPr>
-              <a:t>›  </a:t>
-            </a:r>
-            <a:r>
-              <a:rPr sz="869">
-                <a:solidFill>
-                  <a:srgbClr val="0E1620"/>
-                </a:solidFill>
-                <a:latin typeface="Arial"/>
-              </a:rPr>
-              <a:t>Investment companies traded at a discount to NAV</a:t>
-            </a:r>
-          </a:p>
-          <a:p>
-            <a:pPr marL="149162" indent="-149162">
-              <a:lnSpc>
-                <a:spcPct val="106000"/>
-              </a:lnSpc>
-              <a:spcAft>
-                <a:spcPts val="150"/>
-              </a:spcAft>
-            </a:pPr>
-            <a:r>
-              <a:rPr sz="869" b="1">
-                <a:solidFill>
-                  <a:srgbClr val="556A83"/>
-                </a:solidFill>
-                <a:latin typeface="Arial"/>
-              </a:rPr>
-              <a:t>›  </a:t>
-            </a:r>
-            <a:r>
-              <a:rPr sz="869">
-                <a:solidFill>
-                  <a:srgbClr val="0E1620"/>
-                </a:solidFill>
-                <a:latin typeface="Arial"/>
-              </a:rPr>
-              <a:t>Inefficient capital structure</a:t>
-            </a:r>
-          </a:p>
-          <a:p>
-            <a:pPr marL="149162" indent="-149162">
-              <a:lnSpc>
-                <a:spcPct val="106000"/>
-              </a:lnSpc>
-              <a:spcAft>
-                <a:spcPts val="150"/>
-              </a:spcAft>
-            </a:pPr>
-            <a:r>
-              <a:rPr sz="869" b="1">
-                <a:solidFill>
-                  <a:srgbClr val="556A83"/>
-                </a:solidFill>
-                <a:latin typeface="Arial"/>
-              </a:rPr>
-              <a:t>›  </a:t>
-            </a:r>
-            <a:r>
-              <a:rPr sz="869">
-                <a:solidFill>
-                  <a:srgbClr val="0E1620"/>
-                </a:solidFill>
-                <a:latin typeface="Arial"/>
-              </a:rPr>
-              <a:t>An interesting portfolio of companies not optimally managed</a:t>
-            </a:r>
-          </a:p>
-          <a:p>
-            <a:pPr marL="149162" indent="-149162">
-              <a:lnSpc>
-                <a:spcPct val="106000"/>
-              </a:lnSpc>
-              <a:spcAft>
-                <a:spcPts val="150"/>
-              </a:spcAft>
-            </a:pPr>
-            <a:r>
-              <a:rPr sz="869" b="1">
-                <a:solidFill>
-                  <a:srgbClr val="556A83"/>
-                </a:solidFill>
-                <a:latin typeface="Arial"/>
-              </a:rPr>
-              <a:t>›  </a:t>
-            </a:r>
-            <a:r>
-              <a:rPr sz="869">
-                <a:solidFill>
-                  <a:srgbClr val="0E1620"/>
-                </a:solidFill>
-                <a:latin typeface="Arial"/>
-              </a:rPr>
-              <a:t>Opportunity to buy the underlying assets at a ~30% discount</a:t>
-            </a:r>
-          </a:p>
-          <a:p>
-            <a:pPr marL="149162" indent="-149162">
-              <a:lnSpc>
-                <a:spcPct val="106000"/>
-              </a:lnSpc>
-              <a:spcAft>
-                <a:spcPts val="150"/>
-              </a:spcAft>
-            </a:pPr>
-            <a:r>
-              <a:rPr sz="869" b="1">
-                <a:solidFill>
-                  <a:srgbClr val="556A83"/>
-                </a:solidFill>
-                <a:latin typeface="Arial"/>
-              </a:rPr>
-              <a:t>›  </a:t>
-            </a:r>
-            <a:r>
-              <a:rPr sz="869">
-                <a:solidFill>
-                  <a:srgbClr val="0E1620"/>
-                </a:solidFill>
-                <a:latin typeface="Arial"/>
-              </a:rPr>
-              <a:t>The largest shareholder, Skanska, had sold its holding in 1994</a:t>
-            </a:r>
-          </a:p>
-          <a:p>
-            <a:pPr marL="149162" indent="-149162">
-              <a:lnSpc>
-                <a:spcPct val="106000"/>
-              </a:lnSpc>
-              <a:spcAft>
-                <a:spcPts val="150"/>
-              </a:spcAft>
-            </a:pPr>
-            <a:r>
-              <a:rPr sz="869" b="1">
-                <a:solidFill>
-                  <a:srgbClr val="556A83"/>
-                </a:solidFill>
-                <a:latin typeface="Arial"/>
-              </a:rPr>
-              <a:t>›  </a:t>
-            </a:r>
-            <a:r>
-              <a:rPr sz="869">
-                <a:solidFill>
-                  <a:srgbClr val="0E1620"/>
-                </a:solidFill>
-                <a:latin typeface="Arial"/>
-              </a:rPr>
-              <a:t>The board was not focused on creating shareholder value</a:t>
-            </a:r>
-          </a:p>
-          <a:p>
-            <a:pPr algn="l">
-              <a:lnSpc>
-                <a:spcPct val="110000"/>
-              </a:lnSpc>
-              <a:spcBef>
-                <a:spcPts val="700"/>
-              </a:spcBef>
-              <a:spcAft>
-                <a:spcPts val="250"/>
-              </a:spcAft>
-            </a:pPr>
-            <a:r>
-              <a:rPr sz="1100" b="1" i="0">
-                <a:solidFill>
-                  <a:srgbClr val="314359"/>
-                </a:solidFill>
-                <a:latin typeface="Times New Roman"/>
-              </a:rPr>
-              <a:t>Initial plan</a:t>
-            </a:r>
-          </a:p>
-          <a:p>
-            <a:pPr algn="l">
-              <a:lnSpc>
-                <a:spcPct val="108000"/>
-              </a:lnSpc>
-              <a:spcAft>
-                <a:spcPts val="200"/>
-              </a:spcAft>
-            </a:pPr>
-            <a:r>
-              <a:rPr sz="869" b="0" i="0">
-                <a:solidFill>
-                  <a:srgbClr val="0E1620"/>
-                </a:solidFill>
-                <a:latin typeface="Arial"/>
-              </a:rPr>
-              <a:t>1) Increase shareholder value through extended engagement in holdings via active board management; 2) form a more heterogeneous board to enhance dialogue and decision-making; 3) reduce the discount to NAV through, if necessary, redemption of holdings/cash and synthetic buy-back programs.</a:t>
-            </a:r>
-          </a:p>
-          <a:p>
-            <a:pPr algn="l">
-              <a:lnSpc>
-                <a:spcPct val="110000"/>
-              </a:lnSpc>
-              <a:spcBef>
-                <a:spcPts val="700"/>
-              </a:spcBef>
-              <a:spcAft>
-                <a:spcPts val="250"/>
-              </a:spcAft>
-            </a:pPr>
-            <a:r>
-              <a:rPr sz="1100" b="1" i="0">
-                <a:solidFill>
-                  <a:srgbClr val="314359"/>
-                </a:solidFill>
-                <a:latin typeface="Times New Roman"/>
-              </a:rPr>
-              <a:t>Results</a:t>
-            </a:r>
-          </a:p>
-          <a:p>
-            <a:pPr marL="149162" indent="-149162">
-              <a:lnSpc>
-                <a:spcPct val="106000"/>
-              </a:lnSpc>
-              <a:spcAft>
-                <a:spcPts val="150"/>
-              </a:spcAft>
-            </a:pPr>
-            <a:r>
-              <a:rPr sz="869" b="1">
-                <a:solidFill>
-                  <a:srgbClr val="556A83"/>
-                </a:solidFill>
-                <a:latin typeface="Arial"/>
-              </a:rPr>
-              <a:t>✓  </a:t>
-            </a:r>
-            <a:r>
-              <a:rPr sz="869">
-                <a:solidFill>
-                  <a:srgbClr val="0E1620"/>
-                </a:solidFill>
-                <a:latin typeface="Arial"/>
-              </a:rPr>
-              <a:t>New board and CEO (Christer Gardell); active ownership reduced the NAV discount</a:t>
-            </a:r>
-          </a:p>
-          <a:p>
-            <a:pPr marL="149162" indent="-149162">
-              <a:lnSpc>
-                <a:spcPct val="106000"/>
-              </a:lnSpc>
-              <a:spcAft>
-                <a:spcPts val="150"/>
-              </a:spcAft>
-            </a:pPr>
-            <a:r>
-              <a:rPr sz="869" b="1">
-                <a:solidFill>
-                  <a:srgbClr val="556A83"/>
-                </a:solidFill>
-                <a:latin typeface="Arial"/>
-              </a:rPr>
-              <a:t>✓  </a:t>
-            </a:r>
-            <a:r>
-              <a:rPr sz="869">
-                <a:solidFill>
-                  <a:srgbClr val="0E1620"/>
-                </a:solidFill>
-                <a:latin typeface="Arial"/>
-              </a:rPr>
-              <a:t>Distributed Hufvudstaden to shareholders; sold ASG to Deutsche Post</a:t>
-            </a:r>
-          </a:p>
-          <a:p>
-            <a:pPr marL="149162" indent="-149162">
-              <a:lnSpc>
-                <a:spcPct val="106000"/>
-              </a:lnSpc>
-              <a:spcAft>
-                <a:spcPts val="150"/>
-              </a:spcAft>
-            </a:pPr>
-            <a:r>
-              <a:rPr sz="869" b="1">
-                <a:solidFill>
-                  <a:srgbClr val="556A83"/>
-                </a:solidFill>
-                <a:latin typeface="Arial"/>
-              </a:rPr>
-              <a:t>✓  </a:t>
-            </a:r>
-            <a:r>
-              <a:rPr sz="869">
-                <a:solidFill>
-                  <a:srgbClr val="0E1620"/>
-                </a:solidFill>
-                <a:latin typeface="Arial"/>
-              </a:rPr>
-              <a:t>Founded Acando; synthetic buy-back distributing SEK 1.6bn</a:t>
-            </a:r>
-          </a:p>
-          <a:p>
-            <a:pPr marL="149162" indent="-149162">
-              <a:lnSpc>
-                <a:spcPct val="106000"/>
-              </a:lnSpc>
-              <a:spcAft>
-                <a:spcPts val="150"/>
-              </a:spcAft>
-            </a:pPr>
-            <a:r>
-              <a:rPr sz="869" b="1">
-                <a:solidFill>
-                  <a:srgbClr val="556A83"/>
-                </a:solidFill>
-                <a:latin typeface="Arial"/>
-              </a:rPr>
-              <a:t>✓  </a:t>
-            </a:r>
-            <a:r>
-              <a:rPr sz="869">
-                <a:solidFill>
-                  <a:srgbClr val="0E1620"/>
-                </a:solidFill>
-                <a:latin typeface="Arial"/>
-              </a:rPr>
-              <a:t>~SEK 3.5bn distributed via buy-back and the distribution of SCA</a:t>
-            </a:r>
-          </a:p>
-          <a:p>
-            <a:pPr marL="149162" indent="-149162">
-              <a:lnSpc>
-                <a:spcPct val="106000"/>
-              </a:lnSpc>
-              <a:spcAft>
-                <a:spcPts val="150"/>
-              </a:spcAft>
-            </a:pPr>
-            <a:r>
-              <a:rPr sz="869" b="1">
-                <a:solidFill>
-                  <a:srgbClr val="556A83"/>
-                </a:solidFill>
-                <a:latin typeface="Arial"/>
-              </a:rPr>
-              <a:t>✓  </a:t>
-            </a:r>
-            <a:r>
-              <a:rPr sz="869">
-                <a:solidFill>
-                  <a:srgbClr val="0E1620"/>
-                </a:solidFill>
-                <a:latin typeface="Arial"/>
-              </a:rPr>
-              <a:t>Bilia and Acando distributed to shareholders</a:t>
-            </a:r>
-          </a:p>
-          <a:p>
-            <a:pPr marL="149162" indent="-149162">
-              <a:lnSpc>
-                <a:spcPct val="106000"/>
-              </a:lnSpc>
-              <a:spcAft>
-                <a:spcPts val="150"/>
-              </a:spcAft>
-            </a:pPr>
-            <a:r>
-              <a:rPr sz="869" b="1">
-                <a:solidFill>
-                  <a:srgbClr val="556A83"/>
-                </a:solidFill>
-                <a:latin typeface="Arial"/>
-              </a:rPr>
-              <a:t>✓  </a:t>
-            </a:r>
-            <a:r>
-              <a:rPr sz="869">
-                <a:solidFill>
-                  <a:srgbClr val="0E1620"/>
-                </a:solidFill>
-                <a:latin typeface="Arial"/>
-              </a:rPr>
-              <a:t>Custos ultimately merged with Öresund</a:t>
-            </a:r>
-          </a:p>
-        </p:txBody>
-      </p:sp>
-      <p:sp>
-        <p:nvSpPr>
-          <p:cNvPr id="9" name="Rounded Rectangle 8"/>
-          <p:cNvSpPr/>
-          <p:nvPr/>
-        </p:nvSpPr>
-        <p:spPr>
-          <a:xfrm>
-            <a:off x="4983480" y="1783080"/>
-            <a:ext cx="4297680" cy="384048"/>
-          </a:xfrm>
-          <a:prstGeom prst="roundRect">
-            <a:avLst/>
-          </a:prstGeom>
-          <a:solidFill>
-            <a:srgbClr val="F6F7F9"/>
-          </a:solidFill>
-          <a:ln>
-            <a:noFill/>
-          </a:ln>
-          <a:effectLst/>
-        </p:spPr>
-        <p:txBody>
-          <a:bodyPr rtlCol="0" anchor="ctr"/>
-          <a:lstStyle/>
-          <a:p>
-            <a:pPr algn="ctr"/>
-          </a:p>
-        </p:txBody>
-      </p:sp>
-      <p:sp>
-        <p:nvSpPr>
-          <p:cNvPr id="10" name="TextBox 9"/>
-          <p:cNvSpPr txBox="1"/>
-          <p:nvPr/>
-        </p:nvSpPr>
-        <p:spPr>
-          <a:xfrm>
-            <a:off x="4983480" y="1783080"/>
-            <a:ext cx="4297680" cy="384048"/>
-          </a:xfrm>
-          <a:prstGeom prst="rect">
-            <a:avLst/>
-          </a:prstGeom>
-          <a:noFill/>
-        </p:spPr>
-        <p:txBody>
-          <a:bodyPr wrap="square" anchor="ctr" lIns="0" rIns="0" tIns="0" bIns="0">
-            <a:spAutoFit/>
-          </a:bodyPr>
-          <a:lstStyle/>
-          <a:p>
-            <a:pPr algn="ctr">
-              <a:lnSpc>
-                <a:spcPct val="110000"/>
-              </a:lnSpc>
-              <a:spcAft>
-                <a:spcPts val="0"/>
-              </a:spcAft>
-            </a:pPr>
-            <a:r>
-              <a:rPr sz="1250" b="1" i="0">
-                <a:solidFill>
-                  <a:srgbClr val="314359"/>
-                </a:solidFill>
-                <a:latin typeface="Times New Roman"/>
-              </a:rPr>
-              <a:t>IRR 58.9% · 2000–2004</a:t>
-            </a:r>
-          </a:p>
-        </p:txBody>
-      </p:sp>
-      <p:pic>
-        <p:nvPicPr>
-          <p:cNvPr id="11" name="Picture 10" descr="custos_line.png"/>
-          <p:cNvPicPr>
-            <a:picLocks noChangeAspect="1"/>
-          </p:cNvPicPr>
-          <p:nvPr/>
-        </p:nvPicPr>
-        <p:blipFill>
-          <a:blip r:embed="rId3"/>
-          <a:stretch>
-            <a:fillRect/>
-          </a:stretch>
-        </p:blipFill>
-        <p:spPr>
-          <a:xfrm>
-            <a:off x="4983480" y="2276856"/>
-            <a:ext cx="4297680" cy="2479862"/>
-          </a:xfrm>
-          <a:prstGeom prst="rect">
-            <a:avLst/>
-          </a:prstGeom>
-        </p:spPr>
-      </p:pic>
-      <p:sp>
-        <p:nvSpPr>
-          <p:cNvPr id="12" name="TextBox 11"/>
-          <p:cNvSpPr txBox="1"/>
-          <p:nvPr/>
-        </p:nvSpPr>
-        <p:spPr>
-          <a:xfrm>
-            <a:off x="4983480" y="4848158"/>
-            <a:ext cx="4297680" cy="457200"/>
-          </a:xfrm>
-          <a:prstGeom prst="rect">
-            <a:avLst/>
-          </a:prstGeom>
-          <a:noFill/>
-        </p:spPr>
-        <p:txBody>
-          <a:bodyPr wrap="square" anchor="t" lIns="0" rIns="0" tIns="0" bIns="0">
-            <a:spAutoFit/>
-          </a:bodyPr>
-          <a:lstStyle/>
-          <a:p>
-            <a:pPr algn="ctr">
-              <a:lnSpc>
-                <a:spcPct val="110000"/>
-              </a:lnSpc>
-              <a:spcAft>
-                <a:spcPts val="0"/>
-              </a:spcAft>
-            </a:pPr>
-            <a:r>
-              <a:rPr sz="1200" b="1" i="0">
-                <a:solidFill>
-                  <a:srgbClr val="314359"/>
-                </a:solidFill>
-                <a:latin typeface="Times New Roman"/>
-              </a:rPr>
-              <a:t>≈ SEK 11bn of shareholder value created over nine years</a:t>
-            </a:r>
-          </a:p>
-        </p:txBody>
-      </p:sp>
-      <p:sp>
-        <p:nvSpPr>
-          <p:cNvPr id="13" name="TextBox 12"/>
-          <p:cNvSpPr txBox="1"/>
-          <p:nvPr/>
-        </p:nvSpPr>
-        <p:spPr>
-          <a:xfrm>
-            <a:off x="502920" y="6967728"/>
-            <a:ext cx="4846320" cy="274320"/>
-          </a:xfrm>
-          <a:prstGeom prst="rect">
-            <a:avLst/>
-          </a:prstGeom>
-          <a:noFill/>
-        </p:spPr>
-        <p:txBody>
-          <a:bodyPr wrap="square" anchor="t" lIns="0" rIns="0" tIns="0" bIns="0">
-            <a:spAutoFit/>
-          </a:bodyPr>
-          <a:lstStyle/>
-          <a:p>
-            <a:pPr algn="l">
-              <a:lnSpc>
-                <a:spcPct val="100000"/>
-              </a:lnSpc>
-              <a:spcAft>
-                <a:spcPts val="0"/>
-              </a:spcAft>
-            </a:pPr>
-            <a:r>
-              <a:rPr sz="750" b="0" i="1">
-                <a:solidFill>
-                  <a:srgbClr val="556A83"/>
-                </a:solidFill>
-                <a:latin typeface="Arial"/>
-              </a:rPr>
-              <a:t>Note: 9 SEK ≈ 1€. IRR unleveraged and net of all costs. Executed by members of the team at Investment AB Öresund.</a:t>
+              <a:t>Earlier track record</a:t>
             </a:r>
           </a:p>
         </p:txBody>
@@ -7907,7 +8142,7 @@
                 </a:solidFill>
                 <a:latin typeface="Times New Roman"/>
               </a:rPr>
-              <a:t>Investment case study: Johnson Pump</a:t>
+              <a:t>Investment case study: Custos</a:t>
             </a:r>
           </a:p>
         </p:txBody>
@@ -8013,7 +8248,7 @@
                 </a:solidFill>
                 <a:latin typeface="Arial"/>
               </a:rPr>
-              <a:t>Johnson Pump was a traditional industrial business — a pump OEM with an extensive sales force and a strong brand. It had suffered profitability issues but had started to recover, with revenues of SEK 647m and a negative EBIT.</a:t>
+              <a:t>Custos was a Swedish listed investment company holding a portfolio of listed companies. It traded at a significant discount to net asset value and had an inefficient capital structure.</a:t>
             </a:r>
           </a:p>
           <a:p>
@@ -8063,7 +8298,7 @@
                 </a:solidFill>
                 <a:latin typeface="Arial"/>
               </a:rPr>
-              <a:t>Low profitability was largely a cost issue — customers kept buying and the gross margin was decent</a:t>
+              <a:t>Investment companies traded at a discount to NAV</a:t>
             </a:r>
           </a:p>
           <a:p>
@@ -8091,7 +8326,7 @@
                 </a:solidFill>
                 <a:latin typeface="Arial"/>
               </a:rPr>
-              <a:t>Significant upside on cost in both factories and sales offices</a:t>
+              <a:t>Inefficient capital structure</a:t>
             </a:r>
           </a:p>
           <a:p>
@@ -8119,7 +8354,7 @@
                 </a:solidFill>
                 <a:latin typeface="Arial"/>
               </a:rPr>
-              <a:t>The sales force could be leveraged with a wider product range (R&amp;D, 3rd-party products, M&amp;A)</a:t>
+              <a:t>An interesting portfolio of companies not optimally managed</a:t>
             </a:r>
           </a:p>
           <a:p>
@@ -8147,7 +8382,7 @@
                 </a:solidFill>
                 <a:latin typeface="Arial"/>
               </a:rPr>
-              <a:t>Market segmentation should reveal further niche potential</a:t>
+              <a:t>Opportunity to buy the underlying assets at a ~30% discount</a:t>
             </a:r>
           </a:p>
           <a:p>
@@ -8175,7 +8410,35 @@
                 </a:solidFill>
                 <a:latin typeface="Arial"/>
               </a:rPr>
-              <a:t>Geographic expansion to follow customers moving to low-cost countries</a:t>
+              <a:t>The largest shareholder, Skanska, had sold its holding in 1994</a:t>
+            </a:r>
+          </a:p>
+          <a:p>
+            <a:pPr marL="149162" indent="-149162">
+              <a:lnSpc>
+                <a:spcPct val="106000"/>
+              </a:lnSpc>
+              <a:spcAft>
+                <a:spcPts val="150"/>
+              </a:spcAft>
+            </a:pPr>
+            <a:r>
+              <a:rPr sz="869" b="1">
+                <a:solidFill>
+                  <a:srgbClr val="556A83"/>
+                </a:solidFill>
+                <a:latin typeface="Arial"/>
+              </a:rPr>
+              <a:t>›  </a:t>
+            </a:r>
+            <a:r>
+              <a:rPr sz="869">
+                <a:solidFill>
+                  <a:srgbClr val="0E1620"/>
+                </a:solidFill>
+                <a:latin typeface="Arial"/>
+              </a:rPr>
+              <a:t>The board was not focused on creating shareholder value</a:t>
             </a:r>
           </a:p>
           <a:p>
@@ -8216,7 +8479,7 @@
                 </a:solidFill>
                 <a:latin typeface="Arial"/>
               </a:rPr>
-              <a:t>Reduce costs in factories and sales offices, build a uniform sales process and a simplified product range, expand the range and geography, and grow in adjacencies through M&amp;A.</a:t>
+              <a:t>1) Increase shareholder value through extended engagement in holdings via active board management; 2) form a more heterogeneous board to enhance dialogue and decision-making; 3) reduce the discount to NAV through, if necessary, redemption of holdings/cash and synthetic buy-back programs.</a:t>
             </a:r>
           </a:p>
           <a:p>
@@ -8266,7 +8529,7 @@
                 </a:solidFill>
                 <a:latin typeface="Arial"/>
               </a:rPr>
-              <a:t>New ERP system (2002); component manufacturing moved to India (2003)</a:t>
+              <a:t>New board and CEO (Christer Gardell); active ownership reduced the NAV discount</a:t>
             </a:r>
           </a:p>
           <a:p>
@@ -8294,7 +8557,7 @@
                 </a:solidFill>
                 <a:latin typeface="Arial"/>
               </a:rPr>
-              <a:t>Restructured Dutch operations and centralised sourcing (2004–05)</a:t>
+              <a:t>Distributed Hufvudstaden to shareholders; sold ASG to Deutsche Post</a:t>
             </a:r>
           </a:p>
           <a:p>
@@ -8322,7 +8585,7 @@
                 </a:solidFill>
                 <a:latin typeface="Arial"/>
               </a:rPr>
-              <a:t>New CEO Stefan Charette (2006); separated Marine, acquired Tigerholm, launched an export organisation</a:t>
+              <a:t>Founded Acando; synthetic buy-back distributing SEK 1.6bn</a:t>
             </a:r>
           </a:p>
           <a:p>
@@ -8350,7 +8613,7 @@
                 </a:solidFill>
                 <a:latin typeface="Arial"/>
               </a:rPr>
-              <a:t>Revenues +~17%; SG&amp;A −~18%; operating result +~SEK 62m (−15m to +47m)</a:t>
+              <a:t>~SEK 3.5bn distributed via buy-back and the distribution of SCA</a:t>
             </a:r>
           </a:p>
           <a:p>
@@ -8378,7 +8641,35 @@
                 </a:solidFill>
                 <a:latin typeface="Arial"/>
               </a:rPr>
-              <a:t>SPX Corporation public offer accepted by &gt;90% of shareholders; delisted</a:t>
+              <a:t>Bilia and Acando distributed to shareholders</a:t>
+            </a:r>
+          </a:p>
+          <a:p>
+            <a:pPr marL="149162" indent="-149162">
+              <a:lnSpc>
+                <a:spcPct val="106000"/>
+              </a:lnSpc>
+              <a:spcAft>
+                <a:spcPts val="150"/>
+              </a:spcAft>
+            </a:pPr>
+            <a:r>
+              <a:rPr sz="869" b="1">
+                <a:solidFill>
+                  <a:srgbClr val="556A83"/>
+                </a:solidFill>
+                <a:latin typeface="Arial"/>
+              </a:rPr>
+              <a:t>✓  </a:t>
+            </a:r>
+            <a:r>
+              <a:rPr sz="869">
+                <a:solidFill>
+                  <a:srgbClr val="0E1620"/>
+                </a:solidFill>
+                <a:latin typeface="Arial"/>
+              </a:rPr>
+              <a:t>Custos ultimately merged with Öresund</a:t>
             </a:r>
           </a:p>
         </p:txBody>
@@ -8450,14 +8741,14 @@
                 </a:solidFill>
                 <a:latin typeface="Times New Roman"/>
               </a:rPr>
-              <a:t>IRR 34.4% · 2002–2006</a:t>
+              <a:t>IRR 58.9% · 2000–2004</a:t>
             </a:r>
           </a:p>
         </p:txBody>
       </p:sp>
       <p:pic>
         <p:nvPicPr>
-          <p:cNvPr id="11" name="Picture 10" descr="jp_line.png"/>
+          <p:cNvPr id="11" name="Picture 10" descr="custos_line.png"/>
           <p:cNvPicPr>
             <a:picLocks noChangeAspect="1"/>
           </p:cNvPicPr>
@@ -8482,6 +8773,48 @@
       <p:sp>
         <p:nvSpPr>
           <p:cNvPr id="12" name="TextBox 11"/>
+          <p:cNvSpPr txBox="1"/>
+          <p:nvPr/>
+        </p:nvSpPr>
+        <p:spPr>
+          <a:xfrm>
+            <a:off x="4983480" y="4848158"/>
+            <a:ext cx="4297680" cy="457200"/>
+          </a:xfrm>
+          <a:prstGeom prst="rect">
+            <a:avLst/>
+          </a:prstGeom>
+          <a:noFill/>
+        </p:spPr>
+        <p:txBody>
+          <a:bodyPr wrap="square" anchor="t" lIns="0" rIns="0" tIns="0" bIns="0">
+            <a:spAutoFit/>
+          </a:bodyPr>
+          <a:lstStyle/>
+          <a:p>
+            <a:pPr algn="ctr">
+              <a:lnSpc>
+                <a:spcPct val="110000"/>
+              </a:lnSpc>
+              <a:spcAft>
+                <a:spcPts val="0"/>
+              </a:spcAft>
+            </a:pPr>
+            <a:r>
+              <a:rPr sz="1200" b="1" i="0">
+                <a:solidFill>
+                  <a:srgbClr val="314359"/>
+                </a:solidFill>
+                <a:latin typeface="Times New Roman"/>
+              </a:rPr>
+              <a:t>≈ SEK 11bn of shareholder value created over nine years</a:t>
+            </a:r>
+          </a:p>
+        </p:txBody>
+      </p:sp>
+      <p:sp>
+        <p:nvSpPr>
+          <p:cNvPr id="13" name="TextBox 12"/>
           <p:cNvSpPr txBox="1"/>
           <p:nvPr/>
         </p:nvSpPr>
@@ -8702,7 +9035,7 @@
                 </a:solidFill>
                 <a:latin typeface="Times New Roman"/>
               </a:rPr>
-              <a:t>Investment case study: Wihlborgs / Drott</a:t>
+              <a:t>Investment case study: Johnson Pump</a:t>
             </a:r>
           </a:p>
         </p:txBody>
@@ -8808,7 +9141,7 @@
                 </a:solidFill>
                 <a:latin typeface="Arial"/>
               </a:rPr>
-              <a:t>Wihlborgs and Drott were Swedish listed real-estate companies holding commercial and residential properties in the growing Stockholm and Malmö regions, trading at a discount to NAV with no active owner.</a:t>
+              <a:t>Johnson Pump was a traditional industrial business — a pump OEM with an extensive sales force and a strong brand. It had suffered profitability issues but had started to recover, with revenues of SEK 647m and a negative EBIT.</a:t>
             </a:r>
           </a:p>
           <a:p>
@@ -8858,7 +9191,7 @@
                 </a:solidFill>
                 <a:latin typeface="Arial"/>
               </a:rPr>
-              <a:t>Shares traded at a discount to NAV for real-estate companies</a:t>
+              <a:t>Low profitability was largely a cost issue — customers kept buying and the gross margin was decent</a:t>
             </a:r>
           </a:p>
           <a:p>
@@ -8886,7 +9219,7 @@
                 </a:solidFill>
                 <a:latin typeface="Arial"/>
               </a:rPr>
-              <a:t>Hidden values in both Wihlborgs and Drott</a:t>
+              <a:t>Significant upside on cost in both factories and sales offices</a:t>
             </a:r>
           </a:p>
           <a:p>
@@ -8914,7 +9247,7 @@
                 </a:solidFill>
                 <a:latin typeface="Arial"/>
               </a:rPr>
-              <a:t>Limited active ownership; inefficient debt/capital structure</a:t>
+              <a:t>The sales force could be leveraged with a wider product range (R&amp;D, 3rd-party products, M&amp;A)</a:t>
             </a:r>
           </a:p>
           <a:p>
@@ -8942,7 +9275,7 @@
                 </a:solidFill>
                 <a:latin typeface="Arial"/>
               </a:rPr>
-              <a:t>Limited synergies between commercial and residential — divest</a:t>
+              <a:t>Market segmentation should reveal further niche potential</a:t>
             </a:r>
           </a:p>
           <a:p>
@@ -8970,35 +9303,7 @@
                 </a:solidFill>
                 <a:latin typeface="Arial"/>
               </a:rPr>
-              <a:t>Inefficient organisations</a:t>
-            </a:r>
-          </a:p>
-          <a:p>
-            <a:pPr marL="149162" indent="-149162">
-              <a:lnSpc>
-                <a:spcPct val="106000"/>
-              </a:lnSpc>
-              <a:spcAft>
-                <a:spcPts val="150"/>
-              </a:spcAft>
-            </a:pPr>
-            <a:r>
-              <a:rPr sz="869" b="1">
-                <a:solidFill>
-                  <a:srgbClr val="556A83"/>
-                </a:solidFill>
-                <a:latin typeface="Arial"/>
-              </a:rPr>
-              <a:t>›  </a:t>
-            </a:r>
-            <a:r>
-              <a:rPr sz="869">
-                <a:solidFill>
-                  <a:srgbClr val="0E1620"/>
-                </a:solidFill>
-                <a:latin typeface="Arial"/>
-              </a:rPr>
-              <a:t>Property-investment funds were pushing prices upwards</a:t>
+              <a:t>Geographic expansion to follow customers moving to low-cost countries</a:t>
             </a:r>
           </a:p>
           <a:p>
@@ -9039,7 +9344,7 @@
                 </a:solidFill>
                 <a:latin typeface="Arial"/>
               </a:rPr>
-              <a:t>Divest properties and reduce costs to enable cash distribution; split commercial and residential into separate companies — one for the Öresund/Malmö region and one for Stockholm; refinance to lower the cost of debt.</a:t>
+              <a:t>Reduce costs in factories and sales offices, build a uniform sales process and a simplified product range, expand the range and geography, and grow in adjacencies through M&amp;A.</a:t>
             </a:r>
           </a:p>
           <a:p>
@@ -9089,7 +9394,7 @@
                 </a:solidFill>
                 <a:latin typeface="Arial"/>
               </a:rPr>
-              <a:t>Öresund acquired 12% of Wihlborgs (2001); new board members joined</a:t>
+              <a:t>New ERP system (2002); component manufacturing moved to India (2003)</a:t>
             </a:r>
           </a:p>
           <a:p>
@@ -9117,7 +9422,7 @@
                 </a:solidFill>
                 <a:latin typeface="Arial"/>
               </a:rPr>
-              <a:t>Wihlborgs built a ~10% position in Drott; a new board was elected</a:t>
+              <a:t>Restructured Dutch operations and centralised sourcing (2004–05)</a:t>
             </a:r>
           </a:p>
           <a:p>
@@ -9145,7 +9450,7 @@
                 </a:solidFill>
                 <a:latin typeface="Arial"/>
               </a:rPr>
-              <a:t>New management plan with ~SEK 85m of yearly savings</a:t>
+              <a:t>New CEO Stefan Charette (2006); separated Marine, acquired Tigerholm, launched an export organisation</a:t>
             </a:r>
           </a:p>
           <a:p>
@@ -9173,7 +9478,7 @@
                 </a:solidFill>
                 <a:latin typeface="Arial"/>
               </a:rPr>
-              <a:t>Several properties divested — SEK 3.3bn cash redemption (2004)</a:t>
+              <a:t>Revenues +~17%; SG&amp;A −~18%; operating result +~SEK 62m (−15m to +47m)</a:t>
             </a:r>
           </a:p>
           <a:p>
@@ -9201,35 +9506,7 @@
                 </a:solidFill>
                 <a:latin typeface="Arial"/>
               </a:rPr>
-              <a:t>Drott split into BAB Drott (residential, sold to Stena) and Fabege (commercial, acquired by Wihlborgs)</a:t>
-            </a:r>
-          </a:p>
-          <a:p>
-            <a:pPr marL="149162" indent="-149162">
-              <a:lnSpc>
-                <a:spcPct val="106000"/>
-              </a:lnSpc>
-              <a:spcAft>
-                <a:spcPts val="150"/>
-              </a:spcAft>
-            </a:pPr>
-            <a:r>
-              <a:rPr sz="869" b="1">
-                <a:solidFill>
-                  <a:srgbClr val="556A83"/>
-                </a:solidFill>
-                <a:latin typeface="Arial"/>
-              </a:rPr>
-              <a:t>✓  </a:t>
-            </a:r>
-            <a:r>
-              <a:rPr sz="869">
-                <a:solidFill>
-                  <a:srgbClr val="0E1620"/>
-                </a:solidFill>
-                <a:latin typeface="Arial"/>
-              </a:rPr>
-              <a:t>Combined operations later split into two regional companies</a:t>
+              <a:t>SPX Corporation public offer accepted by &gt;90% of shareholders; delisted</a:t>
             </a:r>
           </a:p>
         </p:txBody>
@@ -9301,14 +9578,14 @@
                 </a:solidFill>
                 <a:latin typeface="Times New Roman"/>
               </a:rPr>
-              <a:t>IRR 31.0% · 2002–2004</a:t>
+              <a:t>IRR 34.4% · 2002–2006</a:t>
             </a:r>
           </a:p>
         </p:txBody>
       </p:sp>
       <p:pic>
         <p:nvPicPr>
-          <p:cNvPr id="11" name="Picture 10" descr="drott_line.png"/>
+          <p:cNvPr id="11" name="Picture 10" descr="jp_line.png"/>
           <p:cNvPicPr>
             <a:picLocks noChangeAspect="1"/>
           </p:cNvPicPr>
@@ -9333,48 +9610,6 @@
       <p:sp>
         <p:nvSpPr>
           <p:cNvPr id="12" name="TextBox 11"/>
-          <p:cNvSpPr txBox="1"/>
-          <p:nvPr/>
-        </p:nvSpPr>
-        <p:spPr>
-          <a:xfrm>
-            <a:off x="4983480" y="4848158"/>
-            <a:ext cx="4297680" cy="457200"/>
-          </a:xfrm>
-          <a:prstGeom prst="rect">
-            <a:avLst/>
-          </a:prstGeom>
-          <a:noFill/>
-        </p:spPr>
-        <p:txBody>
-          <a:bodyPr wrap="square" anchor="t" lIns="0" rIns="0" tIns="0" bIns="0">
-            <a:spAutoFit/>
-          </a:bodyPr>
-          <a:lstStyle/>
-          <a:p>
-            <a:pPr algn="ctr">
-              <a:lnSpc>
-                <a:spcPct val="110000"/>
-              </a:lnSpc>
-              <a:spcAft>
-                <a:spcPts val="0"/>
-              </a:spcAft>
-            </a:pPr>
-            <a:r>
-              <a:rPr sz="1200" b="1" i="0">
-                <a:solidFill>
-                  <a:srgbClr val="314359"/>
-                </a:solidFill>
-                <a:latin typeface="Times New Roman"/>
-              </a:rPr>
-              <a:t>≈ SEK 3bn of net value created in 15 months</a:t>
-            </a:r>
-          </a:p>
-        </p:txBody>
-      </p:sp>
-      <p:sp>
-        <p:nvSpPr>
-          <p:cNvPr id="13" name="TextBox 12"/>
           <p:cNvSpPr txBox="1"/>
           <p:nvPr/>
         </p:nvSpPr>
@@ -9595,7 +9830,7 @@
                 </a:solidFill>
                 <a:latin typeface="Times New Roman"/>
               </a:rPr>
-              <a:t>Investment case study: J&amp;W</a:t>
+              <a:t>Investment case study: Wihlborgs / Drott</a:t>
             </a:r>
           </a:p>
         </p:txBody>
@@ -9701,7 +9936,7 @@
                 </a:solidFill>
                 <a:latin typeface="Arial"/>
               </a:rPr>
-              <a:t>J&amp;W (Jacobson &amp; Widmark) was a Swedish technical-consulting firm. Öresund first invested in 1994 and took a controlling interest in 2000.</a:t>
+              <a:t>Wihlborgs and Drott were Swedish listed real-estate companies holding commercial and residential properties in the growing Stockholm and Malmö regions, trading at a discount to NAV with no active owner.</a:t>
             </a:r>
           </a:p>
           <a:p>
@@ -9751,7 +9986,7 @@
                 </a:solidFill>
                 <a:latin typeface="Arial"/>
               </a:rPr>
-              <a:t>Over-funded pension plans — cash to be returned from the SPP pension trust (now Alecta)</a:t>
+              <a:t>Shares traded at a discount to NAV for real-estate companies</a:t>
             </a:r>
           </a:p>
           <a:p>
@@ -9779,7 +10014,7 @@
                 </a:solidFill>
                 <a:latin typeface="Arial"/>
               </a:rPr>
-              <a:t>A fragmented consulting market with consolidation potential</a:t>
+              <a:t>Hidden values in both Wihlborgs and Drott</a:t>
             </a:r>
           </a:p>
           <a:p>
@@ -9807,7 +10042,91 @@
                 </a:solidFill>
                 <a:latin typeface="Arial"/>
               </a:rPr>
-              <a:t>A non-core subsidiary (Benima Ferator) that could be divested</a:t>
+              <a:t>Limited active ownership; inefficient debt/capital structure</a:t>
+            </a:r>
+          </a:p>
+          <a:p>
+            <a:pPr marL="149162" indent="-149162">
+              <a:lnSpc>
+                <a:spcPct val="106000"/>
+              </a:lnSpc>
+              <a:spcAft>
+                <a:spcPts val="150"/>
+              </a:spcAft>
+            </a:pPr>
+            <a:r>
+              <a:rPr sz="869" b="1">
+                <a:solidFill>
+                  <a:srgbClr val="556A83"/>
+                </a:solidFill>
+                <a:latin typeface="Arial"/>
+              </a:rPr>
+              <a:t>›  </a:t>
+            </a:r>
+            <a:r>
+              <a:rPr sz="869">
+                <a:solidFill>
+                  <a:srgbClr val="0E1620"/>
+                </a:solidFill>
+                <a:latin typeface="Arial"/>
+              </a:rPr>
+              <a:t>Limited synergies between commercial and residential — divest</a:t>
+            </a:r>
+          </a:p>
+          <a:p>
+            <a:pPr marL="149162" indent="-149162">
+              <a:lnSpc>
+                <a:spcPct val="106000"/>
+              </a:lnSpc>
+              <a:spcAft>
+                <a:spcPts val="150"/>
+              </a:spcAft>
+            </a:pPr>
+            <a:r>
+              <a:rPr sz="869" b="1">
+                <a:solidFill>
+                  <a:srgbClr val="556A83"/>
+                </a:solidFill>
+                <a:latin typeface="Arial"/>
+              </a:rPr>
+              <a:t>›  </a:t>
+            </a:r>
+            <a:r>
+              <a:rPr sz="869">
+                <a:solidFill>
+                  <a:srgbClr val="0E1620"/>
+                </a:solidFill>
+                <a:latin typeface="Arial"/>
+              </a:rPr>
+              <a:t>Inefficient organisations</a:t>
+            </a:r>
+          </a:p>
+          <a:p>
+            <a:pPr marL="149162" indent="-149162">
+              <a:lnSpc>
+                <a:spcPct val="106000"/>
+              </a:lnSpc>
+              <a:spcAft>
+                <a:spcPts val="150"/>
+              </a:spcAft>
+            </a:pPr>
+            <a:r>
+              <a:rPr sz="869" b="1">
+                <a:solidFill>
+                  <a:srgbClr val="556A83"/>
+                </a:solidFill>
+                <a:latin typeface="Arial"/>
+              </a:rPr>
+              <a:t>›  </a:t>
+            </a:r>
+            <a:r>
+              <a:rPr sz="869">
+                <a:solidFill>
+                  <a:srgbClr val="0E1620"/>
+                </a:solidFill>
+                <a:latin typeface="Arial"/>
+              </a:rPr>
+              <a:t>Property-investment funds were pushing prices upwards</a:t>
             </a:r>
           </a:p>
           <a:p>
@@ -9848,7 +10167,7 @@
                 </a:solidFill>
                 <a:latin typeface="Arial"/>
               </a:rPr>
-              <a:t>Return excess cash to shareholders, divest non-core operations, and consolidate the fragmented technical-consulting market through acquisitions.</a:t>
+              <a:t>Divest properties and reduce costs to enable cash distribution; split commercial and residential into separate companies — one for the Öresund/Malmö region and one for Stockholm; refinance to lower the cost of debt.</a:t>
             </a:r>
           </a:p>
           <a:p>
@@ -9898,7 +10217,7 @@
                 </a:solidFill>
                 <a:latin typeface="Arial"/>
               </a:rPr>
-              <a:t>Spun off Benima Ferator to shareholders (later acquired by Sigma)</a:t>
+              <a:t>Öresund acquired 12% of Wihlborgs (2001); new board members joined</a:t>
             </a:r>
           </a:p>
           <a:p>
@@ -9926,7 +10245,7 @@
                 </a:solidFill>
                 <a:latin typeface="Arial"/>
               </a:rPr>
-              <a:t>Transferred SPP pension-plan cash to shareholders</a:t>
+              <a:t>Wihlborgs built a ~10% position in Drott; a new board was elected</a:t>
             </a:r>
           </a:p>
           <a:p>
@@ -9954,7 +10273,7 @@
                 </a:solidFill>
                 <a:latin typeface="Arial"/>
               </a:rPr>
-              <a:t>Acquired several smaller competitors and the larger Kjessler &amp; Mannerstråle (KM)</a:t>
+              <a:t>New management plan with ~SEK 85m of yearly savings</a:t>
             </a:r>
           </a:p>
           <a:p>
@@ -9982,7 +10301,63 @@
                 </a:solidFill>
                 <a:latin typeface="Arial"/>
               </a:rPr>
-              <a:t>J&amp;W was subsequently sold to WSP</a:t>
+              <a:t>Several properties divested — SEK 3.3bn cash redemption (2004)</a:t>
+            </a:r>
+          </a:p>
+          <a:p>
+            <a:pPr marL="149162" indent="-149162">
+              <a:lnSpc>
+                <a:spcPct val="106000"/>
+              </a:lnSpc>
+              <a:spcAft>
+                <a:spcPts val="150"/>
+              </a:spcAft>
+            </a:pPr>
+            <a:r>
+              <a:rPr sz="869" b="1">
+                <a:solidFill>
+                  <a:srgbClr val="556A83"/>
+                </a:solidFill>
+                <a:latin typeface="Arial"/>
+              </a:rPr>
+              <a:t>✓  </a:t>
+            </a:r>
+            <a:r>
+              <a:rPr sz="869">
+                <a:solidFill>
+                  <a:srgbClr val="0E1620"/>
+                </a:solidFill>
+                <a:latin typeface="Arial"/>
+              </a:rPr>
+              <a:t>Drott split into BAB Drott (residential, sold to Stena) and Fabege (commercial, acquired by Wihlborgs)</a:t>
+            </a:r>
+          </a:p>
+          <a:p>
+            <a:pPr marL="149162" indent="-149162">
+              <a:lnSpc>
+                <a:spcPct val="106000"/>
+              </a:lnSpc>
+              <a:spcAft>
+                <a:spcPts val="150"/>
+              </a:spcAft>
+            </a:pPr>
+            <a:r>
+              <a:rPr sz="869" b="1">
+                <a:solidFill>
+                  <a:srgbClr val="556A83"/>
+                </a:solidFill>
+                <a:latin typeface="Arial"/>
+              </a:rPr>
+              <a:t>✓  </a:t>
+            </a:r>
+            <a:r>
+              <a:rPr sz="869">
+                <a:solidFill>
+                  <a:srgbClr val="0E1620"/>
+                </a:solidFill>
+                <a:latin typeface="Arial"/>
+              </a:rPr>
+              <a:t>Combined operations later split into two regional companies</a:t>
             </a:r>
           </a:p>
         </p:txBody>
@@ -10054,21 +10429,45 @@
                 </a:solidFill>
                 <a:latin typeface="Times New Roman"/>
               </a:rPr>
-              <a:t>IRR 94.4% · 2000–2001 · Technical consultants</a:t>
-            </a:r>
-          </a:p>
-        </p:txBody>
-      </p:sp>
-      <p:sp>
-        <p:nvSpPr>
-          <p:cNvPr id="11" name="TextBox 10"/>
+              <a:t>IRR 31.0% · 2002–2004</a:t>
+            </a:r>
+          </a:p>
+        </p:txBody>
+      </p:sp>
+      <p:pic>
+        <p:nvPicPr>
+          <p:cNvPr id="11" name="Picture 10" descr="drott_line.png"/>
+          <p:cNvPicPr>
+            <a:picLocks noChangeAspect="1"/>
+          </p:cNvPicPr>
+          <p:nvPr/>
+        </p:nvPicPr>
+        <p:blipFill>
+          <a:blip r:embed="rId3"/>
+          <a:stretch>
+            <a:fillRect/>
+          </a:stretch>
+        </p:blipFill>
+        <p:spPr>
+          <a:xfrm>
+            <a:off x="4983480" y="2276856"/>
+            <a:ext cx="4297680" cy="2479862"/>
+          </a:xfrm>
+          <a:prstGeom prst="rect">
+            <a:avLst/>
+          </a:prstGeom>
+        </p:spPr>
+      </p:pic>
+      <p:sp>
+        <p:nvSpPr>
+          <p:cNvPr id="12" name="TextBox 11"/>
           <p:cNvSpPr txBox="1"/>
           <p:nvPr/>
         </p:nvSpPr>
         <p:spPr>
           <a:xfrm>
-            <a:off x="4983480" y="2350008"/>
-            <a:ext cx="4297680" cy="274320"/>
+            <a:off x="4983480" y="4848158"/>
+            <a:ext cx="4297680" cy="457200"/>
           </a:xfrm>
           <a:prstGeom prst="rect">
             <a:avLst/>
@@ -10090,320 +10489,20 @@
               </a:spcAft>
             </a:pPr>
             <a:r>
-              <a:rPr sz="1100" b="1" i="0">
+              <a:rPr sz="1200" b="1" i="0">
                 <a:solidFill>
                   <a:srgbClr val="314359"/>
                 </a:solidFill>
                 <a:latin typeface="Times New Roman"/>
               </a:rPr>
-              <a:t>Initial investment vs. current value</a:t>
-            </a:r>
-          </a:p>
-        </p:txBody>
-      </p:sp>
-      <p:sp>
-        <p:nvSpPr>
-          <p:cNvPr id="12" name="Rectangle 11"/>
-          <p:cNvSpPr/>
-          <p:nvPr/>
-        </p:nvSpPr>
-        <p:spPr>
-          <a:xfrm>
-            <a:off x="5074920" y="4773168"/>
-            <a:ext cx="4114800" cy="12700"/>
-          </a:xfrm>
-          <a:prstGeom prst="rect">
-            <a:avLst/>
-          </a:prstGeom>
-          <a:solidFill>
-            <a:srgbClr val="E2E5E9"/>
-          </a:solidFill>
-          <a:ln>
-            <a:noFill/>
-          </a:ln>
-          <a:effectLst/>
-        </p:spPr>
-        <p:txBody>
-          <a:bodyPr rtlCol="0" anchor="ctr"/>
-          <a:lstStyle/>
-          <a:p>
-            <a:pPr algn="ctr"/>
-          </a:p>
-        </p:txBody>
-      </p:sp>
-      <p:sp>
-        <p:nvSpPr>
-          <p:cNvPr id="13" name="Rectangle 12"/>
-          <p:cNvSpPr/>
-          <p:nvPr/>
-        </p:nvSpPr>
-        <p:spPr>
-          <a:xfrm>
-            <a:off x="5577840" y="4044976"/>
-            <a:ext cx="1051560" cy="728192"/>
-          </a:xfrm>
-          <a:prstGeom prst="rect">
-            <a:avLst/>
-          </a:prstGeom>
-          <a:solidFill>
-            <a:srgbClr val="152130"/>
-          </a:solidFill>
-          <a:ln>
-            <a:noFill/>
-          </a:ln>
-          <a:effectLst/>
-        </p:spPr>
-        <p:txBody>
-          <a:bodyPr rtlCol="0" anchor="ctr"/>
-          <a:lstStyle/>
-          <a:p>
-            <a:pPr algn="ctr"/>
-          </a:p>
-        </p:txBody>
-      </p:sp>
-      <p:sp>
-        <p:nvSpPr>
-          <p:cNvPr id="14" name="TextBox 13"/>
-          <p:cNvSpPr txBox="1"/>
-          <p:nvPr/>
-        </p:nvSpPr>
-        <p:spPr>
-          <a:xfrm>
-            <a:off x="5303520" y="3770656"/>
-            <a:ext cx="1600200" cy="256032"/>
-          </a:xfrm>
-          <a:prstGeom prst="rect">
-            <a:avLst/>
-          </a:prstGeom>
-          <a:noFill/>
-        </p:spPr>
-        <p:txBody>
-          <a:bodyPr wrap="square" anchor="t" lIns="0" rIns="0" tIns="0" bIns="0">
-            <a:spAutoFit/>
-          </a:bodyPr>
-          <a:lstStyle/>
-          <a:p>
-            <a:pPr algn="ctr">
-              <a:lnSpc>
-                <a:spcPct val="110000"/>
-              </a:lnSpc>
-              <a:spcAft>
-                <a:spcPts val="0"/>
-              </a:spcAft>
-            </a:pPr>
-            <a:r>
-              <a:rPr sz="1300" b="1" i="0">
-                <a:solidFill>
-                  <a:srgbClr val="314359"/>
-                </a:solidFill>
-                <a:latin typeface="Times New Roman"/>
-              </a:rPr>
-              <a:t>213</a:t>
-            </a:r>
-          </a:p>
-        </p:txBody>
-      </p:sp>
-      <p:sp>
-        <p:nvSpPr>
-          <p:cNvPr id="15" name="TextBox 14"/>
-          <p:cNvSpPr txBox="1"/>
-          <p:nvPr/>
-        </p:nvSpPr>
-        <p:spPr>
-          <a:xfrm>
-            <a:off x="5074920" y="4828032"/>
-            <a:ext cx="2057400" cy="310896"/>
-          </a:xfrm>
-          <a:prstGeom prst="rect">
-            <a:avLst/>
-          </a:prstGeom>
-          <a:noFill/>
-        </p:spPr>
-        <p:txBody>
-          <a:bodyPr wrap="square" anchor="t" lIns="0" rIns="0" tIns="0" bIns="0">
-            <a:spAutoFit/>
-          </a:bodyPr>
-          <a:lstStyle/>
-          <a:p>
-            <a:pPr algn="ctr">
-              <a:lnSpc>
-                <a:spcPct val="110000"/>
-              </a:lnSpc>
-              <a:spcAft>
-                <a:spcPts val="0"/>
-              </a:spcAft>
-            </a:pPr>
-            <a:r>
-              <a:rPr sz="950" b="0" i="0">
-                <a:solidFill>
-                  <a:srgbClr val="0E1620"/>
-                </a:solidFill>
-                <a:latin typeface="Arial"/>
-              </a:rPr>
-              <a:t>Initial investment</a:t>
-            </a:r>
-          </a:p>
-        </p:txBody>
-      </p:sp>
-      <p:sp>
-        <p:nvSpPr>
-          <p:cNvPr id="16" name="Rectangle 15"/>
-          <p:cNvSpPr/>
-          <p:nvPr/>
-        </p:nvSpPr>
-        <p:spPr>
-          <a:xfrm>
-            <a:off x="7635240" y="3145846"/>
-            <a:ext cx="1051560" cy="1627322"/>
-          </a:xfrm>
-          <a:prstGeom prst="rect">
-            <a:avLst/>
-          </a:prstGeom>
-          <a:solidFill>
-            <a:srgbClr val="152130"/>
-          </a:solidFill>
-          <a:ln>
-            <a:noFill/>
-          </a:ln>
-          <a:effectLst/>
-        </p:spPr>
-        <p:txBody>
-          <a:bodyPr rtlCol="0" anchor="ctr"/>
-          <a:lstStyle/>
-          <a:p>
-            <a:pPr algn="ctr"/>
-          </a:p>
-        </p:txBody>
-      </p:sp>
-      <p:sp>
-        <p:nvSpPr>
-          <p:cNvPr id="17" name="TextBox 16"/>
-          <p:cNvSpPr txBox="1"/>
-          <p:nvPr/>
-        </p:nvSpPr>
-        <p:spPr>
-          <a:xfrm>
-            <a:off x="7360920" y="2871526"/>
-            <a:ext cx="1600200" cy="256032"/>
-          </a:xfrm>
-          <a:prstGeom prst="rect">
-            <a:avLst/>
-          </a:prstGeom>
-          <a:noFill/>
-        </p:spPr>
-        <p:txBody>
-          <a:bodyPr wrap="square" anchor="t" lIns="0" rIns="0" tIns="0" bIns="0">
-            <a:spAutoFit/>
-          </a:bodyPr>
-          <a:lstStyle/>
-          <a:p>
-            <a:pPr algn="ctr">
-              <a:lnSpc>
-                <a:spcPct val="110000"/>
-              </a:lnSpc>
-              <a:spcAft>
-                <a:spcPts val="0"/>
-              </a:spcAft>
-            </a:pPr>
-            <a:r>
-              <a:rPr sz="1300" b="1" i="0">
-                <a:solidFill>
-                  <a:srgbClr val="314359"/>
-                </a:solidFill>
-                <a:latin typeface="Times New Roman"/>
-              </a:rPr>
-              <a:t>476</a:t>
-            </a:r>
-          </a:p>
-        </p:txBody>
-      </p:sp>
-      <p:sp>
-        <p:nvSpPr>
-          <p:cNvPr id="18" name="TextBox 17"/>
-          <p:cNvSpPr txBox="1"/>
-          <p:nvPr/>
-        </p:nvSpPr>
-        <p:spPr>
-          <a:xfrm>
-            <a:off x="7132320" y="4828032"/>
-            <a:ext cx="2057400" cy="310896"/>
-          </a:xfrm>
-          <a:prstGeom prst="rect">
-            <a:avLst/>
-          </a:prstGeom>
-          <a:noFill/>
-        </p:spPr>
-        <p:txBody>
-          <a:bodyPr wrap="square" anchor="t" lIns="0" rIns="0" tIns="0" bIns="0">
-            <a:spAutoFit/>
-          </a:bodyPr>
-          <a:lstStyle/>
-          <a:p>
-            <a:pPr algn="ctr">
-              <a:lnSpc>
-                <a:spcPct val="110000"/>
-              </a:lnSpc>
-              <a:spcAft>
-                <a:spcPts val="0"/>
-              </a:spcAft>
-            </a:pPr>
-            <a:r>
-              <a:rPr sz="950" b="0" i="0">
-                <a:solidFill>
-                  <a:srgbClr val="0E1620"/>
-                </a:solidFill>
-                <a:latin typeface="Arial"/>
-              </a:rPr>
-              <a:t>Current value</a:t>
-            </a:r>
-          </a:p>
-        </p:txBody>
-      </p:sp>
-      <p:sp>
-        <p:nvSpPr>
-          <p:cNvPr id="19" name="TextBox 18"/>
-          <p:cNvSpPr txBox="1"/>
-          <p:nvPr/>
-        </p:nvSpPr>
-        <p:spPr>
-          <a:xfrm>
-            <a:off x="4983480" y="5157216"/>
-            <a:ext cx="4297680" cy="201168"/>
-          </a:xfrm>
-          <a:prstGeom prst="rect">
-            <a:avLst/>
-          </a:prstGeom>
-          <a:noFill/>
-        </p:spPr>
-        <p:txBody>
-          <a:bodyPr wrap="square" anchor="t" lIns="0" rIns="0" tIns="0" bIns="0">
-            <a:spAutoFit/>
-          </a:bodyPr>
-          <a:lstStyle/>
-          <a:p>
-            <a:pPr algn="l">
-              <a:lnSpc>
-                <a:spcPct val="110000"/>
-              </a:lnSpc>
-              <a:spcAft>
-                <a:spcPts val="0"/>
-              </a:spcAft>
-            </a:pPr>
-            <a:r>
-              <a:rPr sz="850" b="0" i="1">
-                <a:solidFill>
-                  <a:srgbClr val="556A83"/>
-                </a:solidFill>
-                <a:latin typeface="Arial"/>
-              </a:rPr>
-              <a:t>SEK M</a:t>
-            </a:r>
-          </a:p>
-        </p:txBody>
-      </p:sp>
-      <p:sp>
-        <p:nvSpPr>
-          <p:cNvPr id="20" name="TextBox 19"/>
+              <a:t>≈ SEK 3bn of net value created in 15 months</a:t>
+            </a:r>
+          </a:p>
+        </p:txBody>
+      </p:sp>
+      <p:sp>
+        <p:nvSpPr>
+          <p:cNvPr id="13" name="TextBox 12"/>
           <p:cNvSpPr txBox="1"/>
           <p:nvPr/>
         </p:nvSpPr>
@@ -10624,7 +10723,7 @@
                 </a:solidFill>
                 <a:latin typeface="Times New Roman"/>
               </a:rPr>
-              <a:t>Investment case study: Nobia</a:t>
+              <a:t>Investment case study: J&amp;W</a:t>
             </a:r>
           </a:p>
         </p:txBody>
@@ -10730,7 +10829,7 @@
                 </a:solidFill>
                 <a:latin typeface="Arial"/>
               </a:rPr>
-              <a:t>Nobia is a European kitchen company. Originally active across several construction-component areas, it was streamlined to focus on kitchens.</a:t>
+              <a:t>J&amp;W (Jacobson &amp; Widmark) was a Swedish technical-consulting firm. Öresund first invested in 1994 and took a controlling interest in 2000.</a:t>
             </a:r>
           </a:p>
           <a:p>
@@ -10780,7 +10879,7 @@
                 </a:solidFill>
                 <a:latin typeface="Arial"/>
               </a:rPr>
-              <a:t>Active across several construction-component areas — focus opportunity</a:t>
+              <a:t>Over-funded pension plans — cash to be returned from the SPP pension trust (now Alecta)</a:t>
             </a:r>
           </a:p>
           <a:p>
@@ -10808,7 +10907,35 @@
                 </a:solidFill>
                 <a:latin typeface="Arial"/>
               </a:rPr>
-              <a:t>A fragmented European kitchen market with consolidation potential</a:t>
+              <a:t>A fragmented consulting market with consolidation potential</a:t>
+            </a:r>
+          </a:p>
+          <a:p>
+            <a:pPr marL="149162" indent="-149162">
+              <a:lnSpc>
+                <a:spcPct val="106000"/>
+              </a:lnSpc>
+              <a:spcAft>
+                <a:spcPts val="150"/>
+              </a:spcAft>
+            </a:pPr>
+            <a:r>
+              <a:rPr sz="869" b="1">
+                <a:solidFill>
+                  <a:srgbClr val="556A83"/>
+                </a:solidFill>
+                <a:latin typeface="Arial"/>
+              </a:rPr>
+              <a:t>›  </a:t>
+            </a:r>
+            <a:r>
+              <a:rPr sz="869">
+                <a:solidFill>
+                  <a:srgbClr val="0E1620"/>
+                </a:solidFill>
+                <a:latin typeface="Arial"/>
+              </a:rPr>
+              <a:t>A non-core subsidiary (Benima Ferator) that could be divested</a:t>
             </a:r>
           </a:p>
           <a:p>
@@ -10849,7 +10976,7 @@
                 </a:solidFill>
                 <a:latin typeface="Arial"/>
               </a:rPr>
-              <a:t>Streamline Nobia to focus on kitchens by divesting other areas, and consolidate the European kitchen market through acquisitions.</a:t>
+              <a:t>Return excess cash to shareholders, divest non-core operations, and consolidate the fragmented technical-consulting market through acquisitions.</a:t>
             </a:r>
           </a:p>
           <a:p>
@@ -10899,7 +11026,7 @@
                 </a:solidFill>
                 <a:latin typeface="Arial"/>
               </a:rPr>
-              <a:t>Streamlined to focus on kitchens (sold Doors &amp; Windows)</a:t>
+              <a:t>Spun off Benima Ferator to shareholders (later acquired by Sigma)</a:t>
             </a:r>
           </a:p>
           <a:p>
@@ -10927,7 +11054,7 @@
                 </a:solidFill>
                 <a:latin typeface="Arial"/>
               </a:rPr>
-              <a:t>Acquired Gower, EWE-FM and Hygena — the largest kitchen company in Europe</a:t>
+              <a:t>Transferred SPP pension-plan cash to shareholders</a:t>
             </a:r>
           </a:p>
           <a:p>
@@ -10955,7 +11082,7 @@
                 </a:solidFill>
                 <a:latin typeface="Arial"/>
               </a:rPr>
-              <a:t>Turnover up from SEK 9.2bn (2003) to SEK 16.1bn (12m to Jun 2007)</a:t>
+              <a:t>Acquired several smaller competitors and the larger Kjessler &amp; Mannerstråle (KM)</a:t>
             </a:r>
           </a:p>
           <a:p>
@@ -10983,7 +11110,7 @@
                 </a:solidFill>
                 <a:latin typeface="Arial"/>
               </a:rPr>
-              <a:t>EBIT up from SEK 560m to SEK 1,360m</a:t>
+              <a:t>J&amp;W was subsequently sold to WSP</a:t>
             </a:r>
           </a:p>
         </p:txBody>
@@ -11055,7 +11182,7 @@
                 </a:solidFill>
                 <a:latin typeface="Times New Roman"/>
               </a:rPr>
-              <a:t>IRR 33.1% · 2002– · Consumer discretionary</a:t>
+              <a:t>IRR 94.4% · 2000–2001 · Technical consultants</a:t>
             </a:r>
           </a:p>
         </p:txBody>
@@ -11140,8 +11267,8 @@
         </p:nvSpPr>
         <p:spPr>
           <a:xfrm>
-            <a:off x="5577840" y="4529746"/>
-            <a:ext cx="1051560" cy="243422"/>
+            <a:off x="5577840" y="4044976"/>
+            <a:ext cx="1051560" cy="728192"/>
           </a:xfrm>
           <a:prstGeom prst="rect">
             <a:avLst/>
@@ -11170,7 +11297,7 @@
         </p:nvSpPr>
         <p:spPr>
           <a:xfrm>
-            <a:off x="5303520" y="4255426"/>
+            <a:off x="5303520" y="3770656"/>
             <a:ext cx="1600200" cy="256032"/>
           </a:xfrm>
           <a:prstGeom prst="rect">
@@ -11199,7 +11326,7 @@
                 </a:solidFill>
                 <a:latin typeface="Times New Roman"/>
               </a:rPr>
-              <a:t>162</a:t>
+              <a:t>213</a:t>
             </a:r>
           </a:p>
         </p:txBody>
@@ -11313,7 +11440,7 @@
                 </a:solidFill>
                 <a:latin typeface="Times New Roman"/>
               </a:rPr>
-              <a:t>1,083</a:t>
+              <a:t>476</a:t>
             </a:r>
           </a:p>
         </p:txBody>
@@ -11941,7 +12068,7 @@
                 </a:solidFill>
                 <a:latin typeface="Times New Roman"/>
               </a:rPr>
-              <a:t>Investment case study: HQ / Avanza</a:t>
+              <a:t>Investment case study: Nobia</a:t>
             </a:r>
           </a:p>
         </p:txBody>
@@ -12047,7 +12174,7 @@
                 </a:solidFill>
                 <a:latin typeface="Arial"/>
               </a:rPr>
-              <a:t>Hagströmer &amp; Qviberg (HQ) and Avanza are Swedish financial companies — brokerage, fund management, wealth management and online brokerage. Sven Hagströmer founded Hagströmer Fondkommission in 1986; Mats Qviberg joined in 1989.</a:t>
+              <a:t>Nobia is a European kitchen company. Originally active across several construction-component areas, it was streamlined to focus on kitchens.</a:t>
             </a:r>
           </a:p>
           <a:p>
@@ -12097,7 +12224,7 @@
                 </a:solidFill>
                 <a:latin typeface="Arial"/>
               </a:rPr>
-              <a:t>Separate online brokerage / fund management from traditional brokerage and investment banking</a:t>
+              <a:t>Active across several construction-component areas — focus opportunity</a:t>
             </a:r>
           </a:p>
           <a:p>
@@ -12125,7 +12252,7 @@
                 </a:solidFill>
                 <a:latin typeface="Arial"/>
               </a:rPr>
-              <a:t>Consolidation opportunities among internet brokerages</a:t>
+              <a:t>A fragmented European kitchen market with consolidation potential</a:t>
             </a:r>
           </a:p>
           <a:p>
@@ -12166,7 +12293,7 @@
                 </a:solidFill>
                 <a:latin typeface="Arial"/>
               </a:rPr>
-              <a:t>Split HQ into focused entities, consolidate internet brokerages into Avanza, and build a wealth-management business.</a:t>
+              <a:t>Streamline Nobia to focus on kitchens by divesting other areas, and consolidate the European kitchen market through acquisitions.</a:t>
             </a:r>
           </a:p>
           <a:p>
@@ -12216,7 +12343,7 @@
                 </a:solidFill>
                 <a:latin typeface="Arial"/>
               </a:rPr>
-              <a:t>HQ split (2000) into HQ.SE (internet brokerage, fund management) and Hagströmer &amp; Qviberg</a:t>
+              <a:t>Streamlined to focus on kitchens (sold Doors &amp; Windows)</a:t>
             </a:r>
           </a:p>
           <a:p>
@@ -12244,7 +12371,7 @@
                 </a:solidFill>
                 <a:latin typeface="Arial"/>
               </a:rPr>
-              <a:t>HQ.SE acquired Aktiespar FK and Avanza; split into HQ Fonder and Avanza</a:t>
+              <a:t>Acquired Gower, EWE-FM and Hygena — the largest kitchen company in Europe</a:t>
             </a:r>
           </a:p>
           <a:p>
@@ -12272,7 +12399,7 @@
                 </a:solidFill>
                 <a:latin typeface="Arial"/>
               </a:rPr>
-              <a:t>Avanza expanded into pensions, fund distribution, corporate finance and banking</a:t>
+              <a:t>Turnover up from SEK 9.2bn (2003) to SEK 16.1bn (12m to Jun 2007)</a:t>
             </a:r>
           </a:p>
           <a:p>
@@ -12300,7 +12427,7 @@
                 </a:solidFill>
                 <a:latin typeface="Arial"/>
               </a:rPr>
-              <a:t>HQ Fonder merged with Hagströmer &amp; Qviberg (2005) — SEK 85bn AUM</a:t>
+              <a:t>EBIT up from SEK 560m to SEK 1,360m</a:t>
             </a:r>
           </a:p>
         </p:txBody>
@@ -12372,7 +12499,7 @@
                 </a:solidFill>
                 <a:latin typeface="Times New Roman"/>
               </a:rPr>
-              <a:t>IRR 37.8% · 2000– · Finance</a:t>
+              <a:t>IRR 33.1% · 2002– · Consumer discretionary</a:t>
             </a:r>
           </a:p>
         </p:txBody>
@@ -12457,8 +12584,8 @@
         </p:nvSpPr>
         <p:spPr>
           <a:xfrm>
-            <a:off x="5577840" y="4341998"/>
-            <a:ext cx="1051560" cy="431170"/>
+            <a:off x="5577840" y="4529746"/>
+            <a:ext cx="1051560" cy="243422"/>
           </a:xfrm>
           <a:prstGeom prst="rect">
             <a:avLst/>
@@ -12487,7 +12614,7 @@
         </p:nvSpPr>
         <p:spPr>
           <a:xfrm>
-            <a:off x="5303520" y="4067678"/>
+            <a:off x="5303520" y="4255426"/>
             <a:ext cx="1600200" cy="256032"/>
           </a:xfrm>
           <a:prstGeom prst="rect">
@@ -12516,7 +12643,7 @@
                 </a:solidFill>
                 <a:latin typeface="Times New Roman"/>
               </a:rPr>
-              <a:t>744</a:t>
+              <a:t>162</a:t>
             </a:r>
           </a:p>
         </p:txBody>
@@ -12630,7 +12757,7 @@
                 </a:solidFill>
                 <a:latin typeface="Times New Roman"/>
               </a:rPr>
-              <a:t>2,808</a:t>
+              <a:t>1,083</a:t>
             </a:r>
           </a:p>
         </p:txBody>
@@ -12942,7 +13069,7 @@
                 </a:solidFill>
                 <a:latin typeface="Times New Roman"/>
               </a:rPr>
-              <a:t>Investment case study: SkiStar</a:t>
+              <a:t>Investment case study: HQ / Avanza</a:t>
             </a:r>
           </a:p>
         </p:txBody>
@@ -13048,7 +13175,7 @@
                 </a:solidFill>
                 <a:latin typeface="Arial"/>
               </a:rPr>
-              <a:t>SkiStar is a Scandinavian operator of alpine ski resorts, built through the consolidation of several destinations into a single listed leisure company.</a:t>
+              <a:t>Hagströmer &amp; Qviberg (HQ) and Avanza are Swedish financial companies — brokerage, fund management, wealth management and online brokerage. Sven Hagströmer founded Hagströmer Fondkommission in 1986; Mats Qviberg joined in 1989.</a:t>
             </a:r>
           </a:p>
           <a:p>
@@ -13098,7 +13225,7 @@
                 </a:solidFill>
                 <a:latin typeface="Arial"/>
               </a:rPr>
-              <a:t>A fragmented ski-resort market with consolidation potential</a:t>
+              <a:t>Separate online brokerage / fund management from traditional brokerage and investment banking</a:t>
             </a:r>
           </a:p>
           <a:p>
@@ -13126,7 +13253,7 @@
                 </a:solidFill>
                 <a:latin typeface="Arial"/>
               </a:rPr>
-              <a:t>Opportunity to build a leading Scandinavian leisure platform</a:t>
+              <a:t>Consolidation opportunities among internet brokerages</a:t>
             </a:r>
           </a:p>
           <a:p>
@@ -13167,7 +13294,7 @@
                 </a:solidFill>
                 <a:latin typeface="Arial"/>
               </a:rPr>
-              <a:t>Consolidate alpine destinations into a single listed leisure company.</a:t>
+              <a:t>Split HQ into focused entities, consolidate internet brokerages into Avanza, and build a wealth-management business.</a:t>
             </a:r>
           </a:p>
           <a:p>
@@ -13217,7 +13344,7 @@
                 </a:solidFill>
                 <a:latin typeface="Arial"/>
               </a:rPr>
-              <a:t>Hundfjället acquired Tandådalen; the combined entity was restructured</a:t>
+              <a:t>HQ split (2000) into HQ.SE (internet brokerage, fund management) and Hagströmer &amp; Qviberg</a:t>
             </a:r>
           </a:p>
           <a:p>
@@ -13245,7 +13372,7 @@
                 </a:solidFill>
                 <a:latin typeface="Arial"/>
               </a:rPr>
-              <a:t>Acquired Lindvallen; the combined entity was listed</a:t>
+              <a:t>HQ.SE acquired Aktiespar FK and Avanza; split into HQ Fonder and Avanza</a:t>
             </a:r>
           </a:p>
           <a:p>
@@ -13273,7 +13400,7 @@
                 </a:solidFill>
                 <a:latin typeface="Arial"/>
               </a:rPr>
-              <a:t>Acquired Åre, Duved and Vemdalen from Bure — renamed SkiStar</a:t>
+              <a:t>Avanza expanded into pensions, fund distribution, corporate finance and banking</a:t>
             </a:r>
           </a:p>
           <a:p>
@@ -13301,7 +13428,7 @@
                 </a:solidFill>
                 <a:latin typeface="Arial"/>
               </a:rPr>
-              <a:t>Acquired Hemsedal (and later Trysil)</a:t>
+              <a:t>HQ Fonder merged with Hagströmer &amp; Qviberg (2005) — SEK 85bn AUM</a:t>
             </a:r>
           </a:p>
         </p:txBody>
@@ -13373,7 +13500,7 @@
                 </a:solidFill>
                 <a:latin typeface="Times New Roman"/>
               </a:rPr>
-              <a:t>IRR 33.0% · 2000– · Leisure</a:t>
+              <a:t>IRR 37.8% · 2000– · Finance</a:t>
             </a:r>
           </a:p>
         </p:txBody>
@@ -13458,8 +13585,8 @@
         </p:nvSpPr>
         <p:spPr>
           <a:xfrm>
-            <a:off x="5577840" y="4378068"/>
-            <a:ext cx="1051560" cy="395100"/>
+            <a:off x="5577840" y="4341998"/>
+            <a:ext cx="1051560" cy="431170"/>
           </a:xfrm>
           <a:prstGeom prst="rect">
             <a:avLst/>
@@ -13488,7 +13615,7 @@
         </p:nvSpPr>
         <p:spPr>
           <a:xfrm>
-            <a:off x="5303520" y="4103748"/>
+            <a:off x="5303520" y="4067678"/>
             <a:ext cx="1600200" cy="256032"/>
           </a:xfrm>
           <a:prstGeom prst="rect">
@@ -13517,7 +13644,7 @@
                 </a:solidFill>
                 <a:latin typeface="Times New Roman"/>
               </a:rPr>
-              <a:t>160</a:t>
+              <a:t>744</a:t>
             </a:r>
           </a:p>
         </p:txBody>
@@ -13631,7 +13758,7 @@
                 </a:solidFill>
                 <a:latin typeface="Times New Roman"/>
               </a:rPr>
-              <a:t>659</a:t>
+              <a:t>2,808</a:t>
             </a:r>
           </a:p>
         </p:txBody>
@@ -13943,7 +14070,7 @@
                 </a:solidFill>
                 <a:latin typeface="Times New Roman"/>
               </a:rPr>
-              <a:t>Investment case study: Bilia</a:t>
+              <a:t>Investment case study: SkiStar</a:t>
             </a:r>
           </a:p>
         </p:txBody>
@@ -14049,7 +14176,7 @@
                 </a:solidFill>
                 <a:latin typeface="Arial"/>
               </a:rPr>
-              <a:t>Bilia is a leading Nordic car retailer and car-service company. Öresund became an owner in 2003 through a redemption of shares from Custos.</a:t>
+              <a:t>SkiStar is a Scandinavian operator of alpine ski resorts, built through the consolidation of several destinations into a single listed leisure company.</a:t>
             </a:r>
           </a:p>
           <a:p>
@@ -14099,7 +14226,7 @@
                 </a:solidFill>
                 <a:latin typeface="Arial"/>
               </a:rPr>
-              <a:t>Opportunity to separate trucks/heavy vehicles from the car business</a:t>
+              <a:t>A fragmented ski-resort market with consolidation potential</a:t>
             </a:r>
           </a:p>
           <a:p>
@@ -14127,35 +14254,7 @@
                 </a:solidFill>
                 <a:latin typeface="Arial"/>
               </a:rPr>
-              <a:t>Strong cash flow to fund consolidation of car retailers</a:t>
-            </a:r>
-          </a:p>
-          <a:p>
-            <a:pPr marL="149162" indent="-149162">
-              <a:lnSpc>
-                <a:spcPct val="106000"/>
-              </a:lnSpc>
-              <a:spcAft>
-                <a:spcPts val="150"/>
-              </a:spcAft>
-            </a:pPr>
-            <a:r>
-              <a:rPr sz="869" b="1">
-                <a:solidFill>
-                  <a:srgbClr val="556A83"/>
-                </a:solidFill>
-                <a:latin typeface="Arial"/>
-              </a:rPr>
-              <a:t>›  </a:t>
-            </a:r>
-            <a:r>
-              <a:rPr sz="869">
-                <a:solidFill>
-                  <a:srgbClr val="0E1620"/>
-                </a:solidFill>
-                <a:latin typeface="Arial"/>
-              </a:rPr>
-              <a:t>Hidden real-estate value</a:t>
+              <a:t>Opportunity to build a leading Scandinavian leisure platform</a:t>
             </a:r>
           </a:p>
           <a:p>
@@ -14196,7 +14295,7 @@
                 </a:solidFill>
                 <a:latin typeface="Arial"/>
               </a:rPr>
-              <a:t>Separate the heavy-vehicle and car businesses, use strong cash flow to acquire competing car retailers, and unlock real-estate value.</a:t>
+              <a:t>Consolidate alpine destinations into a single listed leisure company.</a:t>
             </a:r>
           </a:p>
           <a:p>
@@ -14246,7 +14345,7 @@
                 </a:solidFill>
                 <a:latin typeface="Arial"/>
               </a:rPr>
-              <a:t>Split into heavy vehicles (LV) and cars (PV); Volvo AB acquired the LV business for PV shares — leaving a pure car retailer</a:t>
+              <a:t>Hundfjället acquired Tandådalen; the combined entity was restructured</a:t>
             </a:r>
           </a:p>
           <a:p>
@@ -14274,7 +14373,7 @@
                 </a:solidFill>
                 <a:latin typeface="Arial"/>
               </a:rPr>
-              <a:t>Acquired several competing car retailers, expanding geography and brands; transferred excess cash to shareholders</a:t>
+              <a:t>Acquired Lindvallen; the combined entity was listed</a:t>
             </a:r>
           </a:p>
           <a:p>
@@ -14302,7 +14401,35 @@
                 </a:solidFill>
                 <a:latin typeface="Arial"/>
               </a:rPr>
-              <a:t>Spun off the real estate as Catena (2006), distributed to shareholders and listed</a:t>
+              <a:t>Acquired Åre, Duved and Vemdalen from Bure — renamed SkiStar</a:t>
+            </a:r>
+          </a:p>
+          <a:p>
+            <a:pPr marL="149162" indent="-149162">
+              <a:lnSpc>
+                <a:spcPct val="106000"/>
+              </a:lnSpc>
+              <a:spcAft>
+                <a:spcPts val="150"/>
+              </a:spcAft>
+            </a:pPr>
+            <a:r>
+              <a:rPr sz="869" b="1">
+                <a:solidFill>
+                  <a:srgbClr val="556A83"/>
+                </a:solidFill>
+                <a:latin typeface="Arial"/>
+              </a:rPr>
+              <a:t>✓  </a:t>
+            </a:r>
+            <a:r>
+              <a:rPr sz="869">
+                <a:solidFill>
+                  <a:srgbClr val="0E1620"/>
+                </a:solidFill>
+                <a:latin typeface="Arial"/>
+              </a:rPr>
+              <a:t>Acquired Hemsedal (and later Trysil)</a:t>
             </a:r>
           </a:p>
         </p:txBody>
@@ -14374,7 +14501,7 @@
                 </a:solidFill>
                 <a:latin typeface="Times New Roman"/>
               </a:rPr>
-              <a:t>IRR 26.0% · 2003– · Consumer discretionary</a:t>
+              <a:t>IRR 33.0% · 2000– · Leisure</a:t>
             </a:r>
           </a:p>
         </p:txBody>
@@ -14459,8 +14586,8 @@
         </p:nvSpPr>
         <p:spPr>
           <a:xfrm>
-            <a:off x="5577840" y="3993410"/>
-            <a:ext cx="1051560" cy="779758"/>
+            <a:off x="5577840" y="4378068"/>
+            <a:ext cx="1051560" cy="395100"/>
           </a:xfrm>
           <a:prstGeom prst="rect">
             <a:avLst/>
@@ -14489,7 +14616,7 @@
         </p:nvSpPr>
         <p:spPr>
           <a:xfrm>
-            <a:off x="5303520" y="3719090"/>
+            <a:off x="5303520" y="4103748"/>
             <a:ext cx="1600200" cy="256032"/>
           </a:xfrm>
           <a:prstGeom prst="rect">
@@ -14518,7 +14645,7 @@
                 </a:solidFill>
                 <a:latin typeface="Times New Roman"/>
               </a:rPr>
-              <a:t>506</a:t>
+              <a:t>160</a:t>
             </a:r>
           </a:p>
         </p:txBody>
@@ -14632,7 +14759,7 @@
                 </a:solidFill>
                 <a:latin typeface="Times New Roman"/>
               </a:rPr>
-              <a:t>1,056</a:t>
+              <a:t>659</a:t>
             </a:r>
           </a:p>
         </p:txBody>
@@ -14796,6 +14923,1007 @@
             <a:avLst/>
           </a:prstGeom>
           <a:solidFill>
+            <a:srgbClr val="FFFFFF"/>
+          </a:solidFill>
+          <a:ln>
+            <a:noFill/>
+          </a:ln>
+          <a:effectLst/>
+        </p:spPr>
+        <p:txBody>
+          <a:bodyPr rtlCol="0" anchor="ctr"/>
+          <a:lstStyle/>
+          <a:p>
+            <a:pPr algn="ctr"/>
+          </a:p>
+        </p:txBody>
+      </p:sp>
+      <p:pic>
+        <p:nvPicPr>
+          <p:cNvPr id="3" name="Picture 2" descr="mark_dark.png"/>
+          <p:cNvPicPr>
+            <a:picLocks noChangeAspect="1"/>
+          </p:cNvPicPr>
+          <p:nvPr/>
+        </p:nvPicPr>
+        <p:blipFill>
+          <a:blip r:embed="rId2"/>
+          <a:stretch>
+            <a:fillRect/>
+          </a:stretch>
+        </p:blipFill>
+        <p:spPr>
+          <a:xfrm>
+            <a:off x="457200" y="219456"/>
+            <a:ext cx="280009" cy="237744"/>
+          </a:xfrm>
+          <a:prstGeom prst="rect">
+            <a:avLst/>
+          </a:prstGeom>
+        </p:spPr>
+      </p:pic>
+      <p:sp>
+        <p:nvSpPr>
+          <p:cNvPr id="4" name="TextBox 3"/>
+          <p:cNvSpPr txBox="1"/>
+          <p:nvPr/>
+        </p:nvSpPr>
+        <p:spPr>
+          <a:xfrm>
+            <a:off x="841248" y="246888"/>
+            <a:ext cx="5486400" cy="274320"/>
+          </a:xfrm>
+          <a:prstGeom prst="rect">
+            <a:avLst/>
+          </a:prstGeom>
+          <a:noFill/>
+        </p:spPr>
+        <p:txBody>
+          <a:bodyPr wrap="square" anchor="t" lIns="0" rIns="0" tIns="0" bIns="0">
+            <a:spAutoFit/>
+          </a:bodyPr>
+          <a:lstStyle/>
+          <a:p>
+            <a:pPr algn="l">
+              <a:lnSpc>
+                <a:spcPct val="110000"/>
+              </a:lnSpc>
+              <a:spcAft>
+                <a:spcPts val="0"/>
+              </a:spcAft>
+            </a:pPr>
+            <a:r>
+              <a:rPr sz="1100" b="0" i="0">
+                <a:solidFill>
+                  <a:srgbClr val="556A83"/>
+                </a:solidFill>
+                <a:latin typeface="Arial"/>
+              </a:rPr>
+              <a:t>Case · Öresund era</a:t>
+            </a:r>
+          </a:p>
+        </p:txBody>
+      </p:sp>
+      <p:sp>
+        <p:nvSpPr>
+          <p:cNvPr id="5" name="Rectangle 4"/>
+          <p:cNvSpPr/>
+          <p:nvPr/>
+        </p:nvSpPr>
+        <p:spPr>
+          <a:xfrm>
+            <a:off x="0" y="566928"/>
+            <a:ext cx="9753904" cy="914400"/>
+          </a:xfrm>
+          <a:prstGeom prst="rect">
+            <a:avLst/>
+          </a:prstGeom>
+          <a:solidFill>
+            <a:srgbClr val="F6F7F9"/>
+          </a:solidFill>
+          <a:ln>
+            <a:noFill/>
+          </a:ln>
+          <a:effectLst/>
+        </p:spPr>
+        <p:txBody>
+          <a:bodyPr rtlCol="0" anchor="ctr"/>
+          <a:lstStyle/>
+          <a:p>
+            <a:pPr algn="ctr"/>
+          </a:p>
+        </p:txBody>
+      </p:sp>
+      <p:sp>
+        <p:nvSpPr>
+          <p:cNvPr id="6" name="TextBox 5"/>
+          <p:cNvSpPr txBox="1"/>
+          <p:nvPr/>
+        </p:nvSpPr>
+        <p:spPr>
+          <a:xfrm>
+            <a:off x="502920" y="713232"/>
+            <a:ext cx="8778240" cy="640080"/>
+          </a:xfrm>
+          <a:prstGeom prst="rect">
+            <a:avLst/>
+          </a:prstGeom>
+          <a:noFill/>
+        </p:spPr>
+        <p:txBody>
+          <a:bodyPr wrap="square" anchor="t" lIns="0" rIns="0" tIns="0" bIns="0">
+            <a:spAutoFit/>
+          </a:bodyPr>
+          <a:lstStyle/>
+          <a:p>
+            <a:pPr algn="l">
+              <a:lnSpc>
+                <a:spcPct val="110000"/>
+              </a:lnSpc>
+              <a:spcAft>
+                <a:spcPts val="0"/>
+              </a:spcAft>
+            </a:pPr>
+            <a:r>
+              <a:rPr sz="2600" b="0" i="0" spc="-78">
+                <a:solidFill>
+                  <a:srgbClr val="314359"/>
+                </a:solidFill>
+                <a:latin typeface="Times New Roman"/>
+              </a:rPr>
+              <a:t>Investment case study: Bilia</a:t>
+            </a:r>
+          </a:p>
+        </p:txBody>
+      </p:sp>
+      <p:sp>
+        <p:nvSpPr>
+          <p:cNvPr id="7" name="TextBox 6"/>
+          <p:cNvSpPr txBox="1"/>
+          <p:nvPr/>
+        </p:nvSpPr>
+        <p:spPr>
+          <a:xfrm>
+            <a:off x="5486400" y="6967728"/>
+            <a:ext cx="4023360" cy="274320"/>
+          </a:xfrm>
+          <a:prstGeom prst="rect">
+            <a:avLst/>
+          </a:prstGeom>
+          <a:noFill/>
+        </p:spPr>
+        <p:txBody>
+          <a:bodyPr wrap="square" anchor="t" lIns="0" rIns="0" tIns="0" bIns="0">
+            <a:spAutoFit/>
+          </a:bodyPr>
+          <a:lstStyle/>
+          <a:p>
+            <a:pPr algn="r">
+              <a:lnSpc>
+                <a:spcPct val="110000"/>
+              </a:lnSpc>
+              <a:spcAft>
+                <a:spcPts val="0"/>
+              </a:spcAft>
+            </a:pPr>
+            <a:r>
+              <a:rPr sz="850" b="0" i="0">
+                <a:solidFill>
+                  <a:srgbClr val="556A83"/>
+                </a:solidFill>
+                <a:latin typeface="Arial"/>
+              </a:rPr>
+              <a:t>Strictly confidential          20</a:t>
+            </a:r>
+          </a:p>
+        </p:txBody>
+      </p:sp>
+      <p:sp>
+        <p:nvSpPr>
+          <p:cNvPr id="8" name="TextBox 7"/>
+          <p:cNvSpPr txBox="1"/>
+          <p:nvPr/>
+        </p:nvSpPr>
+        <p:spPr>
+          <a:xfrm>
+            <a:off x="502920" y="1783080"/>
+            <a:ext cx="4160520" cy="5120640"/>
+          </a:xfrm>
+          <a:prstGeom prst="rect">
+            <a:avLst/>
+          </a:prstGeom>
+          <a:noFill/>
+        </p:spPr>
+        <p:txBody>
+          <a:bodyPr wrap="square" anchor="t" lIns="0" rIns="0" tIns="0" bIns="0">
+            <a:spAutoFit/>
+          </a:bodyPr>
+          <a:lstStyle/>
+          <a:p>
+            <a:pPr algn="l">
+              <a:lnSpc>
+                <a:spcPct val="110000"/>
+              </a:lnSpc>
+              <a:spcBef>
+                <a:spcPts val="0"/>
+              </a:spcBef>
+              <a:spcAft>
+                <a:spcPts val="250"/>
+              </a:spcAft>
+            </a:pPr>
+            <a:r>
+              <a:rPr sz="1100" b="1" i="0">
+                <a:solidFill>
+                  <a:srgbClr val="314359"/>
+                </a:solidFill>
+                <a:latin typeface="Times New Roman"/>
+              </a:rPr>
+              <a:t>Company description</a:t>
+            </a:r>
+          </a:p>
+          <a:p>
+            <a:pPr algn="l">
+              <a:lnSpc>
+                <a:spcPct val="108000"/>
+              </a:lnSpc>
+              <a:spcAft>
+                <a:spcPts val="200"/>
+              </a:spcAft>
+            </a:pPr>
+            <a:r>
+              <a:rPr sz="869" b="0" i="0">
+                <a:solidFill>
+                  <a:srgbClr val="0E1620"/>
+                </a:solidFill>
+                <a:latin typeface="Arial"/>
+              </a:rPr>
+              <a:t>Bilia is a leading Nordic car retailer and car-service company. Öresund became an owner in 2003 through a redemption of shares from Custos.</a:t>
+            </a:r>
+          </a:p>
+          <a:p>
+            <a:pPr algn="l">
+              <a:lnSpc>
+                <a:spcPct val="110000"/>
+              </a:lnSpc>
+              <a:spcBef>
+                <a:spcPts val="700"/>
+              </a:spcBef>
+              <a:spcAft>
+                <a:spcPts val="250"/>
+              </a:spcAft>
+            </a:pPr>
+            <a:r>
+              <a:rPr sz="1100" b="1" i="0">
+                <a:solidFill>
+                  <a:srgbClr val="314359"/>
+                </a:solidFill>
+                <a:latin typeface="Times New Roman"/>
+              </a:rPr>
+              <a:t>Recognized opportunities</a:t>
+            </a:r>
+          </a:p>
+          <a:p>
+            <a:pPr marL="149162" indent="-149162">
+              <a:lnSpc>
+                <a:spcPct val="106000"/>
+              </a:lnSpc>
+              <a:spcAft>
+                <a:spcPts val="150"/>
+              </a:spcAft>
+            </a:pPr>
+            <a:r>
+              <a:rPr sz="869" b="1">
+                <a:solidFill>
+                  <a:srgbClr val="556A83"/>
+                </a:solidFill>
+                <a:latin typeface="Arial"/>
+              </a:rPr>
+              <a:t>›  </a:t>
+            </a:r>
+            <a:r>
+              <a:rPr sz="869">
+                <a:solidFill>
+                  <a:srgbClr val="0E1620"/>
+                </a:solidFill>
+                <a:latin typeface="Arial"/>
+              </a:rPr>
+              <a:t>Opportunity to separate trucks/heavy vehicles from the car business</a:t>
+            </a:r>
+          </a:p>
+          <a:p>
+            <a:pPr marL="149162" indent="-149162">
+              <a:lnSpc>
+                <a:spcPct val="106000"/>
+              </a:lnSpc>
+              <a:spcAft>
+                <a:spcPts val="150"/>
+              </a:spcAft>
+            </a:pPr>
+            <a:r>
+              <a:rPr sz="869" b="1">
+                <a:solidFill>
+                  <a:srgbClr val="556A83"/>
+                </a:solidFill>
+                <a:latin typeface="Arial"/>
+              </a:rPr>
+              <a:t>›  </a:t>
+            </a:r>
+            <a:r>
+              <a:rPr sz="869">
+                <a:solidFill>
+                  <a:srgbClr val="0E1620"/>
+                </a:solidFill>
+                <a:latin typeface="Arial"/>
+              </a:rPr>
+              <a:t>Strong cash flow to fund consolidation of car retailers</a:t>
+            </a:r>
+          </a:p>
+          <a:p>
+            <a:pPr marL="149162" indent="-149162">
+              <a:lnSpc>
+                <a:spcPct val="106000"/>
+              </a:lnSpc>
+              <a:spcAft>
+                <a:spcPts val="150"/>
+              </a:spcAft>
+            </a:pPr>
+            <a:r>
+              <a:rPr sz="869" b="1">
+                <a:solidFill>
+                  <a:srgbClr val="556A83"/>
+                </a:solidFill>
+                <a:latin typeface="Arial"/>
+              </a:rPr>
+              <a:t>›  </a:t>
+            </a:r>
+            <a:r>
+              <a:rPr sz="869">
+                <a:solidFill>
+                  <a:srgbClr val="0E1620"/>
+                </a:solidFill>
+                <a:latin typeface="Arial"/>
+              </a:rPr>
+              <a:t>Hidden real-estate value</a:t>
+            </a:r>
+          </a:p>
+          <a:p>
+            <a:pPr algn="l">
+              <a:lnSpc>
+                <a:spcPct val="110000"/>
+              </a:lnSpc>
+              <a:spcBef>
+                <a:spcPts val="700"/>
+              </a:spcBef>
+              <a:spcAft>
+                <a:spcPts val="250"/>
+              </a:spcAft>
+            </a:pPr>
+            <a:r>
+              <a:rPr sz="1100" b="1" i="0">
+                <a:solidFill>
+                  <a:srgbClr val="314359"/>
+                </a:solidFill>
+                <a:latin typeface="Times New Roman"/>
+              </a:rPr>
+              <a:t>Initial plan</a:t>
+            </a:r>
+          </a:p>
+          <a:p>
+            <a:pPr algn="l">
+              <a:lnSpc>
+                <a:spcPct val="108000"/>
+              </a:lnSpc>
+              <a:spcAft>
+                <a:spcPts val="200"/>
+              </a:spcAft>
+            </a:pPr>
+            <a:r>
+              <a:rPr sz="869" b="0" i="0">
+                <a:solidFill>
+                  <a:srgbClr val="0E1620"/>
+                </a:solidFill>
+                <a:latin typeface="Arial"/>
+              </a:rPr>
+              <a:t>Separate the heavy-vehicle and car businesses, use strong cash flow to acquire competing car retailers, and unlock real-estate value.</a:t>
+            </a:r>
+          </a:p>
+          <a:p>
+            <a:pPr algn="l">
+              <a:lnSpc>
+                <a:spcPct val="110000"/>
+              </a:lnSpc>
+              <a:spcBef>
+                <a:spcPts val="700"/>
+              </a:spcBef>
+              <a:spcAft>
+                <a:spcPts val="250"/>
+              </a:spcAft>
+            </a:pPr>
+            <a:r>
+              <a:rPr sz="1100" b="1" i="0">
+                <a:solidFill>
+                  <a:srgbClr val="314359"/>
+                </a:solidFill>
+                <a:latin typeface="Times New Roman"/>
+              </a:rPr>
+              <a:t>Results</a:t>
+            </a:r>
+          </a:p>
+          <a:p>
+            <a:pPr marL="149162" indent="-149162">
+              <a:lnSpc>
+                <a:spcPct val="106000"/>
+              </a:lnSpc>
+              <a:spcAft>
+                <a:spcPts val="150"/>
+              </a:spcAft>
+            </a:pPr>
+            <a:r>
+              <a:rPr sz="869" b="1">
+                <a:solidFill>
+                  <a:srgbClr val="556A83"/>
+                </a:solidFill>
+                <a:latin typeface="Arial"/>
+              </a:rPr>
+              <a:t>✓  </a:t>
+            </a:r>
+            <a:r>
+              <a:rPr sz="869">
+                <a:solidFill>
+                  <a:srgbClr val="0E1620"/>
+                </a:solidFill>
+                <a:latin typeface="Arial"/>
+              </a:rPr>
+              <a:t>Split into heavy vehicles (LV) and cars (PV); Volvo AB acquired the LV business for PV shares — leaving a pure car retailer</a:t>
+            </a:r>
+          </a:p>
+          <a:p>
+            <a:pPr marL="149162" indent="-149162">
+              <a:lnSpc>
+                <a:spcPct val="106000"/>
+              </a:lnSpc>
+              <a:spcAft>
+                <a:spcPts val="150"/>
+              </a:spcAft>
+            </a:pPr>
+            <a:r>
+              <a:rPr sz="869" b="1">
+                <a:solidFill>
+                  <a:srgbClr val="556A83"/>
+                </a:solidFill>
+                <a:latin typeface="Arial"/>
+              </a:rPr>
+              <a:t>✓  </a:t>
+            </a:r>
+            <a:r>
+              <a:rPr sz="869">
+                <a:solidFill>
+                  <a:srgbClr val="0E1620"/>
+                </a:solidFill>
+                <a:latin typeface="Arial"/>
+              </a:rPr>
+              <a:t>Acquired several competing car retailers, expanding geography and brands; transferred excess cash to shareholders</a:t>
+            </a:r>
+          </a:p>
+          <a:p>
+            <a:pPr marL="149162" indent="-149162">
+              <a:lnSpc>
+                <a:spcPct val="106000"/>
+              </a:lnSpc>
+              <a:spcAft>
+                <a:spcPts val="150"/>
+              </a:spcAft>
+            </a:pPr>
+            <a:r>
+              <a:rPr sz="869" b="1">
+                <a:solidFill>
+                  <a:srgbClr val="556A83"/>
+                </a:solidFill>
+                <a:latin typeface="Arial"/>
+              </a:rPr>
+              <a:t>✓  </a:t>
+            </a:r>
+            <a:r>
+              <a:rPr sz="869">
+                <a:solidFill>
+                  <a:srgbClr val="0E1620"/>
+                </a:solidFill>
+                <a:latin typeface="Arial"/>
+              </a:rPr>
+              <a:t>Spun off the real estate as Catena (2006), distributed to shareholders and listed</a:t>
+            </a:r>
+          </a:p>
+        </p:txBody>
+      </p:sp>
+      <p:sp>
+        <p:nvSpPr>
+          <p:cNvPr id="9" name="Rounded Rectangle 8"/>
+          <p:cNvSpPr/>
+          <p:nvPr/>
+        </p:nvSpPr>
+        <p:spPr>
+          <a:xfrm>
+            <a:off x="4983480" y="1783080"/>
+            <a:ext cx="4297680" cy="384048"/>
+          </a:xfrm>
+          <a:prstGeom prst="roundRect">
+            <a:avLst/>
+          </a:prstGeom>
+          <a:solidFill>
+            <a:srgbClr val="F6F7F9"/>
+          </a:solidFill>
+          <a:ln>
+            <a:noFill/>
+          </a:ln>
+          <a:effectLst/>
+        </p:spPr>
+        <p:txBody>
+          <a:bodyPr rtlCol="0" anchor="ctr"/>
+          <a:lstStyle/>
+          <a:p>
+            <a:pPr algn="ctr"/>
+          </a:p>
+        </p:txBody>
+      </p:sp>
+      <p:sp>
+        <p:nvSpPr>
+          <p:cNvPr id="10" name="TextBox 9"/>
+          <p:cNvSpPr txBox="1"/>
+          <p:nvPr/>
+        </p:nvSpPr>
+        <p:spPr>
+          <a:xfrm>
+            <a:off x="4983480" y="1783080"/>
+            <a:ext cx="4297680" cy="384048"/>
+          </a:xfrm>
+          <a:prstGeom prst="rect">
+            <a:avLst/>
+          </a:prstGeom>
+          <a:noFill/>
+        </p:spPr>
+        <p:txBody>
+          <a:bodyPr wrap="square" anchor="ctr" lIns="0" rIns="0" tIns="0" bIns="0">
+            <a:spAutoFit/>
+          </a:bodyPr>
+          <a:lstStyle/>
+          <a:p>
+            <a:pPr algn="ctr">
+              <a:lnSpc>
+                <a:spcPct val="110000"/>
+              </a:lnSpc>
+              <a:spcAft>
+                <a:spcPts val="0"/>
+              </a:spcAft>
+            </a:pPr>
+            <a:r>
+              <a:rPr sz="1250" b="1" i="0">
+                <a:solidFill>
+                  <a:srgbClr val="314359"/>
+                </a:solidFill>
+                <a:latin typeface="Times New Roman"/>
+              </a:rPr>
+              <a:t>IRR 26.0% · 2003– · Consumer discretionary</a:t>
+            </a:r>
+          </a:p>
+        </p:txBody>
+      </p:sp>
+      <p:sp>
+        <p:nvSpPr>
+          <p:cNvPr id="11" name="TextBox 10"/>
+          <p:cNvSpPr txBox="1"/>
+          <p:nvPr/>
+        </p:nvSpPr>
+        <p:spPr>
+          <a:xfrm>
+            <a:off x="4983480" y="2350008"/>
+            <a:ext cx="4297680" cy="274320"/>
+          </a:xfrm>
+          <a:prstGeom prst="rect">
+            <a:avLst/>
+          </a:prstGeom>
+          <a:noFill/>
+        </p:spPr>
+        <p:txBody>
+          <a:bodyPr wrap="square" anchor="t" lIns="0" rIns="0" tIns="0" bIns="0">
+            <a:spAutoFit/>
+          </a:bodyPr>
+          <a:lstStyle/>
+          <a:p>
+            <a:pPr algn="ctr">
+              <a:lnSpc>
+                <a:spcPct val="110000"/>
+              </a:lnSpc>
+              <a:spcAft>
+                <a:spcPts val="0"/>
+              </a:spcAft>
+            </a:pPr>
+            <a:r>
+              <a:rPr sz="1100" b="1" i="0">
+                <a:solidFill>
+                  <a:srgbClr val="314359"/>
+                </a:solidFill>
+                <a:latin typeface="Times New Roman"/>
+              </a:rPr>
+              <a:t>Initial investment vs. current value</a:t>
+            </a:r>
+          </a:p>
+        </p:txBody>
+      </p:sp>
+      <p:sp>
+        <p:nvSpPr>
+          <p:cNvPr id="12" name="Rectangle 11"/>
+          <p:cNvSpPr/>
+          <p:nvPr/>
+        </p:nvSpPr>
+        <p:spPr>
+          <a:xfrm>
+            <a:off x="5074920" y="4773168"/>
+            <a:ext cx="4114800" cy="12700"/>
+          </a:xfrm>
+          <a:prstGeom prst="rect">
+            <a:avLst/>
+          </a:prstGeom>
+          <a:solidFill>
+            <a:srgbClr val="E2E5E9"/>
+          </a:solidFill>
+          <a:ln>
+            <a:noFill/>
+          </a:ln>
+          <a:effectLst/>
+        </p:spPr>
+        <p:txBody>
+          <a:bodyPr rtlCol="0" anchor="ctr"/>
+          <a:lstStyle/>
+          <a:p>
+            <a:pPr algn="ctr"/>
+          </a:p>
+        </p:txBody>
+      </p:sp>
+      <p:sp>
+        <p:nvSpPr>
+          <p:cNvPr id="13" name="Rectangle 12"/>
+          <p:cNvSpPr/>
+          <p:nvPr/>
+        </p:nvSpPr>
+        <p:spPr>
+          <a:xfrm>
+            <a:off x="5577840" y="3993410"/>
+            <a:ext cx="1051560" cy="779758"/>
+          </a:xfrm>
+          <a:prstGeom prst="rect">
+            <a:avLst/>
+          </a:prstGeom>
+          <a:solidFill>
+            <a:srgbClr val="152130"/>
+          </a:solidFill>
+          <a:ln>
+            <a:noFill/>
+          </a:ln>
+          <a:effectLst/>
+        </p:spPr>
+        <p:txBody>
+          <a:bodyPr rtlCol="0" anchor="ctr"/>
+          <a:lstStyle/>
+          <a:p>
+            <a:pPr algn="ctr"/>
+          </a:p>
+        </p:txBody>
+      </p:sp>
+      <p:sp>
+        <p:nvSpPr>
+          <p:cNvPr id="14" name="TextBox 13"/>
+          <p:cNvSpPr txBox="1"/>
+          <p:nvPr/>
+        </p:nvSpPr>
+        <p:spPr>
+          <a:xfrm>
+            <a:off x="5303520" y="3719090"/>
+            <a:ext cx="1600200" cy="256032"/>
+          </a:xfrm>
+          <a:prstGeom prst="rect">
+            <a:avLst/>
+          </a:prstGeom>
+          <a:noFill/>
+        </p:spPr>
+        <p:txBody>
+          <a:bodyPr wrap="square" anchor="t" lIns="0" rIns="0" tIns="0" bIns="0">
+            <a:spAutoFit/>
+          </a:bodyPr>
+          <a:lstStyle/>
+          <a:p>
+            <a:pPr algn="ctr">
+              <a:lnSpc>
+                <a:spcPct val="110000"/>
+              </a:lnSpc>
+              <a:spcAft>
+                <a:spcPts val="0"/>
+              </a:spcAft>
+            </a:pPr>
+            <a:r>
+              <a:rPr sz="1300" b="1" i="0">
+                <a:solidFill>
+                  <a:srgbClr val="314359"/>
+                </a:solidFill>
+                <a:latin typeface="Times New Roman"/>
+              </a:rPr>
+              <a:t>506</a:t>
+            </a:r>
+          </a:p>
+        </p:txBody>
+      </p:sp>
+      <p:sp>
+        <p:nvSpPr>
+          <p:cNvPr id="15" name="TextBox 14"/>
+          <p:cNvSpPr txBox="1"/>
+          <p:nvPr/>
+        </p:nvSpPr>
+        <p:spPr>
+          <a:xfrm>
+            <a:off x="5074920" y="4828032"/>
+            <a:ext cx="2057400" cy="310896"/>
+          </a:xfrm>
+          <a:prstGeom prst="rect">
+            <a:avLst/>
+          </a:prstGeom>
+          <a:noFill/>
+        </p:spPr>
+        <p:txBody>
+          <a:bodyPr wrap="square" anchor="t" lIns="0" rIns="0" tIns="0" bIns="0">
+            <a:spAutoFit/>
+          </a:bodyPr>
+          <a:lstStyle/>
+          <a:p>
+            <a:pPr algn="ctr">
+              <a:lnSpc>
+                <a:spcPct val="110000"/>
+              </a:lnSpc>
+              <a:spcAft>
+                <a:spcPts val="0"/>
+              </a:spcAft>
+            </a:pPr>
+            <a:r>
+              <a:rPr sz="950" b="0" i="0">
+                <a:solidFill>
+                  <a:srgbClr val="0E1620"/>
+                </a:solidFill>
+                <a:latin typeface="Arial"/>
+              </a:rPr>
+              <a:t>Initial investment</a:t>
+            </a:r>
+          </a:p>
+        </p:txBody>
+      </p:sp>
+      <p:sp>
+        <p:nvSpPr>
+          <p:cNvPr id="16" name="Rectangle 15"/>
+          <p:cNvSpPr/>
+          <p:nvPr/>
+        </p:nvSpPr>
+        <p:spPr>
+          <a:xfrm>
+            <a:off x="7635240" y="3145846"/>
+            <a:ext cx="1051560" cy="1627322"/>
+          </a:xfrm>
+          <a:prstGeom prst="rect">
+            <a:avLst/>
+          </a:prstGeom>
+          <a:solidFill>
+            <a:srgbClr val="152130"/>
+          </a:solidFill>
+          <a:ln>
+            <a:noFill/>
+          </a:ln>
+          <a:effectLst/>
+        </p:spPr>
+        <p:txBody>
+          <a:bodyPr rtlCol="0" anchor="ctr"/>
+          <a:lstStyle/>
+          <a:p>
+            <a:pPr algn="ctr"/>
+          </a:p>
+        </p:txBody>
+      </p:sp>
+      <p:sp>
+        <p:nvSpPr>
+          <p:cNvPr id="17" name="TextBox 16"/>
+          <p:cNvSpPr txBox="1"/>
+          <p:nvPr/>
+        </p:nvSpPr>
+        <p:spPr>
+          <a:xfrm>
+            <a:off x="7360920" y="2871526"/>
+            <a:ext cx="1600200" cy="256032"/>
+          </a:xfrm>
+          <a:prstGeom prst="rect">
+            <a:avLst/>
+          </a:prstGeom>
+          <a:noFill/>
+        </p:spPr>
+        <p:txBody>
+          <a:bodyPr wrap="square" anchor="t" lIns="0" rIns="0" tIns="0" bIns="0">
+            <a:spAutoFit/>
+          </a:bodyPr>
+          <a:lstStyle/>
+          <a:p>
+            <a:pPr algn="ctr">
+              <a:lnSpc>
+                <a:spcPct val="110000"/>
+              </a:lnSpc>
+              <a:spcAft>
+                <a:spcPts val="0"/>
+              </a:spcAft>
+            </a:pPr>
+            <a:r>
+              <a:rPr sz="1300" b="1" i="0">
+                <a:solidFill>
+                  <a:srgbClr val="314359"/>
+                </a:solidFill>
+                <a:latin typeface="Times New Roman"/>
+              </a:rPr>
+              <a:t>1,056</a:t>
+            </a:r>
+          </a:p>
+        </p:txBody>
+      </p:sp>
+      <p:sp>
+        <p:nvSpPr>
+          <p:cNvPr id="18" name="TextBox 17"/>
+          <p:cNvSpPr txBox="1"/>
+          <p:nvPr/>
+        </p:nvSpPr>
+        <p:spPr>
+          <a:xfrm>
+            <a:off x="7132320" y="4828032"/>
+            <a:ext cx="2057400" cy="310896"/>
+          </a:xfrm>
+          <a:prstGeom prst="rect">
+            <a:avLst/>
+          </a:prstGeom>
+          <a:noFill/>
+        </p:spPr>
+        <p:txBody>
+          <a:bodyPr wrap="square" anchor="t" lIns="0" rIns="0" tIns="0" bIns="0">
+            <a:spAutoFit/>
+          </a:bodyPr>
+          <a:lstStyle/>
+          <a:p>
+            <a:pPr algn="ctr">
+              <a:lnSpc>
+                <a:spcPct val="110000"/>
+              </a:lnSpc>
+              <a:spcAft>
+                <a:spcPts val="0"/>
+              </a:spcAft>
+            </a:pPr>
+            <a:r>
+              <a:rPr sz="950" b="0" i="0">
+                <a:solidFill>
+                  <a:srgbClr val="0E1620"/>
+                </a:solidFill>
+                <a:latin typeface="Arial"/>
+              </a:rPr>
+              <a:t>Current value</a:t>
+            </a:r>
+          </a:p>
+        </p:txBody>
+      </p:sp>
+      <p:sp>
+        <p:nvSpPr>
+          <p:cNvPr id="19" name="TextBox 18"/>
+          <p:cNvSpPr txBox="1"/>
+          <p:nvPr/>
+        </p:nvSpPr>
+        <p:spPr>
+          <a:xfrm>
+            <a:off x="4983480" y="5157216"/>
+            <a:ext cx="4297680" cy="201168"/>
+          </a:xfrm>
+          <a:prstGeom prst="rect">
+            <a:avLst/>
+          </a:prstGeom>
+          <a:noFill/>
+        </p:spPr>
+        <p:txBody>
+          <a:bodyPr wrap="square" anchor="t" lIns="0" rIns="0" tIns="0" bIns="0">
+            <a:spAutoFit/>
+          </a:bodyPr>
+          <a:lstStyle/>
+          <a:p>
+            <a:pPr algn="l">
+              <a:lnSpc>
+                <a:spcPct val="110000"/>
+              </a:lnSpc>
+              <a:spcAft>
+                <a:spcPts val="0"/>
+              </a:spcAft>
+            </a:pPr>
+            <a:r>
+              <a:rPr sz="850" b="0" i="1">
+                <a:solidFill>
+                  <a:srgbClr val="556A83"/>
+                </a:solidFill>
+                <a:latin typeface="Arial"/>
+              </a:rPr>
+              <a:t>SEK M</a:t>
+            </a:r>
+          </a:p>
+        </p:txBody>
+      </p:sp>
+      <p:sp>
+        <p:nvSpPr>
+          <p:cNvPr id="20" name="TextBox 19"/>
+          <p:cNvSpPr txBox="1"/>
+          <p:nvPr/>
+        </p:nvSpPr>
+        <p:spPr>
+          <a:xfrm>
+            <a:off x="502920" y="6967728"/>
+            <a:ext cx="4846320" cy="274320"/>
+          </a:xfrm>
+          <a:prstGeom prst="rect">
+            <a:avLst/>
+          </a:prstGeom>
+          <a:noFill/>
+        </p:spPr>
+        <p:txBody>
+          <a:bodyPr wrap="square" anchor="t" lIns="0" rIns="0" tIns="0" bIns="0">
+            <a:spAutoFit/>
+          </a:bodyPr>
+          <a:lstStyle/>
+          <a:p>
+            <a:pPr algn="l">
+              <a:lnSpc>
+                <a:spcPct val="100000"/>
+              </a:lnSpc>
+              <a:spcAft>
+                <a:spcPts val="0"/>
+              </a:spcAft>
+            </a:pPr>
+            <a:r>
+              <a:rPr sz="750" b="0" i="1">
+                <a:solidFill>
+                  <a:srgbClr val="556A83"/>
+                </a:solidFill>
+                <a:latin typeface="Arial"/>
+              </a:rPr>
+              <a:t>Note: 9 SEK ≈ 1€. IRR unleveraged and net of all costs. Executed by members of the team at Investment AB Öresund.</a:t>
+            </a:r>
+          </a:p>
+        </p:txBody>
+      </p:sp>
+    </p:spTree>
+  </p:cSld>
+  <p:clrMapOvr>
+    <a:masterClrMapping/>
+  </p:clrMapOvr>
+</p:sld>
+</file>
+
+<file path=ppt/slides/slide24.xml><?xml version="1.0" encoding="utf-8"?>
+<p:sld xmlns:a="http://schemas.openxmlformats.org/drawingml/2006/main" xmlns:p="http://schemas.openxmlformats.org/presentationml/2006/main" xmlns:r="http://schemas.openxmlformats.org/officeDocument/2006/relationships">
+  <p:cSld>
+    <p:spTree>
+      <p:nvGrpSpPr>
+        <p:cNvPr id="1" name=""/>
+        <p:cNvGrpSpPr/>
+        <p:nvPr/>
+      </p:nvGrpSpPr>
+      <p:grpSpPr/>
+      <p:sp>
+        <p:nvSpPr>
+          <p:cNvPr id="2" name="Rectangle 1"/>
+          <p:cNvSpPr/>
+          <p:nvPr/>
+        </p:nvSpPr>
+        <p:spPr>
+          <a:xfrm>
+            <a:off x="0" y="0"/>
+            <a:ext cx="9753904" cy="7315200"/>
+          </a:xfrm>
+          <a:prstGeom prst="rect">
+            <a:avLst/>
+          </a:prstGeom>
+          <a:solidFill>
             <a:srgbClr val="152130"/>
           </a:solidFill>
           <a:ln>
@@ -17427,7 +18555,223 @@
       </p:sp>
       <p:sp>
         <p:nvSpPr>
-          <p:cNvPr id="70" name="TextBox 69"/>
+          <p:cNvPr id="70" name="Rectangle 69"/>
+          <p:cNvSpPr/>
+          <p:nvPr/>
+        </p:nvSpPr>
+        <p:spPr>
+          <a:xfrm>
+            <a:off x="502920" y="5230368"/>
+            <a:ext cx="2240280" cy="274320"/>
+          </a:xfrm>
+          <a:prstGeom prst="rect">
+            <a:avLst/>
+          </a:prstGeom>
+          <a:solidFill>
+            <a:srgbClr val="FFFFFF"/>
+          </a:solidFill>
+          <a:ln>
+            <a:noFill/>
+          </a:ln>
+          <a:effectLst/>
+        </p:spPr>
+        <p:txBody>
+          <a:bodyPr rtlCol="0" anchor="ctr"/>
+          <a:lstStyle/>
+          <a:p>
+            <a:pPr algn="ctr"/>
+          </a:p>
+        </p:txBody>
+      </p:sp>
+      <p:sp>
+        <p:nvSpPr>
+          <p:cNvPr id="71" name="TextBox 70"/>
+          <p:cNvSpPr txBox="1"/>
+          <p:nvPr/>
+        </p:nvSpPr>
+        <p:spPr>
+          <a:xfrm>
+            <a:off x="557784" y="5230368"/>
+            <a:ext cx="2148840" cy="274320"/>
+          </a:xfrm>
+          <a:prstGeom prst="rect">
+            <a:avLst/>
+          </a:prstGeom>
+          <a:noFill/>
+        </p:spPr>
+        <p:txBody>
+          <a:bodyPr wrap="square" anchor="ctr" lIns="0" rIns="0" tIns="0" bIns="0">
+            <a:spAutoFit/>
+          </a:bodyPr>
+          <a:lstStyle/>
+          <a:p>
+            <a:pPr algn="l">
+              <a:lnSpc>
+                <a:spcPct val="110000"/>
+              </a:lnSpc>
+              <a:spcAft>
+                <a:spcPts val="0"/>
+              </a:spcAft>
+            </a:pPr>
+            <a:r>
+              <a:rPr sz="869" b="1" i="0">
+                <a:solidFill>
+                  <a:srgbClr val="314359"/>
+                </a:solidFill>
+                <a:latin typeface="Arial"/>
+              </a:rPr>
+              <a:t>Robit Plc (exited)</a:t>
+            </a:r>
+          </a:p>
+        </p:txBody>
+      </p:sp>
+      <p:sp>
+        <p:nvSpPr>
+          <p:cNvPr id="72" name="Rectangle 71"/>
+          <p:cNvSpPr/>
+          <p:nvPr/>
+        </p:nvSpPr>
+        <p:spPr>
+          <a:xfrm>
+            <a:off x="2743200" y="5230368"/>
+            <a:ext cx="960120" cy="274320"/>
+          </a:xfrm>
+          <a:prstGeom prst="rect">
+            <a:avLst/>
+          </a:prstGeom>
+          <a:solidFill>
+            <a:srgbClr val="FFFFFF"/>
+          </a:solidFill>
+          <a:ln>
+            <a:noFill/>
+          </a:ln>
+          <a:effectLst/>
+        </p:spPr>
+        <p:txBody>
+          <a:bodyPr rtlCol="0" anchor="ctr"/>
+          <a:lstStyle/>
+          <a:p>
+            <a:pPr algn="ctr"/>
+          </a:p>
+        </p:txBody>
+      </p:sp>
+      <p:sp>
+        <p:nvSpPr>
+          <p:cNvPr id="73" name="TextBox 72"/>
+          <p:cNvSpPr txBox="1"/>
+          <p:nvPr/>
+        </p:nvSpPr>
+        <p:spPr>
+          <a:xfrm>
+            <a:off x="2798064" y="5230368"/>
+            <a:ext cx="868680" cy="274320"/>
+          </a:xfrm>
+          <a:prstGeom prst="rect">
+            <a:avLst/>
+          </a:prstGeom>
+          <a:noFill/>
+        </p:spPr>
+        <p:txBody>
+          <a:bodyPr wrap="square" anchor="ctr" lIns="0" rIns="0" tIns="0" bIns="0">
+            <a:spAutoFit/>
+          </a:bodyPr>
+          <a:lstStyle/>
+          <a:p>
+            <a:pPr algn="r">
+              <a:lnSpc>
+                <a:spcPct val="110000"/>
+              </a:lnSpc>
+              <a:spcAft>
+                <a:spcPts val="0"/>
+              </a:spcAft>
+            </a:pPr>
+            <a:r>
+              <a:rPr sz="869" b="0" i="0">
+                <a:solidFill>
+                  <a:srgbClr val="0E1620"/>
+                </a:solidFill>
+                <a:latin typeface="Arial"/>
+              </a:rPr>
+              <a:t>14%</a:t>
+            </a:r>
+          </a:p>
+        </p:txBody>
+      </p:sp>
+      <p:sp>
+        <p:nvSpPr>
+          <p:cNvPr id="74" name="Rectangle 73"/>
+          <p:cNvSpPr/>
+          <p:nvPr/>
+        </p:nvSpPr>
+        <p:spPr>
+          <a:xfrm>
+            <a:off x="3703320" y="5230368"/>
+            <a:ext cx="960120" cy="274320"/>
+          </a:xfrm>
+          <a:prstGeom prst="rect">
+            <a:avLst/>
+          </a:prstGeom>
+          <a:solidFill>
+            <a:srgbClr val="FFFFFF"/>
+          </a:solidFill>
+          <a:ln>
+            <a:noFill/>
+          </a:ln>
+          <a:effectLst/>
+        </p:spPr>
+        <p:txBody>
+          <a:bodyPr rtlCol="0" anchor="ctr"/>
+          <a:lstStyle/>
+          <a:p>
+            <a:pPr algn="ctr"/>
+          </a:p>
+        </p:txBody>
+      </p:sp>
+      <p:sp>
+        <p:nvSpPr>
+          <p:cNvPr id="75" name="TextBox 74"/>
+          <p:cNvSpPr txBox="1"/>
+          <p:nvPr/>
+        </p:nvSpPr>
+        <p:spPr>
+          <a:xfrm>
+            <a:off x="3758184" y="5230368"/>
+            <a:ext cx="868680" cy="274320"/>
+          </a:xfrm>
+          <a:prstGeom prst="rect">
+            <a:avLst/>
+          </a:prstGeom>
+          <a:noFill/>
+        </p:spPr>
+        <p:txBody>
+          <a:bodyPr wrap="square" anchor="ctr" lIns="0" rIns="0" tIns="0" bIns="0">
+            <a:spAutoFit/>
+          </a:bodyPr>
+          <a:lstStyle/>
+          <a:p>
+            <a:pPr algn="r">
+              <a:lnSpc>
+                <a:spcPct val="110000"/>
+              </a:lnSpc>
+              <a:spcAft>
+                <a:spcPts val="0"/>
+              </a:spcAft>
+            </a:pPr>
+            <a:r>
+              <a:rPr sz="869" b="0" i="0">
+                <a:solidFill>
+                  <a:srgbClr val="0E1620"/>
+                </a:solidFill>
+                <a:latin typeface="Arial"/>
+              </a:rPr>
+              <a:t>—</a:t>
+            </a:r>
+          </a:p>
+        </p:txBody>
+      </p:sp>
+      <p:sp>
+        <p:nvSpPr>
+          <p:cNvPr id="76" name="TextBox 75"/>
           <p:cNvSpPr txBox="1"/>
           <p:nvPr/>
         </p:nvSpPr>
@@ -17469,7 +18813,7 @@
       </p:sp>
       <p:sp>
         <p:nvSpPr>
-          <p:cNvPr id="71" name="Rectangle 70"/>
+          <p:cNvPr id="77" name="Rectangle 76"/>
           <p:cNvSpPr/>
           <p:nvPr/>
         </p:nvSpPr>
@@ -17499,7 +18843,7 @@
       </p:sp>
       <p:sp>
         <p:nvSpPr>
-          <p:cNvPr id="72" name="TextBox 71"/>
+          <p:cNvPr id="78" name="TextBox 77"/>
           <p:cNvSpPr txBox="1"/>
           <p:nvPr/>
         </p:nvSpPr>
@@ -17541,7 +18885,7 @@
       </p:sp>
       <p:sp>
         <p:nvSpPr>
-          <p:cNvPr id="73" name="Rectangle 72"/>
+          <p:cNvPr id="79" name="Rectangle 78"/>
           <p:cNvSpPr/>
           <p:nvPr/>
         </p:nvSpPr>
@@ -17571,7 +18915,7 @@
       </p:sp>
       <p:sp>
         <p:nvSpPr>
-          <p:cNvPr id="74" name="TextBox 73"/>
+          <p:cNvPr id="80" name="TextBox 79"/>
           <p:cNvSpPr txBox="1"/>
           <p:nvPr/>
         </p:nvSpPr>
@@ -17613,7 +18957,7 @@
       </p:sp>
       <p:sp>
         <p:nvSpPr>
-          <p:cNvPr id="75" name="Rectangle 74"/>
+          <p:cNvPr id="81" name="Rectangle 80"/>
           <p:cNvSpPr/>
           <p:nvPr/>
         </p:nvSpPr>
@@ -17643,7 +18987,7 @@
       </p:sp>
       <p:sp>
         <p:nvSpPr>
-          <p:cNvPr id="76" name="TextBox 75"/>
+          <p:cNvPr id="82" name="TextBox 81"/>
           <p:cNvSpPr txBox="1"/>
           <p:nvPr/>
         </p:nvSpPr>
@@ -17685,7 +19029,7 @@
       </p:sp>
       <p:sp>
         <p:nvSpPr>
-          <p:cNvPr id="77" name="Rectangle 76"/>
+          <p:cNvPr id="83" name="Rectangle 82"/>
           <p:cNvSpPr/>
           <p:nvPr/>
         </p:nvSpPr>
@@ -17715,7 +19059,7 @@
       </p:sp>
       <p:sp>
         <p:nvSpPr>
-          <p:cNvPr id="78" name="TextBox 77"/>
+          <p:cNvPr id="84" name="TextBox 83"/>
           <p:cNvSpPr txBox="1"/>
           <p:nvPr/>
         </p:nvSpPr>
@@ -17757,7 +19101,7 @@
       </p:sp>
       <p:sp>
         <p:nvSpPr>
-          <p:cNvPr id="79" name="Rectangle 78"/>
+          <p:cNvPr id="85" name="Rectangle 84"/>
           <p:cNvSpPr/>
           <p:nvPr/>
         </p:nvSpPr>
@@ -17787,7 +19131,7 @@
       </p:sp>
       <p:sp>
         <p:nvSpPr>
-          <p:cNvPr id="80" name="TextBox 79"/>
+          <p:cNvPr id="86" name="TextBox 85"/>
           <p:cNvSpPr txBox="1"/>
           <p:nvPr/>
         </p:nvSpPr>
@@ -17829,7 +19173,7 @@
       </p:sp>
       <p:sp>
         <p:nvSpPr>
-          <p:cNvPr id="81" name="Rectangle 80"/>
+          <p:cNvPr id="87" name="Rectangle 86"/>
           <p:cNvSpPr/>
           <p:nvPr/>
         </p:nvSpPr>
@@ -17859,7 +19203,7 @@
       </p:sp>
       <p:sp>
         <p:nvSpPr>
-          <p:cNvPr id="82" name="TextBox 81"/>
+          <p:cNvPr id="88" name="TextBox 87"/>
           <p:cNvSpPr txBox="1"/>
           <p:nvPr/>
         </p:nvSpPr>
@@ -17901,7 +19245,7 @@
       </p:sp>
       <p:sp>
         <p:nvSpPr>
-          <p:cNvPr id="83" name="Rectangle 82"/>
+          <p:cNvPr id="89" name="Rectangle 88"/>
           <p:cNvSpPr/>
           <p:nvPr/>
         </p:nvSpPr>
@@ -17931,7 +19275,7 @@
       </p:sp>
       <p:sp>
         <p:nvSpPr>
-          <p:cNvPr id="84" name="TextBox 83"/>
+          <p:cNvPr id="90" name="TextBox 89"/>
           <p:cNvSpPr txBox="1"/>
           <p:nvPr/>
         </p:nvSpPr>
@@ -17973,7 +19317,7 @@
       </p:sp>
       <p:sp>
         <p:nvSpPr>
-          <p:cNvPr id="85" name="Rectangle 84"/>
+          <p:cNvPr id="91" name="Rectangle 90"/>
           <p:cNvSpPr/>
           <p:nvPr/>
         </p:nvSpPr>
@@ -18003,7 +19347,7 @@
       </p:sp>
       <p:sp>
         <p:nvSpPr>
-          <p:cNvPr id="86" name="TextBox 85"/>
+          <p:cNvPr id="92" name="TextBox 91"/>
           <p:cNvSpPr txBox="1"/>
           <p:nvPr/>
         </p:nvSpPr>
@@ -18045,7 +19389,7 @@
       </p:sp>
       <p:sp>
         <p:nvSpPr>
-          <p:cNvPr id="87" name="Rectangle 86"/>
+          <p:cNvPr id="93" name="Rectangle 92"/>
           <p:cNvSpPr/>
           <p:nvPr/>
         </p:nvSpPr>
@@ -18075,7 +19419,7 @@
       </p:sp>
       <p:sp>
         <p:nvSpPr>
-          <p:cNvPr id="88" name="TextBox 87"/>
+          <p:cNvPr id="94" name="TextBox 93"/>
           <p:cNvSpPr txBox="1"/>
           <p:nvPr/>
         </p:nvSpPr>
@@ -18117,7 +19461,7 @@
       </p:sp>
       <p:sp>
         <p:nvSpPr>
-          <p:cNvPr id="89" name="Rectangle 88"/>
+          <p:cNvPr id="95" name="Rectangle 94"/>
           <p:cNvSpPr/>
           <p:nvPr/>
         </p:nvSpPr>
@@ -18147,7 +19491,7 @@
       </p:sp>
       <p:sp>
         <p:nvSpPr>
-          <p:cNvPr id="90" name="TextBox 89"/>
+          <p:cNvPr id="96" name="TextBox 95"/>
           <p:cNvSpPr txBox="1"/>
           <p:nvPr/>
         </p:nvSpPr>
@@ -18189,7 +19533,7 @@
       </p:sp>
       <p:sp>
         <p:nvSpPr>
-          <p:cNvPr id="91" name="Rectangle 90"/>
+          <p:cNvPr id="97" name="Rectangle 96"/>
           <p:cNvSpPr/>
           <p:nvPr/>
         </p:nvSpPr>
@@ -18219,7 +19563,7 @@
       </p:sp>
       <p:sp>
         <p:nvSpPr>
-          <p:cNvPr id="92" name="TextBox 91"/>
+          <p:cNvPr id="98" name="TextBox 97"/>
           <p:cNvSpPr txBox="1"/>
           <p:nvPr/>
         </p:nvSpPr>
@@ -18261,7 +19605,7 @@
       </p:sp>
       <p:sp>
         <p:nvSpPr>
-          <p:cNvPr id="93" name="Rectangle 92"/>
+          <p:cNvPr id="99" name="Rectangle 98"/>
           <p:cNvSpPr/>
           <p:nvPr/>
         </p:nvSpPr>
@@ -18291,7 +19635,7 @@
       </p:sp>
       <p:sp>
         <p:nvSpPr>
-          <p:cNvPr id="94" name="TextBox 93"/>
+          <p:cNvPr id="100" name="TextBox 99"/>
           <p:cNvSpPr txBox="1"/>
           <p:nvPr/>
         </p:nvSpPr>
@@ -18333,7 +19677,7 @@
       </p:sp>
       <p:sp>
         <p:nvSpPr>
-          <p:cNvPr id="95" name="Rectangle 94"/>
+          <p:cNvPr id="101" name="Rectangle 100"/>
           <p:cNvSpPr/>
           <p:nvPr/>
         </p:nvSpPr>
@@ -18363,7 +19707,7 @@
       </p:sp>
       <p:sp>
         <p:nvSpPr>
-          <p:cNvPr id="96" name="TextBox 95"/>
+          <p:cNvPr id="102" name="TextBox 101"/>
           <p:cNvSpPr txBox="1"/>
           <p:nvPr/>
         </p:nvSpPr>
@@ -18405,7 +19749,7 @@
       </p:sp>
       <p:sp>
         <p:nvSpPr>
-          <p:cNvPr id="97" name="Rectangle 96"/>
+          <p:cNvPr id="103" name="Rectangle 102"/>
           <p:cNvSpPr/>
           <p:nvPr/>
         </p:nvSpPr>
@@ -18435,7 +19779,7 @@
       </p:sp>
       <p:sp>
         <p:nvSpPr>
-          <p:cNvPr id="98" name="TextBox 97"/>
+          <p:cNvPr id="104" name="TextBox 103"/>
           <p:cNvSpPr txBox="1"/>
           <p:nvPr/>
         </p:nvSpPr>
@@ -18477,7 +19821,7 @@
       </p:sp>
       <p:sp>
         <p:nvSpPr>
-          <p:cNvPr id="99" name="Rectangle 98"/>
+          <p:cNvPr id="105" name="Rectangle 104"/>
           <p:cNvSpPr/>
           <p:nvPr/>
         </p:nvSpPr>
@@ -18507,7 +19851,7 @@
       </p:sp>
       <p:sp>
         <p:nvSpPr>
-          <p:cNvPr id="100" name="TextBox 99"/>
+          <p:cNvPr id="106" name="TextBox 105"/>
           <p:cNvSpPr txBox="1"/>
           <p:nvPr/>
         </p:nvSpPr>
@@ -18549,7 +19893,7 @@
       </p:sp>
       <p:sp>
         <p:nvSpPr>
-          <p:cNvPr id="101" name="Rectangle 100"/>
+          <p:cNvPr id="107" name="Rectangle 106"/>
           <p:cNvSpPr/>
           <p:nvPr/>
         </p:nvSpPr>
@@ -18579,7 +19923,7 @@
       </p:sp>
       <p:sp>
         <p:nvSpPr>
-          <p:cNvPr id="102" name="TextBox 101"/>
+          <p:cNvPr id="108" name="TextBox 107"/>
           <p:cNvSpPr txBox="1"/>
           <p:nvPr/>
         </p:nvSpPr>
@@ -18621,7 +19965,7 @@
       </p:sp>
       <p:sp>
         <p:nvSpPr>
-          <p:cNvPr id="103" name="Rectangle 102"/>
+          <p:cNvPr id="109" name="Rectangle 108"/>
           <p:cNvSpPr/>
           <p:nvPr/>
         </p:nvSpPr>
@@ -18651,7 +19995,7 @@
       </p:sp>
       <p:sp>
         <p:nvSpPr>
-          <p:cNvPr id="104" name="TextBox 103"/>
+          <p:cNvPr id="110" name="TextBox 109"/>
           <p:cNvSpPr txBox="1"/>
           <p:nvPr/>
         </p:nvSpPr>
@@ -18693,7 +20037,7 @@
       </p:sp>
       <p:sp>
         <p:nvSpPr>
-          <p:cNvPr id="105" name="Rectangle 104"/>
+          <p:cNvPr id="111" name="Rectangle 110"/>
           <p:cNvSpPr/>
           <p:nvPr/>
         </p:nvSpPr>
@@ -18723,7 +20067,7 @@
       </p:sp>
       <p:sp>
         <p:nvSpPr>
-          <p:cNvPr id="106" name="TextBox 105"/>
+          <p:cNvPr id="112" name="TextBox 111"/>
           <p:cNvSpPr txBox="1"/>
           <p:nvPr/>
         </p:nvSpPr>
@@ -18765,7 +20109,7 @@
       </p:sp>
       <p:sp>
         <p:nvSpPr>
-          <p:cNvPr id="107" name="Rectangle 106"/>
+          <p:cNvPr id="113" name="Rectangle 112"/>
           <p:cNvSpPr/>
           <p:nvPr/>
         </p:nvSpPr>
@@ -18795,7 +20139,7 @@
       </p:sp>
       <p:sp>
         <p:nvSpPr>
-          <p:cNvPr id="108" name="TextBox 107"/>
+          <p:cNvPr id="114" name="TextBox 113"/>
           <p:cNvSpPr txBox="1"/>
           <p:nvPr/>
         </p:nvSpPr>
@@ -18837,7 +20181,7 @@
       </p:sp>
       <p:sp>
         <p:nvSpPr>
-          <p:cNvPr id="109" name="Rectangle 108"/>
+          <p:cNvPr id="115" name="Rectangle 114"/>
           <p:cNvSpPr/>
           <p:nvPr/>
         </p:nvSpPr>
@@ -18867,7 +20211,7 @@
       </p:sp>
       <p:sp>
         <p:nvSpPr>
-          <p:cNvPr id="110" name="TextBox 109"/>
+          <p:cNvPr id="116" name="TextBox 115"/>
           <p:cNvSpPr txBox="1"/>
           <p:nvPr/>
         </p:nvSpPr>
@@ -18909,7 +20253,7 @@
       </p:sp>
       <p:sp>
         <p:nvSpPr>
-          <p:cNvPr id="111" name="Rectangle 110"/>
+          <p:cNvPr id="117" name="Rectangle 116"/>
           <p:cNvSpPr/>
           <p:nvPr/>
         </p:nvSpPr>
@@ -18939,7 +20283,7 @@
       </p:sp>
       <p:sp>
         <p:nvSpPr>
-          <p:cNvPr id="112" name="TextBox 111"/>
+          <p:cNvPr id="118" name="TextBox 117"/>
           <p:cNvSpPr txBox="1"/>
           <p:nvPr/>
         </p:nvSpPr>
@@ -18981,7 +20325,7 @@
       </p:sp>
       <p:sp>
         <p:nvSpPr>
-          <p:cNvPr id="113" name="Rectangle 112"/>
+          <p:cNvPr id="119" name="Rectangle 118"/>
           <p:cNvSpPr/>
           <p:nvPr/>
         </p:nvSpPr>
@@ -19011,7 +20355,7 @@
       </p:sp>
       <p:sp>
         <p:nvSpPr>
-          <p:cNvPr id="114" name="TextBox 113"/>
+          <p:cNvPr id="120" name="TextBox 119"/>
           <p:cNvSpPr txBox="1"/>
           <p:nvPr/>
         </p:nvSpPr>
@@ -19053,7 +20397,7 @@
       </p:sp>
       <p:sp>
         <p:nvSpPr>
-          <p:cNvPr id="115" name="Rectangle 114"/>
+          <p:cNvPr id="121" name="Rectangle 120"/>
           <p:cNvSpPr/>
           <p:nvPr/>
         </p:nvSpPr>
@@ -19083,7 +20427,7 @@
       </p:sp>
       <p:sp>
         <p:nvSpPr>
-          <p:cNvPr id="116" name="TextBox 115"/>
+          <p:cNvPr id="122" name="TextBox 121"/>
           <p:cNvSpPr txBox="1"/>
           <p:nvPr/>
         </p:nvSpPr>
@@ -19125,7 +20469,7 @@
       </p:sp>
       <p:sp>
         <p:nvSpPr>
-          <p:cNvPr id="117" name="Rectangle 116"/>
+          <p:cNvPr id="123" name="Rectangle 122"/>
           <p:cNvSpPr/>
           <p:nvPr/>
         </p:nvSpPr>
@@ -19155,7 +20499,7 @@
       </p:sp>
       <p:sp>
         <p:nvSpPr>
-          <p:cNvPr id="118" name="TextBox 117"/>
+          <p:cNvPr id="124" name="TextBox 123"/>
           <p:cNvSpPr txBox="1"/>
           <p:nvPr/>
         </p:nvSpPr>
@@ -19197,7 +20541,7 @@
       </p:sp>
       <p:sp>
         <p:nvSpPr>
-          <p:cNvPr id="119" name="Rectangle 118"/>
+          <p:cNvPr id="125" name="Rectangle 124"/>
           <p:cNvSpPr/>
           <p:nvPr/>
         </p:nvSpPr>
@@ -19227,7 +20571,7 @@
       </p:sp>
       <p:sp>
         <p:nvSpPr>
-          <p:cNvPr id="120" name="TextBox 119"/>
+          <p:cNvPr id="126" name="TextBox 125"/>
           <p:cNvSpPr txBox="1"/>
           <p:nvPr/>
         </p:nvSpPr>
@@ -19269,7 +20613,7 @@
       </p:sp>
       <p:sp>
         <p:nvSpPr>
-          <p:cNvPr id="121" name="Rectangle 120"/>
+          <p:cNvPr id="127" name="Rectangle 126"/>
           <p:cNvSpPr/>
           <p:nvPr/>
         </p:nvSpPr>
@@ -19299,7 +20643,7 @@
       </p:sp>
       <p:sp>
         <p:nvSpPr>
-          <p:cNvPr id="122" name="TextBox 121"/>
+          <p:cNvPr id="128" name="TextBox 127"/>
           <p:cNvSpPr txBox="1"/>
           <p:nvPr/>
         </p:nvSpPr>
@@ -19341,7 +20685,7 @@
       </p:sp>
       <p:sp>
         <p:nvSpPr>
-          <p:cNvPr id="123" name="Rectangle 122"/>
+          <p:cNvPr id="129" name="Rectangle 128"/>
           <p:cNvSpPr/>
           <p:nvPr/>
         </p:nvSpPr>
@@ -19371,7 +20715,7 @@
       </p:sp>
       <p:sp>
         <p:nvSpPr>
-          <p:cNvPr id="124" name="TextBox 123"/>
+          <p:cNvPr id="130" name="TextBox 129"/>
           <p:cNvSpPr txBox="1"/>
           <p:nvPr/>
         </p:nvSpPr>
@@ -19413,7 +20757,7 @@
       </p:sp>
       <p:sp>
         <p:nvSpPr>
-          <p:cNvPr id="125" name="TextBox 124"/>
+          <p:cNvPr id="131" name="TextBox 130"/>
           <p:cNvSpPr txBox="1"/>
           <p:nvPr/>
         </p:nvSpPr>
